--- a/.demo/ESPC25_SPFx_Slides.pptx
+++ b/.demo/ESPC25_SPFx_Slides.pptx
@@ -170,6 +170,105 @@
 
 <file path=ppt/changesInfos/changesInfo1.xml><?xml version="1.0" encoding="utf-8"?>
 <pc:chgInfo xmlns:a="http://schemas.openxmlformats.org/drawingml/2006/main" xmlns:r="http://schemas.openxmlformats.org/officeDocument/2006/relationships" xmlns:ac="http://schemas.microsoft.com/office/drawing/2013/main/command" xmlns:pc="http://schemas.microsoft.com/office/powerpoint/2013/main/command">
+  <pc:docChgLst>
+    <pc:chgData name="Guido Zambarda" userId="S::guido.zambarda@pialorsi-sistemi.it::a7cb2718-97c5-47ba-9f67-af13f1621b1f" providerId="AD" clId="Web-{51B4B071-1EBC-32C0-9F4A-9A45D0FEC8DE}"/>
+    <pc:docChg chg="addSld delSld modSld">
+      <pc:chgData name="Guido Zambarda" userId="S::guido.zambarda@pialorsi-sistemi.it::a7cb2718-97c5-47ba-9f67-af13f1621b1f" providerId="AD" clId="Web-{51B4B071-1EBC-32C0-9F4A-9A45D0FEC8DE}" dt="2025-10-26T12:01:52.089" v="414" actId="20577"/>
+      <pc:docMkLst>
+        <pc:docMk/>
+      </pc:docMkLst>
+      <pc:sldChg chg="delSp modSp">
+        <pc:chgData name="Guido Zambarda" userId="S::guido.zambarda@pialorsi-sistemi.it::a7cb2718-97c5-47ba-9f67-af13f1621b1f" providerId="AD" clId="Web-{51B4B071-1EBC-32C0-9F4A-9A45D0FEC8DE}" dt="2025-10-25T10:15:49.977" v="5"/>
+        <pc:sldMkLst>
+          <pc:docMk/>
+          <pc:sldMk cId="3080557386" sldId="256"/>
+        </pc:sldMkLst>
+      </pc:sldChg>
+      <pc:sldChg chg="modSp">
+        <pc:chgData name="Guido Zambarda" userId="S::guido.zambarda@pialorsi-sistemi.it::a7cb2718-97c5-47ba-9f67-af13f1621b1f" providerId="AD" clId="Web-{51B4B071-1EBC-32C0-9F4A-9A45D0FEC8DE}" dt="2025-10-26T11:51:49.523" v="385" actId="20577"/>
+        <pc:sldMkLst>
+          <pc:docMk/>
+          <pc:sldMk cId="1474078492" sldId="261"/>
+        </pc:sldMkLst>
+        <pc:spChg chg="mod">
+          <ac:chgData name="Guido Zambarda" userId="S::guido.zambarda@pialorsi-sistemi.it::a7cb2718-97c5-47ba-9f67-af13f1621b1f" providerId="AD" clId="Web-{51B4B071-1EBC-32C0-9F4A-9A45D0FEC8DE}" dt="2025-10-26T11:51:49.523" v="385" actId="20577"/>
+          <ac:spMkLst>
+            <pc:docMk/>
+            <pc:sldMk cId="1474078492" sldId="261"/>
+            <ac:spMk id="3" creationId="{16B9935E-E93C-3340-8D3C-C7F133794DBC}"/>
+          </ac:spMkLst>
+        </pc:spChg>
+      </pc:sldChg>
+      <pc:sldChg chg="modNotes">
+        <pc:chgData name="Guido Zambarda" userId="S::guido.zambarda@pialorsi-sistemi.it::a7cb2718-97c5-47ba-9f67-af13f1621b1f" providerId="AD" clId="Web-{51B4B071-1EBC-32C0-9F4A-9A45D0FEC8DE}" dt="2025-10-26T12:00:52.291" v="400"/>
+        <pc:sldMkLst>
+          <pc:docMk/>
+          <pc:sldMk cId="391276983" sldId="267"/>
+        </pc:sldMkLst>
+      </pc:sldChg>
+      <pc:sldChg chg="addSp delSp modSp">
+        <pc:chgData name="Guido Zambarda" userId="S::guido.zambarda@pialorsi-sistemi.it::a7cb2718-97c5-47ba-9f67-af13f1621b1f" providerId="AD" clId="Web-{51B4B071-1EBC-32C0-9F4A-9A45D0FEC8DE}" dt="2025-10-25T10:24:21.026" v="37" actId="20577"/>
+        <pc:sldMkLst>
+          <pc:docMk/>
+          <pc:sldMk cId="1510906715" sldId="268"/>
+        </pc:sldMkLst>
+        <pc:spChg chg="mod">
+          <ac:chgData name="Guido Zambarda" userId="S::guido.zambarda@pialorsi-sistemi.it::a7cb2718-97c5-47ba-9f67-af13f1621b1f" providerId="AD" clId="Web-{51B4B071-1EBC-32C0-9F4A-9A45D0FEC8DE}" dt="2025-10-25T10:24:15.604" v="36" actId="20577"/>
+          <ac:spMkLst>
+            <pc:docMk/>
+            <pc:sldMk cId="1510906715" sldId="268"/>
+            <ac:spMk id="4" creationId="{CAAA7AA9-9140-5346-A9FC-23FD73C93F15}"/>
+          </ac:spMkLst>
+        </pc:spChg>
+        <pc:spChg chg="add mod">
+          <ac:chgData name="Guido Zambarda" userId="S::guido.zambarda@pialorsi-sistemi.it::a7cb2718-97c5-47ba-9f67-af13f1621b1f" providerId="AD" clId="Web-{51B4B071-1EBC-32C0-9F4A-9A45D0FEC8DE}" dt="2025-10-25T10:24:21.026" v="37" actId="20577"/>
+          <ac:spMkLst>
+            <pc:docMk/>
+            <pc:sldMk cId="1510906715" sldId="268"/>
+            <ac:spMk id="6" creationId="{C2B3D700-FF9C-8547-6370-A2A0964820D6}"/>
+          </ac:spMkLst>
+        </pc:spChg>
+      </pc:sldChg>
+      <pc:sldChg chg="modSp add replId">
+        <pc:chgData name="Guido Zambarda" userId="S::guido.zambarda@pialorsi-sistemi.it::a7cb2718-97c5-47ba-9f67-af13f1621b1f" providerId="AD" clId="Web-{51B4B071-1EBC-32C0-9F4A-9A45D0FEC8DE}" dt="2025-10-26T12:01:44.480" v="412" actId="20577"/>
+        <pc:sldMkLst>
+          <pc:docMk/>
+          <pc:sldMk cId="1577633904" sldId="275"/>
+        </pc:sldMkLst>
+        <pc:spChg chg="mod">
+          <ac:chgData name="Guido Zambarda" userId="S::guido.zambarda@pialorsi-sistemi.it::a7cb2718-97c5-47ba-9f67-af13f1621b1f" providerId="AD" clId="Web-{51B4B071-1EBC-32C0-9F4A-9A45D0FEC8DE}" dt="2025-10-26T12:01:44.480" v="412" actId="20577"/>
+          <ac:spMkLst>
+            <pc:docMk/>
+            <pc:sldMk cId="1577633904" sldId="275"/>
+            <ac:spMk id="4" creationId="{EC96C119-CC06-C306-4CB9-E960002CC49B}"/>
+          </ac:spMkLst>
+        </pc:spChg>
+        <pc:spChg chg="mod">
+          <ac:chgData name="Guido Zambarda" userId="S::guido.zambarda@pialorsi-sistemi.it::a7cb2718-97c5-47ba-9f67-af13f1621b1f" providerId="AD" clId="Web-{51B4B071-1EBC-32C0-9F4A-9A45D0FEC8DE}" dt="2025-10-26T12:01:25.354" v="405" actId="20577"/>
+          <ac:spMkLst>
+            <pc:docMk/>
+            <pc:sldMk cId="1577633904" sldId="275"/>
+            <ac:spMk id="6" creationId="{CD4ED05C-D796-6842-5DCE-FF0250A5A793}"/>
+          </ac:spMkLst>
+        </pc:spChg>
+      </pc:sldChg>
+      <pc:sldChg chg="modSp add replId">
+        <pc:chgData name="Guido Zambarda" userId="S::guido.zambarda@pialorsi-sistemi.it::a7cb2718-97c5-47ba-9f67-af13f1621b1f" providerId="AD" clId="Web-{51B4B071-1EBC-32C0-9F4A-9A45D0FEC8DE}" dt="2025-10-26T12:01:52.089" v="414" actId="20577"/>
+        <pc:sldMkLst>
+          <pc:docMk/>
+          <pc:sldMk cId="1979839893" sldId="276"/>
+        </pc:sldMkLst>
+        <pc:spChg chg="mod">
+          <ac:chgData name="Guido Zambarda" userId="S::guido.zambarda@pialorsi-sistemi.it::a7cb2718-97c5-47ba-9f67-af13f1621b1f" providerId="AD" clId="Web-{51B4B071-1EBC-32C0-9F4A-9A45D0FEC8DE}" dt="2025-10-26T12:01:52.089" v="414" actId="20577"/>
+          <ac:spMkLst>
+            <pc:docMk/>
+            <pc:sldMk cId="1979839893" sldId="276"/>
+            <ac:spMk id="4" creationId="{0CBA97D0-9053-786F-6374-AD269EB13774}"/>
+          </ac:spMkLst>
+        </pc:spChg>
+      </pc:sldChg>
+    </pc:docChg>
+  </pc:docChgLst>
   <pc:docChgLst>
     <pc:chgData name="Guido Zambarda" userId="S::guido.zambarda@pialorsi-sistemi.it::a7cb2718-97c5-47ba-9f67-af13f1621b1f" providerId="AD" clId="Web-{BD003442-3404-14AA-036D-A5F3D81CF0B2}"/>
     <pc:docChg chg="addSld modSld">
@@ -523,105 +622,6 @@
       </pc:sldChg>
     </pc:docChg>
   </pc:docChgLst>
-  <pc:docChgLst>
-    <pc:chgData name="Guido Zambarda" userId="S::guido.zambarda@pialorsi-sistemi.it::a7cb2718-97c5-47ba-9f67-af13f1621b1f" providerId="AD" clId="Web-{51B4B071-1EBC-32C0-9F4A-9A45D0FEC8DE}"/>
-    <pc:docChg chg="addSld delSld modSld">
-      <pc:chgData name="Guido Zambarda" userId="S::guido.zambarda@pialorsi-sistemi.it::a7cb2718-97c5-47ba-9f67-af13f1621b1f" providerId="AD" clId="Web-{51B4B071-1EBC-32C0-9F4A-9A45D0FEC8DE}" dt="2025-10-26T12:01:52.089" v="414" actId="20577"/>
-      <pc:docMkLst>
-        <pc:docMk/>
-      </pc:docMkLst>
-      <pc:sldChg chg="delSp modSp">
-        <pc:chgData name="Guido Zambarda" userId="S::guido.zambarda@pialorsi-sistemi.it::a7cb2718-97c5-47ba-9f67-af13f1621b1f" providerId="AD" clId="Web-{51B4B071-1EBC-32C0-9F4A-9A45D0FEC8DE}" dt="2025-10-25T10:15:49.977" v="5"/>
-        <pc:sldMkLst>
-          <pc:docMk/>
-          <pc:sldMk cId="3080557386" sldId="256"/>
-        </pc:sldMkLst>
-      </pc:sldChg>
-      <pc:sldChg chg="modSp">
-        <pc:chgData name="Guido Zambarda" userId="S::guido.zambarda@pialorsi-sistemi.it::a7cb2718-97c5-47ba-9f67-af13f1621b1f" providerId="AD" clId="Web-{51B4B071-1EBC-32C0-9F4A-9A45D0FEC8DE}" dt="2025-10-26T11:51:49.523" v="385" actId="20577"/>
-        <pc:sldMkLst>
-          <pc:docMk/>
-          <pc:sldMk cId="1474078492" sldId="261"/>
-        </pc:sldMkLst>
-        <pc:spChg chg="mod">
-          <ac:chgData name="Guido Zambarda" userId="S::guido.zambarda@pialorsi-sistemi.it::a7cb2718-97c5-47ba-9f67-af13f1621b1f" providerId="AD" clId="Web-{51B4B071-1EBC-32C0-9F4A-9A45D0FEC8DE}" dt="2025-10-26T11:51:49.523" v="385" actId="20577"/>
-          <ac:spMkLst>
-            <pc:docMk/>
-            <pc:sldMk cId="1474078492" sldId="261"/>
-            <ac:spMk id="3" creationId="{16B9935E-E93C-3340-8D3C-C7F133794DBC}"/>
-          </ac:spMkLst>
-        </pc:spChg>
-      </pc:sldChg>
-      <pc:sldChg chg="modNotes">
-        <pc:chgData name="Guido Zambarda" userId="S::guido.zambarda@pialorsi-sistemi.it::a7cb2718-97c5-47ba-9f67-af13f1621b1f" providerId="AD" clId="Web-{51B4B071-1EBC-32C0-9F4A-9A45D0FEC8DE}" dt="2025-10-26T12:00:52.291" v="400"/>
-        <pc:sldMkLst>
-          <pc:docMk/>
-          <pc:sldMk cId="391276983" sldId="267"/>
-        </pc:sldMkLst>
-      </pc:sldChg>
-      <pc:sldChg chg="addSp delSp modSp">
-        <pc:chgData name="Guido Zambarda" userId="S::guido.zambarda@pialorsi-sistemi.it::a7cb2718-97c5-47ba-9f67-af13f1621b1f" providerId="AD" clId="Web-{51B4B071-1EBC-32C0-9F4A-9A45D0FEC8DE}" dt="2025-10-25T10:24:21.026" v="37" actId="20577"/>
-        <pc:sldMkLst>
-          <pc:docMk/>
-          <pc:sldMk cId="1510906715" sldId="268"/>
-        </pc:sldMkLst>
-        <pc:spChg chg="mod">
-          <ac:chgData name="Guido Zambarda" userId="S::guido.zambarda@pialorsi-sistemi.it::a7cb2718-97c5-47ba-9f67-af13f1621b1f" providerId="AD" clId="Web-{51B4B071-1EBC-32C0-9F4A-9A45D0FEC8DE}" dt="2025-10-25T10:24:15.604" v="36" actId="20577"/>
-          <ac:spMkLst>
-            <pc:docMk/>
-            <pc:sldMk cId="1510906715" sldId="268"/>
-            <ac:spMk id="4" creationId="{CAAA7AA9-9140-5346-A9FC-23FD73C93F15}"/>
-          </ac:spMkLst>
-        </pc:spChg>
-        <pc:spChg chg="add mod">
-          <ac:chgData name="Guido Zambarda" userId="S::guido.zambarda@pialorsi-sistemi.it::a7cb2718-97c5-47ba-9f67-af13f1621b1f" providerId="AD" clId="Web-{51B4B071-1EBC-32C0-9F4A-9A45D0FEC8DE}" dt="2025-10-25T10:24:21.026" v="37" actId="20577"/>
-          <ac:spMkLst>
-            <pc:docMk/>
-            <pc:sldMk cId="1510906715" sldId="268"/>
-            <ac:spMk id="6" creationId="{C2B3D700-FF9C-8547-6370-A2A0964820D6}"/>
-          </ac:spMkLst>
-        </pc:spChg>
-      </pc:sldChg>
-      <pc:sldChg chg="modSp add replId">
-        <pc:chgData name="Guido Zambarda" userId="S::guido.zambarda@pialorsi-sistemi.it::a7cb2718-97c5-47ba-9f67-af13f1621b1f" providerId="AD" clId="Web-{51B4B071-1EBC-32C0-9F4A-9A45D0FEC8DE}" dt="2025-10-26T12:01:44.480" v="412" actId="20577"/>
-        <pc:sldMkLst>
-          <pc:docMk/>
-          <pc:sldMk cId="1577633904" sldId="275"/>
-        </pc:sldMkLst>
-        <pc:spChg chg="mod">
-          <ac:chgData name="Guido Zambarda" userId="S::guido.zambarda@pialorsi-sistemi.it::a7cb2718-97c5-47ba-9f67-af13f1621b1f" providerId="AD" clId="Web-{51B4B071-1EBC-32C0-9F4A-9A45D0FEC8DE}" dt="2025-10-26T12:01:44.480" v="412" actId="20577"/>
-          <ac:spMkLst>
-            <pc:docMk/>
-            <pc:sldMk cId="1577633904" sldId="275"/>
-            <ac:spMk id="4" creationId="{EC96C119-CC06-C306-4CB9-E960002CC49B}"/>
-          </ac:spMkLst>
-        </pc:spChg>
-        <pc:spChg chg="mod">
-          <ac:chgData name="Guido Zambarda" userId="S::guido.zambarda@pialorsi-sistemi.it::a7cb2718-97c5-47ba-9f67-af13f1621b1f" providerId="AD" clId="Web-{51B4B071-1EBC-32C0-9F4A-9A45D0FEC8DE}" dt="2025-10-26T12:01:25.354" v="405" actId="20577"/>
-          <ac:spMkLst>
-            <pc:docMk/>
-            <pc:sldMk cId="1577633904" sldId="275"/>
-            <ac:spMk id="6" creationId="{CD4ED05C-D796-6842-5DCE-FF0250A5A793}"/>
-          </ac:spMkLst>
-        </pc:spChg>
-      </pc:sldChg>
-      <pc:sldChg chg="modSp add replId">
-        <pc:chgData name="Guido Zambarda" userId="S::guido.zambarda@pialorsi-sistemi.it::a7cb2718-97c5-47ba-9f67-af13f1621b1f" providerId="AD" clId="Web-{51B4B071-1EBC-32C0-9F4A-9A45D0FEC8DE}" dt="2025-10-26T12:01:52.089" v="414" actId="20577"/>
-        <pc:sldMkLst>
-          <pc:docMk/>
-          <pc:sldMk cId="1979839893" sldId="276"/>
-        </pc:sldMkLst>
-        <pc:spChg chg="mod">
-          <ac:chgData name="Guido Zambarda" userId="S::guido.zambarda@pialorsi-sistemi.it::a7cb2718-97c5-47ba-9f67-af13f1621b1f" providerId="AD" clId="Web-{51B4B071-1EBC-32C0-9F4A-9A45D0FEC8DE}" dt="2025-10-26T12:01:52.089" v="414" actId="20577"/>
-          <ac:spMkLst>
-            <pc:docMk/>
-            <pc:sldMk cId="1979839893" sldId="276"/>
-            <ac:spMk id="4" creationId="{0CBA97D0-9053-786F-6374-AD269EB13774}"/>
-          </ac:spMkLst>
-        </pc:spChg>
-      </pc:sldChg>
-    </pc:docChg>
-  </pc:docChgLst>
 </pc:chgInfo>
 </file>
 
@@ -2606,7 +2606,250 @@
           <a:bodyPr/>
           <a:lstStyle/>
           <a:p>
-            <a:endParaRPr lang="en-US"/>
+            <a:r>
+              <a:rPr lang="en-US" sz="1200" kern="1200" dirty="0">
+                <a:solidFill>
+                  <a:schemeClr val="tx1"/>
+                </a:solidFill>
+                <a:effectLst/>
+                <a:latin typeface="+mn-lt"/>
+                <a:ea typeface="+mn-ea"/>
+                <a:cs typeface="+mn-cs"/>
+              </a:rPr>
+              <a:t>Web part over a list form customizer to allow data to be sent to external systems (e.g., SQL, CRM) and not just SharePoint.</a:t>
+            </a:r>
+          </a:p>
+          <a:p>
+            <a:endParaRPr lang="en-US" sz="1200" b="0" kern="1200" dirty="0">
+              <a:solidFill>
+                <a:schemeClr val="tx1"/>
+              </a:solidFill>
+              <a:effectLst/>
+              <a:latin typeface="+mn-lt"/>
+              <a:ea typeface="+mn-ea"/>
+              <a:cs typeface="+mn-cs"/>
+            </a:endParaRPr>
+          </a:p>
+          <a:p>
+            <a:r>
+              <a:rPr lang="en-US" sz="1200" b="0" kern="1200" dirty="0">
+                <a:solidFill>
+                  <a:schemeClr val="tx1"/>
+                </a:solidFill>
+                <a:effectLst/>
+                <a:latin typeface="+mn-lt"/>
+                <a:ea typeface="+mn-ea"/>
+                <a:cs typeface="+mn-cs"/>
+              </a:rPr>
+              <a:t>Unit Testing</a:t>
+            </a:r>
+            <a:r>
+              <a:rPr lang="en-US" sz="1200" kern="1200" dirty="0">
+                <a:solidFill>
+                  <a:schemeClr val="tx1"/>
+                </a:solidFill>
+                <a:effectLst/>
+                <a:latin typeface="+mn-lt"/>
+                <a:ea typeface="+mn-ea"/>
+                <a:cs typeface="+mn-cs"/>
+              </a:rPr>
+              <a:t>: Unit tests are written for business logic, with a focus on conditions and validation. Peter Paul emphasized the importance of two-person review—one writes tests, another implements logic—to catch errors early. </a:t>
+            </a:r>
+          </a:p>
+          <a:p>
+            <a:endParaRPr lang="en-US" sz="1200" b="1" kern="1200" dirty="0">
+              <a:solidFill>
+                <a:schemeClr val="tx1"/>
+              </a:solidFill>
+              <a:effectLst/>
+              <a:latin typeface="+mn-lt"/>
+              <a:ea typeface="+mn-ea"/>
+              <a:cs typeface="+mn-cs"/>
+            </a:endParaRPr>
+          </a:p>
+          <a:p>
+            <a:r>
+              <a:rPr lang="en-US" sz="1200" b="0" kern="1200" dirty="0">
+                <a:solidFill>
+                  <a:schemeClr val="tx1"/>
+                </a:solidFill>
+                <a:effectLst/>
+                <a:latin typeface="+mn-lt"/>
+                <a:ea typeface="+mn-ea"/>
+                <a:cs typeface="+mn-cs"/>
+              </a:rPr>
+              <a:t>UI Testing</a:t>
+            </a:r>
+            <a:r>
+              <a:rPr lang="en-US" sz="1200" kern="1200" dirty="0">
+                <a:solidFill>
+                  <a:schemeClr val="tx1"/>
+                </a:solidFill>
+                <a:effectLst/>
+                <a:latin typeface="+mn-lt"/>
+                <a:ea typeface="+mn-ea"/>
+                <a:cs typeface="+mn-cs"/>
+              </a:rPr>
+              <a:t>: Playwright is used for automated UI tests, checking DOM elements and visual layout, ensuring the user experience matches business requirements. Screenshots are used for visual regression. </a:t>
+            </a:r>
+          </a:p>
+          <a:p>
+            <a:endParaRPr lang="en-US" sz="1200" kern="1200" dirty="0">
+              <a:solidFill>
+                <a:schemeClr val="tx1"/>
+              </a:solidFill>
+              <a:effectLst/>
+              <a:latin typeface="+mn-lt"/>
+              <a:ea typeface="+mn-ea"/>
+              <a:cs typeface="+mn-cs"/>
+            </a:endParaRPr>
+          </a:p>
+          <a:p>
+            <a:r>
+              <a:rPr lang="en-US" sz="1200" b="0" kern="1200" dirty="0">
+                <a:solidFill>
+                  <a:schemeClr val="tx1"/>
+                </a:solidFill>
+                <a:effectLst/>
+                <a:latin typeface="+mn-lt"/>
+                <a:ea typeface="+mn-ea"/>
+                <a:cs typeface="+mn-cs"/>
+              </a:rPr>
+              <a:t>Error Handling</a:t>
+            </a:r>
+            <a:r>
+              <a:rPr lang="en-US" sz="1200" kern="1200" dirty="0">
+                <a:solidFill>
+                  <a:schemeClr val="tx1"/>
+                </a:solidFill>
+                <a:effectLst/>
+                <a:latin typeface="+mn-lt"/>
+                <a:ea typeface="+mn-ea"/>
+                <a:cs typeface="+mn-cs"/>
+              </a:rPr>
+              <a:t>: Special attention is given to handling API errors (e.g., 429 errors), with mocking strategies for development and end-to-end tests.  </a:t>
+            </a:r>
+          </a:p>
+          <a:p>
+            <a:endParaRPr lang="en-US" sz="1200" kern="1200" dirty="0">
+              <a:solidFill>
+                <a:schemeClr val="tx1"/>
+              </a:solidFill>
+              <a:effectLst/>
+              <a:latin typeface="+mn-lt"/>
+              <a:ea typeface="+mn-ea"/>
+              <a:cs typeface="+mn-cs"/>
+            </a:endParaRPr>
+          </a:p>
+          <a:p>
+            <a:pPr marL="0" marR="0" lvl="0" indent="0" algn="l" defTabSz="914400" rtl="0" eaLnBrk="1" fontAlgn="auto" latinLnBrk="0" hangingPunct="1">
+              <a:lnSpc>
+                <a:spcPct val="100000"/>
+              </a:lnSpc>
+              <a:spcBef>
+                <a:spcPts val="0"/>
+              </a:spcBef>
+              <a:spcAft>
+                <a:spcPts val="0"/>
+              </a:spcAft>
+              <a:buClrTx/>
+              <a:buSzTx/>
+              <a:buFontTx/>
+              <a:buNone/>
+              <a:tabLst/>
+              <a:defRPr/>
+            </a:pPr>
+            <a:r>
+              <a:rPr lang="en-US" sz="1200" b="0" kern="1200" dirty="0">
+                <a:solidFill>
+                  <a:schemeClr val="tx1"/>
+                </a:solidFill>
+                <a:effectLst/>
+                <a:latin typeface="+mn-lt"/>
+                <a:ea typeface="+mn-ea"/>
+                <a:cs typeface="+mn-cs"/>
+              </a:rPr>
+              <a:t>CI/CD Pipeline</a:t>
+            </a:r>
+            <a:r>
+              <a:rPr lang="en-US" sz="1200" kern="1200" dirty="0">
+                <a:solidFill>
+                  <a:schemeClr val="tx1"/>
+                </a:solidFill>
+                <a:effectLst/>
+                <a:latin typeface="+mn-lt"/>
+                <a:ea typeface="+mn-ea"/>
+                <a:cs typeface="+mn-cs"/>
+              </a:rPr>
+              <a:t>: GitHub Actions automate environment setup, dependency installation, solution bundling, unit tests, packaging, deployment, and UI tests. </a:t>
+            </a:r>
+            <a:r>
+              <a:rPr lang="en-US" sz="1200" kern="1200">
+                <a:solidFill>
+                  <a:schemeClr val="tx1"/>
+                </a:solidFill>
+                <a:effectLst/>
+                <a:latin typeface="+mn-lt"/>
+                <a:ea typeface="+mn-ea"/>
+                <a:cs typeface="+mn-cs"/>
+              </a:rPr>
+              <a:t>Secrets </a:t>
+            </a:r>
+            <a:r>
+              <a:rPr lang="en-US" sz="1200" kern="1200" dirty="0">
+                <a:solidFill>
+                  <a:schemeClr val="tx1"/>
+                </a:solidFill>
+                <a:effectLst/>
+                <a:latin typeface="+mn-lt"/>
+                <a:ea typeface="+mn-ea"/>
+                <a:cs typeface="+mn-cs"/>
+              </a:rPr>
+              <a:t>and environment variables are managed for </a:t>
+            </a:r>
+            <a:r>
+              <a:rPr lang="en-US" sz="1200" kern="1200">
+                <a:solidFill>
+                  <a:schemeClr val="tx1"/>
+                </a:solidFill>
+                <a:effectLst/>
+                <a:latin typeface="+mn-lt"/>
+                <a:ea typeface="+mn-ea"/>
+                <a:cs typeface="+mn-cs"/>
+              </a:rPr>
+              <a:t>security.</a:t>
+            </a:r>
+            <a:endParaRPr lang="en-US" sz="1200" kern="1200" dirty="0">
+              <a:solidFill>
+                <a:schemeClr val="tx1"/>
+              </a:solidFill>
+              <a:effectLst/>
+              <a:latin typeface="+mn-lt"/>
+              <a:ea typeface="+mn-ea"/>
+              <a:cs typeface="+mn-cs"/>
+            </a:endParaRPr>
+          </a:p>
+          <a:p>
+            <a:endParaRPr lang="en-US" sz="1200" kern="1200" dirty="0">
+              <a:solidFill>
+                <a:schemeClr val="tx1"/>
+              </a:solidFill>
+              <a:effectLst/>
+              <a:latin typeface="+mn-lt"/>
+              <a:ea typeface="+mn-ea"/>
+              <a:cs typeface="+mn-cs"/>
+            </a:endParaRPr>
+          </a:p>
+          <a:p>
+            <a:endParaRPr lang="en-US" sz="1200" kern="1200" dirty="0">
+              <a:solidFill>
+                <a:schemeClr val="tx1"/>
+              </a:solidFill>
+              <a:effectLst/>
+              <a:latin typeface="+mn-lt"/>
+              <a:ea typeface="+mn-ea"/>
+              <a:cs typeface="+mn-cs"/>
+            </a:endParaRPr>
           </a:p>
         </p:txBody>
       </p:sp>
@@ -9703,7 +9946,7 @@
                 <a:latin typeface="Arial"/>
                 <a:cs typeface="Arial"/>
               </a:rPr>
-              <a:t>The creation of new customer can trigger multiple work flows</a:t>
+              <a:t>The creation of new customer can trigger multiple workflows</a:t>
             </a:r>
           </a:p>
           <a:p>
@@ -9717,7 +9960,7 @@
           </a:p>
           <a:p>
             <a:r>
-              <a:rPr lang="en-US">
+              <a:rPr lang="en-US" dirty="0">
                 <a:latin typeface="Arial"/>
                 <a:cs typeface="Arial"/>
               </a:rPr>
@@ -9892,13 +10135,19 @@
           <a:p>
             <a:r>
               <a:rPr lang="en-US" dirty="0"/>
+              <a:t>Using tenant settings to define the environment</a:t>
+            </a:r>
+          </a:p>
+          <a:p>
+            <a:r>
+              <a:rPr lang="en-US" dirty="0"/>
               <a:t>Testing locally with Jest.</a:t>
             </a:r>
           </a:p>
           <a:p>
             <a:r>
               <a:rPr lang="en-US" dirty="0"/>
-              <a:t>Testing with Playwright.</a:t>
+              <a:t>UI testing with Playwright.</a:t>
             </a:r>
           </a:p>
           <a:p>
@@ -10637,21 +10886,27 @@
         <mc:Choice xmlns:we="http://schemas.microsoft.com/office/webextensions/webextension/2010/11" xmlns:pca="http://schemas.microsoft.com/office/powerpoint/2013/contentapp" Requires="we pca">
           <p:graphicFrame>
             <p:nvGraphicFramePr>
-              <p:cNvPr id="2" name="Add-in 1">
+              <p:cNvPr id="3" name="Add-in 2">
                 <a:extLst>
                   <a:ext uri="{FF2B5EF4-FFF2-40B4-BE49-F238E27FC236}">
-                    <a16:creationId xmlns:a16="http://schemas.microsoft.com/office/drawing/2014/main" id="{D0AF1CDF-1E00-0C39-3154-E485A6B48BAC}"/>
+                    <a16:creationId xmlns:a16="http://schemas.microsoft.com/office/drawing/2014/main" id="{1CA29BF3-95FC-A0F7-B036-056A9ECD02AA}"/>
                   </a:ext>
                 </a:extLst>
               </p:cNvPr>
               <p:cNvGraphicFramePr>
                 <a:graphicFrameLocks noGrp="1"/>
               </p:cNvGraphicFramePr>
-              <p:nvPr/>
+              <p:nvPr>
+                <p:extLst>
+                  <p:ext uri="{D42A27DB-BD31-4B8C-83A1-F6EECF244321}">
+                    <p14:modId xmlns:p14="http://schemas.microsoft.com/office/powerpoint/2010/main" val="1464362284"/>
+                  </p:ext>
+                </p:extLst>
+              </p:nvPr>
             </p:nvGraphicFramePr>
             <p:xfrm>
-              <a:off x="12643755" y="166007"/>
-              <a:ext cx="5598525" cy="5651863"/>
+              <a:off x="12741728" y="547005"/>
+              <a:ext cx="5568043" cy="5505451"/>
             </p:xfrm>
             <a:graphic>
               <a:graphicData uri="http://schemas.microsoft.com/office/webextensions/webextension/2010/11">
@@ -10663,10 +10918,10 @@
         <mc:Fallback>
           <p:pic>
             <p:nvPicPr>
-              <p:cNvPr id="2" name="Add-in 1">
+              <p:cNvPr id="3" name="Add-in 2">
                 <a:extLst>
                   <a:ext uri="{FF2B5EF4-FFF2-40B4-BE49-F238E27FC236}">
-                    <a16:creationId xmlns:a16="http://schemas.microsoft.com/office/drawing/2014/main" id="{D0AF1CDF-1E00-0C39-3154-E485A6B48BAC}"/>
+                    <a16:creationId xmlns:a16="http://schemas.microsoft.com/office/drawing/2014/main" id="{1CA29BF3-95FC-A0F7-B036-056A9ECD02AA}"/>
                   </a:ext>
                 </a:extLst>
               </p:cNvPr>
@@ -10683,8 +10938,8 @@
             </p:blipFill>
             <p:spPr>
               <a:xfrm>
-                <a:off x="12643755" y="166007"/>
-                <a:ext cx="5598525" cy="5651863"/>
+                <a:off x="12741728" y="547005"/>
+                <a:ext cx="5568043" cy="5505451"/>
               </a:xfrm>
               <a:prstGeom prst="rect">
                 <a:avLst/>
@@ -12678,15 +12933,15 @@
 </file>
 
 <file path=ppt/webextensions/webextension1.xml><?xml version="1.0" encoding="utf-8"?>
-<we:webextension xmlns:we="http://schemas.microsoft.com/office/webextensions/webextension/2010/11" id="{CBB7C452-12F4-4B74-9562-7D772A3D81BF}">
+<we:webextension xmlns:we="http://schemas.microsoft.com/office/webextensions/webextension/2010/11" id="{E1D6287C-E119-4EB4-9553-4AA90814C03A}">
   <we:reference id="wa200008736" version="1.0.0.0" store="en-US" storeType="OMEX"/>
   <we:alternateReferences>
     <we:reference id="WA200008736" version="1.0.0.0" store="WA200008736" storeType="OMEX"/>
   </we:alternateReferences>
   <we:properties>
+    <we:property name="dtServerUrl" value="&quot;http://localhost:3710&quot;"/>
+    <we:property name="dtDemoId" value="&quot;demo-mi7wlce4-lh10&quot;"/>
     <we:property name="dtAddInSlideId" value="&quot;7&quot;"/>
-    <we:property name="dtDemoId" value="&quot;demo-mgw0r003-w4fr&quot;"/>
-    <we:property name="dtServerUrl" value="&quot;http://localhost:3710&quot;"/>
   </we:properties>
   <we:bindings/>
   <we:snapshot xmlns:r="http://schemas.openxmlformats.org/officeDocument/2006/relationships" r:embed="rId1"/>
@@ -12716,9 +12971,9 @@
     <we:reference id="WA200008736" version="1.0.0.0" store="WA200008736" storeType="OMEX"/>
   </we:alternateReferences>
   <we:properties>
+    <we:property name="dtAddInSlideId" value="&quot;11&quot;"/>
+    <we:property name="dtDemoId" value="&quot;demo-mi665oql-prba&quot;"/>
     <we:property name="dtServerUrl" value="&quot;http://localhost:3710&quot;"/>
-    <we:property name="dtDemoId" value="&quot;demo-mi665oql-prba&quot;"/>
-    <we:property name="dtAddInSlideId" value="&quot;11&quot;"/>
   </we:properties>
   <we:bindings/>
   <we:snapshot xmlns:r="http://schemas.openxmlformats.org/officeDocument/2006/relationships" r:embed="rId1"/>
@@ -12732,9 +12987,9 @@
     <we:reference id="WA200008736" version="1.0.0.0" store="WA200008736" storeType="OMEX"/>
   </we:alternateReferences>
   <we:properties>
+    <we:property name="dtAddInSlideId" value="&quot;13&quot;"/>
+    <we:property name="dtDemoId" value="&quot;demo-mi66cnpy-h2tu&quot;"/>
     <we:property name="dtServerUrl" value="&quot;http://localhost:3710&quot;"/>
-    <we:property name="dtDemoId" value="&quot;demo-mi66cnpy-h2tu&quot;"/>
-    <we:property name="dtAddInSlideId" value="&quot;13&quot;"/>
   </we:properties>
   <we:bindings/>
   <we:snapshot xmlns:r="http://schemas.openxmlformats.org/officeDocument/2006/relationships" r:embed="rId1"/>
@@ -12748,9 +13003,9 @@
     <we:reference id="WA200008736" version="1.0.0.0" store="WA200008736" storeType="OMEX"/>
   </we:alternateReferences>
   <we:properties>
+    <we:property name="dtAddInSlideId" value="&quot;15&quot;"/>
+    <we:property name="dtDemoId" value="&quot;demo-mi66lt1n-v79y&quot;"/>
     <we:property name="dtServerUrl" value="&quot;http://localhost:3710&quot;"/>
-    <we:property name="dtDemoId" value="&quot;demo-mi66lt1n-v79y&quot;"/>
-    <we:property name="dtAddInSlideId" value="&quot;15&quot;"/>
   </we:properties>
   <we:bindings/>
   <we:snapshot xmlns:r="http://schemas.openxmlformats.org/officeDocument/2006/relationships" r:embed="rId1"/>
@@ -12758,6 +13013,15 @@
 </file>
 
 <file path=customXml/item1.xml><?xml version="1.0" encoding="utf-8"?>
+<?mso-contentType ?>
+<FormTemplates xmlns="http://schemas.microsoft.com/sharepoint/v3/contenttype/forms">
+  <Display>DocumentLibraryForm</Display>
+  <Edit>DocumentLibraryForm</Edit>
+  <New>DocumentLibraryForm</New>
+</FormTemplates>
+</file>
+
+<file path=customXml/item2.xml><?xml version="1.0" encoding="utf-8"?>
 <p:properties xmlns:p="http://schemas.microsoft.com/office/2006/metadata/properties" xmlns:xsi="http://www.w3.org/2001/XMLSchema-instance" xmlns:pc="http://schemas.microsoft.com/office/infopath/2007/PartnerControls">
   <documentManagement>
     <TaxCatchAll xmlns="1b3b1065-ae42-4d8a-aa8c-0a73a17faba8" xsi:nil="true"/>
@@ -12766,15 +13030,6 @@
     </lcf76f155ced4ddcb4097134ff3c332f>
   </documentManagement>
 </p:properties>
-</file>
-
-<file path=customXml/item2.xml><?xml version="1.0" encoding="utf-8"?>
-<?mso-contentType ?>
-<FormTemplates xmlns="http://schemas.microsoft.com/sharepoint/v3/contenttype/forms">
-  <Display>DocumentLibraryForm</Display>
-  <Edit>DocumentLibraryForm</Edit>
-  <New>DocumentLibraryForm</New>
-</FormTemplates>
 </file>
 
 <file path=customXml/item3.xml><?xml version="1.0" encoding="utf-8"?>
@@ -12991,6 +13246,14 @@
 </file>
 
 <file path=customXml/itemProps1.xml><?xml version="1.0" encoding="utf-8"?>
+<ds:datastoreItem xmlns:ds="http://schemas.openxmlformats.org/officeDocument/2006/customXml" ds:itemID="{B6782FBD-C4AD-49F1-B11B-703DF9FAD87C}">
+  <ds:schemaRefs>
+    <ds:schemaRef ds:uri="http://schemas.microsoft.com/sharepoint/v3/contenttype/forms"/>
+  </ds:schemaRefs>
+</ds:datastoreItem>
+</file>
+
+<file path=customXml/itemProps2.xml><?xml version="1.0" encoding="utf-8"?>
 <ds:datastoreItem xmlns:ds="http://schemas.openxmlformats.org/officeDocument/2006/customXml" ds:itemID="{D05C0892-D583-430B-AD43-D1A4EB1EE043}">
   <ds:schemaRefs>
     <ds:schemaRef ds:uri="1b3b1065-ae42-4d8a-aa8c-0a73a17faba8"/>
@@ -13003,14 +13266,6 @@
     <ds:schemaRef ds:uri="http://schemas.microsoft.com/office/infopath/2007/PartnerControls"/>
     <ds:schemaRef ds:uri="http://schemas.openxmlformats.org/package/2006/metadata/core-properties"/>
     <ds:schemaRef ds:uri="http://www.w3.org/XML/1998/namespace"/>
-  </ds:schemaRefs>
-</ds:datastoreItem>
-</file>
-
-<file path=customXml/itemProps2.xml><?xml version="1.0" encoding="utf-8"?>
-<ds:datastoreItem xmlns:ds="http://schemas.openxmlformats.org/officeDocument/2006/customXml" ds:itemID="{B6782FBD-C4AD-49F1-B11B-703DF9FAD87C}">
-  <ds:schemaRefs>
-    <ds:schemaRef ds:uri="http://schemas.microsoft.com/sharepoint/v3/contenttype/forms"/>
   </ds:schemaRefs>
 </ds:datastoreItem>
 </file>

--- a/.demo/ESPC25_SPFx_Slides.pptx
+++ b/.demo/ESPC25_SPFx_Slides.pptx
@@ -8,7 +8,7 @@
     <p:sldMasterId id="2147483684" r:id="rId7"/>
   </p:sldMasterIdLst>
   <p:notesMasterIdLst>
-    <p:notesMasterId r:id="rId25"/>
+    <p:notesMasterId r:id="rId21"/>
   </p:notesMasterIdLst>
   <p:sldIdLst>
     <p:sldId id="256" r:id="rId8"/>
@@ -17,17 +17,13 @@
     <p:sldId id="261" r:id="rId11"/>
     <p:sldId id="274" r:id="rId12"/>
     <p:sldId id="285" r:id="rId13"/>
-    <p:sldId id="278" r:id="rId14"/>
+    <p:sldId id="286" r:id="rId14"/>
     <p:sldId id="275" r:id="rId15"/>
-    <p:sldId id="279" r:id="rId16"/>
-    <p:sldId id="276" r:id="rId17"/>
-    <p:sldId id="280" r:id="rId18"/>
-    <p:sldId id="277" r:id="rId19"/>
-    <p:sldId id="282" r:id="rId20"/>
-    <p:sldId id="283" r:id="rId21"/>
-    <p:sldId id="284" r:id="rId22"/>
-    <p:sldId id="281" r:id="rId23"/>
-    <p:sldId id="273" r:id="rId24"/>
+    <p:sldId id="276" r:id="rId16"/>
+    <p:sldId id="277" r:id="rId17"/>
+    <p:sldId id="283" r:id="rId18"/>
+    <p:sldId id="281" r:id="rId19"/>
+    <p:sldId id="273" r:id="rId20"/>
   </p:sldIdLst>
   <p:sldSz cx="12192000" cy="6858000"/>
   <p:notesSz cx="6858000" cy="9144000"/>
@@ -1075,790 +1071,6 @@
         <p:cNvPr id="1" name="">
           <a:extLst>
             <a:ext uri="{FF2B5EF4-FFF2-40B4-BE49-F238E27FC236}">
-              <a16:creationId xmlns:a16="http://schemas.microsoft.com/office/drawing/2014/main" id="{0023F4EE-5668-9285-4B73-8EBC843A05AB}"/>
-            </a:ext>
-          </a:extLst>
-        </p:cNvPr>
-        <p:cNvGrpSpPr/>
-        <p:nvPr/>
-      </p:nvGrpSpPr>
-      <p:grpSpPr>
-        <a:xfrm>
-          <a:off x="0" y="0"/>
-          <a:ext cx="0" cy="0"/>
-          <a:chOff x="0" y="0"/>
-          <a:chExt cx="0" cy="0"/>
-        </a:xfrm>
-      </p:grpSpPr>
-      <p:sp>
-        <p:nvSpPr>
-          <p:cNvPr id="2" name="Slide Image Placeholder 1">
-            <a:extLst>
-              <a:ext uri="{FF2B5EF4-FFF2-40B4-BE49-F238E27FC236}">
-                <a16:creationId xmlns:a16="http://schemas.microsoft.com/office/drawing/2014/main" id="{C01EC2A8-F0C7-F4A1-B109-E0297E4C5B58}"/>
-              </a:ext>
-            </a:extLst>
-          </p:cNvPr>
-          <p:cNvSpPr>
-            <a:spLocks noGrp="1" noRot="1" noChangeAspect="1"/>
-          </p:cNvSpPr>
-          <p:nvPr>
-            <p:ph type="sldImg"/>
-          </p:nvPr>
-        </p:nvSpPr>
-        <p:spPr/>
-      </p:sp>
-      <p:sp>
-        <p:nvSpPr>
-          <p:cNvPr id="3" name="Notes Placeholder 2">
-            <a:extLst>
-              <a:ext uri="{FF2B5EF4-FFF2-40B4-BE49-F238E27FC236}">
-                <a16:creationId xmlns:a16="http://schemas.microsoft.com/office/drawing/2014/main" id="{B8BF611D-1BCF-DBDD-C050-F6D145728FA0}"/>
-              </a:ext>
-            </a:extLst>
-          </p:cNvPr>
-          <p:cNvSpPr>
-            <a:spLocks noGrp="1"/>
-          </p:cNvSpPr>
-          <p:nvPr>
-            <p:ph type="body" idx="1"/>
-          </p:nvPr>
-        </p:nvSpPr>
-        <p:spPr/>
-        <p:txBody>
-          <a:bodyPr/>
-          <a:lstStyle/>
-          <a:p>
-            <a:endParaRPr lang="en-US"/>
-          </a:p>
-        </p:txBody>
-      </p:sp>
-      <p:sp>
-        <p:nvSpPr>
-          <p:cNvPr id="4" name="Slide Number Placeholder 3">
-            <a:extLst>
-              <a:ext uri="{FF2B5EF4-FFF2-40B4-BE49-F238E27FC236}">
-                <a16:creationId xmlns:a16="http://schemas.microsoft.com/office/drawing/2014/main" id="{73D21354-4A05-B689-9220-13769DB891BC}"/>
-              </a:ext>
-            </a:extLst>
-          </p:cNvPr>
-          <p:cNvSpPr>
-            <a:spLocks noGrp="1"/>
-          </p:cNvSpPr>
-          <p:nvPr>
-            <p:ph type="sldNum" sz="quarter" idx="5"/>
-          </p:nvPr>
-        </p:nvSpPr>
-        <p:spPr/>
-        <p:txBody>
-          <a:bodyPr/>
-          <a:lstStyle/>
-          <a:p>
-            <a:fld id="{7EB8C794-77EE-4724-B493-2E0907BFA558}" type="slidenum">
-              <a:rPr lang="en-GB" smtClean="0"/>
-              <a:t>11</a:t>
-            </a:fld>
-            <a:endParaRPr lang="en-GB"/>
-          </a:p>
-        </p:txBody>
-      </p:sp>
-    </p:spTree>
-    <p:extLst>
-      <p:ext uri="{BB962C8B-B14F-4D97-AF65-F5344CB8AC3E}">
-        <p14:creationId xmlns:p14="http://schemas.microsoft.com/office/powerpoint/2010/main" val="788871678"/>
-      </p:ext>
-    </p:extLst>
-  </p:cSld>
-  <p:clrMapOvr>
-    <a:masterClrMapping/>
-  </p:clrMapOvr>
-</p:notes>
-</file>
-
-<file path=ppt/notesSlides/notesSlide11.xml><?xml version="1.0" encoding="utf-8"?>
-<p:notes xmlns:a="http://schemas.openxmlformats.org/drawingml/2006/main" xmlns:r="http://schemas.openxmlformats.org/officeDocument/2006/relationships" xmlns:p="http://schemas.openxmlformats.org/presentationml/2006/main">
-  <p:cSld>
-    <p:spTree>
-      <p:nvGrpSpPr>
-        <p:cNvPr id="1" name="">
-          <a:extLst>
-            <a:ext uri="{FF2B5EF4-FFF2-40B4-BE49-F238E27FC236}">
-              <a16:creationId xmlns:a16="http://schemas.microsoft.com/office/drawing/2014/main" id="{E5E34A03-EDDC-496B-A252-C7FFBF6910FF}"/>
-            </a:ext>
-          </a:extLst>
-        </p:cNvPr>
-        <p:cNvGrpSpPr/>
-        <p:nvPr/>
-      </p:nvGrpSpPr>
-      <p:grpSpPr>
-        <a:xfrm>
-          <a:off x="0" y="0"/>
-          <a:ext cx="0" cy="0"/>
-          <a:chOff x="0" y="0"/>
-          <a:chExt cx="0" cy="0"/>
-        </a:xfrm>
-      </p:grpSpPr>
-      <p:sp>
-        <p:nvSpPr>
-          <p:cNvPr id="2" name="Slide Image Placeholder 1">
-            <a:extLst>
-              <a:ext uri="{FF2B5EF4-FFF2-40B4-BE49-F238E27FC236}">
-                <a16:creationId xmlns:a16="http://schemas.microsoft.com/office/drawing/2014/main" id="{48A9EF52-BEF5-A1DD-9400-B0F6CF9FCB38}"/>
-              </a:ext>
-            </a:extLst>
-          </p:cNvPr>
-          <p:cNvSpPr>
-            <a:spLocks noGrp="1" noRot="1" noChangeAspect="1"/>
-          </p:cNvSpPr>
-          <p:nvPr>
-            <p:ph type="sldImg"/>
-          </p:nvPr>
-        </p:nvSpPr>
-        <p:spPr/>
-      </p:sp>
-      <p:sp>
-        <p:nvSpPr>
-          <p:cNvPr id="3" name="Notes Placeholder 2">
-            <a:extLst>
-              <a:ext uri="{FF2B5EF4-FFF2-40B4-BE49-F238E27FC236}">
-                <a16:creationId xmlns:a16="http://schemas.microsoft.com/office/drawing/2014/main" id="{9CD63604-03EE-C33D-885B-D60B1D085275}"/>
-              </a:ext>
-            </a:extLst>
-          </p:cNvPr>
-          <p:cNvSpPr>
-            <a:spLocks noGrp="1"/>
-          </p:cNvSpPr>
-          <p:nvPr>
-            <p:ph type="body" idx="1"/>
-          </p:nvPr>
-        </p:nvSpPr>
-        <p:spPr/>
-        <p:txBody>
-          <a:bodyPr/>
-          <a:lstStyle/>
-          <a:p>
-            <a:r>
-              <a:rPr lang="en-US" dirty="0">
-                <a:ea typeface="Calibri"/>
-                <a:cs typeface="Calibri"/>
-              </a:rPr>
-              <a:t>How often do we use tests in our projects?</a:t>
-            </a:r>
-          </a:p>
-          <a:p>
-            <a:r>
-              <a:rPr lang="en-US">
-                <a:ea typeface="Calibri"/>
-                <a:cs typeface="Calibri"/>
-              </a:rPr>
-              <a:t>It depends on:</a:t>
-            </a:r>
-          </a:p>
-          <a:p>
-            <a:pPr marL="171450" indent="-171450">
-              <a:buFont typeface="Calibri"/>
-              <a:buChar char="-"/>
-            </a:pPr>
-            <a:r>
-              <a:rPr lang="en-US" dirty="0">
-                <a:ea typeface="Calibri"/>
-                <a:cs typeface="Calibri"/>
-              </a:rPr>
-              <a:t>Budget</a:t>
-            </a:r>
-          </a:p>
-          <a:p>
-            <a:pPr marL="171450" indent="-171450">
-              <a:buFont typeface="Calibri"/>
-              <a:buChar char="-"/>
-            </a:pPr>
-            <a:r>
-              <a:rPr lang="en-US" dirty="0">
-                <a:ea typeface="Calibri"/>
-                <a:cs typeface="Calibri"/>
-              </a:rPr>
-              <a:t>Timing</a:t>
-            </a:r>
-          </a:p>
-          <a:p>
-            <a:pPr marL="171450" indent="-171450">
-              <a:buFont typeface="Calibri"/>
-              <a:buChar char="-"/>
-            </a:pPr>
-            <a:r>
-              <a:rPr lang="en-US" dirty="0">
-                <a:ea typeface="Calibri"/>
-                <a:cs typeface="Calibri"/>
-              </a:rPr>
-              <a:t>Customers says it's not needed</a:t>
-            </a:r>
-          </a:p>
-          <a:p>
-            <a:endParaRPr lang="en-US" dirty="0">
-              <a:ea typeface="Calibri"/>
-              <a:cs typeface="Calibri"/>
-            </a:endParaRPr>
-          </a:p>
-          <a:p>
-            <a:r>
-              <a:rPr lang="en-US" dirty="0">
-                <a:ea typeface="Calibri"/>
-                <a:cs typeface="Calibri"/>
-              </a:rPr>
-              <a:t>Giveaways</a:t>
-            </a:r>
-          </a:p>
-          <a:p>
-            <a:pPr marL="171450" indent="-171450">
-              <a:buFont typeface="Calibri"/>
-              <a:buChar char="-"/>
-            </a:pPr>
-            <a:r>
-              <a:rPr lang="en-US" dirty="0">
-                <a:ea typeface="Calibri"/>
-                <a:cs typeface="Calibri"/>
-              </a:rPr>
-              <a:t>Unit tests saves can save our life and are responsible to have an expected behavior of your application over multiple deployments and changes.</a:t>
-            </a:r>
-          </a:p>
-          <a:p>
-            <a:pPr marL="171450" indent="-171450">
-              <a:buFont typeface="Calibri"/>
-              <a:buChar char="-"/>
-            </a:pPr>
-            <a:r>
-              <a:rPr lang="en-US" dirty="0">
-                <a:ea typeface="Calibri"/>
-                <a:cs typeface="Calibri"/>
-              </a:rPr>
-              <a:t>Who writes the code should not test it but leave it to another person of the team</a:t>
-            </a:r>
-          </a:p>
-          <a:p>
-            <a:pPr marL="171450" indent="-171450">
-              <a:buFont typeface="Calibri"/>
-              <a:buChar char="-"/>
-            </a:pPr>
-            <a:endParaRPr lang="en-US" dirty="0">
-              <a:ea typeface="Calibri"/>
-              <a:cs typeface="Calibri"/>
-            </a:endParaRPr>
-          </a:p>
-          <a:p>
-            <a:pPr marL="171450" indent="-171450">
-              <a:buFont typeface="Calibri"/>
-              <a:buChar char="-"/>
-            </a:pPr>
-            <a:endParaRPr lang="en-US" dirty="0">
-              <a:ea typeface="Calibri"/>
-              <a:cs typeface="Calibri"/>
-            </a:endParaRPr>
-          </a:p>
-        </p:txBody>
-      </p:sp>
-      <p:sp>
-        <p:nvSpPr>
-          <p:cNvPr id="4" name="Slide Number Placeholder 3">
-            <a:extLst>
-              <a:ext uri="{FF2B5EF4-FFF2-40B4-BE49-F238E27FC236}">
-                <a16:creationId xmlns:a16="http://schemas.microsoft.com/office/drawing/2014/main" id="{C242478F-627E-D87B-5821-E7FA3AAFEC44}"/>
-              </a:ext>
-            </a:extLst>
-          </p:cNvPr>
-          <p:cNvSpPr>
-            <a:spLocks noGrp="1"/>
-          </p:cNvSpPr>
-          <p:nvPr>
-            <p:ph type="sldNum" sz="quarter" idx="5"/>
-          </p:nvPr>
-        </p:nvSpPr>
-        <p:spPr/>
-        <p:txBody>
-          <a:bodyPr/>
-          <a:lstStyle/>
-          <a:p>
-            <a:fld id="{7EB8C794-77EE-4724-B493-2E0907BFA558}" type="slidenum">
-              <a:rPr lang="en-GB" smtClean="0"/>
-              <a:t>12</a:t>
-            </a:fld>
-            <a:endParaRPr lang="en-GB"/>
-          </a:p>
-        </p:txBody>
-      </p:sp>
-    </p:spTree>
-    <p:extLst>
-      <p:ext uri="{BB962C8B-B14F-4D97-AF65-F5344CB8AC3E}">
-        <p14:creationId xmlns:p14="http://schemas.microsoft.com/office/powerpoint/2010/main" val="2612603715"/>
-      </p:ext>
-    </p:extLst>
-  </p:cSld>
-  <p:clrMapOvr>
-    <a:masterClrMapping/>
-  </p:clrMapOvr>
-</p:notes>
-</file>
-
-<file path=ppt/notesSlides/notesSlide12.xml><?xml version="1.0" encoding="utf-8"?>
-<p:notes xmlns:a="http://schemas.openxmlformats.org/drawingml/2006/main" xmlns:r="http://schemas.openxmlformats.org/officeDocument/2006/relationships" xmlns:p="http://schemas.openxmlformats.org/presentationml/2006/main">
-  <p:cSld>
-    <p:spTree>
-      <p:nvGrpSpPr>
-        <p:cNvPr id="1" name="">
-          <a:extLst>
-            <a:ext uri="{FF2B5EF4-FFF2-40B4-BE49-F238E27FC236}">
-              <a16:creationId xmlns:a16="http://schemas.microsoft.com/office/drawing/2014/main" id="{A493CA4D-7E14-2800-0583-DD0B38E8D7B3}"/>
-            </a:ext>
-          </a:extLst>
-        </p:cNvPr>
-        <p:cNvGrpSpPr/>
-        <p:nvPr/>
-      </p:nvGrpSpPr>
-      <p:grpSpPr>
-        <a:xfrm>
-          <a:off x="0" y="0"/>
-          <a:ext cx="0" cy="0"/>
-          <a:chOff x="0" y="0"/>
-          <a:chExt cx="0" cy="0"/>
-        </a:xfrm>
-      </p:grpSpPr>
-      <p:sp>
-        <p:nvSpPr>
-          <p:cNvPr id="2" name="Slide Image Placeholder 1">
-            <a:extLst>
-              <a:ext uri="{FF2B5EF4-FFF2-40B4-BE49-F238E27FC236}">
-                <a16:creationId xmlns:a16="http://schemas.microsoft.com/office/drawing/2014/main" id="{12DD0095-F60D-2C41-9EDA-8B28885687FC}"/>
-              </a:ext>
-            </a:extLst>
-          </p:cNvPr>
-          <p:cNvSpPr>
-            <a:spLocks noGrp="1" noRot="1" noChangeAspect="1"/>
-          </p:cNvSpPr>
-          <p:nvPr>
-            <p:ph type="sldImg"/>
-          </p:nvPr>
-        </p:nvSpPr>
-        <p:spPr/>
-      </p:sp>
-      <p:sp>
-        <p:nvSpPr>
-          <p:cNvPr id="3" name="Notes Placeholder 2">
-            <a:extLst>
-              <a:ext uri="{FF2B5EF4-FFF2-40B4-BE49-F238E27FC236}">
-                <a16:creationId xmlns:a16="http://schemas.microsoft.com/office/drawing/2014/main" id="{EF516803-58C8-3F40-5AAA-CEC1FC1D4C15}"/>
-              </a:ext>
-            </a:extLst>
-          </p:cNvPr>
-          <p:cNvSpPr>
-            <a:spLocks noGrp="1"/>
-          </p:cNvSpPr>
-          <p:nvPr>
-            <p:ph type="body" idx="1"/>
-          </p:nvPr>
-        </p:nvSpPr>
-        <p:spPr/>
-        <p:txBody>
-          <a:bodyPr/>
-          <a:lstStyle/>
-          <a:p>
-            <a:pPr marL="171450" indent="-171450">
-              <a:buFont typeface="Calibri"/>
-              <a:buChar char="-"/>
-            </a:pPr>
-            <a:endParaRPr lang="en-US" dirty="0">
-              <a:ea typeface="Calibri"/>
-              <a:cs typeface="Calibri"/>
-            </a:endParaRPr>
-          </a:p>
-        </p:txBody>
-      </p:sp>
-      <p:sp>
-        <p:nvSpPr>
-          <p:cNvPr id="4" name="Slide Number Placeholder 3">
-            <a:extLst>
-              <a:ext uri="{FF2B5EF4-FFF2-40B4-BE49-F238E27FC236}">
-                <a16:creationId xmlns:a16="http://schemas.microsoft.com/office/drawing/2014/main" id="{45FEDAD8-A81E-C5AC-22ED-6AB4F974DF91}"/>
-              </a:ext>
-            </a:extLst>
-          </p:cNvPr>
-          <p:cNvSpPr>
-            <a:spLocks noGrp="1"/>
-          </p:cNvSpPr>
-          <p:nvPr>
-            <p:ph type="sldNum" sz="quarter" idx="5"/>
-          </p:nvPr>
-        </p:nvSpPr>
-        <p:spPr/>
-        <p:txBody>
-          <a:bodyPr/>
-          <a:lstStyle/>
-          <a:p>
-            <a:fld id="{7EB8C794-77EE-4724-B493-2E0907BFA558}" type="slidenum">
-              <a:rPr lang="en-GB" smtClean="0"/>
-              <a:t>13</a:t>
-            </a:fld>
-            <a:endParaRPr lang="en-GB"/>
-          </a:p>
-        </p:txBody>
-      </p:sp>
-    </p:spTree>
-    <p:extLst>
-      <p:ext uri="{BB962C8B-B14F-4D97-AF65-F5344CB8AC3E}">
-        <p14:creationId xmlns:p14="http://schemas.microsoft.com/office/powerpoint/2010/main" val="3169937132"/>
-      </p:ext>
-    </p:extLst>
-  </p:cSld>
-  <p:clrMapOvr>
-    <a:masterClrMapping/>
-  </p:clrMapOvr>
-</p:notes>
-</file>
-
-<file path=ppt/notesSlides/notesSlide13.xml><?xml version="1.0" encoding="utf-8"?>
-<p:notes xmlns:a="http://schemas.openxmlformats.org/drawingml/2006/main" xmlns:r="http://schemas.openxmlformats.org/officeDocument/2006/relationships" xmlns:p="http://schemas.openxmlformats.org/presentationml/2006/main">
-  <p:cSld>
-    <p:spTree>
-      <p:nvGrpSpPr>
-        <p:cNvPr id="1" name="">
-          <a:extLst>
-            <a:ext uri="{FF2B5EF4-FFF2-40B4-BE49-F238E27FC236}">
-              <a16:creationId xmlns:a16="http://schemas.microsoft.com/office/drawing/2014/main" id="{2D45DC49-A269-D24C-E4C8-75E5BCE198F7}"/>
-            </a:ext>
-          </a:extLst>
-        </p:cNvPr>
-        <p:cNvGrpSpPr/>
-        <p:nvPr/>
-      </p:nvGrpSpPr>
-      <p:grpSpPr>
-        <a:xfrm>
-          <a:off x="0" y="0"/>
-          <a:ext cx="0" cy="0"/>
-          <a:chOff x="0" y="0"/>
-          <a:chExt cx="0" cy="0"/>
-        </a:xfrm>
-      </p:grpSpPr>
-      <p:sp>
-        <p:nvSpPr>
-          <p:cNvPr id="2" name="Slide Image Placeholder 1">
-            <a:extLst>
-              <a:ext uri="{FF2B5EF4-FFF2-40B4-BE49-F238E27FC236}">
-                <a16:creationId xmlns:a16="http://schemas.microsoft.com/office/drawing/2014/main" id="{722FAF7C-28B0-293F-58BE-68267837BDBE}"/>
-              </a:ext>
-            </a:extLst>
-          </p:cNvPr>
-          <p:cNvSpPr>
-            <a:spLocks noGrp="1" noRot="1" noChangeAspect="1"/>
-          </p:cNvSpPr>
-          <p:nvPr>
-            <p:ph type="sldImg"/>
-          </p:nvPr>
-        </p:nvSpPr>
-        <p:spPr/>
-      </p:sp>
-      <p:sp>
-        <p:nvSpPr>
-          <p:cNvPr id="3" name="Notes Placeholder 2">
-            <a:extLst>
-              <a:ext uri="{FF2B5EF4-FFF2-40B4-BE49-F238E27FC236}">
-                <a16:creationId xmlns:a16="http://schemas.microsoft.com/office/drawing/2014/main" id="{66A4D9B9-AA9D-7422-0FFE-2998DA32119B}"/>
-              </a:ext>
-            </a:extLst>
-          </p:cNvPr>
-          <p:cNvSpPr>
-            <a:spLocks noGrp="1"/>
-          </p:cNvSpPr>
-          <p:nvPr>
-            <p:ph type="body" idx="1"/>
-          </p:nvPr>
-        </p:nvSpPr>
-        <p:spPr/>
-        <p:txBody>
-          <a:bodyPr/>
-          <a:lstStyle/>
-          <a:p>
-            <a:r>
-              <a:rPr lang="en-US" dirty="0">
-                <a:ea typeface="Calibri"/>
-                <a:cs typeface="Calibri"/>
-              </a:rPr>
-              <a:t>How often do we use tests in our projects?</a:t>
-            </a:r>
-          </a:p>
-          <a:p>
-            <a:r>
-              <a:rPr lang="en-US">
-                <a:ea typeface="Calibri"/>
-                <a:cs typeface="Calibri"/>
-              </a:rPr>
-              <a:t>It depends on:</a:t>
-            </a:r>
-          </a:p>
-          <a:p>
-            <a:pPr marL="171450" indent="-171450">
-              <a:buFont typeface="Calibri"/>
-              <a:buChar char="-"/>
-            </a:pPr>
-            <a:r>
-              <a:rPr lang="en-US" dirty="0">
-                <a:ea typeface="Calibri"/>
-                <a:cs typeface="Calibri"/>
-              </a:rPr>
-              <a:t>Budget</a:t>
-            </a:r>
-          </a:p>
-          <a:p>
-            <a:pPr marL="171450" indent="-171450">
-              <a:buFont typeface="Calibri"/>
-              <a:buChar char="-"/>
-            </a:pPr>
-            <a:r>
-              <a:rPr lang="en-US" dirty="0">
-                <a:ea typeface="Calibri"/>
-                <a:cs typeface="Calibri"/>
-              </a:rPr>
-              <a:t>Timing</a:t>
-            </a:r>
-          </a:p>
-          <a:p>
-            <a:pPr marL="171450" indent="-171450">
-              <a:buFont typeface="Calibri"/>
-              <a:buChar char="-"/>
-            </a:pPr>
-            <a:r>
-              <a:rPr lang="en-US" dirty="0">
-                <a:ea typeface="Calibri"/>
-                <a:cs typeface="Calibri"/>
-              </a:rPr>
-              <a:t>Customers says it's not needed</a:t>
-            </a:r>
-          </a:p>
-          <a:p>
-            <a:endParaRPr lang="en-US" dirty="0">
-              <a:ea typeface="Calibri"/>
-              <a:cs typeface="Calibri"/>
-            </a:endParaRPr>
-          </a:p>
-          <a:p>
-            <a:r>
-              <a:rPr lang="en-US" dirty="0">
-                <a:ea typeface="Calibri"/>
-                <a:cs typeface="Calibri"/>
-              </a:rPr>
-              <a:t>Giveaways</a:t>
-            </a:r>
-          </a:p>
-          <a:p>
-            <a:pPr marL="171450" indent="-171450">
-              <a:buFont typeface="Calibri"/>
-              <a:buChar char="-"/>
-            </a:pPr>
-            <a:r>
-              <a:rPr lang="en-US" dirty="0">
-                <a:ea typeface="Calibri"/>
-                <a:cs typeface="Calibri"/>
-              </a:rPr>
-              <a:t>Unit tests saves can save our life and are responsible to have an expected behavior of your application over multiple deployments and changes.</a:t>
-            </a:r>
-          </a:p>
-          <a:p>
-            <a:pPr marL="171450" indent="-171450">
-              <a:buFont typeface="Calibri"/>
-              <a:buChar char="-"/>
-            </a:pPr>
-            <a:r>
-              <a:rPr lang="en-US" dirty="0">
-                <a:ea typeface="Calibri"/>
-                <a:cs typeface="Calibri"/>
-              </a:rPr>
-              <a:t>Who writes the code should not test it but leave it to another person of the team</a:t>
-            </a:r>
-          </a:p>
-          <a:p>
-            <a:pPr marL="171450" indent="-171450">
-              <a:buFont typeface="Calibri"/>
-              <a:buChar char="-"/>
-            </a:pPr>
-            <a:endParaRPr lang="en-US" dirty="0">
-              <a:ea typeface="Calibri"/>
-              <a:cs typeface="Calibri"/>
-            </a:endParaRPr>
-          </a:p>
-          <a:p>
-            <a:pPr marL="171450" indent="-171450">
-              <a:buFont typeface="Calibri"/>
-              <a:buChar char="-"/>
-            </a:pPr>
-            <a:endParaRPr lang="en-US" dirty="0">
-              <a:ea typeface="Calibri"/>
-              <a:cs typeface="Calibri"/>
-            </a:endParaRPr>
-          </a:p>
-        </p:txBody>
-      </p:sp>
-      <p:sp>
-        <p:nvSpPr>
-          <p:cNvPr id="4" name="Slide Number Placeholder 3">
-            <a:extLst>
-              <a:ext uri="{FF2B5EF4-FFF2-40B4-BE49-F238E27FC236}">
-                <a16:creationId xmlns:a16="http://schemas.microsoft.com/office/drawing/2014/main" id="{0D40BFFB-821F-4B9A-38C5-7DC704AF23EB}"/>
-              </a:ext>
-            </a:extLst>
-          </p:cNvPr>
-          <p:cNvSpPr>
-            <a:spLocks noGrp="1"/>
-          </p:cNvSpPr>
-          <p:nvPr>
-            <p:ph type="sldNum" sz="quarter" idx="5"/>
-          </p:nvPr>
-        </p:nvSpPr>
-        <p:spPr/>
-        <p:txBody>
-          <a:bodyPr/>
-          <a:lstStyle/>
-          <a:p>
-            <a:fld id="{7EB8C794-77EE-4724-B493-2E0907BFA558}" type="slidenum">
-              <a:rPr lang="en-GB" smtClean="0"/>
-              <a:t>14</a:t>
-            </a:fld>
-            <a:endParaRPr lang="en-GB"/>
-          </a:p>
-        </p:txBody>
-      </p:sp>
-    </p:spTree>
-    <p:extLst>
-      <p:ext uri="{BB962C8B-B14F-4D97-AF65-F5344CB8AC3E}">
-        <p14:creationId xmlns:p14="http://schemas.microsoft.com/office/powerpoint/2010/main" val="1301111360"/>
-      </p:ext>
-    </p:extLst>
-  </p:cSld>
-  <p:clrMapOvr>
-    <a:masterClrMapping/>
-  </p:clrMapOvr>
-</p:notes>
-</file>
-
-<file path=ppt/notesSlides/notesSlide14.xml><?xml version="1.0" encoding="utf-8"?>
-<p:notes xmlns:a="http://schemas.openxmlformats.org/drawingml/2006/main" xmlns:r="http://schemas.openxmlformats.org/officeDocument/2006/relationships" xmlns:p="http://schemas.openxmlformats.org/presentationml/2006/main">
-  <p:cSld>
-    <p:spTree>
-      <p:nvGrpSpPr>
-        <p:cNvPr id="1" name="">
-          <a:extLst>
-            <a:ext uri="{FF2B5EF4-FFF2-40B4-BE49-F238E27FC236}">
-              <a16:creationId xmlns:a16="http://schemas.microsoft.com/office/drawing/2014/main" id="{EFAE80E2-63DB-FCE2-C727-8D4FDE5FCD82}"/>
-            </a:ext>
-          </a:extLst>
-        </p:cNvPr>
-        <p:cNvGrpSpPr/>
-        <p:nvPr/>
-      </p:nvGrpSpPr>
-      <p:grpSpPr>
-        <a:xfrm>
-          <a:off x="0" y="0"/>
-          <a:ext cx="0" cy="0"/>
-          <a:chOff x="0" y="0"/>
-          <a:chExt cx="0" cy="0"/>
-        </a:xfrm>
-      </p:grpSpPr>
-      <p:sp>
-        <p:nvSpPr>
-          <p:cNvPr id="2" name="Slide Image Placeholder 1">
-            <a:extLst>
-              <a:ext uri="{FF2B5EF4-FFF2-40B4-BE49-F238E27FC236}">
-                <a16:creationId xmlns:a16="http://schemas.microsoft.com/office/drawing/2014/main" id="{1BBF3711-4E5E-C1F5-3FD3-FEDDF48A49A8}"/>
-              </a:ext>
-            </a:extLst>
-          </p:cNvPr>
-          <p:cNvSpPr>
-            <a:spLocks noGrp="1" noRot="1" noChangeAspect="1"/>
-          </p:cNvSpPr>
-          <p:nvPr>
-            <p:ph type="sldImg"/>
-          </p:nvPr>
-        </p:nvSpPr>
-        <p:spPr/>
-      </p:sp>
-      <p:sp>
-        <p:nvSpPr>
-          <p:cNvPr id="3" name="Notes Placeholder 2">
-            <a:extLst>
-              <a:ext uri="{FF2B5EF4-FFF2-40B4-BE49-F238E27FC236}">
-                <a16:creationId xmlns:a16="http://schemas.microsoft.com/office/drawing/2014/main" id="{34E75094-FBBD-4136-A93E-620C11F35268}"/>
-              </a:ext>
-            </a:extLst>
-          </p:cNvPr>
-          <p:cNvSpPr>
-            <a:spLocks noGrp="1"/>
-          </p:cNvSpPr>
-          <p:nvPr>
-            <p:ph type="body" idx="1"/>
-          </p:nvPr>
-        </p:nvSpPr>
-        <p:spPr/>
-        <p:txBody>
-          <a:bodyPr/>
-          <a:lstStyle/>
-          <a:p>
-            <a:pPr marL="171450" indent="-171450">
-              <a:buFont typeface="Calibri"/>
-              <a:buChar char="-"/>
-            </a:pPr>
-            <a:endParaRPr lang="en-US" dirty="0">
-              <a:ea typeface="Calibri"/>
-              <a:cs typeface="Calibri"/>
-            </a:endParaRPr>
-          </a:p>
-        </p:txBody>
-      </p:sp>
-      <p:sp>
-        <p:nvSpPr>
-          <p:cNvPr id="4" name="Slide Number Placeholder 3">
-            <a:extLst>
-              <a:ext uri="{FF2B5EF4-FFF2-40B4-BE49-F238E27FC236}">
-                <a16:creationId xmlns:a16="http://schemas.microsoft.com/office/drawing/2014/main" id="{253F40E7-4962-49A7-2F83-62E2E4535C5E}"/>
-              </a:ext>
-            </a:extLst>
-          </p:cNvPr>
-          <p:cNvSpPr>
-            <a:spLocks noGrp="1"/>
-          </p:cNvSpPr>
-          <p:nvPr>
-            <p:ph type="sldNum" sz="quarter" idx="5"/>
-          </p:nvPr>
-        </p:nvSpPr>
-        <p:spPr/>
-        <p:txBody>
-          <a:bodyPr/>
-          <a:lstStyle/>
-          <a:p>
-            <a:fld id="{7EB8C794-77EE-4724-B493-2E0907BFA558}" type="slidenum">
-              <a:rPr lang="en-GB" smtClean="0"/>
-              <a:t>15</a:t>
-            </a:fld>
-            <a:endParaRPr lang="en-GB"/>
-          </a:p>
-        </p:txBody>
-      </p:sp>
-    </p:spTree>
-    <p:extLst>
-      <p:ext uri="{BB962C8B-B14F-4D97-AF65-F5344CB8AC3E}">
-        <p14:creationId xmlns:p14="http://schemas.microsoft.com/office/powerpoint/2010/main" val="3547106509"/>
-      </p:ext>
-    </p:extLst>
-  </p:cSld>
-  <p:clrMapOvr>
-    <a:masterClrMapping/>
-  </p:clrMapOvr>
-</p:notes>
-</file>
-
-<file path=ppt/notesSlides/notesSlide15.xml><?xml version="1.0" encoding="utf-8"?>
-<p:notes xmlns:a="http://schemas.openxmlformats.org/drawingml/2006/main" xmlns:r="http://schemas.openxmlformats.org/officeDocument/2006/relationships" xmlns:p="http://schemas.openxmlformats.org/presentationml/2006/main">
-  <p:cSld>
-    <p:spTree>
-      <p:nvGrpSpPr>
-        <p:cNvPr id="1" name="">
-          <a:extLst>
-            <a:ext uri="{FF2B5EF4-FFF2-40B4-BE49-F238E27FC236}">
               <a16:creationId xmlns:a16="http://schemas.microsoft.com/office/drawing/2014/main" id="{57A32D5C-DF60-A326-82D2-59F7D398ADA0}"/>
             </a:ext>
           </a:extLst>
@@ -1923,7 +1135,7 @@
           </a:p>
           <a:p>
             <a:r>
-              <a:rPr lang="en-US">
+              <a:rPr lang="en-US" dirty="0">
                 <a:ea typeface="Calibri"/>
                 <a:cs typeface="Calibri"/>
               </a:rPr>
@@ -2008,6 +1220,47 @@
                 <a:cs typeface="Calibri"/>
               </a:rPr>
               <a:t>Who writes the code should not test it but leave it to another person of the team</a:t>
+            </a:r>
+          </a:p>
+          <a:p>
+            <a:pPr marL="171450" indent="-171450">
+              <a:buFont typeface="Calibri"/>
+              <a:buChar char="-"/>
+            </a:pPr>
+            <a:endParaRPr lang="en-US" dirty="0">
+              <a:ea typeface="Calibri"/>
+              <a:cs typeface="Calibri"/>
+            </a:endParaRPr>
+          </a:p>
+          <a:p>
+            <a:pPr marL="0" marR="0" lvl="0" indent="0" algn="l" defTabSz="914400" rtl="0" eaLnBrk="1" fontAlgn="auto" latinLnBrk="0" hangingPunct="1">
+              <a:lnSpc>
+                <a:spcPct val="100000"/>
+              </a:lnSpc>
+              <a:spcBef>
+                <a:spcPts val="0"/>
+              </a:spcBef>
+              <a:spcAft>
+                <a:spcPts val="0"/>
+              </a:spcAft>
+              <a:buClrTx/>
+              <a:buSzTx/>
+              <a:buFont typeface="Calibri"/>
+              <a:buNone/>
+              <a:tabLst/>
+              <a:defRPr/>
+            </a:pPr>
+            <a:r>
+              <a:rPr lang="en-US" sz="1200" kern="1200" dirty="0">
+                <a:solidFill>
+                  <a:schemeClr val="tx1"/>
+                </a:solidFill>
+                <a:effectLst/>
+                <a:latin typeface="+mn-lt"/>
+                <a:ea typeface="+mn-ea"/>
+                <a:cs typeface="+mn-cs"/>
+              </a:rPr>
+              <a:t>The provided repo is public for audience use and learning: https://github.com/GuidoZam/espc-spfx-session-demo</a:t>
             </a:r>
           </a:p>
           <a:p>
@@ -2055,7 +1308,7 @@
           <a:p>
             <a:fld id="{7EB8C794-77EE-4724-B493-2E0907BFA558}" type="slidenum">
               <a:rPr lang="en-GB" smtClean="0"/>
-              <a:t>16</a:t>
+              <a:t>12</a:t>
             </a:fld>
             <a:endParaRPr lang="en-GB"/>
           </a:p>
@@ -2074,7 +1327,7 @@
 </p:notes>
 </file>
 
-<file path=ppt/notesSlides/notesSlide16.xml><?xml version="1.0" encoding="utf-8"?>
+<file path=ppt/notesSlides/notesSlide11.xml><?xml version="1.0" encoding="utf-8"?>
 <p:notes xmlns:a="http://schemas.openxmlformats.org/drawingml/2006/main" xmlns:r="http://schemas.openxmlformats.org/officeDocument/2006/relationships" xmlns:p="http://schemas.openxmlformats.org/presentationml/2006/main">
   <p:cSld>
     <p:spTree>
@@ -2147,7 +1400,7 @@
           <a:p>
             <a:fld id="{7EB8C794-77EE-4724-B493-2E0907BFA558}" type="slidenum">
               <a:rPr lang="en-GB" smtClean="0"/>
-              <a:t>17</a:t>
+              <a:t>13</a:t>
             </a:fld>
             <a:endParaRPr lang="en-GB"/>
           </a:p>
@@ -2781,53 +2034,8 @@
                 <a:ea typeface="+mn-ea"/>
                 <a:cs typeface="+mn-cs"/>
               </a:rPr>
-              <a:t>: GitHub Actions automate environment setup, dependency installation, solution bundling, unit tests, packaging, deployment, and UI tests. </a:t>
-            </a:r>
-            <a:r>
-              <a:rPr lang="en-US" sz="1200" kern="1200">
-                <a:solidFill>
-                  <a:schemeClr val="tx1"/>
-                </a:solidFill>
-                <a:effectLst/>
-                <a:latin typeface="+mn-lt"/>
-                <a:ea typeface="+mn-ea"/>
-                <a:cs typeface="+mn-cs"/>
-              </a:rPr>
-              <a:t>Secrets </a:t>
-            </a:r>
-            <a:r>
-              <a:rPr lang="en-US" sz="1200" kern="1200" dirty="0">
-                <a:solidFill>
-                  <a:schemeClr val="tx1"/>
-                </a:solidFill>
-                <a:effectLst/>
-                <a:latin typeface="+mn-lt"/>
-                <a:ea typeface="+mn-ea"/>
-                <a:cs typeface="+mn-cs"/>
-              </a:rPr>
-              <a:t>and environment variables are managed for </a:t>
-            </a:r>
-            <a:r>
-              <a:rPr lang="en-US" sz="1200" kern="1200">
-                <a:solidFill>
-                  <a:schemeClr val="tx1"/>
-                </a:solidFill>
-                <a:effectLst/>
-                <a:latin typeface="+mn-lt"/>
-                <a:ea typeface="+mn-ea"/>
-                <a:cs typeface="+mn-cs"/>
-              </a:rPr>
-              <a:t>security.</a:t>
-            </a:r>
-            <a:endParaRPr lang="en-US" sz="1200" kern="1200" dirty="0">
-              <a:solidFill>
-                <a:schemeClr val="tx1"/>
-              </a:solidFill>
-              <a:effectLst/>
-              <a:latin typeface="+mn-lt"/>
-              <a:ea typeface="+mn-ea"/>
-              <a:cs typeface="+mn-cs"/>
-            </a:endParaRPr>
+              <a:t>: GitHub Actions automate environment setup, dependency installation, solution bundling, unit tests, packaging, deployment, and UI tests. Secrets and environment variables are managed for security.</a:t>
+            </a:r>
           </a:p>
           <a:p>
             <a:endParaRPr lang="en-US" sz="1200" kern="1200" dirty="0">
@@ -2896,114 +2104,6 @@
 </file>
 
 <file path=ppt/notesSlides/notesSlide6.xml><?xml version="1.0" encoding="utf-8"?>
-<p:notes xmlns:a="http://schemas.openxmlformats.org/drawingml/2006/main" xmlns:r="http://schemas.openxmlformats.org/officeDocument/2006/relationships" xmlns:p="http://schemas.openxmlformats.org/presentationml/2006/main">
-  <p:cSld>
-    <p:spTree>
-      <p:nvGrpSpPr>
-        <p:cNvPr id="1" name="">
-          <a:extLst>
-            <a:ext uri="{FF2B5EF4-FFF2-40B4-BE49-F238E27FC236}">
-              <a16:creationId xmlns:a16="http://schemas.microsoft.com/office/drawing/2014/main" id="{64EF6624-3DC2-E340-A7D7-C639466C1FA7}"/>
-            </a:ext>
-          </a:extLst>
-        </p:cNvPr>
-        <p:cNvGrpSpPr/>
-        <p:nvPr/>
-      </p:nvGrpSpPr>
-      <p:grpSpPr>
-        <a:xfrm>
-          <a:off x="0" y="0"/>
-          <a:ext cx="0" cy="0"/>
-          <a:chOff x="0" y="0"/>
-          <a:chExt cx="0" cy="0"/>
-        </a:xfrm>
-      </p:grpSpPr>
-      <p:sp>
-        <p:nvSpPr>
-          <p:cNvPr id="2" name="Slide Image Placeholder 1">
-            <a:extLst>
-              <a:ext uri="{FF2B5EF4-FFF2-40B4-BE49-F238E27FC236}">
-                <a16:creationId xmlns:a16="http://schemas.microsoft.com/office/drawing/2014/main" id="{5DFEC2C2-C1D4-D0DC-94B6-24D973D64854}"/>
-              </a:ext>
-            </a:extLst>
-          </p:cNvPr>
-          <p:cNvSpPr>
-            <a:spLocks noGrp="1" noRot="1" noChangeAspect="1"/>
-          </p:cNvSpPr>
-          <p:nvPr>
-            <p:ph type="sldImg"/>
-          </p:nvPr>
-        </p:nvSpPr>
-        <p:spPr/>
-      </p:sp>
-      <p:sp>
-        <p:nvSpPr>
-          <p:cNvPr id="3" name="Notes Placeholder 2">
-            <a:extLst>
-              <a:ext uri="{FF2B5EF4-FFF2-40B4-BE49-F238E27FC236}">
-                <a16:creationId xmlns:a16="http://schemas.microsoft.com/office/drawing/2014/main" id="{DC98B1D0-935D-3637-C120-1CEF4FD6F489}"/>
-              </a:ext>
-            </a:extLst>
-          </p:cNvPr>
-          <p:cNvSpPr>
-            <a:spLocks noGrp="1"/>
-          </p:cNvSpPr>
-          <p:nvPr>
-            <p:ph type="body" idx="1"/>
-          </p:nvPr>
-        </p:nvSpPr>
-        <p:spPr/>
-        <p:txBody>
-          <a:bodyPr/>
-          <a:lstStyle/>
-          <a:p>
-            <a:endParaRPr lang="en-US"/>
-          </a:p>
-        </p:txBody>
-      </p:sp>
-      <p:sp>
-        <p:nvSpPr>
-          <p:cNvPr id="4" name="Slide Number Placeholder 3">
-            <a:extLst>
-              <a:ext uri="{FF2B5EF4-FFF2-40B4-BE49-F238E27FC236}">
-                <a16:creationId xmlns:a16="http://schemas.microsoft.com/office/drawing/2014/main" id="{5725798C-9EDE-4536-DFE5-61FB8626B747}"/>
-              </a:ext>
-            </a:extLst>
-          </p:cNvPr>
-          <p:cNvSpPr>
-            <a:spLocks noGrp="1"/>
-          </p:cNvSpPr>
-          <p:nvPr>
-            <p:ph type="sldNum" sz="quarter" idx="5"/>
-          </p:nvPr>
-        </p:nvSpPr>
-        <p:spPr/>
-        <p:txBody>
-          <a:bodyPr/>
-          <a:lstStyle/>
-          <a:p>
-            <a:fld id="{7EB8C794-77EE-4724-B493-2E0907BFA558}" type="slidenum">
-              <a:rPr lang="en-GB" smtClean="0"/>
-              <a:t>7</a:t>
-            </a:fld>
-            <a:endParaRPr lang="en-GB"/>
-          </a:p>
-        </p:txBody>
-      </p:sp>
-    </p:spTree>
-    <p:extLst>
-      <p:ext uri="{BB962C8B-B14F-4D97-AF65-F5344CB8AC3E}">
-        <p14:creationId xmlns:p14="http://schemas.microsoft.com/office/powerpoint/2010/main" val="2726051225"/>
-      </p:ext>
-    </p:extLst>
-  </p:cSld>
-  <p:clrMapOvr>
-    <a:masterClrMapping/>
-  </p:clrMapOvr>
-</p:notes>
-</file>
-
-<file path=ppt/notesSlides/notesSlide7.xml><?xml version="1.0" encoding="utf-8"?>
 <p:notes xmlns:a="http://schemas.openxmlformats.org/drawingml/2006/main" xmlns:r="http://schemas.openxmlformats.org/officeDocument/2006/relationships" xmlns:p="http://schemas.openxmlformats.org/presentationml/2006/main">
   <p:cSld>
     <p:spTree>
@@ -3111,115 +2211,7 @@
 </p:notes>
 </file>
 
-<file path=ppt/notesSlides/notesSlide8.xml><?xml version="1.0" encoding="utf-8"?>
-<p:notes xmlns:a="http://schemas.openxmlformats.org/drawingml/2006/main" xmlns:r="http://schemas.openxmlformats.org/officeDocument/2006/relationships" xmlns:p="http://schemas.openxmlformats.org/presentationml/2006/main">
-  <p:cSld>
-    <p:spTree>
-      <p:nvGrpSpPr>
-        <p:cNvPr id="1" name="">
-          <a:extLst>
-            <a:ext uri="{FF2B5EF4-FFF2-40B4-BE49-F238E27FC236}">
-              <a16:creationId xmlns:a16="http://schemas.microsoft.com/office/drawing/2014/main" id="{E6BCE4A0-0AA1-E271-625F-A7FD4E61A325}"/>
-            </a:ext>
-          </a:extLst>
-        </p:cNvPr>
-        <p:cNvGrpSpPr/>
-        <p:nvPr/>
-      </p:nvGrpSpPr>
-      <p:grpSpPr>
-        <a:xfrm>
-          <a:off x="0" y="0"/>
-          <a:ext cx="0" cy="0"/>
-          <a:chOff x="0" y="0"/>
-          <a:chExt cx="0" cy="0"/>
-        </a:xfrm>
-      </p:grpSpPr>
-      <p:sp>
-        <p:nvSpPr>
-          <p:cNvPr id="2" name="Slide Image Placeholder 1">
-            <a:extLst>
-              <a:ext uri="{FF2B5EF4-FFF2-40B4-BE49-F238E27FC236}">
-                <a16:creationId xmlns:a16="http://schemas.microsoft.com/office/drawing/2014/main" id="{4CAA5670-B381-EA14-A3A6-6B2CB7A78D40}"/>
-              </a:ext>
-            </a:extLst>
-          </p:cNvPr>
-          <p:cNvSpPr>
-            <a:spLocks noGrp="1" noRot="1" noChangeAspect="1"/>
-          </p:cNvSpPr>
-          <p:nvPr>
-            <p:ph type="sldImg"/>
-          </p:nvPr>
-        </p:nvSpPr>
-        <p:spPr/>
-      </p:sp>
-      <p:sp>
-        <p:nvSpPr>
-          <p:cNvPr id="3" name="Notes Placeholder 2">
-            <a:extLst>
-              <a:ext uri="{FF2B5EF4-FFF2-40B4-BE49-F238E27FC236}">
-                <a16:creationId xmlns:a16="http://schemas.microsoft.com/office/drawing/2014/main" id="{26D46F86-6651-C673-E87C-4E6377849872}"/>
-              </a:ext>
-            </a:extLst>
-          </p:cNvPr>
-          <p:cNvSpPr>
-            <a:spLocks noGrp="1"/>
-          </p:cNvSpPr>
-          <p:nvPr>
-            <p:ph type="body" idx="1"/>
-          </p:nvPr>
-        </p:nvSpPr>
-        <p:spPr/>
-        <p:txBody>
-          <a:bodyPr/>
-          <a:lstStyle/>
-          <a:p>
-            <a:endParaRPr lang="en-US"/>
-          </a:p>
-        </p:txBody>
-      </p:sp>
-      <p:sp>
-        <p:nvSpPr>
-          <p:cNvPr id="4" name="Slide Number Placeholder 3">
-            <a:extLst>
-              <a:ext uri="{FF2B5EF4-FFF2-40B4-BE49-F238E27FC236}">
-                <a16:creationId xmlns:a16="http://schemas.microsoft.com/office/drawing/2014/main" id="{9B454DCF-14DA-F2AA-CBAC-5EEC773FA70C}"/>
-              </a:ext>
-            </a:extLst>
-          </p:cNvPr>
-          <p:cNvSpPr>
-            <a:spLocks noGrp="1"/>
-          </p:cNvSpPr>
-          <p:nvPr>
-            <p:ph type="sldNum" sz="quarter" idx="5"/>
-          </p:nvPr>
-        </p:nvSpPr>
-        <p:spPr/>
-        <p:txBody>
-          <a:bodyPr/>
-          <a:lstStyle/>
-          <a:p>
-            <a:fld id="{7EB8C794-77EE-4724-B493-2E0907BFA558}" type="slidenum">
-              <a:rPr lang="en-GB" smtClean="0"/>
-              <a:t>9</a:t>
-            </a:fld>
-            <a:endParaRPr lang="en-GB"/>
-          </a:p>
-        </p:txBody>
-      </p:sp>
-    </p:spTree>
-    <p:extLst>
-      <p:ext uri="{BB962C8B-B14F-4D97-AF65-F5344CB8AC3E}">
-        <p14:creationId xmlns:p14="http://schemas.microsoft.com/office/powerpoint/2010/main" val="520218635"/>
-      </p:ext>
-    </p:extLst>
-  </p:cSld>
-  <p:clrMapOvr>
-    <a:masterClrMapping/>
-  </p:clrMapOvr>
-</p:notes>
-</file>
-
-<file path=ppt/notesSlides/notesSlide9.xml><?xml version="1.0" encoding="utf-8"?>
+<file path=ppt/notesSlides/notesSlide7.xml><?xml version="1.0" encoding="utf-8"?>
 <p:notes xmlns:a="http://schemas.openxmlformats.org/drawingml/2006/main" xmlns:r="http://schemas.openxmlformats.org/officeDocument/2006/relationships" xmlns:p="http://schemas.openxmlformats.org/presentationml/2006/main">
   <p:cSld>
     <p:spTree>
@@ -3308,7 +2300,7 @@
           <a:p>
             <a:fld id="{7EB8C794-77EE-4724-B493-2E0907BFA558}" type="slidenum">
               <a:rPr lang="en-GB" smtClean="0"/>
-              <a:t>10</a:t>
+              <a:t>9</a:t>
             </a:fld>
             <a:endParaRPr lang="en-GB"/>
           </a:p>
@@ -3318,6 +2310,452 @@
     <p:extLst>
       <p:ext uri="{BB962C8B-B14F-4D97-AF65-F5344CB8AC3E}">
         <p14:creationId xmlns:p14="http://schemas.microsoft.com/office/powerpoint/2010/main" val="4161228640"/>
+      </p:ext>
+    </p:extLst>
+  </p:cSld>
+  <p:clrMapOvr>
+    <a:masterClrMapping/>
+  </p:clrMapOvr>
+</p:notes>
+</file>
+
+<file path=ppt/notesSlides/notesSlide8.xml><?xml version="1.0" encoding="utf-8"?>
+<p:notes xmlns:a="http://schemas.openxmlformats.org/drawingml/2006/main" xmlns:r="http://schemas.openxmlformats.org/officeDocument/2006/relationships" xmlns:p="http://schemas.openxmlformats.org/presentationml/2006/main">
+  <p:cSld>
+    <p:spTree>
+      <p:nvGrpSpPr>
+        <p:cNvPr id="1" name="">
+          <a:extLst>
+            <a:ext uri="{FF2B5EF4-FFF2-40B4-BE49-F238E27FC236}">
+              <a16:creationId xmlns:a16="http://schemas.microsoft.com/office/drawing/2014/main" id="{E5E34A03-EDDC-496B-A252-C7FFBF6910FF}"/>
+            </a:ext>
+          </a:extLst>
+        </p:cNvPr>
+        <p:cNvGrpSpPr/>
+        <p:nvPr/>
+      </p:nvGrpSpPr>
+      <p:grpSpPr>
+        <a:xfrm>
+          <a:off x="0" y="0"/>
+          <a:ext cx="0" cy="0"/>
+          <a:chOff x="0" y="0"/>
+          <a:chExt cx="0" cy="0"/>
+        </a:xfrm>
+      </p:grpSpPr>
+      <p:sp>
+        <p:nvSpPr>
+          <p:cNvPr id="2" name="Slide Image Placeholder 1">
+            <a:extLst>
+              <a:ext uri="{FF2B5EF4-FFF2-40B4-BE49-F238E27FC236}">
+                <a16:creationId xmlns:a16="http://schemas.microsoft.com/office/drawing/2014/main" id="{48A9EF52-BEF5-A1DD-9400-B0F6CF9FCB38}"/>
+              </a:ext>
+            </a:extLst>
+          </p:cNvPr>
+          <p:cNvSpPr>
+            <a:spLocks noGrp="1" noRot="1" noChangeAspect="1"/>
+          </p:cNvSpPr>
+          <p:nvPr>
+            <p:ph type="sldImg"/>
+          </p:nvPr>
+        </p:nvSpPr>
+        <p:spPr/>
+      </p:sp>
+      <p:sp>
+        <p:nvSpPr>
+          <p:cNvPr id="3" name="Notes Placeholder 2">
+            <a:extLst>
+              <a:ext uri="{FF2B5EF4-FFF2-40B4-BE49-F238E27FC236}">
+                <a16:creationId xmlns:a16="http://schemas.microsoft.com/office/drawing/2014/main" id="{9CD63604-03EE-C33D-885B-D60B1D085275}"/>
+              </a:ext>
+            </a:extLst>
+          </p:cNvPr>
+          <p:cNvSpPr>
+            <a:spLocks noGrp="1"/>
+          </p:cNvSpPr>
+          <p:nvPr>
+            <p:ph type="body" idx="1"/>
+          </p:nvPr>
+        </p:nvSpPr>
+        <p:spPr/>
+        <p:txBody>
+          <a:bodyPr/>
+          <a:lstStyle/>
+          <a:p>
+            <a:r>
+              <a:rPr lang="en-US" dirty="0">
+                <a:ea typeface="Calibri"/>
+                <a:cs typeface="Calibri"/>
+              </a:rPr>
+              <a:t>How often do we use tests in our projects?</a:t>
+            </a:r>
+          </a:p>
+          <a:p>
+            <a:r>
+              <a:rPr lang="en-US">
+                <a:ea typeface="Calibri"/>
+                <a:cs typeface="Calibri"/>
+              </a:rPr>
+              <a:t>It depends on:</a:t>
+            </a:r>
+          </a:p>
+          <a:p>
+            <a:pPr marL="171450" indent="-171450">
+              <a:buFont typeface="Calibri"/>
+              <a:buChar char="-"/>
+            </a:pPr>
+            <a:r>
+              <a:rPr lang="en-US" dirty="0">
+                <a:ea typeface="Calibri"/>
+                <a:cs typeface="Calibri"/>
+              </a:rPr>
+              <a:t>Budget</a:t>
+            </a:r>
+          </a:p>
+          <a:p>
+            <a:pPr marL="171450" indent="-171450">
+              <a:buFont typeface="Calibri"/>
+              <a:buChar char="-"/>
+            </a:pPr>
+            <a:r>
+              <a:rPr lang="en-US" dirty="0">
+                <a:ea typeface="Calibri"/>
+                <a:cs typeface="Calibri"/>
+              </a:rPr>
+              <a:t>Timing</a:t>
+            </a:r>
+          </a:p>
+          <a:p>
+            <a:pPr marL="171450" indent="-171450">
+              <a:buFont typeface="Calibri"/>
+              <a:buChar char="-"/>
+            </a:pPr>
+            <a:r>
+              <a:rPr lang="en-US" dirty="0">
+                <a:ea typeface="Calibri"/>
+                <a:cs typeface="Calibri"/>
+              </a:rPr>
+              <a:t>Customers says it's not needed</a:t>
+            </a:r>
+          </a:p>
+          <a:p>
+            <a:endParaRPr lang="en-US" dirty="0">
+              <a:ea typeface="Calibri"/>
+              <a:cs typeface="Calibri"/>
+            </a:endParaRPr>
+          </a:p>
+          <a:p>
+            <a:r>
+              <a:rPr lang="en-US" dirty="0">
+                <a:ea typeface="Calibri"/>
+                <a:cs typeface="Calibri"/>
+              </a:rPr>
+              <a:t>Giveaways</a:t>
+            </a:r>
+          </a:p>
+          <a:p>
+            <a:pPr marL="171450" indent="-171450">
+              <a:buFont typeface="Calibri"/>
+              <a:buChar char="-"/>
+            </a:pPr>
+            <a:r>
+              <a:rPr lang="en-US" dirty="0">
+                <a:ea typeface="Calibri"/>
+                <a:cs typeface="Calibri"/>
+              </a:rPr>
+              <a:t>Unit tests saves can save our life and are responsible to have an expected behavior of your application over multiple deployments and changes.</a:t>
+            </a:r>
+          </a:p>
+          <a:p>
+            <a:pPr marL="171450" indent="-171450">
+              <a:buFont typeface="Calibri"/>
+              <a:buChar char="-"/>
+            </a:pPr>
+            <a:r>
+              <a:rPr lang="en-US" dirty="0">
+                <a:ea typeface="Calibri"/>
+                <a:cs typeface="Calibri"/>
+              </a:rPr>
+              <a:t>Who writes the code should not test it but leave it to another person of the team</a:t>
+            </a:r>
+          </a:p>
+          <a:p>
+            <a:pPr marL="171450" indent="-171450">
+              <a:buFont typeface="Calibri"/>
+              <a:buChar char="-"/>
+            </a:pPr>
+            <a:endParaRPr lang="en-US" dirty="0">
+              <a:ea typeface="Calibri"/>
+              <a:cs typeface="Calibri"/>
+            </a:endParaRPr>
+          </a:p>
+          <a:p>
+            <a:pPr marL="171450" indent="-171450">
+              <a:buFont typeface="Calibri"/>
+              <a:buChar char="-"/>
+            </a:pPr>
+            <a:endParaRPr lang="en-US" dirty="0">
+              <a:ea typeface="Calibri"/>
+              <a:cs typeface="Calibri"/>
+            </a:endParaRPr>
+          </a:p>
+        </p:txBody>
+      </p:sp>
+      <p:sp>
+        <p:nvSpPr>
+          <p:cNvPr id="4" name="Slide Number Placeholder 3">
+            <a:extLst>
+              <a:ext uri="{FF2B5EF4-FFF2-40B4-BE49-F238E27FC236}">
+                <a16:creationId xmlns:a16="http://schemas.microsoft.com/office/drawing/2014/main" id="{C242478F-627E-D87B-5821-E7FA3AAFEC44}"/>
+              </a:ext>
+            </a:extLst>
+          </p:cNvPr>
+          <p:cNvSpPr>
+            <a:spLocks noGrp="1"/>
+          </p:cNvSpPr>
+          <p:nvPr>
+            <p:ph type="sldNum" sz="quarter" idx="5"/>
+          </p:nvPr>
+        </p:nvSpPr>
+        <p:spPr/>
+        <p:txBody>
+          <a:bodyPr/>
+          <a:lstStyle/>
+          <a:p>
+            <a:fld id="{7EB8C794-77EE-4724-B493-2E0907BFA558}" type="slidenum">
+              <a:rPr lang="en-GB" smtClean="0"/>
+              <a:t>10</a:t>
+            </a:fld>
+            <a:endParaRPr lang="en-GB"/>
+          </a:p>
+        </p:txBody>
+      </p:sp>
+    </p:spTree>
+    <p:extLst>
+      <p:ext uri="{BB962C8B-B14F-4D97-AF65-F5344CB8AC3E}">
+        <p14:creationId xmlns:p14="http://schemas.microsoft.com/office/powerpoint/2010/main" val="2612603715"/>
+      </p:ext>
+    </p:extLst>
+  </p:cSld>
+  <p:clrMapOvr>
+    <a:masterClrMapping/>
+  </p:clrMapOvr>
+</p:notes>
+</file>
+
+<file path=ppt/notesSlides/notesSlide9.xml><?xml version="1.0" encoding="utf-8"?>
+<p:notes xmlns:a="http://schemas.openxmlformats.org/drawingml/2006/main" xmlns:r="http://schemas.openxmlformats.org/officeDocument/2006/relationships" xmlns:p="http://schemas.openxmlformats.org/presentationml/2006/main">
+  <p:cSld>
+    <p:spTree>
+      <p:nvGrpSpPr>
+        <p:cNvPr id="1" name="">
+          <a:extLst>
+            <a:ext uri="{FF2B5EF4-FFF2-40B4-BE49-F238E27FC236}">
+              <a16:creationId xmlns:a16="http://schemas.microsoft.com/office/drawing/2014/main" id="{2D45DC49-A269-D24C-E4C8-75E5BCE198F7}"/>
+            </a:ext>
+          </a:extLst>
+        </p:cNvPr>
+        <p:cNvGrpSpPr/>
+        <p:nvPr/>
+      </p:nvGrpSpPr>
+      <p:grpSpPr>
+        <a:xfrm>
+          <a:off x="0" y="0"/>
+          <a:ext cx="0" cy="0"/>
+          <a:chOff x="0" y="0"/>
+          <a:chExt cx="0" cy="0"/>
+        </a:xfrm>
+      </p:grpSpPr>
+      <p:sp>
+        <p:nvSpPr>
+          <p:cNvPr id="2" name="Slide Image Placeholder 1">
+            <a:extLst>
+              <a:ext uri="{FF2B5EF4-FFF2-40B4-BE49-F238E27FC236}">
+                <a16:creationId xmlns:a16="http://schemas.microsoft.com/office/drawing/2014/main" id="{722FAF7C-28B0-293F-58BE-68267837BDBE}"/>
+              </a:ext>
+            </a:extLst>
+          </p:cNvPr>
+          <p:cNvSpPr>
+            <a:spLocks noGrp="1" noRot="1" noChangeAspect="1"/>
+          </p:cNvSpPr>
+          <p:nvPr>
+            <p:ph type="sldImg"/>
+          </p:nvPr>
+        </p:nvSpPr>
+        <p:spPr/>
+      </p:sp>
+      <p:sp>
+        <p:nvSpPr>
+          <p:cNvPr id="3" name="Notes Placeholder 2">
+            <a:extLst>
+              <a:ext uri="{FF2B5EF4-FFF2-40B4-BE49-F238E27FC236}">
+                <a16:creationId xmlns:a16="http://schemas.microsoft.com/office/drawing/2014/main" id="{66A4D9B9-AA9D-7422-0FFE-2998DA32119B}"/>
+              </a:ext>
+            </a:extLst>
+          </p:cNvPr>
+          <p:cNvSpPr>
+            <a:spLocks noGrp="1"/>
+          </p:cNvSpPr>
+          <p:nvPr>
+            <p:ph type="body" idx="1"/>
+          </p:nvPr>
+        </p:nvSpPr>
+        <p:spPr/>
+        <p:txBody>
+          <a:bodyPr/>
+          <a:lstStyle/>
+          <a:p>
+            <a:r>
+              <a:rPr lang="en-US" dirty="0">
+                <a:ea typeface="Calibri"/>
+                <a:cs typeface="Calibri"/>
+              </a:rPr>
+              <a:t>How often do we use tests in our projects?</a:t>
+            </a:r>
+          </a:p>
+          <a:p>
+            <a:r>
+              <a:rPr lang="en-US">
+                <a:ea typeface="Calibri"/>
+                <a:cs typeface="Calibri"/>
+              </a:rPr>
+              <a:t>It depends on:</a:t>
+            </a:r>
+          </a:p>
+          <a:p>
+            <a:pPr marL="171450" indent="-171450">
+              <a:buFont typeface="Calibri"/>
+              <a:buChar char="-"/>
+            </a:pPr>
+            <a:r>
+              <a:rPr lang="en-US" dirty="0">
+                <a:ea typeface="Calibri"/>
+                <a:cs typeface="Calibri"/>
+              </a:rPr>
+              <a:t>Budget</a:t>
+            </a:r>
+          </a:p>
+          <a:p>
+            <a:pPr marL="171450" indent="-171450">
+              <a:buFont typeface="Calibri"/>
+              <a:buChar char="-"/>
+            </a:pPr>
+            <a:r>
+              <a:rPr lang="en-US" dirty="0">
+                <a:ea typeface="Calibri"/>
+                <a:cs typeface="Calibri"/>
+              </a:rPr>
+              <a:t>Timing</a:t>
+            </a:r>
+          </a:p>
+          <a:p>
+            <a:pPr marL="171450" indent="-171450">
+              <a:buFont typeface="Calibri"/>
+              <a:buChar char="-"/>
+            </a:pPr>
+            <a:r>
+              <a:rPr lang="en-US" dirty="0">
+                <a:ea typeface="Calibri"/>
+                <a:cs typeface="Calibri"/>
+              </a:rPr>
+              <a:t>Customers says it's not needed</a:t>
+            </a:r>
+          </a:p>
+          <a:p>
+            <a:endParaRPr lang="en-US" dirty="0">
+              <a:ea typeface="Calibri"/>
+              <a:cs typeface="Calibri"/>
+            </a:endParaRPr>
+          </a:p>
+          <a:p>
+            <a:r>
+              <a:rPr lang="en-US" dirty="0">
+                <a:ea typeface="Calibri"/>
+                <a:cs typeface="Calibri"/>
+              </a:rPr>
+              <a:t>Giveaways</a:t>
+            </a:r>
+          </a:p>
+          <a:p>
+            <a:pPr marL="171450" indent="-171450">
+              <a:buFont typeface="Calibri"/>
+              <a:buChar char="-"/>
+            </a:pPr>
+            <a:r>
+              <a:rPr lang="en-US" dirty="0">
+                <a:ea typeface="Calibri"/>
+                <a:cs typeface="Calibri"/>
+              </a:rPr>
+              <a:t>Unit tests saves can save our life and are responsible to have an expected behavior of your application over multiple deployments and changes.</a:t>
+            </a:r>
+          </a:p>
+          <a:p>
+            <a:pPr marL="171450" indent="-171450">
+              <a:buFont typeface="Calibri"/>
+              <a:buChar char="-"/>
+            </a:pPr>
+            <a:r>
+              <a:rPr lang="en-US" dirty="0">
+                <a:ea typeface="Calibri"/>
+                <a:cs typeface="Calibri"/>
+              </a:rPr>
+              <a:t>Who writes the code should not test it but leave it to another person of the team</a:t>
+            </a:r>
+          </a:p>
+          <a:p>
+            <a:pPr marL="171450" indent="-171450">
+              <a:buFont typeface="Calibri"/>
+              <a:buChar char="-"/>
+            </a:pPr>
+            <a:endParaRPr lang="en-US" dirty="0">
+              <a:ea typeface="Calibri"/>
+              <a:cs typeface="Calibri"/>
+            </a:endParaRPr>
+          </a:p>
+          <a:p>
+            <a:pPr marL="171450" indent="-171450">
+              <a:buFont typeface="Calibri"/>
+              <a:buChar char="-"/>
+            </a:pPr>
+            <a:endParaRPr lang="en-US" dirty="0">
+              <a:ea typeface="Calibri"/>
+              <a:cs typeface="Calibri"/>
+            </a:endParaRPr>
+          </a:p>
+        </p:txBody>
+      </p:sp>
+      <p:sp>
+        <p:nvSpPr>
+          <p:cNvPr id="4" name="Slide Number Placeholder 3">
+            <a:extLst>
+              <a:ext uri="{FF2B5EF4-FFF2-40B4-BE49-F238E27FC236}">
+                <a16:creationId xmlns:a16="http://schemas.microsoft.com/office/drawing/2014/main" id="{0D40BFFB-821F-4B9A-38C5-7DC704AF23EB}"/>
+              </a:ext>
+            </a:extLst>
+          </p:cNvPr>
+          <p:cNvSpPr>
+            <a:spLocks noGrp="1"/>
+          </p:cNvSpPr>
+          <p:nvPr>
+            <p:ph type="sldNum" sz="quarter" idx="5"/>
+          </p:nvPr>
+        </p:nvSpPr>
+        <p:spPr/>
+        <p:txBody>
+          <a:bodyPr/>
+          <a:lstStyle/>
+          <a:p>
+            <a:fld id="{7EB8C794-77EE-4724-B493-2E0907BFA558}" type="slidenum">
+              <a:rPr lang="en-GB" smtClean="0"/>
+              <a:t>11</a:t>
+            </a:fld>
+            <a:endParaRPr lang="en-GB"/>
+          </a:p>
+        </p:txBody>
+      </p:sp>
+    </p:spTree>
+    <p:extLst>
+      <p:ext uri="{BB962C8B-B14F-4D97-AF65-F5344CB8AC3E}">
+        <p14:creationId xmlns:p14="http://schemas.microsoft.com/office/powerpoint/2010/main" val="1301111360"/>
       </p:ext>
     </p:extLst>
   </p:cSld>
@@ -7165,648 +6603,6 @@
         <p:cNvPr id="1" name="">
           <a:extLst>
             <a:ext uri="{FF2B5EF4-FFF2-40B4-BE49-F238E27FC236}">
-              <a16:creationId xmlns:a16="http://schemas.microsoft.com/office/drawing/2014/main" id="{CE6AA263-EDC0-82B9-0839-92AF21ACE1CD}"/>
-            </a:ext>
-          </a:extLst>
-        </p:cNvPr>
-        <p:cNvGrpSpPr/>
-        <p:nvPr/>
-      </p:nvGrpSpPr>
-      <p:grpSpPr>
-        <a:xfrm>
-          <a:off x="0" y="0"/>
-          <a:ext cx="0" cy="0"/>
-          <a:chOff x="0" y="0"/>
-          <a:chExt cx="0" cy="0"/>
-        </a:xfrm>
-      </p:grpSpPr>
-      <p:sp>
-        <p:nvSpPr>
-          <p:cNvPr id="4" name="Text Placeholder 3">
-            <a:extLst>
-              <a:ext uri="{FF2B5EF4-FFF2-40B4-BE49-F238E27FC236}">
-                <a16:creationId xmlns:a16="http://schemas.microsoft.com/office/drawing/2014/main" id="{0CBA97D0-9053-786F-6374-AD269EB13774}"/>
-              </a:ext>
-            </a:extLst>
-          </p:cNvPr>
-          <p:cNvSpPr>
-            <a:spLocks noGrp="1"/>
-          </p:cNvSpPr>
-          <p:nvPr>
-            <p:ph type="body" sz="quarter" idx="10"/>
-          </p:nvPr>
-        </p:nvSpPr>
-        <p:spPr/>
-        <p:txBody>
-          <a:bodyPr lIns="91440" tIns="45720" rIns="91440" bIns="45720" anchor="t"/>
-          <a:lstStyle/>
-          <a:p>
-            <a:r>
-              <a:rPr lang="it-IT" dirty="0">
-                <a:latin typeface="Arial"/>
-                <a:cs typeface="Arial"/>
-              </a:rPr>
-              <a:t>e2e</a:t>
-            </a:r>
-            <a:r>
-              <a:rPr lang="en-IT" dirty="0">
-                <a:latin typeface="Arial"/>
-                <a:cs typeface="Arial"/>
-              </a:rPr>
-              <a:t> testing</a:t>
-            </a:r>
-            <a:endParaRPr lang="en-US" dirty="0"/>
-          </a:p>
-        </p:txBody>
-      </p:sp>
-      <p:sp>
-        <p:nvSpPr>
-          <p:cNvPr id="6" name="Text Placeholder 3">
-            <a:extLst>
-              <a:ext uri="{FF2B5EF4-FFF2-40B4-BE49-F238E27FC236}">
-                <a16:creationId xmlns:a16="http://schemas.microsoft.com/office/drawing/2014/main" id="{BDFF9A42-A75A-359A-8534-541E28FE0BB2}"/>
-              </a:ext>
-            </a:extLst>
-          </p:cNvPr>
-          <p:cNvSpPr txBox="1">
-            <a:spLocks/>
-          </p:cNvSpPr>
-          <p:nvPr/>
-        </p:nvSpPr>
-        <p:spPr>
-          <a:xfrm>
-            <a:off x="6209198" y="4788827"/>
-            <a:ext cx="5445392" cy="849973"/>
-          </a:xfrm>
-          <a:prstGeom prst="rect">
-            <a:avLst/>
-          </a:prstGeom>
-        </p:spPr>
-        <p:txBody>
-          <a:bodyPr lIns="91440" tIns="45720" rIns="91440" bIns="45720" anchor="t"/>
-          <a:lstStyle>
-            <a:lvl1pPr marL="0" indent="0" algn="l" defTabSz="914400" rtl="0" eaLnBrk="1" latinLnBrk="0" hangingPunct="1">
-              <a:lnSpc>
-                <a:spcPct val="90000"/>
-              </a:lnSpc>
-              <a:spcBef>
-                <a:spcPts val="1000"/>
-              </a:spcBef>
-              <a:buFont typeface="Arial"/>
-              <a:buNone/>
-              <a:defRPr sz="4800" b="1" kern="1200">
-                <a:solidFill>
-                  <a:srgbClr val="00C700"/>
-                </a:solidFill>
-                <a:latin typeface="Arial" panose="020B0604020202020204" pitchFamily="34" charset="0"/>
-                <a:ea typeface="+mn-ea"/>
-                <a:cs typeface="Arial" panose="020B0604020202020204" pitchFamily="34" charset="0"/>
-              </a:defRPr>
-            </a:lvl1pPr>
-            <a:lvl2pPr marL="685800" indent="-228600" algn="l" defTabSz="914400" rtl="0" eaLnBrk="1" latinLnBrk="0" hangingPunct="1">
-              <a:lnSpc>
-                <a:spcPct val="90000"/>
-              </a:lnSpc>
-              <a:spcBef>
-                <a:spcPts val="500"/>
-              </a:spcBef>
-              <a:buFont typeface="Arial"/>
-              <a:buChar char="•"/>
-              <a:defRPr sz="2400" kern="1200">
-                <a:solidFill>
-                  <a:srgbClr val="00E2FF"/>
-                </a:solidFill>
-                <a:latin typeface="+mn-lt"/>
-                <a:ea typeface="+mn-ea"/>
-                <a:cs typeface="+mn-cs"/>
-              </a:defRPr>
-            </a:lvl2pPr>
-            <a:lvl3pPr marL="1143000" indent="-228600" algn="l" defTabSz="914400" rtl="0" eaLnBrk="1" latinLnBrk="0" hangingPunct="1">
-              <a:lnSpc>
-                <a:spcPct val="90000"/>
-              </a:lnSpc>
-              <a:spcBef>
-                <a:spcPts val="500"/>
-              </a:spcBef>
-              <a:buFont typeface="Arial"/>
-              <a:buChar char="•"/>
-              <a:defRPr sz="2000" kern="1200">
-                <a:solidFill>
-                  <a:srgbClr val="00E2FF"/>
-                </a:solidFill>
-                <a:latin typeface="+mn-lt"/>
-                <a:ea typeface="+mn-ea"/>
-                <a:cs typeface="+mn-cs"/>
-              </a:defRPr>
-            </a:lvl3pPr>
-            <a:lvl4pPr marL="1600200" indent="-228600" algn="l" defTabSz="914400" rtl="0" eaLnBrk="1" latinLnBrk="0" hangingPunct="1">
-              <a:lnSpc>
-                <a:spcPct val="90000"/>
-              </a:lnSpc>
-              <a:spcBef>
-                <a:spcPts val="500"/>
-              </a:spcBef>
-              <a:buFont typeface="Arial"/>
-              <a:buChar char="•"/>
-              <a:defRPr sz="1800" kern="1200">
-                <a:solidFill>
-                  <a:srgbClr val="00E2FF"/>
-                </a:solidFill>
-                <a:latin typeface="+mn-lt"/>
-                <a:ea typeface="+mn-ea"/>
-                <a:cs typeface="+mn-cs"/>
-              </a:defRPr>
-            </a:lvl4pPr>
-            <a:lvl5pPr marL="2057400" indent="-228600" algn="l" defTabSz="914400" rtl="0" eaLnBrk="1" latinLnBrk="0" hangingPunct="1">
-              <a:lnSpc>
-                <a:spcPct val="90000"/>
-              </a:lnSpc>
-              <a:spcBef>
-                <a:spcPts val="500"/>
-              </a:spcBef>
-              <a:buFont typeface="Arial"/>
-              <a:buChar char="•"/>
-              <a:defRPr sz="1800" kern="1200">
-                <a:solidFill>
-                  <a:srgbClr val="00E2FF"/>
-                </a:solidFill>
-                <a:latin typeface="+mn-lt"/>
-                <a:ea typeface="+mn-ea"/>
-                <a:cs typeface="+mn-cs"/>
-              </a:defRPr>
-            </a:lvl5pPr>
-            <a:lvl6pPr marL="2514600" indent="-228600" algn="l" defTabSz="914400" rtl="0" eaLnBrk="1" latinLnBrk="0" hangingPunct="1">
-              <a:lnSpc>
-                <a:spcPct val="90000"/>
-              </a:lnSpc>
-              <a:spcBef>
-                <a:spcPts val="500"/>
-              </a:spcBef>
-              <a:buFont typeface="Arial"/>
-              <a:buChar char="•"/>
-              <a:defRPr sz="1800" kern="1200">
-                <a:solidFill>
-                  <a:schemeClr val="tx1"/>
-                </a:solidFill>
-                <a:latin typeface="+mn-lt"/>
-                <a:ea typeface="+mn-ea"/>
-                <a:cs typeface="+mn-cs"/>
-              </a:defRPr>
-            </a:lvl6pPr>
-            <a:lvl7pPr marL="2971800" indent="-228600" algn="l" defTabSz="914400" rtl="0" eaLnBrk="1" latinLnBrk="0" hangingPunct="1">
-              <a:lnSpc>
-                <a:spcPct val="90000"/>
-              </a:lnSpc>
-              <a:spcBef>
-                <a:spcPts val="500"/>
-              </a:spcBef>
-              <a:buFont typeface="Arial"/>
-              <a:buChar char="•"/>
-              <a:defRPr sz="1800" kern="1200">
-                <a:solidFill>
-                  <a:schemeClr val="tx1"/>
-                </a:solidFill>
-                <a:latin typeface="+mn-lt"/>
-                <a:ea typeface="+mn-ea"/>
-                <a:cs typeface="+mn-cs"/>
-              </a:defRPr>
-            </a:lvl7pPr>
-            <a:lvl8pPr marL="3429000" indent="-228600" algn="l" defTabSz="914400" rtl="0" eaLnBrk="1" latinLnBrk="0" hangingPunct="1">
-              <a:lnSpc>
-                <a:spcPct val="90000"/>
-              </a:lnSpc>
-              <a:spcBef>
-                <a:spcPts val="500"/>
-              </a:spcBef>
-              <a:buFont typeface="Arial"/>
-              <a:buChar char="•"/>
-              <a:defRPr sz="1800" kern="1200">
-                <a:solidFill>
-                  <a:schemeClr val="tx1"/>
-                </a:solidFill>
-                <a:latin typeface="+mn-lt"/>
-                <a:ea typeface="+mn-ea"/>
-                <a:cs typeface="+mn-cs"/>
-              </a:defRPr>
-            </a:lvl8pPr>
-            <a:lvl9pPr marL="3886200" indent="-228600" algn="l" defTabSz="914400" rtl="0" eaLnBrk="1" latinLnBrk="0" hangingPunct="1">
-              <a:lnSpc>
-                <a:spcPct val="90000"/>
-              </a:lnSpc>
-              <a:spcBef>
-                <a:spcPts val="500"/>
-              </a:spcBef>
-              <a:buFont typeface="Arial"/>
-              <a:buChar char="•"/>
-              <a:defRPr sz="1800" kern="1200">
-                <a:solidFill>
-                  <a:schemeClr val="tx1"/>
-                </a:solidFill>
-                <a:latin typeface="+mn-lt"/>
-                <a:ea typeface="+mn-ea"/>
-                <a:cs typeface="+mn-cs"/>
-              </a:defRPr>
-            </a:lvl9pPr>
-          </a:lstStyle>
-          <a:p>
-            <a:endParaRPr lang="en-US" dirty="0"/>
-          </a:p>
-        </p:txBody>
-      </p:sp>
-    </p:spTree>
-    <p:extLst>
-      <p:ext uri="{BB962C8B-B14F-4D97-AF65-F5344CB8AC3E}">
-        <p14:creationId xmlns:p14="http://schemas.microsoft.com/office/powerpoint/2010/main" val="1979839893"/>
-      </p:ext>
-    </p:extLst>
-  </p:cSld>
-  <p:clrMapOvr>
-    <a:masterClrMapping/>
-  </p:clrMapOvr>
-</p:sld>
-</file>
-
-<file path=ppt/slides/slide11.xml><?xml version="1.0" encoding="utf-8"?>
-<p:sld xmlns:a="http://schemas.openxmlformats.org/drawingml/2006/main" xmlns:r="http://schemas.openxmlformats.org/officeDocument/2006/relationships" xmlns:p="http://schemas.openxmlformats.org/presentationml/2006/main">
-  <p:cSld>
-    <p:bg>
-      <p:bgPr>
-        <a:blipFill dpi="0" rotWithShape="1">
-          <a:blip r:embed="rId3" cstate="print">
-            <a:lum/>
-            <a:extLst>
-              <a:ext uri="{28A0092B-C50C-407E-A947-70E740481C1C}">
-                <a14:useLocalDpi xmlns:a14="http://schemas.microsoft.com/office/drawing/2010/main"/>
-              </a:ext>
-            </a:extLst>
-          </a:blip>
-          <a:srcRect/>
-          <a:stretch>
-            <a:fillRect/>
-          </a:stretch>
-        </a:blipFill>
-        <a:effectLst/>
-      </p:bgPr>
-    </p:bg>
-    <p:spTree>
-      <p:nvGrpSpPr>
-        <p:cNvPr id="1" name="">
-          <a:extLst>
-            <a:ext uri="{FF2B5EF4-FFF2-40B4-BE49-F238E27FC236}">
-              <a16:creationId xmlns:a16="http://schemas.microsoft.com/office/drawing/2014/main" id="{5805A5E5-D3EC-44E9-752C-D3A5E830A955}"/>
-            </a:ext>
-          </a:extLst>
-        </p:cNvPr>
-        <p:cNvGrpSpPr/>
-        <p:nvPr/>
-      </p:nvGrpSpPr>
-      <p:grpSpPr>
-        <a:xfrm>
-          <a:off x="0" y="0"/>
-          <a:ext cx="0" cy="0"/>
-          <a:chOff x="0" y="0"/>
-          <a:chExt cx="0" cy="0"/>
-        </a:xfrm>
-      </p:grpSpPr>
-      <p:sp>
-        <p:nvSpPr>
-          <p:cNvPr id="4" name="Text Placeholder 3">
-            <a:extLst>
-              <a:ext uri="{FF2B5EF4-FFF2-40B4-BE49-F238E27FC236}">
-                <a16:creationId xmlns:a16="http://schemas.microsoft.com/office/drawing/2014/main" id="{6CE9F7C7-5705-43AF-5BDB-A32A450340BE}"/>
-              </a:ext>
-            </a:extLst>
-          </p:cNvPr>
-          <p:cNvSpPr>
-            <a:spLocks noGrp="1"/>
-          </p:cNvSpPr>
-          <p:nvPr>
-            <p:ph type="body" sz="quarter" idx="10"/>
-          </p:nvPr>
-        </p:nvSpPr>
-        <p:spPr/>
-        <p:txBody>
-          <a:bodyPr lIns="91440" tIns="45720" rIns="91440" bIns="45720" anchor="t"/>
-          <a:lstStyle/>
-          <a:p>
-            <a:r>
-              <a:rPr lang="it-IT" dirty="0">
-                <a:latin typeface="Arial"/>
-                <a:cs typeface="Arial"/>
-              </a:rPr>
-              <a:t>e2e</a:t>
-            </a:r>
-            <a:r>
-              <a:rPr lang="en-IT" dirty="0">
-                <a:latin typeface="Arial"/>
-                <a:cs typeface="Arial"/>
-              </a:rPr>
-              <a:t> testing</a:t>
-            </a:r>
-            <a:endParaRPr lang="en-US" dirty="0"/>
-          </a:p>
-        </p:txBody>
-      </p:sp>
-      <p:sp>
-        <p:nvSpPr>
-          <p:cNvPr id="6" name="Text Placeholder 3">
-            <a:extLst>
-              <a:ext uri="{FF2B5EF4-FFF2-40B4-BE49-F238E27FC236}">
-                <a16:creationId xmlns:a16="http://schemas.microsoft.com/office/drawing/2014/main" id="{74ABDC1B-4C09-B487-189D-2D3D6D1551D4}"/>
-              </a:ext>
-            </a:extLst>
-          </p:cNvPr>
-          <p:cNvSpPr txBox="1">
-            <a:spLocks/>
-          </p:cNvSpPr>
-          <p:nvPr/>
-        </p:nvSpPr>
-        <p:spPr>
-          <a:xfrm>
-            <a:off x="6209198" y="4788827"/>
-            <a:ext cx="5445392" cy="849973"/>
-          </a:xfrm>
-          <a:prstGeom prst="rect">
-            <a:avLst/>
-          </a:prstGeom>
-        </p:spPr>
-        <p:txBody>
-          <a:bodyPr lIns="91440" tIns="45720" rIns="91440" bIns="45720" anchor="t"/>
-          <a:lstStyle>
-            <a:lvl1pPr marL="0" indent="0" algn="l" defTabSz="914400" rtl="0" eaLnBrk="1" latinLnBrk="0" hangingPunct="1">
-              <a:lnSpc>
-                <a:spcPct val="90000"/>
-              </a:lnSpc>
-              <a:spcBef>
-                <a:spcPts val="1000"/>
-              </a:spcBef>
-              <a:buFont typeface="Arial"/>
-              <a:buNone/>
-              <a:defRPr sz="4800" b="1" kern="1200">
-                <a:solidFill>
-                  <a:srgbClr val="00C700"/>
-                </a:solidFill>
-                <a:latin typeface="Arial" panose="020B0604020202020204" pitchFamily="34" charset="0"/>
-                <a:ea typeface="+mn-ea"/>
-                <a:cs typeface="Arial" panose="020B0604020202020204" pitchFamily="34" charset="0"/>
-              </a:defRPr>
-            </a:lvl1pPr>
-            <a:lvl2pPr marL="685800" indent="-228600" algn="l" defTabSz="914400" rtl="0" eaLnBrk="1" latinLnBrk="0" hangingPunct="1">
-              <a:lnSpc>
-                <a:spcPct val="90000"/>
-              </a:lnSpc>
-              <a:spcBef>
-                <a:spcPts val="500"/>
-              </a:spcBef>
-              <a:buFont typeface="Arial"/>
-              <a:buChar char="•"/>
-              <a:defRPr sz="2400" kern="1200">
-                <a:solidFill>
-                  <a:srgbClr val="00E2FF"/>
-                </a:solidFill>
-                <a:latin typeface="+mn-lt"/>
-                <a:ea typeface="+mn-ea"/>
-                <a:cs typeface="+mn-cs"/>
-              </a:defRPr>
-            </a:lvl2pPr>
-            <a:lvl3pPr marL="1143000" indent="-228600" algn="l" defTabSz="914400" rtl="0" eaLnBrk="1" latinLnBrk="0" hangingPunct="1">
-              <a:lnSpc>
-                <a:spcPct val="90000"/>
-              </a:lnSpc>
-              <a:spcBef>
-                <a:spcPts val="500"/>
-              </a:spcBef>
-              <a:buFont typeface="Arial"/>
-              <a:buChar char="•"/>
-              <a:defRPr sz="2000" kern="1200">
-                <a:solidFill>
-                  <a:srgbClr val="00E2FF"/>
-                </a:solidFill>
-                <a:latin typeface="+mn-lt"/>
-                <a:ea typeface="+mn-ea"/>
-                <a:cs typeface="+mn-cs"/>
-              </a:defRPr>
-            </a:lvl3pPr>
-            <a:lvl4pPr marL="1600200" indent="-228600" algn="l" defTabSz="914400" rtl="0" eaLnBrk="1" latinLnBrk="0" hangingPunct="1">
-              <a:lnSpc>
-                <a:spcPct val="90000"/>
-              </a:lnSpc>
-              <a:spcBef>
-                <a:spcPts val="500"/>
-              </a:spcBef>
-              <a:buFont typeface="Arial"/>
-              <a:buChar char="•"/>
-              <a:defRPr sz="1800" kern="1200">
-                <a:solidFill>
-                  <a:srgbClr val="00E2FF"/>
-                </a:solidFill>
-                <a:latin typeface="+mn-lt"/>
-                <a:ea typeface="+mn-ea"/>
-                <a:cs typeface="+mn-cs"/>
-              </a:defRPr>
-            </a:lvl4pPr>
-            <a:lvl5pPr marL="2057400" indent="-228600" algn="l" defTabSz="914400" rtl="0" eaLnBrk="1" latinLnBrk="0" hangingPunct="1">
-              <a:lnSpc>
-                <a:spcPct val="90000"/>
-              </a:lnSpc>
-              <a:spcBef>
-                <a:spcPts val="500"/>
-              </a:spcBef>
-              <a:buFont typeface="Arial"/>
-              <a:buChar char="•"/>
-              <a:defRPr sz="1800" kern="1200">
-                <a:solidFill>
-                  <a:srgbClr val="00E2FF"/>
-                </a:solidFill>
-                <a:latin typeface="+mn-lt"/>
-                <a:ea typeface="+mn-ea"/>
-                <a:cs typeface="+mn-cs"/>
-              </a:defRPr>
-            </a:lvl5pPr>
-            <a:lvl6pPr marL="2514600" indent="-228600" algn="l" defTabSz="914400" rtl="0" eaLnBrk="1" latinLnBrk="0" hangingPunct="1">
-              <a:lnSpc>
-                <a:spcPct val="90000"/>
-              </a:lnSpc>
-              <a:spcBef>
-                <a:spcPts val="500"/>
-              </a:spcBef>
-              <a:buFont typeface="Arial"/>
-              <a:buChar char="•"/>
-              <a:defRPr sz="1800" kern="1200">
-                <a:solidFill>
-                  <a:schemeClr val="tx1"/>
-                </a:solidFill>
-                <a:latin typeface="+mn-lt"/>
-                <a:ea typeface="+mn-ea"/>
-                <a:cs typeface="+mn-cs"/>
-              </a:defRPr>
-            </a:lvl6pPr>
-            <a:lvl7pPr marL="2971800" indent="-228600" algn="l" defTabSz="914400" rtl="0" eaLnBrk="1" latinLnBrk="0" hangingPunct="1">
-              <a:lnSpc>
-                <a:spcPct val="90000"/>
-              </a:lnSpc>
-              <a:spcBef>
-                <a:spcPts val="500"/>
-              </a:spcBef>
-              <a:buFont typeface="Arial"/>
-              <a:buChar char="•"/>
-              <a:defRPr sz="1800" kern="1200">
-                <a:solidFill>
-                  <a:schemeClr val="tx1"/>
-                </a:solidFill>
-                <a:latin typeface="+mn-lt"/>
-                <a:ea typeface="+mn-ea"/>
-                <a:cs typeface="+mn-cs"/>
-              </a:defRPr>
-            </a:lvl7pPr>
-            <a:lvl8pPr marL="3429000" indent="-228600" algn="l" defTabSz="914400" rtl="0" eaLnBrk="1" latinLnBrk="0" hangingPunct="1">
-              <a:lnSpc>
-                <a:spcPct val="90000"/>
-              </a:lnSpc>
-              <a:spcBef>
-                <a:spcPts val="500"/>
-              </a:spcBef>
-              <a:buFont typeface="Arial"/>
-              <a:buChar char="•"/>
-              <a:defRPr sz="1800" kern="1200">
-                <a:solidFill>
-                  <a:schemeClr val="tx1"/>
-                </a:solidFill>
-                <a:latin typeface="+mn-lt"/>
-                <a:ea typeface="+mn-ea"/>
-                <a:cs typeface="+mn-cs"/>
-              </a:defRPr>
-            </a:lvl8pPr>
-            <a:lvl9pPr marL="3886200" indent="-228600" algn="l" defTabSz="914400" rtl="0" eaLnBrk="1" latinLnBrk="0" hangingPunct="1">
-              <a:lnSpc>
-                <a:spcPct val="90000"/>
-              </a:lnSpc>
-              <a:spcBef>
-                <a:spcPts val="500"/>
-              </a:spcBef>
-              <a:buFont typeface="Arial"/>
-              <a:buChar char="•"/>
-              <a:defRPr sz="1800" kern="1200">
-                <a:solidFill>
-                  <a:schemeClr val="tx1"/>
-                </a:solidFill>
-                <a:latin typeface="+mn-lt"/>
-                <a:ea typeface="+mn-ea"/>
-                <a:cs typeface="+mn-cs"/>
-              </a:defRPr>
-            </a:lvl9pPr>
-          </a:lstStyle>
-          <a:p>
-            <a:endParaRPr lang="en-US" dirty="0"/>
-          </a:p>
-        </p:txBody>
-      </p:sp>
-      <mc:AlternateContent xmlns:mc="http://schemas.openxmlformats.org/markup-compatibility/2006">
-        <mc:Choice xmlns:we="http://schemas.microsoft.com/office/webextensions/webextension/2010/11" xmlns:pca="http://schemas.microsoft.com/office/powerpoint/2013/contentapp" Requires="we pca">
-          <p:graphicFrame>
-            <p:nvGraphicFramePr>
-              <p:cNvPr id="2" name="Add-in 1">
-                <a:extLst>
-                  <a:ext uri="{FF2B5EF4-FFF2-40B4-BE49-F238E27FC236}">
-                    <a16:creationId xmlns:a16="http://schemas.microsoft.com/office/drawing/2014/main" id="{F1F174B0-FE5B-3090-4CDC-8A9DB0BA3B3A}"/>
-                  </a:ext>
-                </a:extLst>
-              </p:cNvPr>
-              <p:cNvGraphicFramePr>
-                <a:graphicFrameLocks noGrp="1"/>
-              </p:cNvGraphicFramePr>
-              <p:nvPr>
-                <p:extLst>
-                  <p:ext uri="{D42A27DB-BD31-4B8C-83A1-F6EECF244321}">
-                    <p14:modId xmlns:p14="http://schemas.microsoft.com/office/powerpoint/2010/main" val="1843969257"/>
-                  </p:ext>
-                </p:extLst>
-              </p:nvPr>
-            </p:nvGraphicFramePr>
-            <p:xfrm>
-              <a:off x="12687300" y="274864"/>
-              <a:ext cx="4686300" cy="5614308"/>
-            </p:xfrm>
-            <a:graphic>
-              <a:graphicData uri="http://schemas.microsoft.com/office/webextensions/webextension/2010/11">
-                <we:webextensionref xmlns:we="http://schemas.microsoft.com/office/webextensions/webextension/2010/11" xmlns:r="http://schemas.openxmlformats.org/officeDocument/2006/relationships" r:id="rId4"/>
-              </a:graphicData>
-            </a:graphic>
-          </p:graphicFrame>
-        </mc:Choice>
-        <mc:Fallback>
-          <p:pic>
-            <p:nvPicPr>
-              <p:cNvPr id="2" name="Add-in 1">
-                <a:extLst>
-                  <a:ext uri="{FF2B5EF4-FFF2-40B4-BE49-F238E27FC236}">
-                    <a16:creationId xmlns:a16="http://schemas.microsoft.com/office/drawing/2014/main" id="{F1F174B0-FE5B-3090-4CDC-8A9DB0BA3B3A}"/>
-                  </a:ext>
-                </a:extLst>
-              </p:cNvPr>
-              <p:cNvPicPr>
-                <a:picLocks noGrp="1" noRot="1" noChangeAspect="1" noMove="1" noResize="1" noEditPoints="1" noAdjustHandles="1" noChangeArrowheads="1" noChangeShapeType="1"/>
-              </p:cNvPicPr>
-              <p:nvPr/>
-            </p:nvPicPr>
-            <p:blipFill>
-              <a:blip r:embed="rId5"/>
-              <a:stretch>
-                <a:fillRect/>
-              </a:stretch>
-            </p:blipFill>
-            <p:spPr>
-              <a:xfrm>
-                <a:off x="12687300" y="274864"/>
-                <a:ext cx="4686300" cy="5614308"/>
-              </a:xfrm>
-              <a:prstGeom prst="rect">
-                <a:avLst/>
-              </a:prstGeom>
-            </p:spPr>
-          </p:pic>
-        </mc:Fallback>
-      </mc:AlternateContent>
-    </p:spTree>
-    <p:extLst>
-      <p:ext uri="{BB962C8B-B14F-4D97-AF65-F5344CB8AC3E}">
-        <p14:creationId xmlns:p14="http://schemas.microsoft.com/office/powerpoint/2010/main" val="1232860560"/>
-      </p:ext>
-    </p:extLst>
-  </p:cSld>
-  <p:clrMapOvr>
-    <a:masterClrMapping/>
-  </p:clrMapOvr>
-</p:sld>
-</file>
-
-<file path=ppt/slides/slide12.xml><?xml version="1.0" encoding="utf-8"?>
-<p:sld xmlns:a="http://schemas.openxmlformats.org/drawingml/2006/main" xmlns:r="http://schemas.openxmlformats.org/officeDocument/2006/relationships" xmlns:p="http://schemas.openxmlformats.org/presentationml/2006/main">
-  <p:cSld>
-    <p:bg>
-      <p:bgPr>
-        <a:blipFill dpi="0" rotWithShape="1">
-          <a:blip r:embed="rId3" cstate="print">
-            <a:lum/>
-            <a:extLst>
-              <a:ext uri="{28A0092B-C50C-407E-A947-70E740481C1C}">
-                <a14:useLocalDpi xmlns:a14="http://schemas.microsoft.com/office/drawing/2010/main"/>
-              </a:ext>
-            </a:extLst>
-          </a:blip>
-          <a:srcRect/>
-          <a:stretch>
-            <a:fillRect/>
-          </a:stretch>
-        </a:blipFill>
-        <a:effectLst/>
-      </p:bgPr>
-    </p:bg>
-    <p:spTree>
-      <p:nvGrpSpPr>
-        <p:cNvPr id="1" name="">
-          <a:extLst>
-            <a:ext uri="{FF2B5EF4-FFF2-40B4-BE49-F238E27FC236}">
               <a16:creationId xmlns:a16="http://schemas.microsoft.com/office/drawing/2014/main" id="{C725CA65-1D1C-35F6-4B69-B4B4CDBAD361}"/>
             </a:ext>
           </a:extLst>
@@ -8048,99 +6844,12 @@
           </a:p>
         </p:txBody>
       </p:sp>
-    </p:spTree>
-    <p:extLst>
-      <p:ext uri="{BB962C8B-B14F-4D97-AF65-F5344CB8AC3E}">
-        <p14:creationId xmlns:p14="http://schemas.microsoft.com/office/powerpoint/2010/main" val="1791411079"/>
-      </p:ext>
-    </p:extLst>
-  </p:cSld>
-  <p:clrMapOvr>
-    <a:masterClrMapping/>
-  </p:clrMapOvr>
-</p:sld>
-</file>
-
-<file path=ppt/slides/slide13.xml><?xml version="1.0" encoding="utf-8"?>
-<p:sld xmlns:a="http://schemas.openxmlformats.org/drawingml/2006/main" xmlns:r="http://schemas.openxmlformats.org/officeDocument/2006/relationships" xmlns:p="http://schemas.openxmlformats.org/presentationml/2006/main">
-  <p:cSld>
-    <p:bg>
-      <p:bgPr>
-        <a:blipFill dpi="0" rotWithShape="1">
-          <a:blip r:embed="rId3" cstate="print">
-            <a:lum/>
-            <a:extLst>
-              <a:ext uri="{28A0092B-C50C-407E-A947-70E740481C1C}">
-                <a14:useLocalDpi xmlns:a14="http://schemas.microsoft.com/office/drawing/2010/main"/>
-              </a:ext>
-            </a:extLst>
-          </a:blip>
-          <a:srcRect/>
-          <a:stretch>
-            <a:fillRect/>
-          </a:stretch>
-        </a:blipFill>
-        <a:effectLst/>
-      </p:bgPr>
-    </p:bg>
-    <p:spTree>
-      <p:nvGrpSpPr>
-        <p:cNvPr id="1" name="">
-          <a:extLst>
-            <a:ext uri="{FF2B5EF4-FFF2-40B4-BE49-F238E27FC236}">
-              <a16:creationId xmlns:a16="http://schemas.microsoft.com/office/drawing/2014/main" id="{54E3EB38-EB15-1947-3FD2-BBBE7CBE43C1}"/>
-            </a:ext>
-          </a:extLst>
-        </p:cNvPr>
-        <p:cNvGrpSpPr/>
-        <p:nvPr/>
-      </p:nvGrpSpPr>
-      <p:grpSpPr>
-        <a:xfrm>
-          <a:off x="0" y="0"/>
-          <a:ext cx="0" cy="0"/>
-          <a:chOff x="0" y="0"/>
-          <a:chExt cx="0" cy="0"/>
-        </a:xfrm>
-      </p:grpSpPr>
       <p:sp>
         <p:nvSpPr>
-          <p:cNvPr id="4" name="Text Placeholder 3">
+          <p:cNvPr id="2" name="Text Placeholder 3">
             <a:extLst>
               <a:ext uri="{FF2B5EF4-FFF2-40B4-BE49-F238E27FC236}">
-                <a16:creationId xmlns:a16="http://schemas.microsoft.com/office/drawing/2014/main" id="{AEDCE888-A35E-7E8E-12A7-28D5C06ADD16}"/>
-              </a:ext>
-            </a:extLst>
-          </p:cNvPr>
-          <p:cNvSpPr>
-            <a:spLocks noGrp="1"/>
-          </p:cNvSpPr>
-          <p:nvPr>
-            <p:ph type="body" sz="quarter" idx="10"/>
-          </p:nvPr>
-        </p:nvSpPr>
-        <p:spPr/>
-        <p:txBody>
-          <a:bodyPr lIns="91440" tIns="45720" rIns="91440" bIns="45720" anchor="t"/>
-          <a:lstStyle/>
-          <a:p>
-            <a:r>
-              <a:rPr lang="it-IT" dirty="0">
-                <a:latin typeface="Arial"/>
-                <a:cs typeface="Arial"/>
-              </a:rPr>
-              <a:t>GitHub actions</a:t>
-            </a:r>
-            <a:endParaRPr lang="en-US" dirty="0"/>
-          </a:p>
-        </p:txBody>
-      </p:sp>
-      <p:sp>
-        <p:nvSpPr>
-          <p:cNvPr id="6" name="Text Placeholder 3">
-            <a:extLst>
-              <a:ext uri="{FF2B5EF4-FFF2-40B4-BE49-F238E27FC236}">
-                <a16:creationId xmlns:a16="http://schemas.microsoft.com/office/drawing/2014/main" id="{025F3150-E0E8-6FA0-B677-61DBBCC27F13}"/>
+                <a16:creationId xmlns:a16="http://schemas.microsoft.com/office/drawing/2014/main" id="{8B8C9911-1E1C-2726-C60C-26A1C8978B2B}"/>
               </a:ext>
             </a:extLst>
           </p:cNvPr>
@@ -8151,7 +6860,7 @@
         </p:nvSpPr>
         <p:spPr>
           <a:xfrm>
-            <a:off x="6209198" y="4788827"/>
+            <a:off x="6361598" y="4941227"/>
             <a:ext cx="5445392" cy="849973"/>
           </a:xfrm>
           <a:prstGeom prst="rect">
@@ -8325,80 +7034,21 @@
             </a:lvl9pPr>
           </a:lstStyle>
           <a:p>
+            <a:r>
+              <a:rPr lang="en-IT" dirty="0">
+                <a:latin typeface="Arial"/>
+                <a:cs typeface="Arial"/>
+              </a:rPr>
+              <a:t>Yes, it's a demo</a:t>
+            </a:r>
             <a:endParaRPr lang="en-US" dirty="0"/>
           </a:p>
         </p:txBody>
       </p:sp>
-      <mc:AlternateContent xmlns:mc="http://schemas.openxmlformats.org/markup-compatibility/2006">
-        <mc:Choice xmlns:we="http://schemas.microsoft.com/office/webextensions/webextension/2010/11" xmlns:pca="http://schemas.microsoft.com/office/powerpoint/2013/contentapp" Requires="we pca">
-          <p:graphicFrame>
-            <p:nvGraphicFramePr>
-              <p:cNvPr id="2" name="Add-in 1">
-                <a:extLst>
-                  <a:ext uri="{FF2B5EF4-FFF2-40B4-BE49-F238E27FC236}">
-                    <a16:creationId xmlns:a16="http://schemas.microsoft.com/office/drawing/2014/main" id="{259E4729-93C9-3900-6DC4-27254095C5F2}"/>
-                  </a:ext>
-                </a:extLst>
-              </p:cNvPr>
-              <p:cNvGraphicFramePr>
-                <a:graphicFrameLocks noGrp="1"/>
-              </p:cNvGraphicFramePr>
-              <p:nvPr>
-                <p:extLst>
-                  <p:ext uri="{D42A27DB-BD31-4B8C-83A1-F6EECF244321}">
-                    <p14:modId xmlns:p14="http://schemas.microsoft.com/office/powerpoint/2010/main" val="3168493422"/>
-                  </p:ext>
-                </p:extLst>
-              </p:nvPr>
-            </p:nvGraphicFramePr>
-            <p:xfrm>
-              <a:off x="12710160" y="510538"/>
-              <a:ext cx="4743450" cy="5455921"/>
-            </p:xfrm>
-            <a:graphic>
-              <a:graphicData uri="http://schemas.microsoft.com/office/webextensions/webextension/2010/11">
-                <we:webextensionref xmlns:we="http://schemas.microsoft.com/office/webextensions/webextension/2010/11" xmlns:r="http://schemas.openxmlformats.org/officeDocument/2006/relationships" r:id="rId4"/>
-              </a:graphicData>
-            </a:graphic>
-          </p:graphicFrame>
-        </mc:Choice>
-        <mc:Fallback>
-          <p:pic>
-            <p:nvPicPr>
-              <p:cNvPr id="2" name="Add-in 1">
-                <a:extLst>
-                  <a:ext uri="{FF2B5EF4-FFF2-40B4-BE49-F238E27FC236}">
-                    <a16:creationId xmlns:a16="http://schemas.microsoft.com/office/drawing/2014/main" id="{259E4729-93C9-3900-6DC4-27254095C5F2}"/>
-                  </a:ext>
-                </a:extLst>
-              </p:cNvPr>
-              <p:cNvPicPr>
-                <a:picLocks noGrp="1" noRot="1" noChangeAspect="1" noMove="1" noResize="1" noEditPoints="1" noAdjustHandles="1" noChangeArrowheads="1" noChangeShapeType="1"/>
-              </p:cNvPicPr>
-              <p:nvPr/>
-            </p:nvPicPr>
-            <p:blipFill>
-              <a:blip r:embed="rId5"/>
-              <a:stretch>
-                <a:fillRect/>
-              </a:stretch>
-            </p:blipFill>
-            <p:spPr>
-              <a:xfrm>
-                <a:off x="12710160" y="510538"/>
-                <a:ext cx="4743450" cy="5455921"/>
-              </a:xfrm>
-              <a:prstGeom prst="rect">
-                <a:avLst/>
-              </a:prstGeom>
-            </p:spPr>
-          </p:pic>
-        </mc:Fallback>
-      </mc:AlternateContent>
     </p:spTree>
     <p:extLst>
       <p:ext uri="{BB962C8B-B14F-4D97-AF65-F5344CB8AC3E}">
-        <p14:creationId xmlns:p14="http://schemas.microsoft.com/office/powerpoint/2010/main" val="2712857754"/>
+        <p14:creationId xmlns:p14="http://schemas.microsoft.com/office/powerpoint/2010/main" val="1791411079"/>
       </p:ext>
     </p:extLst>
   </p:cSld>
@@ -8408,7 +7058,7 @@
 </p:sld>
 </file>
 
-<file path=ppt/slides/slide14.xml><?xml version="1.0" encoding="utf-8"?>
+<file path=ppt/slides/slide11.xml><?xml version="1.0" encoding="utf-8"?>
 <p:sld xmlns:a="http://schemas.openxmlformats.org/drawingml/2006/main" xmlns:r="http://schemas.openxmlformats.org/officeDocument/2006/relationships" xmlns:p="http://schemas.openxmlformats.org/presentationml/2006/main">
   <p:cSld>
     <p:bg>
@@ -8711,134 +7361,12 @@
           </a:p>
         </p:txBody>
       </p:sp>
-    </p:spTree>
-    <p:extLst>
-      <p:ext uri="{BB962C8B-B14F-4D97-AF65-F5344CB8AC3E}">
-        <p14:creationId xmlns:p14="http://schemas.microsoft.com/office/powerpoint/2010/main" val="3241895489"/>
-      </p:ext>
-    </p:extLst>
-  </p:cSld>
-  <p:clrMapOvr>
-    <a:masterClrMapping/>
-  </p:clrMapOvr>
-</p:sld>
-</file>
-
-<file path=ppt/slides/slide15.xml><?xml version="1.0" encoding="utf-8"?>
-<p:sld xmlns:a="http://schemas.openxmlformats.org/drawingml/2006/main" xmlns:r="http://schemas.openxmlformats.org/officeDocument/2006/relationships" xmlns:p="http://schemas.openxmlformats.org/presentationml/2006/main">
-  <p:cSld>
-    <p:bg>
-      <p:bgPr>
-        <a:blipFill dpi="0" rotWithShape="1">
-          <a:blip r:embed="rId3" cstate="print">
-            <a:lum/>
-            <a:extLst>
-              <a:ext uri="{28A0092B-C50C-407E-A947-70E740481C1C}">
-                <a14:useLocalDpi xmlns:a14="http://schemas.microsoft.com/office/drawing/2010/main"/>
-              </a:ext>
-            </a:extLst>
-          </a:blip>
-          <a:srcRect/>
-          <a:stretch>
-            <a:fillRect/>
-          </a:stretch>
-        </a:blipFill>
-        <a:effectLst/>
-      </p:bgPr>
-    </p:bg>
-    <p:spTree>
-      <p:nvGrpSpPr>
-        <p:cNvPr id="1" name="">
-          <a:extLst>
-            <a:ext uri="{FF2B5EF4-FFF2-40B4-BE49-F238E27FC236}">
-              <a16:creationId xmlns:a16="http://schemas.microsoft.com/office/drawing/2014/main" id="{13D8953E-EC56-1897-AF75-B211BE81F7C4}"/>
-            </a:ext>
-          </a:extLst>
-        </p:cNvPr>
-        <p:cNvGrpSpPr/>
-        <p:nvPr/>
-      </p:nvGrpSpPr>
-      <p:grpSpPr>
-        <a:xfrm>
-          <a:off x="0" y="0"/>
-          <a:ext cx="0" cy="0"/>
-          <a:chOff x="0" y="0"/>
-          <a:chExt cx="0" cy="0"/>
-        </a:xfrm>
-      </p:grpSpPr>
       <p:sp>
         <p:nvSpPr>
-          <p:cNvPr id="4" name="Text Placeholder 3">
+          <p:cNvPr id="2" name="Text Placeholder 3">
             <a:extLst>
               <a:ext uri="{FF2B5EF4-FFF2-40B4-BE49-F238E27FC236}">
-                <a16:creationId xmlns:a16="http://schemas.microsoft.com/office/drawing/2014/main" id="{D0178AF1-A378-3016-8683-09203D567CC4}"/>
-              </a:ext>
-            </a:extLst>
-          </p:cNvPr>
-          <p:cNvSpPr>
-            <a:spLocks noGrp="1"/>
-          </p:cNvSpPr>
-          <p:nvPr>
-            <p:ph type="body" sz="quarter" idx="10"/>
-          </p:nvPr>
-        </p:nvSpPr>
-        <p:spPr/>
-        <p:txBody>
-          <a:bodyPr lIns="91440" tIns="45720" rIns="91440" bIns="45720" anchor="t"/>
-          <a:lstStyle/>
-          <a:p>
-            <a:r>
-              <a:rPr lang="it-IT" dirty="0" err="1">
-                <a:latin typeface="Arial"/>
-                <a:cs typeface="Arial"/>
-              </a:rPr>
-              <a:t>Now</a:t>
-            </a:r>
-            <a:r>
-              <a:rPr lang="it-IT" dirty="0">
-                <a:latin typeface="Arial"/>
-                <a:cs typeface="Arial"/>
-              </a:rPr>
-              <a:t>, </a:t>
-            </a:r>
-            <a:r>
-              <a:rPr lang="it-IT" dirty="0" err="1">
-                <a:latin typeface="Arial"/>
-                <a:cs typeface="Arial"/>
-              </a:rPr>
-              <a:t>let’s</a:t>
-            </a:r>
-            <a:r>
-              <a:rPr lang="it-IT" dirty="0">
-                <a:latin typeface="Arial"/>
-                <a:cs typeface="Arial"/>
-              </a:rPr>
-              <a:t> make a </a:t>
-            </a:r>
-            <a:r>
-              <a:rPr lang="it-IT" dirty="0" err="1">
-                <a:latin typeface="Arial"/>
-                <a:cs typeface="Arial"/>
-              </a:rPr>
-              <a:t>change</a:t>
-            </a:r>
-            <a:r>
-              <a:rPr lang="it-IT" dirty="0">
-                <a:latin typeface="Arial"/>
-                <a:cs typeface="Arial"/>
-              </a:rPr>
-              <a:t>!</a:t>
-            </a:r>
-            <a:endParaRPr lang="en-US" dirty="0"/>
-          </a:p>
-        </p:txBody>
-      </p:sp>
-      <p:sp>
-        <p:nvSpPr>
-          <p:cNvPr id="6" name="Text Placeholder 3">
-            <a:extLst>
-              <a:ext uri="{FF2B5EF4-FFF2-40B4-BE49-F238E27FC236}">
-                <a16:creationId xmlns:a16="http://schemas.microsoft.com/office/drawing/2014/main" id="{3F330FA4-E096-0D3F-B79D-319B49698834}"/>
+                <a16:creationId xmlns:a16="http://schemas.microsoft.com/office/drawing/2014/main" id="{3A78386B-8BE4-FA7F-8A45-0993259E0E50}"/>
               </a:ext>
             </a:extLst>
           </p:cNvPr>
@@ -8849,7 +7377,7 @@
         </p:nvSpPr>
         <p:spPr>
           <a:xfrm>
-            <a:off x="6209198" y="4788827"/>
+            <a:off x="6361598" y="4941227"/>
             <a:ext cx="5445392" cy="849973"/>
           </a:xfrm>
           <a:prstGeom prst="rect">
@@ -9023,80 +7551,21 @@
             </a:lvl9pPr>
           </a:lstStyle>
           <a:p>
+            <a:r>
+              <a:rPr lang="en-IT" dirty="0">
+                <a:latin typeface="Arial"/>
+                <a:cs typeface="Arial"/>
+              </a:rPr>
+              <a:t>Yes, it's a demo</a:t>
+            </a:r>
             <a:endParaRPr lang="en-US" dirty="0"/>
           </a:p>
         </p:txBody>
       </p:sp>
-      <mc:AlternateContent xmlns:mc="http://schemas.openxmlformats.org/markup-compatibility/2006">
-        <mc:Choice xmlns:we="http://schemas.microsoft.com/office/webextensions/webextension/2010/11" xmlns:pca="http://schemas.microsoft.com/office/powerpoint/2013/contentapp" Requires="we pca">
-          <p:graphicFrame>
-            <p:nvGraphicFramePr>
-              <p:cNvPr id="2" name="Add-in 1">
-                <a:extLst>
-                  <a:ext uri="{FF2B5EF4-FFF2-40B4-BE49-F238E27FC236}">
-                    <a16:creationId xmlns:a16="http://schemas.microsoft.com/office/drawing/2014/main" id="{F10467F8-A133-FB87-24FB-0D850252A188}"/>
-                  </a:ext>
-                </a:extLst>
-              </p:cNvPr>
-              <p:cNvGraphicFramePr>
-                <a:graphicFrameLocks noGrp="1"/>
-              </p:cNvGraphicFramePr>
-              <p:nvPr>
-                <p:extLst>
-                  <p:ext uri="{D42A27DB-BD31-4B8C-83A1-F6EECF244321}">
-                    <p14:modId xmlns:p14="http://schemas.microsoft.com/office/powerpoint/2010/main" val="2470749793"/>
-                  </p:ext>
-                </p:extLst>
-              </p:nvPr>
-            </p:nvGraphicFramePr>
-            <p:xfrm>
-              <a:off x="12755880" y="590548"/>
-              <a:ext cx="5577840" cy="5330191"/>
-            </p:xfrm>
-            <a:graphic>
-              <a:graphicData uri="http://schemas.microsoft.com/office/webextensions/webextension/2010/11">
-                <we:webextensionref xmlns:we="http://schemas.microsoft.com/office/webextensions/webextension/2010/11" xmlns:r="http://schemas.openxmlformats.org/officeDocument/2006/relationships" r:id="rId4"/>
-              </a:graphicData>
-            </a:graphic>
-          </p:graphicFrame>
-        </mc:Choice>
-        <mc:Fallback>
-          <p:pic>
-            <p:nvPicPr>
-              <p:cNvPr id="2" name="Add-in 1">
-                <a:extLst>
-                  <a:ext uri="{FF2B5EF4-FFF2-40B4-BE49-F238E27FC236}">
-                    <a16:creationId xmlns:a16="http://schemas.microsoft.com/office/drawing/2014/main" id="{F10467F8-A133-FB87-24FB-0D850252A188}"/>
-                  </a:ext>
-                </a:extLst>
-              </p:cNvPr>
-              <p:cNvPicPr>
-                <a:picLocks noGrp="1" noRot="1" noChangeAspect="1" noMove="1" noResize="1" noEditPoints="1" noAdjustHandles="1" noChangeArrowheads="1" noChangeShapeType="1"/>
-              </p:cNvPicPr>
-              <p:nvPr/>
-            </p:nvPicPr>
-            <p:blipFill>
-              <a:blip r:embed="rId5"/>
-              <a:stretch>
-                <a:fillRect/>
-              </a:stretch>
-            </p:blipFill>
-            <p:spPr>
-              <a:xfrm>
-                <a:off x="12755880" y="590548"/>
-                <a:ext cx="5577840" cy="5330191"/>
-              </a:xfrm>
-              <a:prstGeom prst="rect">
-                <a:avLst/>
-              </a:prstGeom>
-            </p:spPr>
-          </p:pic>
-        </mc:Fallback>
-      </mc:AlternateContent>
     </p:spTree>
     <p:extLst>
       <p:ext uri="{BB962C8B-B14F-4D97-AF65-F5344CB8AC3E}">
-        <p14:creationId xmlns:p14="http://schemas.microsoft.com/office/powerpoint/2010/main" val="1744574347"/>
+        <p14:creationId xmlns:p14="http://schemas.microsoft.com/office/powerpoint/2010/main" val="3241895489"/>
       </p:ext>
     </p:extLst>
   </p:cSld>
@@ -9106,7 +7575,7 @@
 </p:sld>
 </file>
 
-<file path=ppt/slides/slide16.xml><?xml version="1.0" encoding="utf-8"?>
+<file path=ppt/slides/slide12.xml><?xml version="1.0" encoding="utf-8"?>
 <p:sld xmlns:a="http://schemas.openxmlformats.org/drawingml/2006/main" xmlns:r="http://schemas.openxmlformats.org/officeDocument/2006/relationships" xmlns:p="http://schemas.openxmlformats.org/presentationml/2006/main">
   <p:cSld>
     <p:bg>
@@ -9150,6 +7619,35 @@
       </p:grpSpPr>
       <p:sp>
         <p:nvSpPr>
+          <p:cNvPr id="2" name="Title 1">
+            <a:extLst>
+              <a:ext uri="{FF2B5EF4-FFF2-40B4-BE49-F238E27FC236}">
+                <a16:creationId xmlns:a16="http://schemas.microsoft.com/office/drawing/2014/main" id="{EB174F43-E0B4-56F1-2F81-F8EFE350D194}"/>
+              </a:ext>
+            </a:extLst>
+          </p:cNvPr>
+          <p:cNvSpPr>
+            <a:spLocks noGrp="1"/>
+          </p:cNvSpPr>
+          <p:nvPr>
+            <p:ph type="title"/>
+          </p:nvPr>
+        </p:nvSpPr>
+        <p:spPr/>
+        <p:txBody>
+          <a:bodyPr/>
+          <a:lstStyle/>
+          <a:p>
+            <a:r>
+              <a:rPr lang="it-IT" dirty="0"/>
+              <a:t>Wrap up</a:t>
+            </a:r>
+            <a:endParaRPr lang="en-US" dirty="0"/>
+          </a:p>
+        </p:txBody>
+      </p:sp>
+      <p:sp>
+        <p:nvSpPr>
           <p:cNvPr id="4" name="Text Placeholder 3">
             <a:extLst>
               <a:ext uri="{FF2B5EF4-FFF2-40B4-BE49-F238E27FC236}">
@@ -9161,7 +7659,7 @@
             <a:spLocks noGrp="1"/>
           </p:cNvSpPr>
           <p:nvPr>
-            <p:ph type="body" sz="quarter" idx="10"/>
+            <p:ph type="body" sz="quarter" idx="11"/>
           </p:nvPr>
         </p:nvSpPr>
         <p:spPr/>
@@ -9169,14 +7667,29 @@
           <a:bodyPr lIns="91440" tIns="45720" rIns="91440" bIns="45720" anchor="t"/>
           <a:lstStyle/>
           <a:p>
-            <a:r>
-              <a:rPr lang="en-IT">
+            <a:pPr marL="0" indent="0">
+              <a:buNone/>
+            </a:pPr>
+            <a:r>
+              <a:rPr lang="it-IT" dirty="0">
                 <a:latin typeface="Arial"/>
                 <a:cs typeface="Arial"/>
               </a:rPr>
-              <a:t>Wrap up</a:t>
-            </a:r>
-            <a:endParaRPr lang="en-US"/>
+              <a:t>Public repo:</a:t>
+            </a:r>
+          </a:p>
+          <a:p>
+            <a:pPr marL="0" indent="0">
+              <a:buNone/>
+            </a:pPr>
+            <a:r>
+              <a:rPr lang="en-IT" dirty="0">
+                <a:latin typeface="Arial"/>
+                <a:cs typeface="Arial"/>
+              </a:rPr>
+              <a:t>https://github.com/GuidoZam/espc-spfx-session-demo</a:t>
+            </a:r>
+            <a:endParaRPr lang="en-US" dirty="0"/>
           </a:p>
         </p:txBody>
       </p:sp>
@@ -9374,6 +7887,36 @@
           </a:p>
         </p:txBody>
       </p:sp>
+      <p:pic>
+        <p:nvPicPr>
+          <p:cNvPr id="5" name="Picture 4">
+            <a:extLst>
+              <a:ext uri="{FF2B5EF4-FFF2-40B4-BE49-F238E27FC236}">
+                <a16:creationId xmlns:a16="http://schemas.microsoft.com/office/drawing/2014/main" id="{E2BC3B9F-7E7B-E6C8-9727-3F09D8C9102B}"/>
+              </a:ext>
+            </a:extLst>
+          </p:cNvPr>
+          <p:cNvPicPr>
+            <a:picLocks noChangeAspect="1"/>
+          </p:cNvPicPr>
+          <p:nvPr/>
+        </p:nvPicPr>
+        <p:blipFill>
+          <a:blip r:embed="rId4"/>
+          <a:stretch>
+            <a:fillRect/>
+          </a:stretch>
+        </p:blipFill>
+        <p:spPr>
+          <a:xfrm>
+            <a:off x="7741560" y="2973771"/>
+            <a:ext cx="2665029" cy="2665029"/>
+          </a:xfrm>
+          <a:prstGeom prst="rect">
+            <a:avLst/>
+          </a:prstGeom>
+        </p:spPr>
+      </p:pic>
     </p:spTree>
     <p:extLst>
       <p:ext uri="{BB962C8B-B14F-4D97-AF65-F5344CB8AC3E}">
@@ -9387,7 +7930,7 @@
 </p:sld>
 </file>
 
-<file path=ppt/slides/slide17.xml><?xml version="1.0" encoding="utf-8"?>
+<file path=ppt/slides/slide13.xml><?xml version="1.0" encoding="utf-8"?>
 <p:sld xmlns:a="http://schemas.openxmlformats.org/drawingml/2006/main" xmlns:r="http://schemas.openxmlformats.org/officeDocument/2006/relationships" xmlns:p="http://schemas.openxmlformats.org/presentationml/2006/main">
   <p:cSld>
     <p:bg>
@@ -10389,8 +8932,35 @@
                 <a:latin typeface="Arial"/>
                 <a:cs typeface="Arial"/>
               </a:rPr>
-              <a:t>Let’s explore the solution</a:t>
-            </a:r>
+              <a:t>Let’s </a:t>
+            </a:r>
+            <a:r>
+              <a:rPr lang="it-IT" sz="4800" b="1" dirty="0" err="1">
+                <a:solidFill>
+                  <a:srgbClr val="00C700"/>
+                </a:solidFill>
+                <a:latin typeface="Arial"/>
+                <a:cs typeface="Arial"/>
+              </a:rPr>
+              <a:t>see</a:t>
+            </a:r>
+            <a:r>
+              <a:rPr lang="it-IT" sz="4800" b="1" dirty="0">
+                <a:solidFill>
+                  <a:srgbClr val="00C700"/>
+                </a:solidFill>
+                <a:latin typeface="Arial"/>
+                <a:cs typeface="Arial"/>
+              </a:rPr>
+              <a:t> the form</a:t>
+            </a:r>
+            <a:endParaRPr lang="en-IT" sz="4800" b="1" dirty="0">
+              <a:solidFill>
+                <a:srgbClr val="00C700"/>
+              </a:solidFill>
+              <a:latin typeface="Arial"/>
+              <a:cs typeface="Arial"/>
+            </a:endParaRPr>
           </a:p>
         </p:txBody>
       </p:sp>
@@ -10611,31 +9181,12 @@
 <file path=ppt/slides/slide7.xml><?xml version="1.0" encoding="utf-8"?>
 <p:sld xmlns:a="http://schemas.openxmlformats.org/drawingml/2006/main" xmlns:r="http://schemas.openxmlformats.org/officeDocument/2006/relationships" xmlns:p="http://schemas.openxmlformats.org/presentationml/2006/main">
   <p:cSld>
-    <p:bg>
-      <p:bgPr>
-        <a:blipFill dpi="0" rotWithShape="1">
-          <a:blip r:embed="rId3" cstate="print">
-            <a:lum/>
-            <a:extLst>
-              <a:ext uri="{28A0092B-C50C-407E-A947-70E740481C1C}">
-                <a14:useLocalDpi xmlns:a14="http://schemas.microsoft.com/office/drawing/2010/main"/>
-              </a:ext>
-            </a:extLst>
-          </a:blip>
-          <a:srcRect/>
-          <a:stretch>
-            <a:fillRect/>
-          </a:stretch>
-        </a:blipFill>
-        <a:effectLst/>
-      </p:bgPr>
-    </p:bg>
     <p:spTree>
       <p:nvGrpSpPr>
         <p:cNvPr id="1" name="">
           <a:extLst>
             <a:ext uri="{FF2B5EF4-FFF2-40B4-BE49-F238E27FC236}">
-              <a16:creationId xmlns:a16="http://schemas.microsoft.com/office/drawing/2014/main" id="{8F6AD8BF-776C-BDF6-EE6A-ABBA3886776E}"/>
+              <a16:creationId xmlns:a16="http://schemas.microsoft.com/office/drawing/2014/main" id="{74E19C68-9386-19AE-105F-51B68DF92FE3}"/>
             </a:ext>
           </a:extLst>
         </p:cNvPr>
@@ -10655,24 +9206,199 @@
           <p:cNvPr id="4" name="Text Placeholder 3">
             <a:extLst>
               <a:ext uri="{FF2B5EF4-FFF2-40B4-BE49-F238E27FC236}">
-                <a16:creationId xmlns:a16="http://schemas.microsoft.com/office/drawing/2014/main" id="{9179BCFB-57DC-8C0A-4753-100E56CE5122}"/>
+                <a16:creationId xmlns:a16="http://schemas.microsoft.com/office/drawing/2014/main" id="{5181D7CF-4862-7D2C-A698-CEFA40F5FE41}"/>
               </a:ext>
             </a:extLst>
           </p:cNvPr>
-          <p:cNvSpPr>
-            <a:spLocks noGrp="1"/>
+          <p:cNvSpPr txBox="1">
+            <a:spLocks/>
           </p:cNvSpPr>
-          <p:nvPr>
-            <p:ph type="body" sz="quarter" idx="10"/>
-          </p:nvPr>
+          <p:nvPr/>
         </p:nvSpPr>
-        <p:spPr/>
+        <p:spPr>
+          <a:xfrm>
+            <a:off x="737938" y="1628799"/>
+            <a:ext cx="10764252" cy="3857601"/>
+          </a:xfrm>
+          <a:prstGeom prst="rect">
+            <a:avLst/>
+          </a:prstGeom>
+        </p:spPr>
         <p:txBody>
           <a:bodyPr lIns="91440" tIns="45720" rIns="91440" bIns="45720" anchor="t"/>
-          <a:lstStyle/>
-          <a:p>
-            <a:r>
-              <a:rPr lang="en-IT">
+          <a:lstStyle>
+            <a:lvl1pPr marL="228600" indent="-228600" algn="l" defTabSz="914400" rtl="0" eaLnBrk="1" latinLnBrk="0" hangingPunct="1">
+              <a:lnSpc>
+                <a:spcPct val="90000"/>
+              </a:lnSpc>
+              <a:spcBef>
+                <a:spcPts val="1000"/>
+              </a:spcBef>
+              <a:buFont typeface="Arial"/>
+              <a:buChar char="•"/>
+              <a:defRPr sz="2800" kern="1200">
+                <a:solidFill>
+                  <a:schemeClr val="tx1"/>
+                </a:solidFill>
+                <a:latin typeface="+mn-lt"/>
+                <a:ea typeface="+mn-ea"/>
+                <a:cs typeface="+mn-cs"/>
+              </a:defRPr>
+            </a:lvl1pPr>
+            <a:lvl2pPr marL="685800" indent="-228600" algn="l" defTabSz="914400" rtl="0" eaLnBrk="1" latinLnBrk="0" hangingPunct="1">
+              <a:lnSpc>
+                <a:spcPct val="90000"/>
+              </a:lnSpc>
+              <a:spcBef>
+                <a:spcPts val="500"/>
+              </a:spcBef>
+              <a:buFont typeface="Arial"/>
+              <a:buChar char="•"/>
+              <a:defRPr sz="2400" kern="1200">
+                <a:solidFill>
+                  <a:schemeClr val="tx1"/>
+                </a:solidFill>
+                <a:latin typeface="+mn-lt"/>
+                <a:ea typeface="+mn-ea"/>
+                <a:cs typeface="+mn-cs"/>
+              </a:defRPr>
+            </a:lvl2pPr>
+            <a:lvl3pPr marL="1143000" indent="-228600" algn="l" defTabSz="914400" rtl="0" eaLnBrk="1" latinLnBrk="0" hangingPunct="1">
+              <a:lnSpc>
+                <a:spcPct val="90000"/>
+              </a:lnSpc>
+              <a:spcBef>
+                <a:spcPts val="500"/>
+              </a:spcBef>
+              <a:buFont typeface="Arial"/>
+              <a:buChar char="•"/>
+              <a:defRPr sz="2000" kern="1200">
+                <a:solidFill>
+                  <a:schemeClr val="tx1"/>
+                </a:solidFill>
+                <a:latin typeface="+mn-lt"/>
+                <a:ea typeface="+mn-ea"/>
+                <a:cs typeface="+mn-cs"/>
+              </a:defRPr>
+            </a:lvl3pPr>
+            <a:lvl4pPr marL="1600200" indent="-228600" algn="l" defTabSz="914400" rtl="0" eaLnBrk="1" latinLnBrk="0" hangingPunct="1">
+              <a:lnSpc>
+                <a:spcPct val="90000"/>
+              </a:lnSpc>
+              <a:spcBef>
+                <a:spcPts val="500"/>
+              </a:spcBef>
+              <a:buFont typeface="Arial"/>
+              <a:buChar char="•"/>
+              <a:defRPr sz="1800" kern="1200">
+                <a:solidFill>
+                  <a:schemeClr val="tx1"/>
+                </a:solidFill>
+                <a:latin typeface="+mn-lt"/>
+                <a:ea typeface="+mn-ea"/>
+                <a:cs typeface="+mn-cs"/>
+              </a:defRPr>
+            </a:lvl4pPr>
+            <a:lvl5pPr marL="2057400" indent="-228600" algn="l" defTabSz="914400" rtl="0" eaLnBrk="1" latinLnBrk="0" hangingPunct="1">
+              <a:lnSpc>
+                <a:spcPct val="90000"/>
+              </a:lnSpc>
+              <a:spcBef>
+                <a:spcPts val="500"/>
+              </a:spcBef>
+              <a:buFont typeface="Arial"/>
+              <a:buChar char="•"/>
+              <a:defRPr sz="1800" kern="1200">
+                <a:solidFill>
+                  <a:schemeClr val="tx1"/>
+                </a:solidFill>
+                <a:latin typeface="+mn-lt"/>
+                <a:ea typeface="+mn-ea"/>
+                <a:cs typeface="+mn-cs"/>
+              </a:defRPr>
+            </a:lvl5pPr>
+            <a:lvl6pPr marL="2514600" indent="-228600" algn="l" defTabSz="914400" rtl="0" eaLnBrk="1" latinLnBrk="0" hangingPunct="1">
+              <a:lnSpc>
+                <a:spcPct val="90000"/>
+              </a:lnSpc>
+              <a:spcBef>
+                <a:spcPts val="500"/>
+              </a:spcBef>
+              <a:buFont typeface="Arial"/>
+              <a:buChar char="•"/>
+              <a:defRPr sz="1800" kern="1200">
+                <a:solidFill>
+                  <a:schemeClr val="tx1"/>
+                </a:solidFill>
+                <a:latin typeface="+mn-lt"/>
+                <a:ea typeface="+mn-ea"/>
+                <a:cs typeface="+mn-cs"/>
+              </a:defRPr>
+            </a:lvl6pPr>
+            <a:lvl7pPr marL="2971800" indent="-228600" algn="l" defTabSz="914400" rtl="0" eaLnBrk="1" latinLnBrk="0" hangingPunct="1">
+              <a:lnSpc>
+                <a:spcPct val="90000"/>
+              </a:lnSpc>
+              <a:spcBef>
+                <a:spcPts val="500"/>
+              </a:spcBef>
+              <a:buFont typeface="Arial"/>
+              <a:buChar char="•"/>
+              <a:defRPr sz="1800" kern="1200">
+                <a:solidFill>
+                  <a:schemeClr val="tx1"/>
+                </a:solidFill>
+                <a:latin typeface="+mn-lt"/>
+                <a:ea typeface="+mn-ea"/>
+                <a:cs typeface="+mn-cs"/>
+              </a:defRPr>
+            </a:lvl7pPr>
+            <a:lvl8pPr marL="3429000" indent="-228600" algn="l" defTabSz="914400" rtl="0" eaLnBrk="1" latinLnBrk="0" hangingPunct="1">
+              <a:lnSpc>
+                <a:spcPct val="90000"/>
+              </a:lnSpc>
+              <a:spcBef>
+                <a:spcPts val="500"/>
+              </a:spcBef>
+              <a:buFont typeface="Arial"/>
+              <a:buChar char="•"/>
+              <a:defRPr sz="1800" kern="1200">
+                <a:solidFill>
+                  <a:schemeClr val="tx1"/>
+                </a:solidFill>
+                <a:latin typeface="+mn-lt"/>
+                <a:ea typeface="+mn-ea"/>
+                <a:cs typeface="+mn-cs"/>
+              </a:defRPr>
+            </a:lvl8pPr>
+            <a:lvl9pPr marL="3886200" indent="-228600" algn="l" defTabSz="914400" rtl="0" eaLnBrk="1" latinLnBrk="0" hangingPunct="1">
+              <a:lnSpc>
+                <a:spcPct val="90000"/>
+              </a:lnSpc>
+              <a:spcBef>
+                <a:spcPts val="500"/>
+              </a:spcBef>
+              <a:buFont typeface="Arial"/>
+              <a:buChar char="•"/>
+              <a:defRPr sz="1800" kern="1200">
+                <a:solidFill>
+                  <a:schemeClr val="tx1"/>
+                </a:solidFill>
+                <a:latin typeface="+mn-lt"/>
+                <a:ea typeface="+mn-ea"/>
+                <a:cs typeface="+mn-cs"/>
+              </a:defRPr>
+            </a:lvl9pPr>
+          </a:lstStyle>
+          <a:p>
+            <a:pPr marL="0" indent="0">
+              <a:buNone/>
+            </a:pPr>
+            <a:r>
+              <a:rPr lang="en-IT" sz="4800" b="1" dirty="0">
+                <a:solidFill>
+                  <a:srgbClr val="00C700"/>
+                </a:solidFill>
                 <a:latin typeface="Arial"/>
                 <a:cs typeface="Arial"/>
               </a:rPr>
@@ -10683,10 +9409,10 @@
       </p:sp>
       <p:sp>
         <p:nvSpPr>
-          <p:cNvPr id="6" name="Text Placeholder 3">
+          <p:cNvPr id="5" name="Text Placeholder 3">
             <a:extLst>
               <a:ext uri="{FF2B5EF4-FFF2-40B4-BE49-F238E27FC236}">
-                <a16:creationId xmlns:a16="http://schemas.microsoft.com/office/drawing/2014/main" id="{0681DA0A-CCBA-EB95-B7AD-406BDAC51C17}"/>
+                <a16:creationId xmlns:a16="http://schemas.microsoft.com/office/drawing/2014/main" id="{94934B45-769D-EB84-1026-D9DC4BBEDA19}"/>
               </a:ext>
             </a:extLst>
           </p:cNvPr>
@@ -10872,86 +9598,20 @@
           </a:lstStyle>
           <a:p>
             <a:r>
-              <a:rPr lang="en-IT">
+              <a:rPr lang="en-IT" dirty="0">
                 <a:latin typeface="Arial"/>
                 <a:cs typeface="Arial"/>
               </a:rPr>
               <a:t>Yes, it's a demo</a:t>
             </a:r>
-            <a:endParaRPr lang="en-US"/>
+            <a:endParaRPr lang="en-US" dirty="0"/>
           </a:p>
         </p:txBody>
       </p:sp>
-      <mc:AlternateContent xmlns:mc="http://schemas.openxmlformats.org/markup-compatibility/2006">
-        <mc:Choice xmlns:we="http://schemas.microsoft.com/office/webextensions/webextension/2010/11" xmlns:pca="http://schemas.microsoft.com/office/powerpoint/2013/contentapp" Requires="we pca">
-          <p:graphicFrame>
-            <p:nvGraphicFramePr>
-              <p:cNvPr id="3" name="Add-in 2">
-                <a:extLst>
-                  <a:ext uri="{FF2B5EF4-FFF2-40B4-BE49-F238E27FC236}">
-                    <a16:creationId xmlns:a16="http://schemas.microsoft.com/office/drawing/2014/main" id="{1CA29BF3-95FC-A0F7-B036-056A9ECD02AA}"/>
-                  </a:ext>
-                </a:extLst>
-              </p:cNvPr>
-              <p:cNvGraphicFramePr>
-                <a:graphicFrameLocks noGrp="1"/>
-              </p:cNvGraphicFramePr>
-              <p:nvPr>
-                <p:extLst>
-                  <p:ext uri="{D42A27DB-BD31-4B8C-83A1-F6EECF244321}">
-                    <p14:modId xmlns:p14="http://schemas.microsoft.com/office/powerpoint/2010/main" val="1464362284"/>
-                  </p:ext>
-                </p:extLst>
-              </p:nvPr>
-            </p:nvGraphicFramePr>
-            <p:xfrm>
-              <a:off x="12741728" y="547005"/>
-              <a:ext cx="5568043" cy="5505451"/>
-            </p:xfrm>
-            <a:graphic>
-              <a:graphicData uri="http://schemas.microsoft.com/office/webextensions/webextension/2010/11">
-                <we:webextensionref xmlns:we="http://schemas.microsoft.com/office/webextensions/webextension/2010/11" xmlns:r="http://schemas.openxmlformats.org/officeDocument/2006/relationships" r:id="rId4"/>
-              </a:graphicData>
-            </a:graphic>
-          </p:graphicFrame>
-        </mc:Choice>
-        <mc:Fallback>
-          <p:pic>
-            <p:nvPicPr>
-              <p:cNvPr id="3" name="Add-in 2">
-                <a:extLst>
-                  <a:ext uri="{FF2B5EF4-FFF2-40B4-BE49-F238E27FC236}">
-                    <a16:creationId xmlns:a16="http://schemas.microsoft.com/office/drawing/2014/main" id="{1CA29BF3-95FC-A0F7-B036-056A9ECD02AA}"/>
-                  </a:ext>
-                </a:extLst>
-              </p:cNvPr>
-              <p:cNvPicPr>
-                <a:picLocks noGrp="1" noRot="1" noChangeAspect="1" noMove="1" noResize="1" noEditPoints="1" noAdjustHandles="1" noChangeArrowheads="1" noChangeShapeType="1"/>
-              </p:cNvPicPr>
-              <p:nvPr/>
-            </p:nvPicPr>
-            <p:blipFill>
-              <a:blip r:embed="rId5"/>
-              <a:stretch>
-                <a:fillRect/>
-              </a:stretch>
-            </p:blipFill>
-            <p:spPr>
-              <a:xfrm>
-                <a:off x="12741728" y="547005"/>
-                <a:ext cx="5568043" cy="5505451"/>
-              </a:xfrm>
-              <a:prstGeom prst="rect">
-                <a:avLst/>
-              </a:prstGeom>
-            </p:spPr>
-          </p:pic>
-        </mc:Fallback>
-      </mc:AlternateContent>
     </p:spTree>
     <p:extLst>
       <p:ext uri="{BB962C8B-B14F-4D97-AF65-F5344CB8AC3E}">
-        <p14:creationId xmlns:p14="http://schemas.microsoft.com/office/powerpoint/2010/main" val="1168151202"/>
+        <p14:creationId xmlns:p14="http://schemas.microsoft.com/office/powerpoint/2010/main" val="3104044014"/>
       </p:ext>
     </p:extLst>
   </p:cSld>
@@ -11239,6 +9899,207 @@
           </a:p>
         </p:txBody>
       </p:sp>
+      <p:sp>
+        <p:nvSpPr>
+          <p:cNvPr id="2" name="Text Placeholder 3">
+            <a:extLst>
+              <a:ext uri="{FF2B5EF4-FFF2-40B4-BE49-F238E27FC236}">
+                <a16:creationId xmlns:a16="http://schemas.microsoft.com/office/drawing/2014/main" id="{1B12BF3B-4688-0992-8EB8-D4AAABCB7FCE}"/>
+              </a:ext>
+            </a:extLst>
+          </p:cNvPr>
+          <p:cNvSpPr txBox="1">
+            <a:spLocks/>
+          </p:cNvSpPr>
+          <p:nvPr/>
+        </p:nvSpPr>
+        <p:spPr>
+          <a:xfrm>
+            <a:off x="6361598" y="4941227"/>
+            <a:ext cx="5445392" cy="849973"/>
+          </a:xfrm>
+          <a:prstGeom prst="rect">
+            <a:avLst/>
+          </a:prstGeom>
+        </p:spPr>
+        <p:txBody>
+          <a:bodyPr lIns="91440" tIns="45720" rIns="91440" bIns="45720" anchor="t"/>
+          <a:lstStyle>
+            <a:lvl1pPr marL="0" indent="0" algn="l" defTabSz="914400" rtl="0" eaLnBrk="1" latinLnBrk="0" hangingPunct="1">
+              <a:lnSpc>
+                <a:spcPct val="90000"/>
+              </a:lnSpc>
+              <a:spcBef>
+                <a:spcPts val="1000"/>
+              </a:spcBef>
+              <a:buFont typeface="Arial"/>
+              <a:buNone/>
+              <a:defRPr sz="4800" b="1" kern="1200">
+                <a:solidFill>
+                  <a:srgbClr val="00C700"/>
+                </a:solidFill>
+                <a:latin typeface="Arial" panose="020B0604020202020204" pitchFamily="34" charset="0"/>
+                <a:ea typeface="+mn-ea"/>
+                <a:cs typeface="Arial" panose="020B0604020202020204" pitchFamily="34" charset="0"/>
+              </a:defRPr>
+            </a:lvl1pPr>
+            <a:lvl2pPr marL="685800" indent="-228600" algn="l" defTabSz="914400" rtl="0" eaLnBrk="1" latinLnBrk="0" hangingPunct="1">
+              <a:lnSpc>
+                <a:spcPct val="90000"/>
+              </a:lnSpc>
+              <a:spcBef>
+                <a:spcPts val="500"/>
+              </a:spcBef>
+              <a:buFont typeface="Arial"/>
+              <a:buChar char="•"/>
+              <a:defRPr sz="2400" kern="1200">
+                <a:solidFill>
+                  <a:srgbClr val="00E2FF"/>
+                </a:solidFill>
+                <a:latin typeface="+mn-lt"/>
+                <a:ea typeface="+mn-ea"/>
+                <a:cs typeface="+mn-cs"/>
+              </a:defRPr>
+            </a:lvl2pPr>
+            <a:lvl3pPr marL="1143000" indent="-228600" algn="l" defTabSz="914400" rtl="0" eaLnBrk="1" latinLnBrk="0" hangingPunct="1">
+              <a:lnSpc>
+                <a:spcPct val="90000"/>
+              </a:lnSpc>
+              <a:spcBef>
+                <a:spcPts val="500"/>
+              </a:spcBef>
+              <a:buFont typeface="Arial"/>
+              <a:buChar char="•"/>
+              <a:defRPr sz="2000" kern="1200">
+                <a:solidFill>
+                  <a:srgbClr val="00E2FF"/>
+                </a:solidFill>
+                <a:latin typeface="+mn-lt"/>
+                <a:ea typeface="+mn-ea"/>
+                <a:cs typeface="+mn-cs"/>
+              </a:defRPr>
+            </a:lvl3pPr>
+            <a:lvl4pPr marL="1600200" indent="-228600" algn="l" defTabSz="914400" rtl="0" eaLnBrk="1" latinLnBrk="0" hangingPunct="1">
+              <a:lnSpc>
+                <a:spcPct val="90000"/>
+              </a:lnSpc>
+              <a:spcBef>
+                <a:spcPts val="500"/>
+              </a:spcBef>
+              <a:buFont typeface="Arial"/>
+              <a:buChar char="•"/>
+              <a:defRPr sz="1800" kern="1200">
+                <a:solidFill>
+                  <a:srgbClr val="00E2FF"/>
+                </a:solidFill>
+                <a:latin typeface="+mn-lt"/>
+                <a:ea typeface="+mn-ea"/>
+                <a:cs typeface="+mn-cs"/>
+              </a:defRPr>
+            </a:lvl4pPr>
+            <a:lvl5pPr marL="2057400" indent="-228600" algn="l" defTabSz="914400" rtl="0" eaLnBrk="1" latinLnBrk="0" hangingPunct="1">
+              <a:lnSpc>
+                <a:spcPct val="90000"/>
+              </a:lnSpc>
+              <a:spcBef>
+                <a:spcPts val="500"/>
+              </a:spcBef>
+              <a:buFont typeface="Arial"/>
+              <a:buChar char="•"/>
+              <a:defRPr sz="1800" kern="1200">
+                <a:solidFill>
+                  <a:srgbClr val="00E2FF"/>
+                </a:solidFill>
+                <a:latin typeface="+mn-lt"/>
+                <a:ea typeface="+mn-ea"/>
+                <a:cs typeface="+mn-cs"/>
+              </a:defRPr>
+            </a:lvl5pPr>
+            <a:lvl6pPr marL="2514600" indent="-228600" algn="l" defTabSz="914400" rtl="0" eaLnBrk="1" latinLnBrk="0" hangingPunct="1">
+              <a:lnSpc>
+                <a:spcPct val="90000"/>
+              </a:lnSpc>
+              <a:spcBef>
+                <a:spcPts val="500"/>
+              </a:spcBef>
+              <a:buFont typeface="Arial"/>
+              <a:buChar char="•"/>
+              <a:defRPr sz="1800" kern="1200">
+                <a:solidFill>
+                  <a:schemeClr val="tx1"/>
+                </a:solidFill>
+                <a:latin typeface="+mn-lt"/>
+                <a:ea typeface="+mn-ea"/>
+                <a:cs typeface="+mn-cs"/>
+              </a:defRPr>
+            </a:lvl6pPr>
+            <a:lvl7pPr marL="2971800" indent="-228600" algn="l" defTabSz="914400" rtl="0" eaLnBrk="1" latinLnBrk="0" hangingPunct="1">
+              <a:lnSpc>
+                <a:spcPct val="90000"/>
+              </a:lnSpc>
+              <a:spcBef>
+                <a:spcPts val="500"/>
+              </a:spcBef>
+              <a:buFont typeface="Arial"/>
+              <a:buChar char="•"/>
+              <a:defRPr sz="1800" kern="1200">
+                <a:solidFill>
+                  <a:schemeClr val="tx1"/>
+                </a:solidFill>
+                <a:latin typeface="+mn-lt"/>
+                <a:ea typeface="+mn-ea"/>
+                <a:cs typeface="+mn-cs"/>
+              </a:defRPr>
+            </a:lvl7pPr>
+            <a:lvl8pPr marL="3429000" indent="-228600" algn="l" defTabSz="914400" rtl="0" eaLnBrk="1" latinLnBrk="0" hangingPunct="1">
+              <a:lnSpc>
+                <a:spcPct val="90000"/>
+              </a:lnSpc>
+              <a:spcBef>
+                <a:spcPts val="500"/>
+              </a:spcBef>
+              <a:buFont typeface="Arial"/>
+              <a:buChar char="•"/>
+              <a:defRPr sz="1800" kern="1200">
+                <a:solidFill>
+                  <a:schemeClr val="tx1"/>
+                </a:solidFill>
+                <a:latin typeface="+mn-lt"/>
+                <a:ea typeface="+mn-ea"/>
+                <a:cs typeface="+mn-cs"/>
+              </a:defRPr>
+            </a:lvl8pPr>
+            <a:lvl9pPr marL="3886200" indent="-228600" algn="l" defTabSz="914400" rtl="0" eaLnBrk="1" latinLnBrk="0" hangingPunct="1">
+              <a:lnSpc>
+                <a:spcPct val="90000"/>
+              </a:lnSpc>
+              <a:spcBef>
+                <a:spcPts val="500"/>
+              </a:spcBef>
+              <a:buFont typeface="Arial"/>
+              <a:buChar char="•"/>
+              <a:defRPr sz="1800" kern="1200">
+                <a:solidFill>
+                  <a:schemeClr val="tx1"/>
+                </a:solidFill>
+                <a:latin typeface="+mn-lt"/>
+                <a:ea typeface="+mn-ea"/>
+                <a:cs typeface="+mn-cs"/>
+              </a:defRPr>
+            </a:lvl9pPr>
+          </a:lstStyle>
+          <a:p>
+            <a:r>
+              <a:rPr lang="en-IT" dirty="0">
+                <a:latin typeface="Arial"/>
+                <a:cs typeface="Arial"/>
+              </a:rPr>
+              <a:t>Yes, it's a demo</a:t>
+            </a:r>
+            <a:endParaRPr lang="en-US" dirty="0"/>
+          </a:p>
+        </p:txBody>
+      </p:sp>
     </p:spTree>
     <p:extLst>
       <p:ext uri="{BB962C8B-B14F-4D97-AF65-F5344CB8AC3E}">
@@ -11279,7 +10140,7 @@
         <p:cNvPr id="1" name="">
           <a:extLst>
             <a:ext uri="{FF2B5EF4-FFF2-40B4-BE49-F238E27FC236}">
-              <a16:creationId xmlns:a16="http://schemas.microsoft.com/office/drawing/2014/main" id="{DD9AFB09-250B-3A1B-C09E-6E6AD18C9D8D}"/>
+              <a16:creationId xmlns:a16="http://schemas.microsoft.com/office/drawing/2014/main" id="{CE6AA263-EDC0-82B9-0839-92AF21ACE1CD}"/>
             </a:ext>
           </a:extLst>
         </p:cNvPr>
@@ -11299,7 +10160,7 @@
           <p:cNvPr id="4" name="Text Placeholder 3">
             <a:extLst>
               <a:ext uri="{FF2B5EF4-FFF2-40B4-BE49-F238E27FC236}">
-                <a16:creationId xmlns:a16="http://schemas.microsoft.com/office/drawing/2014/main" id="{7F6A3742-4B7B-4C4F-4217-8532368F9692}"/>
+                <a16:creationId xmlns:a16="http://schemas.microsoft.com/office/drawing/2014/main" id="{0CBA97D0-9053-786F-6374-AD269EB13774}"/>
               </a:ext>
             </a:extLst>
           </p:cNvPr>
@@ -11316,21 +10177,18 @@
           <a:lstStyle/>
           <a:p>
             <a:r>
+              <a:rPr lang="it-IT" dirty="0">
+                <a:latin typeface="Arial"/>
+                <a:cs typeface="Arial"/>
+              </a:rPr>
+              <a:t>e2e</a:t>
+            </a:r>
+            <a:r>
               <a:rPr lang="en-IT" dirty="0">
                 <a:latin typeface="Arial"/>
                 <a:cs typeface="Arial"/>
               </a:rPr>
-              <a:t>Unit testing</a:t>
-            </a:r>
-            <a:endParaRPr lang="en-US"/>
-          </a:p>
-          <a:p>
-            <a:r>
-              <a:rPr lang="en-US">
-                <a:latin typeface="Arial"/>
-                <a:cs typeface="Arial"/>
-              </a:rPr>
-              <a:t>Business logic</a:t>
+              <a:t> testing</a:t>
             </a:r>
             <a:endParaRPr lang="en-US" dirty="0"/>
           </a:p>
@@ -11341,7 +10199,7 @@
           <p:cNvPr id="6" name="Text Placeholder 3">
             <a:extLst>
               <a:ext uri="{FF2B5EF4-FFF2-40B4-BE49-F238E27FC236}">
-                <a16:creationId xmlns:a16="http://schemas.microsoft.com/office/drawing/2014/main" id="{031EFA2E-CC08-4E61-C8EC-6D7EC82AAA4C}"/>
+                <a16:creationId xmlns:a16="http://schemas.microsoft.com/office/drawing/2014/main" id="{BDFF9A42-A75A-359A-8534-541E28FE0BB2}"/>
               </a:ext>
             </a:extLst>
           </p:cNvPr>
@@ -11530,76 +10388,211 @@
           </a:p>
         </p:txBody>
       </p:sp>
-      <mc:AlternateContent xmlns:mc="http://schemas.openxmlformats.org/markup-compatibility/2006">
-        <mc:Choice xmlns:we="http://schemas.microsoft.com/office/webextensions/webextension/2010/11" xmlns:pca="http://schemas.microsoft.com/office/powerpoint/2013/contentapp" Requires="we pca">
-          <p:graphicFrame>
-            <p:nvGraphicFramePr>
-              <p:cNvPr id="2" name="Add-in 1">
-                <a:extLst>
-                  <a:ext uri="{FF2B5EF4-FFF2-40B4-BE49-F238E27FC236}">
-                    <a16:creationId xmlns:a16="http://schemas.microsoft.com/office/drawing/2014/main" id="{A45B9582-E3B7-5FD5-D1EC-C428FFBF9EC2}"/>
-                  </a:ext>
-                </a:extLst>
-              </p:cNvPr>
-              <p:cNvGraphicFramePr>
-                <a:graphicFrameLocks noGrp="1"/>
-              </p:cNvGraphicFramePr>
-              <p:nvPr>
-                <p:extLst>
-                  <p:ext uri="{D42A27DB-BD31-4B8C-83A1-F6EECF244321}">
-                    <p14:modId xmlns:p14="http://schemas.microsoft.com/office/powerpoint/2010/main" val="4113641312"/>
-                  </p:ext>
-                </p:extLst>
-              </p:nvPr>
-            </p:nvGraphicFramePr>
-            <p:xfrm>
-              <a:off x="12687299" y="490945"/>
-              <a:ext cx="5546271" cy="5603422"/>
-            </p:xfrm>
-            <a:graphic>
-              <a:graphicData uri="http://schemas.microsoft.com/office/webextensions/webextension/2010/11">
-                <we:webextensionref xmlns:we="http://schemas.microsoft.com/office/webextensions/webextension/2010/11" xmlns:r="http://schemas.openxmlformats.org/officeDocument/2006/relationships" r:id="rId4"/>
-              </a:graphicData>
-            </a:graphic>
-          </p:graphicFrame>
-        </mc:Choice>
-        <mc:Fallback>
-          <p:pic>
-            <p:nvPicPr>
-              <p:cNvPr id="2" name="Add-in 1">
-                <a:extLst>
-                  <a:ext uri="{FF2B5EF4-FFF2-40B4-BE49-F238E27FC236}">
-                    <a16:creationId xmlns:a16="http://schemas.microsoft.com/office/drawing/2014/main" id="{A45B9582-E3B7-5FD5-D1EC-C428FFBF9EC2}"/>
-                  </a:ext>
-                </a:extLst>
-              </p:cNvPr>
-              <p:cNvPicPr>
-                <a:picLocks noGrp="1" noRot="1" noChangeAspect="1" noMove="1" noResize="1" noEditPoints="1" noAdjustHandles="1" noChangeArrowheads="1" noChangeShapeType="1"/>
-              </p:cNvPicPr>
-              <p:nvPr/>
-            </p:nvPicPr>
-            <p:blipFill>
-              <a:blip r:embed="rId5"/>
-              <a:stretch>
-                <a:fillRect/>
-              </a:stretch>
-            </p:blipFill>
-            <p:spPr>
-              <a:xfrm>
-                <a:off x="12687299" y="490945"/>
-                <a:ext cx="5546271" cy="5603422"/>
-              </a:xfrm>
-              <a:prstGeom prst="rect">
-                <a:avLst/>
-              </a:prstGeom>
-            </p:spPr>
-          </p:pic>
-        </mc:Fallback>
-      </mc:AlternateContent>
+      <p:sp>
+        <p:nvSpPr>
+          <p:cNvPr id="2" name="Text Placeholder 3">
+            <a:extLst>
+              <a:ext uri="{FF2B5EF4-FFF2-40B4-BE49-F238E27FC236}">
+                <a16:creationId xmlns:a16="http://schemas.microsoft.com/office/drawing/2014/main" id="{AFAEDE67-5200-687D-2622-25016CB5F05D}"/>
+              </a:ext>
+            </a:extLst>
+          </p:cNvPr>
+          <p:cNvSpPr txBox="1">
+            <a:spLocks/>
+          </p:cNvSpPr>
+          <p:nvPr/>
+        </p:nvSpPr>
+        <p:spPr>
+          <a:xfrm>
+            <a:off x="6361598" y="4941227"/>
+            <a:ext cx="5445392" cy="849973"/>
+          </a:xfrm>
+          <a:prstGeom prst="rect">
+            <a:avLst/>
+          </a:prstGeom>
+        </p:spPr>
+        <p:txBody>
+          <a:bodyPr lIns="91440" tIns="45720" rIns="91440" bIns="45720" anchor="t"/>
+          <a:lstStyle>
+            <a:lvl1pPr marL="0" indent="0" algn="l" defTabSz="914400" rtl="0" eaLnBrk="1" latinLnBrk="0" hangingPunct="1">
+              <a:lnSpc>
+                <a:spcPct val="90000"/>
+              </a:lnSpc>
+              <a:spcBef>
+                <a:spcPts val="1000"/>
+              </a:spcBef>
+              <a:buFont typeface="Arial"/>
+              <a:buNone/>
+              <a:defRPr sz="4800" b="1" kern="1200">
+                <a:solidFill>
+                  <a:srgbClr val="00C700"/>
+                </a:solidFill>
+                <a:latin typeface="Arial" panose="020B0604020202020204" pitchFamily="34" charset="0"/>
+                <a:ea typeface="+mn-ea"/>
+                <a:cs typeface="Arial" panose="020B0604020202020204" pitchFamily="34" charset="0"/>
+              </a:defRPr>
+            </a:lvl1pPr>
+            <a:lvl2pPr marL="685800" indent="-228600" algn="l" defTabSz="914400" rtl="0" eaLnBrk="1" latinLnBrk="0" hangingPunct="1">
+              <a:lnSpc>
+                <a:spcPct val="90000"/>
+              </a:lnSpc>
+              <a:spcBef>
+                <a:spcPts val="500"/>
+              </a:spcBef>
+              <a:buFont typeface="Arial"/>
+              <a:buChar char="•"/>
+              <a:defRPr sz="2400" kern="1200">
+                <a:solidFill>
+                  <a:srgbClr val="00E2FF"/>
+                </a:solidFill>
+                <a:latin typeface="+mn-lt"/>
+                <a:ea typeface="+mn-ea"/>
+                <a:cs typeface="+mn-cs"/>
+              </a:defRPr>
+            </a:lvl2pPr>
+            <a:lvl3pPr marL="1143000" indent="-228600" algn="l" defTabSz="914400" rtl="0" eaLnBrk="1" latinLnBrk="0" hangingPunct="1">
+              <a:lnSpc>
+                <a:spcPct val="90000"/>
+              </a:lnSpc>
+              <a:spcBef>
+                <a:spcPts val="500"/>
+              </a:spcBef>
+              <a:buFont typeface="Arial"/>
+              <a:buChar char="•"/>
+              <a:defRPr sz="2000" kern="1200">
+                <a:solidFill>
+                  <a:srgbClr val="00E2FF"/>
+                </a:solidFill>
+                <a:latin typeface="+mn-lt"/>
+                <a:ea typeface="+mn-ea"/>
+                <a:cs typeface="+mn-cs"/>
+              </a:defRPr>
+            </a:lvl3pPr>
+            <a:lvl4pPr marL="1600200" indent="-228600" algn="l" defTabSz="914400" rtl="0" eaLnBrk="1" latinLnBrk="0" hangingPunct="1">
+              <a:lnSpc>
+                <a:spcPct val="90000"/>
+              </a:lnSpc>
+              <a:spcBef>
+                <a:spcPts val="500"/>
+              </a:spcBef>
+              <a:buFont typeface="Arial"/>
+              <a:buChar char="•"/>
+              <a:defRPr sz="1800" kern="1200">
+                <a:solidFill>
+                  <a:srgbClr val="00E2FF"/>
+                </a:solidFill>
+                <a:latin typeface="+mn-lt"/>
+                <a:ea typeface="+mn-ea"/>
+                <a:cs typeface="+mn-cs"/>
+              </a:defRPr>
+            </a:lvl4pPr>
+            <a:lvl5pPr marL="2057400" indent="-228600" algn="l" defTabSz="914400" rtl="0" eaLnBrk="1" latinLnBrk="0" hangingPunct="1">
+              <a:lnSpc>
+                <a:spcPct val="90000"/>
+              </a:lnSpc>
+              <a:spcBef>
+                <a:spcPts val="500"/>
+              </a:spcBef>
+              <a:buFont typeface="Arial"/>
+              <a:buChar char="•"/>
+              <a:defRPr sz="1800" kern="1200">
+                <a:solidFill>
+                  <a:srgbClr val="00E2FF"/>
+                </a:solidFill>
+                <a:latin typeface="+mn-lt"/>
+                <a:ea typeface="+mn-ea"/>
+                <a:cs typeface="+mn-cs"/>
+              </a:defRPr>
+            </a:lvl5pPr>
+            <a:lvl6pPr marL="2514600" indent="-228600" algn="l" defTabSz="914400" rtl="0" eaLnBrk="1" latinLnBrk="0" hangingPunct="1">
+              <a:lnSpc>
+                <a:spcPct val="90000"/>
+              </a:lnSpc>
+              <a:spcBef>
+                <a:spcPts val="500"/>
+              </a:spcBef>
+              <a:buFont typeface="Arial"/>
+              <a:buChar char="•"/>
+              <a:defRPr sz="1800" kern="1200">
+                <a:solidFill>
+                  <a:schemeClr val="tx1"/>
+                </a:solidFill>
+                <a:latin typeface="+mn-lt"/>
+                <a:ea typeface="+mn-ea"/>
+                <a:cs typeface="+mn-cs"/>
+              </a:defRPr>
+            </a:lvl6pPr>
+            <a:lvl7pPr marL="2971800" indent="-228600" algn="l" defTabSz="914400" rtl="0" eaLnBrk="1" latinLnBrk="0" hangingPunct="1">
+              <a:lnSpc>
+                <a:spcPct val="90000"/>
+              </a:lnSpc>
+              <a:spcBef>
+                <a:spcPts val="500"/>
+              </a:spcBef>
+              <a:buFont typeface="Arial"/>
+              <a:buChar char="•"/>
+              <a:defRPr sz="1800" kern="1200">
+                <a:solidFill>
+                  <a:schemeClr val="tx1"/>
+                </a:solidFill>
+                <a:latin typeface="+mn-lt"/>
+                <a:ea typeface="+mn-ea"/>
+                <a:cs typeface="+mn-cs"/>
+              </a:defRPr>
+            </a:lvl7pPr>
+            <a:lvl8pPr marL="3429000" indent="-228600" algn="l" defTabSz="914400" rtl="0" eaLnBrk="1" latinLnBrk="0" hangingPunct="1">
+              <a:lnSpc>
+                <a:spcPct val="90000"/>
+              </a:lnSpc>
+              <a:spcBef>
+                <a:spcPts val="500"/>
+              </a:spcBef>
+              <a:buFont typeface="Arial"/>
+              <a:buChar char="•"/>
+              <a:defRPr sz="1800" kern="1200">
+                <a:solidFill>
+                  <a:schemeClr val="tx1"/>
+                </a:solidFill>
+                <a:latin typeface="+mn-lt"/>
+                <a:ea typeface="+mn-ea"/>
+                <a:cs typeface="+mn-cs"/>
+              </a:defRPr>
+            </a:lvl8pPr>
+            <a:lvl9pPr marL="3886200" indent="-228600" algn="l" defTabSz="914400" rtl="0" eaLnBrk="1" latinLnBrk="0" hangingPunct="1">
+              <a:lnSpc>
+                <a:spcPct val="90000"/>
+              </a:lnSpc>
+              <a:spcBef>
+                <a:spcPts val="500"/>
+              </a:spcBef>
+              <a:buFont typeface="Arial"/>
+              <a:buChar char="•"/>
+              <a:defRPr sz="1800" kern="1200">
+                <a:solidFill>
+                  <a:schemeClr val="tx1"/>
+                </a:solidFill>
+                <a:latin typeface="+mn-lt"/>
+                <a:ea typeface="+mn-ea"/>
+                <a:cs typeface="+mn-cs"/>
+              </a:defRPr>
+            </a:lvl9pPr>
+          </a:lstStyle>
+          <a:p>
+            <a:r>
+              <a:rPr lang="en-IT" dirty="0">
+                <a:latin typeface="Arial"/>
+                <a:cs typeface="Arial"/>
+              </a:rPr>
+              <a:t>Yes, it's a demo</a:t>
+            </a:r>
+            <a:endParaRPr lang="en-US" dirty="0"/>
+          </a:p>
+        </p:txBody>
+      </p:sp>
     </p:spTree>
     <p:extLst>
       <p:ext uri="{BB962C8B-B14F-4D97-AF65-F5344CB8AC3E}">
-        <p14:creationId xmlns:p14="http://schemas.microsoft.com/office/powerpoint/2010/main" val="4057030523"/>
+        <p14:creationId xmlns:p14="http://schemas.microsoft.com/office/powerpoint/2010/main" val="1979839893"/>
       </p:ext>
     </p:extLst>
   </p:cSld>
@@ -12932,86 +11925,6 @@
 </a:theme>
 </file>
 
-<file path=ppt/webextensions/webextension1.xml><?xml version="1.0" encoding="utf-8"?>
-<we:webextension xmlns:we="http://schemas.microsoft.com/office/webextensions/webextension/2010/11" id="{E1D6287C-E119-4EB4-9553-4AA90814C03A}">
-  <we:reference id="wa200008736" version="1.0.0.0" store="en-US" storeType="OMEX"/>
-  <we:alternateReferences>
-    <we:reference id="WA200008736" version="1.0.0.0" store="WA200008736" storeType="OMEX"/>
-  </we:alternateReferences>
-  <we:properties>
-    <we:property name="dtServerUrl" value="&quot;http://localhost:3710&quot;"/>
-    <we:property name="dtDemoId" value="&quot;demo-mi7wlce4-lh10&quot;"/>
-    <we:property name="dtAddInSlideId" value="&quot;7&quot;"/>
-  </we:properties>
-  <we:bindings/>
-  <we:snapshot xmlns:r="http://schemas.openxmlformats.org/officeDocument/2006/relationships" r:embed="rId1"/>
-</we:webextension>
-</file>
-
-<file path=ppt/webextensions/webextension2.xml><?xml version="1.0" encoding="utf-8"?>
-<we:webextension xmlns:we="http://schemas.microsoft.com/office/webextensions/webextension/2010/11" id="{7FC1C454-888A-44F4-811F-6E89BE8663C7}">
-  <we:reference id="wa200008736" version="1.0.0.0" store="en-US" storeType="OMEX"/>
-  <we:alternateReferences>
-    <we:reference id="WA200008736" version="1.0.0.0" store="WA200008736" storeType="OMEX"/>
-  </we:alternateReferences>
-  <we:properties>
-    <we:property name="dtAddInSlideId" value="&quot;9&quot;"/>
-    <we:property name="dtDemoId" value="&quot;demo-mi67d68t-rc01&quot;"/>
-    <we:property name="dtServerUrl" value="&quot;http://localhost:3710&quot;"/>
-  </we:properties>
-  <we:bindings/>
-  <we:snapshot xmlns:r="http://schemas.openxmlformats.org/officeDocument/2006/relationships" r:embed="rId1"/>
-</we:webextension>
-</file>
-
-<file path=ppt/webextensions/webextension3.xml><?xml version="1.0" encoding="utf-8"?>
-<we:webextension xmlns:we="http://schemas.microsoft.com/office/webextensions/webextension/2010/11" id="{950736F9-0746-4D9C-B16C-A847C1836C07}">
-  <we:reference id="wa200008736" version="1.0.0.0" store="en-US" storeType="OMEX"/>
-  <we:alternateReferences>
-    <we:reference id="WA200008736" version="1.0.0.0" store="WA200008736" storeType="OMEX"/>
-  </we:alternateReferences>
-  <we:properties>
-    <we:property name="dtAddInSlideId" value="&quot;11&quot;"/>
-    <we:property name="dtDemoId" value="&quot;demo-mi665oql-prba&quot;"/>
-    <we:property name="dtServerUrl" value="&quot;http://localhost:3710&quot;"/>
-  </we:properties>
-  <we:bindings/>
-  <we:snapshot xmlns:r="http://schemas.openxmlformats.org/officeDocument/2006/relationships" r:embed="rId1"/>
-</we:webextension>
-</file>
-
-<file path=ppt/webextensions/webextension4.xml><?xml version="1.0" encoding="utf-8"?>
-<we:webextension xmlns:we="http://schemas.microsoft.com/office/webextensions/webextension/2010/11" id="{C53A98D1-B4A2-48F2-861F-980AF20D6155}">
-  <we:reference id="wa200008736" version="1.0.0.0" store="en-US" storeType="OMEX"/>
-  <we:alternateReferences>
-    <we:reference id="WA200008736" version="1.0.0.0" store="WA200008736" storeType="OMEX"/>
-  </we:alternateReferences>
-  <we:properties>
-    <we:property name="dtAddInSlideId" value="&quot;13&quot;"/>
-    <we:property name="dtDemoId" value="&quot;demo-mi66cnpy-h2tu&quot;"/>
-    <we:property name="dtServerUrl" value="&quot;http://localhost:3710&quot;"/>
-  </we:properties>
-  <we:bindings/>
-  <we:snapshot xmlns:r="http://schemas.openxmlformats.org/officeDocument/2006/relationships" r:embed="rId1"/>
-</we:webextension>
-</file>
-
-<file path=ppt/webextensions/webextension5.xml><?xml version="1.0" encoding="utf-8"?>
-<we:webextension xmlns:we="http://schemas.microsoft.com/office/webextensions/webextension/2010/11" id="{50E8D167-3FBD-40D7-B0B1-4EA29FCBB70E}">
-  <we:reference id="wa200008736" version="1.0.0.0" store="en-US" storeType="OMEX"/>
-  <we:alternateReferences>
-    <we:reference id="WA200008736" version="1.0.0.0" store="WA200008736" storeType="OMEX"/>
-  </we:alternateReferences>
-  <we:properties>
-    <we:property name="dtAddInSlideId" value="&quot;15&quot;"/>
-    <we:property name="dtDemoId" value="&quot;demo-mi66lt1n-v79y&quot;"/>
-    <we:property name="dtServerUrl" value="&quot;http://localhost:3710&quot;"/>
-  </we:properties>
-  <we:bindings/>
-  <we:snapshot xmlns:r="http://schemas.openxmlformats.org/officeDocument/2006/relationships" r:embed="rId1"/>
-</we:webextension>
-</file>
-
 <file path=customXml/item1.xml><?xml version="1.0" encoding="utf-8"?>
 <?mso-contentType ?>
 <FormTemplates xmlns="http://schemas.microsoft.com/sharepoint/v3/contenttype/forms">

--- a/.demo/ESPC25_SPFx_Slides.pptx
+++ b/.demo/ESPC25_SPFx_Slides.pptx
@@ -8,7 +8,7 @@
     <p:sldMasterId id="2147483684" r:id="rId7"/>
   </p:sldMasterIdLst>
   <p:notesMasterIdLst>
-    <p:notesMasterId r:id="rId21"/>
+    <p:notesMasterId r:id="rId24"/>
   </p:notesMasterIdLst>
   <p:sldIdLst>
     <p:sldId id="256" r:id="rId8"/>
@@ -18,12 +18,15 @@
     <p:sldId id="274" r:id="rId12"/>
     <p:sldId id="285" r:id="rId13"/>
     <p:sldId id="286" r:id="rId14"/>
-    <p:sldId id="275" r:id="rId15"/>
-    <p:sldId id="276" r:id="rId16"/>
-    <p:sldId id="277" r:id="rId17"/>
-    <p:sldId id="283" r:id="rId18"/>
-    <p:sldId id="281" r:id="rId19"/>
-    <p:sldId id="273" r:id="rId20"/>
+    <p:sldId id="287" r:id="rId15"/>
+    <p:sldId id="275" r:id="rId16"/>
+    <p:sldId id="288" r:id="rId17"/>
+    <p:sldId id="276" r:id="rId18"/>
+    <p:sldId id="289" r:id="rId19"/>
+    <p:sldId id="277" r:id="rId20"/>
+    <p:sldId id="283" r:id="rId21"/>
+    <p:sldId id="281" r:id="rId22"/>
+    <p:sldId id="273" r:id="rId23"/>
   </p:sldIdLst>
   <p:sldSz cx="12192000" cy="6858000"/>
   <p:notesSz cx="6858000" cy="9144000"/>
@@ -703,7 +706,7 @@
           <a:p>
             <a:fld id="{8DB4B101-3225-4967-95B5-ED5755256DE0}" type="datetimeFigureOut">
               <a:rPr lang="en-GB" smtClean="0"/>
-              <a:t>19/11/2025</a:t>
+              <a:t>22/11/2025</a:t>
             </a:fld>
             <a:endParaRPr lang="en-GB"/>
           </a:p>
@@ -1071,6 +1074,568 @@
         <p:cNvPr id="1" name="">
           <a:extLst>
             <a:ext uri="{FF2B5EF4-FFF2-40B4-BE49-F238E27FC236}">
+              <a16:creationId xmlns:a16="http://schemas.microsoft.com/office/drawing/2014/main" id="{7A251376-E98D-0D52-97E6-BE532ED4896C}"/>
+            </a:ext>
+          </a:extLst>
+        </p:cNvPr>
+        <p:cNvGrpSpPr/>
+        <p:nvPr/>
+      </p:nvGrpSpPr>
+      <p:grpSpPr>
+        <a:xfrm>
+          <a:off x="0" y="0"/>
+          <a:ext cx="0" cy="0"/>
+          <a:chOff x="0" y="0"/>
+          <a:chExt cx="0" cy="0"/>
+        </a:xfrm>
+      </p:grpSpPr>
+      <p:sp>
+        <p:nvSpPr>
+          <p:cNvPr id="2" name="Slide Image Placeholder 1">
+            <a:extLst>
+              <a:ext uri="{FF2B5EF4-FFF2-40B4-BE49-F238E27FC236}">
+                <a16:creationId xmlns:a16="http://schemas.microsoft.com/office/drawing/2014/main" id="{B2D8AE71-AB59-8C3B-C27F-22F9BB8AEE05}"/>
+              </a:ext>
+            </a:extLst>
+          </p:cNvPr>
+          <p:cNvSpPr>
+            <a:spLocks noGrp="1" noRot="1" noChangeAspect="1"/>
+          </p:cNvSpPr>
+          <p:nvPr>
+            <p:ph type="sldImg"/>
+          </p:nvPr>
+        </p:nvSpPr>
+        <p:spPr/>
+      </p:sp>
+      <p:sp>
+        <p:nvSpPr>
+          <p:cNvPr id="3" name="Notes Placeholder 2">
+            <a:extLst>
+              <a:ext uri="{FF2B5EF4-FFF2-40B4-BE49-F238E27FC236}">
+                <a16:creationId xmlns:a16="http://schemas.microsoft.com/office/drawing/2014/main" id="{5933BC22-A7D6-765F-B178-04AE9781FA06}"/>
+              </a:ext>
+            </a:extLst>
+          </p:cNvPr>
+          <p:cNvSpPr>
+            <a:spLocks noGrp="1"/>
+          </p:cNvSpPr>
+          <p:nvPr>
+            <p:ph type="body" idx="1"/>
+          </p:nvPr>
+        </p:nvSpPr>
+        <p:spPr/>
+        <p:txBody>
+          <a:bodyPr/>
+          <a:lstStyle/>
+          <a:p>
+            <a:endParaRPr lang="en-US" sz="1200" kern="1200" dirty="0">
+              <a:solidFill>
+                <a:schemeClr val="tx1"/>
+              </a:solidFill>
+              <a:effectLst/>
+              <a:latin typeface="+mn-lt"/>
+              <a:ea typeface="+mn-ea"/>
+              <a:cs typeface="+mn-cs"/>
+            </a:endParaRPr>
+          </a:p>
+        </p:txBody>
+      </p:sp>
+      <p:sp>
+        <p:nvSpPr>
+          <p:cNvPr id="4" name="Slide Number Placeholder 3">
+            <a:extLst>
+              <a:ext uri="{FF2B5EF4-FFF2-40B4-BE49-F238E27FC236}">
+                <a16:creationId xmlns:a16="http://schemas.microsoft.com/office/drawing/2014/main" id="{D80542DA-0172-2FD6-CE68-82AC0A024CEF}"/>
+              </a:ext>
+            </a:extLst>
+          </p:cNvPr>
+          <p:cNvSpPr>
+            <a:spLocks noGrp="1"/>
+          </p:cNvSpPr>
+          <p:nvPr>
+            <p:ph type="sldNum" sz="quarter" idx="5"/>
+          </p:nvPr>
+        </p:nvSpPr>
+        <p:spPr/>
+        <p:txBody>
+          <a:bodyPr/>
+          <a:lstStyle/>
+          <a:p>
+            <a:fld id="{7EB8C794-77EE-4724-B493-2E0907BFA558}" type="slidenum">
+              <a:rPr lang="en-GB" smtClean="0"/>
+              <a:t>12</a:t>
+            </a:fld>
+            <a:endParaRPr lang="en-GB"/>
+          </a:p>
+        </p:txBody>
+      </p:sp>
+    </p:spTree>
+    <p:extLst>
+      <p:ext uri="{BB962C8B-B14F-4D97-AF65-F5344CB8AC3E}">
+        <p14:creationId xmlns:p14="http://schemas.microsoft.com/office/powerpoint/2010/main" val="2339638766"/>
+      </p:ext>
+    </p:extLst>
+  </p:cSld>
+  <p:clrMapOvr>
+    <a:masterClrMapping/>
+  </p:clrMapOvr>
+</p:notes>
+</file>
+
+<file path=ppt/notesSlides/notesSlide11.xml><?xml version="1.0" encoding="utf-8"?>
+<p:notes xmlns:a="http://schemas.openxmlformats.org/drawingml/2006/main" xmlns:r="http://schemas.openxmlformats.org/officeDocument/2006/relationships" xmlns:p="http://schemas.openxmlformats.org/presentationml/2006/main">
+  <p:cSld>
+    <p:spTree>
+      <p:nvGrpSpPr>
+        <p:cNvPr id="1" name="">
+          <a:extLst>
+            <a:ext uri="{FF2B5EF4-FFF2-40B4-BE49-F238E27FC236}">
+              <a16:creationId xmlns:a16="http://schemas.microsoft.com/office/drawing/2014/main" id="{E5E34A03-EDDC-496B-A252-C7FFBF6910FF}"/>
+            </a:ext>
+          </a:extLst>
+        </p:cNvPr>
+        <p:cNvGrpSpPr/>
+        <p:nvPr/>
+      </p:nvGrpSpPr>
+      <p:grpSpPr>
+        <a:xfrm>
+          <a:off x="0" y="0"/>
+          <a:ext cx="0" cy="0"/>
+          <a:chOff x="0" y="0"/>
+          <a:chExt cx="0" cy="0"/>
+        </a:xfrm>
+      </p:grpSpPr>
+      <p:sp>
+        <p:nvSpPr>
+          <p:cNvPr id="2" name="Slide Image Placeholder 1">
+            <a:extLst>
+              <a:ext uri="{FF2B5EF4-FFF2-40B4-BE49-F238E27FC236}">
+                <a16:creationId xmlns:a16="http://schemas.microsoft.com/office/drawing/2014/main" id="{48A9EF52-BEF5-A1DD-9400-B0F6CF9FCB38}"/>
+              </a:ext>
+            </a:extLst>
+          </p:cNvPr>
+          <p:cNvSpPr>
+            <a:spLocks noGrp="1" noRot="1" noChangeAspect="1"/>
+          </p:cNvSpPr>
+          <p:nvPr>
+            <p:ph type="sldImg"/>
+          </p:nvPr>
+        </p:nvSpPr>
+        <p:spPr/>
+      </p:sp>
+      <p:sp>
+        <p:nvSpPr>
+          <p:cNvPr id="3" name="Notes Placeholder 2">
+            <a:extLst>
+              <a:ext uri="{FF2B5EF4-FFF2-40B4-BE49-F238E27FC236}">
+                <a16:creationId xmlns:a16="http://schemas.microsoft.com/office/drawing/2014/main" id="{9CD63604-03EE-C33D-885B-D60B1D085275}"/>
+              </a:ext>
+            </a:extLst>
+          </p:cNvPr>
+          <p:cNvSpPr>
+            <a:spLocks noGrp="1"/>
+          </p:cNvSpPr>
+          <p:nvPr>
+            <p:ph type="body" idx="1"/>
+          </p:nvPr>
+        </p:nvSpPr>
+        <p:spPr/>
+        <p:txBody>
+          <a:bodyPr/>
+          <a:lstStyle/>
+          <a:p>
+            <a:r>
+              <a:rPr lang="en-US" dirty="0">
+                <a:ea typeface="Calibri"/>
+                <a:cs typeface="Calibri"/>
+              </a:rPr>
+              <a:t>How often do we use tests in our projects?</a:t>
+            </a:r>
+          </a:p>
+          <a:p>
+            <a:r>
+              <a:rPr lang="en-US">
+                <a:ea typeface="Calibri"/>
+                <a:cs typeface="Calibri"/>
+              </a:rPr>
+              <a:t>It depends on:</a:t>
+            </a:r>
+          </a:p>
+          <a:p>
+            <a:pPr marL="171450" indent="-171450">
+              <a:buFont typeface="Calibri"/>
+              <a:buChar char="-"/>
+            </a:pPr>
+            <a:r>
+              <a:rPr lang="en-US" dirty="0">
+                <a:ea typeface="Calibri"/>
+                <a:cs typeface="Calibri"/>
+              </a:rPr>
+              <a:t>Budget</a:t>
+            </a:r>
+          </a:p>
+          <a:p>
+            <a:pPr marL="171450" indent="-171450">
+              <a:buFont typeface="Calibri"/>
+              <a:buChar char="-"/>
+            </a:pPr>
+            <a:r>
+              <a:rPr lang="en-US" dirty="0">
+                <a:ea typeface="Calibri"/>
+                <a:cs typeface="Calibri"/>
+              </a:rPr>
+              <a:t>Timing</a:t>
+            </a:r>
+          </a:p>
+          <a:p>
+            <a:pPr marL="171450" indent="-171450">
+              <a:buFont typeface="Calibri"/>
+              <a:buChar char="-"/>
+            </a:pPr>
+            <a:r>
+              <a:rPr lang="en-US" dirty="0">
+                <a:ea typeface="Calibri"/>
+                <a:cs typeface="Calibri"/>
+              </a:rPr>
+              <a:t>Customers says it's not needed</a:t>
+            </a:r>
+          </a:p>
+          <a:p>
+            <a:endParaRPr lang="en-US" dirty="0">
+              <a:ea typeface="Calibri"/>
+              <a:cs typeface="Calibri"/>
+            </a:endParaRPr>
+          </a:p>
+          <a:p>
+            <a:r>
+              <a:rPr lang="en-US" dirty="0">
+                <a:ea typeface="Calibri"/>
+                <a:cs typeface="Calibri"/>
+              </a:rPr>
+              <a:t>Giveaways</a:t>
+            </a:r>
+          </a:p>
+          <a:p>
+            <a:pPr marL="171450" indent="-171450">
+              <a:buFont typeface="Calibri"/>
+              <a:buChar char="-"/>
+            </a:pPr>
+            <a:r>
+              <a:rPr lang="en-US" dirty="0">
+                <a:ea typeface="Calibri"/>
+                <a:cs typeface="Calibri"/>
+              </a:rPr>
+              <a:t>Unit tests saves can save our life and are responsible to have an expected behavior of your application over multiple deployments and changes.</a:t>
+            </a:r>
+          </a:p>
+          <a:p>
+            <a:pPr marL="171450" indent="-171450">
+              <a:buFont typeface="Calibri"/>
+              <a:buChar char="-"/>
+            </a:pPr>
+            <a:r>
+              <a:rPr lang="en-US" dirty="0">
+                <a:ea typeface="Calibri"/>
+                <a:cs typeface="Calibri"/>
+              </a:rPr>
+              <a:t>Who writes the code should not test it but leave it to another person of the team</a:t>
+            </a:r>
+          </a:p>
+          <a:p>
+            <a:pPr marL="171450" indent="-171450">
+              <a:buFont typeface="Calibri"/>
+              <a:buChar char="-"/>
+            </a:pPr>
+            <a:endParaRPr lang="en-US" dirty="0">
+              <a:ea typeface="Calibri"/>
+              <a:cs typeface="Calibri"/>
+            </a:endParaRPr>
+          </a:p>
+          <a:p>
+            <a:pPr marL="171450" indent="-171450">
+              <a:buFont typeface="Calibri"/>
+              <a:buChar char="-"/>
+            </a:pPr>
+            <a:endParaRPr lang="en-US" dirty="0">
+              <a:ea typeface="Calibri"/>
+              <a:cs typeface="Calibri"/>
+            </a:endParaRPr>
+          </a:p>
+        </p:txBody>
+      </p:sp>
+      <p:sp>
+        <p:nvSpPr>
+          <p:cNvPr id="4" name="Slide Number Placeholder 3">
+            <a:extLst>
+              <a:ext uri="{FF2B5EF4-FFF2-40B4-BE49-F238E27FC236}">
+                <a16:creationId xmlns:a16="http://schemas.microsoft.com/office/drawing/2014/main" id="{C242478F-627E-D87B-5821-E7FA3AAFEC44}"/>
+              </a:ext>
+            </a:extLst>
+          </p:cNvPr>
+          <p:cNvSpPr>
+            <a:spLocks noGrp="1"/>
+          </p:cNvSpPr>
+          <p:nvPr>
+            <p:ph type="sldNum" sz="quarter" idx="5"/>
+          </p:nvPr>
+        </p:nvSpPr>
+        <p:spPr/>
+        <p:txBody>
+          <a:bodyPr/>
+          <a:lstStyle/>
+          <a:p>
+            <a:fld id="{7EB8C794-77EE-4724-B493-2E0907BFA558}" type="slidenum">
+              <a:rPr lang="en-GB" smtClean="0"/>
+              <a:t>13</a:t>
+            </a:fld>
+            <a:endParaRPr lang="en-GB"/>
+          </a:p>
+        </p:txBody>
+      </p:sp>
+    </p:spTree>
+    <p:extLst>
+      <p:ext uri="{BB962C8B-B14F-4D97-AF65-F5344CB8AC3E}">
+        <p14:creationId xmlns:p14="http://schemas.microsoft.com/office/powerpoint/2010/main" val="2612603715"/>
+      </p:ext>
+    </p:extLst>
+  </p:cSld>
+  <p:clrMapOvr>
+    <a:masterClrMapping/>
+  </p:clrMapOvr>
+</p:notes>
+</file>
+
+<file path=ppt/notesSlides/notesSlide12.xml><?xml version="1.0" encoding="utf-8"?>
+<p:notes xmlns:a="http://schemas.openxmlformats.org/drawingml/2006/main" xmlns:r="http://schemas.openxmlformats.org/officeDocument/2006/relationships" xmlns:p="http://schemas.openxmlformats.org/presentationml/2006/main">
+  <p:cSld>
+    <p:spTree>
+      <p:nvGrpSpPr>
+        <p:cNvPr id="1" name="">
+          <a:extLst>
+            <a:ext uri="{FF2B5EF4-FFF2-40B4-BE49-F238E27FC236}">
+              <a16:creationId xmlns:a16="http://schemas.microsoft.com/office/drawing/2014/main" id="{2D45DC49-A269-D24C-E4C8-75E5BCE198F7}"/>
+            </a:ext>
+          </a:extLst>
+        </p:cNvPr>
+        <p:cNvGrpSpPr/>
+        <p:nvPr/>
+      </p:nvGrpSpPr>
+      <p:grpSpPr>
+        <a:xfrm>
+          <a:off x="0" y="0"/>
+          <a:ext cx="0" cy="0"/>
+          <a:chOff x="0" y="0"/>
+          <a:chExt cx="0" cy="0"/>
+        </a:xfrm>
+      </p:grpSpPr>
+      <p:sp>
+        <p:nvSpPr>
+          <p:cNvPr id="2" name="Slide Image Placeholder 1">
+            <a:extLst>
+              <a:ext uri="{FF2B5EF4-FFF2-40B4-BE49-F238E27FC236}">
+                <a16:creationId xmlns:a16="http://schemas.microsoft.com/office/drawing/2014/main" id="{722FAF7C-28B0-293F-58BE-68267837BDBE}"/>
+              </a:ext>
+            </a:extLst>
+          </p:cNvPr>
+          <p:cNvSpPr>
+            <a:spLocks noGrp="1" noRot="1" noChangeAspect="1"/>
+          </p:cNvSpPr>
+          <p:nvPr>
+            <p:ph type="sldImg"/>
+          </p:nvPr>
+        </p:nvSpPr>
+        <p:spPr/>
+      </p:sp>
+      <p:sp>
+        <p:nvSpPr>
+          <p:cNvPr id="3" name="Notes Placeholder 2">
+            <a:extLst>
+              <a:ext uri="{FF2B5EF4-FFF2-40B4-BE49-F238E27FC236}">
+                <a16:creationId xmlns:a16="http://schemas.microsoft.com/office/drawing/2014/main" id="{66A4D9B9-AA9D-7422-0FFE-2998DA32119B}"/>
+              </a:ext>
+            </a:extLst>
+          </p:cNvPr>
+          <p:cNvSpPr>
+            <a:spLocks noGrp="1"/>
+          </p:cNvSpPr>
+          <p:nvPr>
+            <p:ph type="body" idx="1"/>
+          </p:nvPr>
+        </p:nvSpPr>
+        <p:spPr/>
+        <p:txBody>
+          <a:bodyPr/>
+          <a:lstStyle/>
+          <a:p>
+            <a:r>
+              <a:rPr lang="en-US" dirty="0">
+                <a:ea typeface="Calibri"/>
+                <a:cs typeface="Calibri"/>
+              </a:rPr>
+              <a:t>How often do we use tests in our projects?</a:t>
+            </a:r>
+          </a:p>
+          <a:p>
+            <a:r>
+              <a:rPr lang="en-US">
+                <a:ea typeface="Calibri"/>
+                <a:cs typeface="Calibri"/>
+              </a:rPr>
+              <a:t>It depends on:</a:t>
+            </a:r>
+          </a:p>
+          <a:p>
+            <a:pPr marL="171450" indent="-171450">
+              <a:buFont typeface="Calibri"/>
+              <a:buChar char="-"/>
+            </a:pPr>
+            <a:r>
+              <a:rPr lang="en-US" dirty="0">
+                <a:ea typeface="Calibri"/>
+                <a:cs typeface="Calibri"/>
+              </a:rPr>
+              <a:t>Budget</a:t>
+            </a:r>
+          </a:p>
+          <a:p>
+            <a:pPr marL="171450" indent="-171450">
+              <a:buFont typeface="Calibri"/>
+              <a:buChar char="-"/>
+            </a:pPr>
+            <a:r>
+              <a:rPr lang="en-US" dirty="0">
+                <a:ea typeface="Calibri"/>
+                <a:cs typeface="Calibri"/>
+              </a:rPr>
+              <a:t>Timing</a:t>
+            </a:r>
+          </a:p>
+          <a:p>
+            <a:pPr marL="171450" indent="-171450">
+              <a:buFont typeface="Calibri"/>
+              <a:buChar char="-"/>
+            </a:pPr>
+            <a:r>
+              <a:rPr lang="en-US" dirty="0">
+                <a:ea typeface="Calibri"/>
+                <a:cs typeface="Calibri"/>
+              </a:rPr>
+              <a:t>Customers says it's not needed</a:t>
+            </a:r>
+          </a:p>
+          <a:p>
+            <a:endParaRPr lang="en-US" dirty="0">
+              <a:ea typeface="Calibri"/>
+              <a:cs typeface="Calibri"/>
+            </a:endParaRPr>
+          </a:p>
+          <a:p>
+            <a:r>
+              <a:rPr lang="en-US" dirty="0">
+                <a:ea typeface="Calibri"/>
+                <a:cs typeface="Calibri"/>
+              </a:rPr>
+              <a:t>Giveaways</a:t>
+            </a:r>
+          </a:p>
+          <a:p>
+            <a:pPr marL="171450" indent="-171450">
+              <a:buFont typeface="Calibri"/>
+              <a:buChar char="-"/>
+            </a:pPr>
+            <a:r>
+              <a:rPr lang="en-US" dirty="0">
+                <a:ea typeface="Calibri"/>
+                <a:cs typeface="Calibri"/>
+              </a:rPr>
+              <a:t>Unit tests saves can save our life and are responsible to have an expected behavior of your application over multiple deployments and changes.</a:t>
+            </a:r>
+          </a:p>
+          <a:p>
+            <a:pPr marL="171450" indent="-171450">
+              <a:buFont typeface="Calibri"/>
+              <a:buChar char="-"/>
+            </a:pPr>
+            <a:r>
+              <a:rPr lang="en-US" dirty="0">
+                <a:ea typeface="Calibri"/>
+                <a:cs typeface="Calibri"/>
+              </a:rPr>
+              <a:t>Who writes the code should not test it but leave it to another person of the team</a:t>
+            </a:r>
+          </a:p>
+          <a:p>
+            <a:pPr marL="171450" indent="-171450">
+              <a:buFont typeface="Calibri"/>
+              <a:buChar char="-"/>
+            </a:pPr>
+            <a:endParaRPr lang="en-US" dirty="0">
+              <a:ea typeface="Calibri"/>
+              <a:cs typeface="Calibri"/>
+            </a:endParaRPr>
+          </a:p>
+          <a:p>
+            <a:pPr marL="171450" indent="-171450">
+              <a:buFont typeface="Calibri"/>
+              <a:buChar char="-"/>
+            </a:pPr>
+            <a:endParaRPr lang="en-US" dirty="0">
+              <a:ea typeface="Calibri"/>
+              <a:cs typeface="Calibri"/>
+            </a:endParaRPr>
+          </a:p>
+        </p:txBody>
+      </p:sp>
+      <p:sp>
+        <p:nvSpPr>
+          <p:cNvPr id="4" name="Slide Number Placeholder 3">
+            <a:extLst>
+              <a:ext uri="{FF2B5EF4-FFF2-40B4-BE49-F238E27FC236}">
+                <a16:creationId xmlns:a16="http://schemas.microsoft.com/office/drawing/2014/main" id="{0D40BFFB-821F-4B9A-38C5-7DC704AF23EB}"/>
+              </a:ext>
+            </a:extLst>
+          </p:cNvPr>
+          <p:cNvSpPr>
+            <a:spLocks noGrp="1"/>
+          </p:cNvSpPr>
+          <p:nvPr>
+            <p:ph type="sldNum" sz="quarter" idx="5"/>
+          </p:nvPr>
+        </p:nvSpPr>
+        <p:spPr/>
+        <p:txBody>
+          <a:bodyPr/>
+          <a:lstStyle/>
+          <a:p>
+            <a:fld id="{7EB8C794-77EE-4724-B493-2E0907BFA558}" type="slidenum">
+              <a:rPr lang="en-GB" smtClean="0"/>
+              <a:t>14</a:t>
+            </a:fld>
+            <a:endParaRPr lang="en-GB"/>
+          </a:p>
+        </p:txBody>
+      </p:sp>
+    </p:spTree>
+    <p:extLst>
+      <p:ext uri="{BB962C8B-B14F-4D97-AF65-F5344CB8AC3E}">
+        <p14:creationId xmlns:p14="http://schemas.microsoft.com/office/powerpoint/2010/main" val="1301111360"/>
+      </p:ext>
+    </p:extLst>
+  </p:cSld>
+  <p:clrMapOvr>
+    <a:masterClrMapping/>
+  </p:clrMapOvr>
+</p:notes>
+</file>
+
+<file path=ppt/notesSlides/notesSlide13.xml><?xml version="1.0" encoding="utf-8"?>
+<p:notes xmlns:a="http://schemas.openxmlformats.org/drawingml/2006/main" xmlns:r="http://schemas.openxmlformats.org/officeDocument/2006/relationships" xmlns:p="http://schemas.openxmlformats.org/presentationml/2006/main">
+  <p:cSld>
+    <p:spTree>
+      <p:nvGrpSpPr>
+        <p:cNvPr id="1" name="">
+          <a:extLst>
+            <a:ext uri="{FF2B5EF4-FFF2-40B4-BE49-F238E27FC236}">
               <a16:creationId xmlns:a16="http://schemas.microsoft.com/office/drawing/2014/main" id="{57A32D5C-DF60-A326-82D2-59F7D398ADA0}"/>
             </a:ext>
           </a:extLst>
@@ -1308,7 +1873,7 @@
           <a:p>
             <a:fld id="{7EB8C794-77EE-4724-B493-2E0907BFA558}" type="slidenum">
               <a:rPr lang="en-GB" smtClean="0"/>
-              <a:t>12</a:t>
+              <a:t>15</a:t>
             </a:fld>
             <a:endParaRPr lang="en-GB"/>
           </a:p>
@@ -1327,7 +1892,7 @@
 </p:notes>
 </file>
 
-<file path=ppt/notesSlides/notesSlide11.xml><?xml version="1.0" encoding="utf-8"?>
+<file path=ppt/notesSlides/notesSlide14.xml><?xml version="1.0" encoding="utf-8"?>
 <p:notes xmlns:a="http://schemas.openxmlformats.org/drawingml/2006/main" xmlns:r="http://schemas.openxmlformats.org/officeDocument/2006/relationships" xmlns:p="http://schemas.openxmlformats.org/presentationml/2006/main">
   <p:cSld>
     <p:spTree>
@@ -1400,7 +1965,7 @@
           <a:p>
             <a:fld id="{7EB8C794-77EE-4724-B493-2E0907BFA558}" type="slidenum">
               <a:rPr lang="en-GB" smtClean="0"/>
-              <a:t>13</a:t>
+              <a:t>16</a:t>
             </a:fld>
             <a:endParaRPr lang="en-GB"/>
           </a:p>
@@ -2111,6 +2676,122 @@
         <p:cNvPr id="1" name="">
           <a:extLst>
             <a:ext uri="{FF2B5EF4-FFF2-40B4-BE49-F238E27FC236}">
+              <a16:creationId xmlns:a16="http://schemas.microsoft.com/office/drawing/2014/main" id="{E103AC6C-8741-79FD-C830-353BF90C43A0}"/>
+            </a:ext>
+          </a:extLst>
+        </p:cNvPr>
+        <p:cNvGrpSpPr/>
+        <p:nvPr/>
+      </p:nvGrpSpPr>
+      <p:grpSpPr>
+        <a:xfrm>
+          <a:off x="0" y="0"/>
+          <a:ext cx="0" cy="0"/>
+          <a:chOff x="0" y="0"/>
+          <a:chExt cx="0" cy="0"/>
+        </a:xfrm>
+      </p:grpSpPr>
+      <p:sp>
+        <p:nvSpPr>
+          <p:cNvPr id="2" name="Slide Image Placeholder 1">
+            <a:extLst>
+              <a:ext uri="{FF2B5EF4-FFF2-40B4-BE49-F238E27FC236}">
+                <a16:creationId xmlns:a16="http://schemas.microsoft.com/office/drawing/2014/main" id="{C63E1990-444C-AD0A-7FF6-85CD6BB42228}"/>
+              </a:ext>
+            </a:extLst>
+          </p:cNvPr>
+          <p:cNvSpPr>
+            <a:spLocks noGrp="1" noRot="1" noChangeAspect="1"/>
+          </p:cNvSpPr>
+          <p:nvPr>
+            <p:ph type="sldImg"/>
+          </p:nvPr>
+        </p:nvSpPr>
+        <p:spPr/>
+      </p:sp>
+      <p:sp>
+        <p:nvSpPr>
+          <p:cNvPr id="3" name="Notes Placeholder 2">
+            <a:extLst>
+              <a:ext uri="{FF2B5EF4-FFF2-40B4-BE49-F238E27FC236}">
+                <a16:creationId xmlns:a16="http://schemas.microsoft.com/office/drawing/2014/main" id="{E9B4154A-8546-8090-4507-A01E1F8201F3}"/>
+              </a:ext>
+            </a:extLst>
+          </p:cNvPr>
+          <p:cNvSpPr>
+            <a:spLocks noGrp="1"/>
+          </p:cNvSpPr>
+          <p:nvPr>
+            <p:ph type="body" idx="1"/>
+          </p:nvPr>
+        </p:nvSpPr>
+        <p:spPr/>
+        <p:txBody>
+          <a:bodyPr/>
+          <a:lstStyle/>
+          <a:p>
+            <a:endParaRPr lang="en-US" sz="1200" kern="1200" dirty="0">
+              <a:solidFill>
+                <a:schemeClr val="tx1"/>
+              </a:solidFill>
+              <a:effectLst/>
+              <a:latin typeface="+mn-lt"/>
+              <a:ea typeface="+mn-ea"/>
+              <a:cs typeface="+mn-cs"/>
+            </a:endParaRPr>
+          </a:p>
+        </p:txBody>
+      </p:sp>
+      <p:sp>
+        <p:nvSpPr>
+          <p:cNvPr id="4" name="Slide Number Placeholder 3">
+            <a:extLst>
+              <a:ext uri="{FF2B5EF4-FFF2-40B4-BE49-F238E27FC236}">
+                <a16:creationId xmlns:a16="http://schemas.microsoft.com/office/drawing/2014/main" id="{D0420E7B-DB96-BB84-F486-8291DF238D2F}"/>
+              </a:ext>
+            </a:extLst>
+          </p:cNvPr>
+          <p:cNvSpPr>
+            <a:spLocks noGrp="1"/>
+          </p:cNvSpPr>
+          <p:nvPr>
+            <p:ph type="sldNum" sz="quarter" idx="5"/>
+          </p:nvPr>
+        </p:nvSpPr>
+        <p:spPr/>
+        <p:txBody>
+          <a:bodyPr/>
+          <a:lstStyle/>
+          <a:p>
+            <a:fld id="{7EB8C794-77EE-4724-B493-2E0907BFA558}" type="slidenum">
+              <a:rPr lang="en-GB" smtClean="0"/>
+              <a:t>8</a:t>
+            </a:fld>
+            <a:endParaRPr lang="en-GB"/>
+          </a:p>
+        </p:txBody>
+      </p:sp>
+    </p:spTree>
+    <p:extLst>
+      <p:ext uri="{BB962C8B-B14F-4D97-AF65-F5344CB8AC3E}">
+        <p14:creationId xmlns:p14="http://schemas.microsoft.com/office/powerpoint/2010/main" val="2617264847"/>
+      </p:ext>
+    </p:extLst>
+  </p:cSld>
+  <p:clrMapOvr>
+    <a:masterClrMapping/>
+  </p:clrMapOvr>
+</p:notes>
+</file>
+
+<file path=ppt/notesSlides/notesSlide7.xml><?xml version="1.0" encoding="utf-8"?>
+<p:notes xmlns:a="http://schemas.openxmlformats.org/drawingml/2006/main" xmlns:r="http://schemas.openxmlformats.org/officeDocument/2006/relationships" xmlns:p="http://schemas.openxmlformats.org/presentationml/2006/main">
+  <p:cSld>
+    <p:spTree>
+      <p:nvGrpSpPr>
+        <p:cNvPr id="1" name="">
+          <a:extLst>
+            <a:ext uri="{FF2B5EF4-FFF2-40B4-BE49-F238E27FC236}">
               <a16:creationId xmlns:a16="http://schemas.microsoft.com/office/drawing/2014/main" id="{DB31D178-C0B9-2116-DE8E-6C6067D30768}"/>
             </a:ext>
           </a:extLst>
@@ -2192,7 +2873,7 @@
           <a:p>
             <a:fld id="{7EB8C794-77EE-4724-B493-2E0907BFA558}" type="slidenum">
               <a:rPr lang="en-GB" smtClean="0"/>
-              <a:t>8</a:t>
+              <a:t>9</a:t>
             </a:fld>
             <a:endParaRPr lang="en-GB"/>
           </a:p>
@@ -2211,7 +2892,123 @@
 </p:notes>
 </file>
 
-<file path=ppt/notesSlides/notesSlide7.xml><?xml version="1.0" encoding="utf-8"?>
+<file path=ppt/notesSlides/notesSlide8.xml><?xml version="1.0" encoding="utf-8"?>
+<p:notes xmlns:a="http://schemas.openxmlformats.org/drawingml/2006/main" xmlns:r="http://schemas.openxmlformats.org/officeDocument/2006/relationships" xmlns:p="http://schemas.openxmlformats.org/presentationml/2006/main">
+  <p:cSld>
+    <p:spTree>
+      <p:nvGrpSpPr>
+        <p:cNvPr id="1" name="">
+          <a:extLst>
+            <a:ext uri="{FF2B5EF4-FFF2-40B4-BE49-F238E27FC236}">
+              <a16:creationId xmlns:a16="http://schemas.microsoft.com/office/drawing/2014/main" id="{E9622399-B1E6-259A-BBB9-859916C1B001}"/>
+            </a:ext>
+          </a:extLst>
+        </p:cNvPr>
+        <p:cNvGrpSpPr/>
+        <p:nvPr/>
+      </p:nvGrpSpPr>
+      <p:grpSpPr>
+        <a:xfrm>
+          <a:off x="0" y="0"/>
+          <a:ext cx="0" cy="0"/>
+          <a:chOff x="0" y="0"/>
+          <a:chExt cx="0" cy="0"/>
+        </a:xfrm>
+      </p:grpSpPr>
+      <p:sp>
+        <p:nvSpPr>
+          <p:cNvPr id="2" name="Slide Image Placeholder 1">
+            <a:extLst>
+              <a:ext uri="{FF2B5EF4-FFF2-40B4-BE49-F238E27FC236}">
+                <a16:creationId xmlns:a16="http://schemas.microsoft.com/office/drawing/2014/main" id="{EB630D2C-0F1A-A5AD-3BDB-8D10BBAA5D12}"/>
+              </a:ext>
+            </a:extLst>
+          </p:cNvPr>
+          <p:cNvSpPr>
+            <a:spLocks noGrp="1" noRot="1" noChangeAspect="1"/>
+          </p:cNvSpPr>
+          <p:nvPr>
+            <p:ph type="sldImg"/>
+          </p:nvPr>
+        </p:nvSpPr>
+        <p:spPr/>
+      </p:sp>
+      <p:sp>
+        <p:nvSpPr>
+          <p:cNvPr id="3" name="Notes Placeholder 2">
+            <a:extLst>
+              <a:ext uri="{FF2B5EF4-FFF2-40B4-BE49-F238E27FC236}">
+                <a16:creationId xmlns:a16="http://schemas.microsoft.com/office/drawing/2014/main" id="{48776B68-DD89-D3C6-4C8B-663C0EADF87C}"/>
+              </a:ext>
+            </a:extLst>
+          </p:cNvPr>
+          <p:cNvSpPr>
+            <a:spLocks noGrp="1"/>
+          </p:cNvSpPr>
+          <p:nvPr>
+            <p:ph type="body" idx="1"/>
+          </p:nvPr>
+        </p:nvSpPr>
+        <p:spPr/>
+        <p:txBody>
+          <a:bodyPr/>
+          <a:lstStyle/>
+          <a:p>
+            <a:endParaRPr lang="en-US" sz="1200" kern="1200" dirty="0">
+              <a:solidFill>
+                <a:schemeClr val="tx1"/>
+              </a:solidFill>
+              <a:effectLst/>
+              <a:latin typeface="+mn-lt"/>
+              <a:ea typeface="+mn-ea"/>
+              <a:cs typeface="+mn-cs"/>
+            </a:endParaRPr>
+          </a:p>
+        </p:txBody>
+      </p:sp>
+      <p:sp>
+        <p:nvSpPr>
+          <p:cNvPr id="4" name="Slide Number Placeholder 3">
+            <a:extLst>
+              <a:ext uri="{FF2B5EF4-FFF2-40B4-BE49-F238E27FC236}">
+                <a16:creationId xmlns:a16="http://schemas.microsoft.com/office/drawing/2014/main" id="{96A56057-8F57-3A0E-B88E-0564668DB9B8}"/>
+              </a:ext>
+            </a:extLst>
+          </p:cNvPr>
+          <p:cNvSpPr>
+            <a:spLocks noGrp="1"/>
+          </p:cNvSpPr>
+          <p:nvPr>
+            <p:ph type="sldNum" sz="quarter" idx="5"/>
+          </p:nvPr>
+        </p:nvSpPr>
+        <p:spPr/>
+        <p:txBody>
+          <a:bodyPr/>
+          <a:lstStyle/>
+          <a:p>
+            <a:fld id="{7EB8C794-77EE-4724-B493-2E0907BFA558}" type="slidenum">
+              <a:rPr lang="en-GB" smtClean="0"/>
+              <a:t>10</a:t>
+            </a:fld>
+            <a:endParaRPr lang="en-GB"/>
+          </a:p>
+        </p:txBody>
+      </p:sp>
+    </p:spTree>
+    <p:extLst>
+      <p:ext uri="{BB962C8B-B14F-4D97-AF65-F5344CB8AC3E}">
+        <p14:creationId xmlns:p14="http://schemas.microsoft.com/office/powerpoint/2010/main" val="3572504598"/>
+      </p:ext>
+    </p:extLst>
+  </p:cSld>
+  <p:clrMapOvr>
+    <a:masterClrMapping/>
+  </p:clrMapOvr>
+</p:notes>
+</file>
+
+<file path=ppt/notesSlides/notesSlide9.xml><?xml version="1.0" encoding="utf-8"?>
 <p:notes xmlns:a="http://schemas.openxmlformats.org/drawingml/2006/main" xmlns:r="http://schemas.openxmlformats.org/officeDocument/2006/relationships" xmlns:p="http://schemas.openxmlformats.org/presentationml/2006/main">
   <p:cSld>
     <p:spTree>
@@ -2300,7 +3097,7 @@
           <a:p>
             <a:fld id="{7EB8C794-77EE-4724-B493-2E0907BFA558}" type="slidenum">
               <a:rPr lang="en-GB" smtClean="0"/>
-              <a:t>9</a:t>
+              <a:t>11</a:t>
             </a:fld>
             <a:endParaRPr lang="en-GB"/>
           </a:p>
@@ -2310,452 +3107,6 @@
     <p:extLst>
       <p:ext uri="{BB962C8B-B14F-4D97-AF65-F5344CB8AC3E}">
         <p14:creationId xmlns:p14="http://schemas.microsoft.com/office/powerpoint/2010/main" val="4161228640"/>
-      </p:ext>
-    </p:extLst>
-  </p:cSld>
-  <p:clrMapOvr>
-    <a:masterClrMapping/>
-  </p:clrMapOvr>
-</p:notes>
-</file>
-
-<file path=ppt/notesSlides/notesSlide8.xml><?xml version="1.0" encoding="utf-8"?>
-<p:notes xmlns:a="http://schemas.openxmlformats.org/drawingml/2006/main" xmlns:r="http://schemas.openxmlformats.org/officeDocument/2006/relationships" xmlns:p="http://schemas.openxmlformats.org/presentationml/2006/main">
-  <p:cSld>
-    <p:spTree>
-      <p:nvGrpSpPr>
-        <p:cNvPr id="1" name="">
-          <a:extLst>
-            <a:ext uri="{FF2B5EF4-FFF2-40B4-BE49-F238E27FC236}">
-              <a16:creationId xmlns:a16="http://schemas.microsoft.com/office/drawing/2014/main" id="{E5E34A03-EDDC-496B-A252-C7FFBF6910FF}"/>
-            </a:ext>
-          </a:extLst>
-        </p:cNvPr>
-        <p:cNvGrpSpPr/>
-        <p:nvPr/>
-      </p:nvGrpSpPr>
-      <p:grpSpPr>
-        <a:xfrm>
-          <a:off x="0" y="0"/>
-          <a:ext cx="0" cy="0"/>
-          <a:chOff x="0" y="0"/>
-          <a:chExt cx="0" cy="0"/>
-        </a:xfrm>
-      </p:grpSpPr>
-      <p:sp>
-        <p:nvSpPr>
-          <p:cNvPr id="2" name="Slide Image Placeholder 1">
-            <a:extLst>
-              <a:ext uri="{FF2B5EF4-FFF2-40B4-BE49-F238E27FC236}">
-                <a16:creationId xmlns:a16="http://schemas.microsoft.com/office/drawing/2014/main" id="{48A9EF52-BEF5-A1DD-9400-B0F6CF9FCB38}"/>
-              </a:ext>
-            </a:extLst>
-          </p:cNvPr>
-          <p:cNvSpPr>
-            <a:spLocks noGrp="1" noRot="1" noChangeAspect="1"/>
-          </p:cNvSpPr>
-          <p:nvPr>
-            <p:ph type="sldImg"/>
-          </p:nvPr>
-        </p:nvSpPr>
-        <p:spPr/>
-      </p:sp>
-      <p:sp>
-        <p:nvSpPr>
-          <p:cNvPr id="3" name="Notes Placeholder 2">
-            <a:extLst>
-              <a:ext uri="{FF2B5EF4-FFF2-40B4-BE49-F238E27FC236}">
-                <a16:creationId xmlns:a16="http://schemas.microsoft.com/office/drawing/2014/main" id="{9CD63604-03EE-C33D-885B-D60B1D085275}"/>
-              </a:ext>
-            </a:extLst>
-          </p:cNvPr>
-          <p:cNvSpPr>
-            <a:spLocks noGrp="1"/>
-          </p:cNvSpPr>
-          <p:nvPr>
-            <p:ph type="body" idx="1"/>
-          </p:nvPr>
-        </p:nvSpPr>
-        <p:spPr/>
-        <p:txBody>
-          <a:bodyPr/>
-          <a:lstStyle/>
-          <a:p>
-            <a:r>
-              <a:rPr lang="en-US" dirty="0">
-                <a:ea typeface="Calibri"/>
-                <a:cs typeface="Calibri"/>
-              </a:rPr>
-              <a:t>How often do we use tests in our projects?</a:t>
-            </a:r>
-          </a:p>
-          <a:p>
-            <a:r>
-              <a:rPr lang="en-US">
-                <a:ea typeface="Calibri"/>
-                <a:cs typeface="Calibri"/>
-              </a:rPr>
-              <a:t>It depends on:</a:t>
-            </a:r>
-          </a:p>
-          <a:p>
-            <a:pPr marL="171450" indent="-171450">
-              <a:buFont typeface="Calibri"/>
-              <a:buChar char="-"/>
-            </a:pPr>
-            <a:r>
-              <a:rPr lang="en-US" dirty="0">
-                <a:ea typeface="Calibri"/>
-                <a:cs typeface="Calibri"/>
-              </a:rPr>
-              <a:t>Budget</a:t>
-            </a:r>
-          </a:p>
-          <a:p>
-            <a:pPr marL="171450" indent="-171450">
-              <a:buFont typeface="Calibri"/>
-              <a:buChar char="-"/>
-            </a:pPr>
-            <a:r>
-              <a:rPr lang="en-US" dirty="0">
-                <a:ea typeface="Calibri"/>
-                <a:cs typeface="Calibri"/>
-              </a:rPr>
-              <a:t>Timing</a:t>
-            </a:r>
-          </a:p>
-          <a:p>
-            <a:pPr marL="171450" indent="-171450">
-              <a:buFont typeface="Calibri"/>
-              <a:buChar char="-"/>
-            </a:pPr>
-            <a:r>
-              <a:rPr lang="en-US" dirty="0">
-                <a:ea typeface="Calibri"/>
-                <a:cs typeface="Calibri"/>
-              </a:rPr>
-              <a:t>Customers says it's not needed</a:t>
-            </a:r>
-          </a:p>
-          <a:p>
-            <a:endParaRPr lang="en-US" dirty="0">
-              <a:ea typeface="Calibri"/>
-              <a:cs typeface="Calibri"/>
-            </a:endParaRPr>
-          </a:p>
-          <a:p>
-            <a:r>
-              <a:rPr lang="en-US" dirty="0">
-                <a:ea typeface="Calibri"/>
-                <a:cs typeface="Calibri"/>
-              </a:rPr>
-              <a:t>Giveaways</a:t>
-            </a:r>
-          </a:p>
-          <a:p>
-            <a:pPr marL="171450" indent="-171450">
-              <a:buFont typeface="Calibri"/>
-              <a:buChar char="-"/>
-            </a:pPr>
-            <a:r>
-              <a:rPr lang="en-US" dirty="0">
-                <a:ea typeface="Calibri"/>
-                <a:cs typeface="Calibri"/>
-              </a:rPr>
-              <a:t>Unit tests saves can save our life and are responsible to have an expected behavior of your application over multiple deployments and changes.</a:t>
-            </a:r>
-          </a:p>
-          <a:p>
-            <a:pPr marL="171450" indent="-171450">
-              <a:buFont typeface="Calibri"/>
-              <a:buChar char="-"/>
-            </a:pPr>
-            <a:r>
-              <a:rPr lang="en-US" dirty="0">
-                <a:ea typeface="Calibri"/>
-                <a:cs typeface="Calibri"/>
-              </a:rPr>
-              <a:t>Who writes the code should not test it but leave it to another person of the team</a:t>
-            </a:r>
-          </a:p>
-          <a:p>
-            <a:pPr marL="171450" indent="-171450">
-              <a:buFont typeface="Calibri"/>
-              <a:buChar char="-"/>
-            </a:pPr>
-            <a:endParaRPr lang="en-US" dirty="0">
-              <a:ea typeface="Calibri"/>
-              <a:cs typeface="Calibri"/>
-            </a:endParaRPr>
-          </a:p>
-          <a:p>
-            <a:pPr marL="171450" indent="-171450">
-              <a:buFont typeface="Calibri"/>
-              <a:buChar char="-"/>
-            </a:pPr>
-            <a:endParaRPr lang="en-US" dirty="0">
-              <a:ea typeface="Calibri"/>
-              <a:cs typeface="Calibri"/>
-            </a:endParaRPr>
-          </a:p>
-        </p:txBody>
-      </p:sp>
-      <p:sp>
-        <p:nvSpPr>
-          <p:cNvPr id="4" name="Slide Number Placeholder 3">
-            <a:extLst>
-              <a:ext uri="{FF2B5EF4-FFF2-40B4-BE49-F238E27FC236}">
-                <a16:creationId xmlns:a16="http://schemas.microsoft.com/office/drawing/2014/main" id="{C242478F-627E-D87B-5821-E7FA3AAFEC44}"/>
-              </a:ext>
-            </a:extLst>
-          </p:cNvPr>
-          <p:cNvSpPr>
-            <a:spLocks noGrp="1"/>
-          </p:cNvSpPr>
-          <p:nvPr>
-            <p:ph type="sldNum" sz="quarter" idx="5"/>
-          </p:nvPr>
-        </p:nvSpPr>
-        <p:spPr/>
-        <p:txBody>
-          <a:bodyPr/>
-          <a:lstStyle/>
-          <a:p>
-            <a:fld id="{7EB8C794-77EE-4724-B493-2E0907BFA558}" type="slidenum">
-              <a:rPr lang="en-GB" smtClean="0"/>
-              <a:t>10</a:t>
-            </a:fld>
-            <a:endParaRPr lang="en-GB"/>
-          </a:p>
-        </p:txBody>
-      </p:sp>
-    </p:spTree>
-    <p:extLst>
-      <p:ext uri="{BB962C8B-B14F-4D97-AF65-F5344CB8AC3E}">
-        <p14:creationId xmlns:p14="http://schemas.microsoft.com/office/powerpoint/2010/main" val="2612603715"/>
-      </p:ext>
-    </p:extLst>
-  </p:cSld>
-  <p:clrMapOvr>
-    <a:masterClrMapping/>
-  </p:clrMapOvr>
-</p:notes>
-</file>
-
-<file path=ppt/notesSlides/notesSlide9.xml><?xml version="1.0" encoding="utf-8"?>
-<p:notes xmlns:a="http://schemas.openxmlformats.org/drawingml/2006/main" xmlns:r="http://schemas.openxmlformats.org/officeDocument/2006/relationships" xmlns:p="http://schemas.openxmlformats.org/presentationml/2006/main">
-  <p:cSld>
-    <p:spTree>
-      <p:nvGrpSpPr>
-        <p:cNvPr id="1" name="">
-          <a:extLst>
-            <a:ext uri="{FF2B5EF4-FFF2-40B4-BE49-F238E27FC236}">
-              <a16:creationId xmlns:a16="http://schemas.microsoft.com/office/drawing/2014/main" id="{2D45DC49-A269-D24C-E4C8-75E5BCE198F7}"/>
-            </a:ext>
-          </a:extLst>
-        </p:cNvPr>
-        <p:cNvGrpSpPr/>
-        <p:nvPr/>
-      </p:nvGrpSpPr>
-      <p:grpSpPr>
-        <a:xfrm>
-          <a:off x="0" y="0"/>
-          <a:ext cx="0" cy="0"/>
-          <a:chOff x="0" y="0"/>
-          <a:chExt cx="0" cy="0"/>
-        </a:xfrm>
-      </p:grpSpPr>
-      <p:sp>
-        <p:nvSpPr>
-          <p:cNvPr id="2" name="Slide Image Placeholder 1">
-            <a:extLst>
-              <a:ext uri="{FF2B5EF4-FFF2-40B4-BE49-F238E27FC236}">
-                <a16:creationId xmlns:a16="http://schemas.microsoft.com/office/drawing/2014/main" id="{722FAF7C-28B0-293F-58BE-68267837BDBE}"/>
-              </a:ext>
-            </a:extLst>
-          </p:cNvPr>
-          <p:cNvSpPr>
-            <a:spLocks noGrp="1" noRot="1" noChangeAspect="1"/>
-          </p:cNvSpPr>
-          <p:nvPr>
-            <p:ph type="sldImg"/>
-          </p:nvPr>
-        </p:nvSpPr>
-        <p:spPr/>
-      </p:sp>
-      <p:sp>
-        <p:nvSpPr>
-          <p:cNvPr id="3" name="Notes Placeholder 2">
-            <a:extLst>
-              <a:ext uri="{FF2B5EF4-FFF2-40B4-BE49-F238E27FC236}">
-                <a16:creationId xmlns:a16="http://schemas.microsoft.com/office/drawing/2014/main" id="{66A4D9B9-AA9D-7422-0FFE-2998DA32119B}"/>
-              </a:ext>
-            </a:extLst>
-          </p:cNvPr>
-          <p:cNvSpPr>
-            <a:spLocks noGrp="1"/>
-          </p:cNvSpPr>
-          <p:nvPr>
-            <p:ph type="body" idx="1"/>
-          </p:nvPr>
-        </p:nvSpPr>
-        <p:spPr/>
-        <p:txBody>
-          <a:bodyPr/>
-          <a:lstStyle/>
-          <a:p>
-            <a:r>
-              <a:rPr lang="en-US" dirty="0">
-                <a:ea typeface="Calibri"/>
-                <a:cs typeface="Calibri"/>
-              </a:rPr>
-              <a:t>How often do we use tests in our projects?</a:t>
-            </a:r>
-          </a:p>
-          <a:p>
-            <a:r>
-              <a:rPr lang="en-US">
-                <a:ea typeface="Calibri"/>
-                <a:cs typeface="Calibri"/>
-              </a:rPr>
-              <a:t>It depends on:</a:t>
-            </a:r>
-          </a:p>
-          <a:p>
-            <a:pPr marL="171450" indent="-171450">
-              <a:buFont typeface="Calibri"/>
-              <a:buChar char="-"/>
-            </a:pPr>
-            <a:r>
-              <a:rPr lang="en-US" dirty="0">
-                <a:ea typeface="Calibri"/>
-                <a:cs typeface="Calibri"/>
-              </a:rPr>
-              <a:t>Budget</a:t>
-            </a:r>
-          </a:p>
-          <a:p>
-            <a:pPr marL="171450" indent="-171450">
-              <a:buFont typeface="Calibri"/>
-              <a:buChar char="-"/>
-            </a:pPr>
-            <a:r>
-              <a:rPr lang="en-US" dirty="0">
-                <a:ea typeface="Calibri"/>
-                <a:cs typeface="Calibri"/>
-              </a:rPr>
-              <a:t>Timing</a:t>
-            </a:r>
-          </a:p>
-          <a:p>
-            <a:pPr marL="171450" indent="-171450">
-              <a:buFont typeface="Calibri"/>
-              <a:buChar char="-"/>
-            </a:pPr>
-            <a:r>
-              <a:rPr lang="en-US" dirty="0">
-                <a:ea typeface="Calibri"/>
-                <a:cs typeface="Calibri"/>
-              </a:rPr>
-              <a:t>Customers says it's not needed</a:t>
-            </a:r>
-          </a:p>
-          <a:p>
-            <a:endParaRPr lang="en-US" dirty="0">
-              <a:ea typeface="Calibri"/>
-              <a:cs typeface="Calibri"/>
-            </a:endParaRPr>
-          </a:p>
-          <a:p>
-            <a:r>
-              <a:rPr lang="en-US" dirty="0">
-                <a:ea typeface="Calibri"/>
-                <a:cs typeface="Calibri"/>
-              </a:rPr>
-              <a:t>Giveaways</a:t>
-            </a:r>
-          </a:p>
-          <a:p>
-            <a:pPr marL="171450" indent="-171450">
-              <a:buFont typeface="Calibri"/>
-              <a:buChar char="-"/>
-            </a:pPr>
-            <a:r>
-              <a:rPr lang="en-US" dirty="0">
-                <a:ea typeface="Calibri"/>
-                <a:cs typeface="Calibri"/>
-              </a:rPr>
-              <a:t>Unit tests saves can save our life and are responsible to have an expected behavior of your application over multiple deployments and changes.</a:t>
-            </a:r>
-          </a:p>
-          <a:p>
-            <a:pPr marL="171450" indent="-171450">
-              <a:buFont typeface="Calibri"/>
-              <a:buChar char="-"/>
-            </a:pPr>
-            <a:r>
-              <a:rPr lang="en-US" dirty="0">
-                <a:ea typeface="Calibri"/>
-                <a:cs typeface="Calibri"/>
-              </a:rPr>
-              <a:t>Who writes the code should not test it but leave it to another person of the team</a:t>
-            </a:r>
-          </a:p>
-          <a:p>
-            <a:pPr marL="171450" indent="-171450">
-              <a:buFont typeface="Calibri"/>
-              <a:buChar char="-"/>
-            </a:pPr>
-            <a:endParaRPr lang="en-US" dirty="0">
-              <a:ea typeface="Calibri"/>
-              <a:cs typeface="Calibri"/>
-            </a:endParaRPr>
-          </a:p>
-          <a:p>
-            <a:pPr marL="171450" indent="-171450">
-              <a:buFont typeface="Calibri"/>
-              <a:buChar char="-"/>
-            </a:pPr>
-            <a:endParaRPr lang="en-US" dirty="0">
-              <a:ea typeface="Calibri"/>
-              <a:cs typeface="Calibri"/>
-            </a:endParaRPr>
-          </a:p>
-        </p:txBody>
-      </p:sp>
-      <p:sp>
-        <p:nvSpPr>
-          <p:cNvPr id="4" name="Slide Number Placeholder 3">
-            <a:extLst>
-              <a:ext uri="{FF2B5EF4-FFF2-40B4-BE49-F238E27FC236}">
-                <a16:creationId xmlns:a16="http://schemas.microsoft.com/office/drawing/2014/main" id="{0D40BFFB-821F-4B9A-38C5-7DC704AF23EB}"/>
-              </a:ext>
-            </a:extLst>
-          </p:cNvPr>
-          <p:cNvSpPr>
-            <a:spLocks noGrp="1"/>
-          </p:cNvSpPr>
-          <p:nvPr>
-            <p:ph type="sldNum" sz="quarter" idx="5"/>
-          </p:nvPr>
-        </p:nvSpPr>
-        <p:spPr/>
-        <p:txBody>
-          <a:bodyPr/>
-          <a:lstStyle/>
-          <a:p>
-            <a:fld id="{7EB8C794-77EE-4724-B493-2E0907BFA558}" type="slidenum">
-              <a:rPr lang="en-GB" smtClean="0"/>
-              <a:t>11</a:t>
-            </a:fld>
-            <a:endParaRPr lang="en-GB"/>
-          </a:p>
-        </p:txBody>
-      </p:sp>
-    </p:spTree>
-    <p:extLst>
-      <p:ext uri="{BB962C8B-B14F-4D97-AF65-F5344CB8AC3E}">
-        <p14:creationId xmlns:p14="http://schemas.microsoft.com/office/powerpoint/2010/main" val="1301111360"/>
       </p:ext>
     </p:extLst>
   </p:cSld>
@@ -6579,6 +6930,758 @@
 <file path=ppt/slides/slide10.xml><?xml version="1.0" encoding="utf-8"?>
 <p:sld xmlns:a="http://schemas.openxmlformats.org/drawingml/2006/main" xmlns:r="http://schemas.openxmlformats.org/officeDocument/2006/relationships" xmlns:p="http://schemas.openxmlformats.org/presentationml/2006/main">
   <p:cSld>
+    <p:spTree>
+      <p:nvGrpSpPr>
+        <p:cNvPr id="1" name="">
+          <a:extLst>
+            <a:ext uri="{FF2B5EF4-FFF2-40B4-BE49-F238E27FC236}">
+              <a16:creationId xmlns:a16="http://schemas.microsoft.com/office/drawing/2014/main" id="{6DA76CDC-12C3-FE89-F28E-DD3487417D51}"/>
+            </a:ext>
+          </a:extLst>
+        </p:cNvPr>
+        <p:cNvGrpSpPr/>
+        <p:nvPr/>
+      </p:nvGrpSpPr>
+      <p:grpSpPr>
+        <a:xfrm>
+          <a:off x="0" y="0"/>
+          <a:ext cx="0" cy="0"/>
+          <a:chOff x="0" y="0"/>
+          <a:chExt cx="0" cy="0"/>
+        </a:xfrm>
+      </p:grpSpPr>
+      <p:sp>
+        <p:nvSpPr>
+          <p:cNvPr id="2" name="Title 1">
+            <a:extLst>
+              <a:ext uri="{FF2B5EF4-FFF2-40B4-BE49-F238E27FC236}">
+                <a16:creationId xmlns:a16="http://schemas.microsoft.com/office/drawing/2014/main" id="{B6908459-1448-6041-0B69-B1D8948328D6}"/>
+              </a:ext>
+            </a:extLst>
+          </p:cNvPr>
+          <p:cNvSpPr>
+            <a:spLocks noGrp="1"/>
+          </p:cNvSpPr>
+          <p:nvPr>
+            <p:ph type="title"/>
+          </p:nvPr>
+        </p:nvSpPr>
+        <p:spPr/>
+        <p:txBody>
+          <a:bodyPr/>
+          <a:lstStyle/>
+          <a:p>
+            <a:r>
+              <a:rPr lang="it-IT" dirty="0">
+                <a:latin typeface="Arial" panose="020B0604020202020204" pitchFamily="34" charset="0"/>
+                <a:cs typeface="Arial" panose="020B0604020202020204" pitchFamily="34" charset="0"/>
+              </a:rPr>
+              <a:t>e2e testing</a:t>
+            </a:r>
+            <a:endParaRPr lang="en-US" dirty="0">
+              <a:latin typeface="Arial" panose="020B0604020202020204" pitchFamily="34" charset="0"/>
+              <a:cs typeface="Arial" panose="020B0604020202020204" pitchFamily="34" charset="0"/>
+            </a:endParaRPr>
+          </a:p>
+        </p:txBody>
+      </p:sp>
+      <p:sp>
+        <p:nvSpPr>
+          <p:cNvPr id="3" name="Text Placeholder 2">
+            <a:extLst>
+              <a:ext uri="{FF2B5EF4-FFF2-40B4-BE49-F238E27FC236}">
+                <a16:creationId xmlns:a16="http://schemas.microsoft.com/office/drawing/2014/main" id="{E34A7405-B080-B53A-674D-D0CECDA26E6C}"/>
+              </a:ext>
+            </a:extLst>
+          </p:cNvPr>
+          <p:cNvSpPr>
+            <a:spLocks noGrp="1"/>
+          </p:cNvSpPr>
+          <p:nvPr>
+            <p:ph type="body" sz="quarter" idx="11"/>
+          </p:nvPr>
+        </p:nvSpPr>
+        <p:spPr/>
+        <p:txBody>
+          <a:bodyPr/>
+          <a:lstStyle/>
+          <a:p>
+            <a:pPr marL="0" indent="0">
+              <a:buNone/>
+            </a:pPr>
+            <a:r>
+              <a:rPr lang="en-US" dirty="0"/>
+              <a:t>Is the process of verifying that an application's user interface (UI) works correctly, is functional, and is user-friendly by testing the visual elements users interact with directly.</a:t>
+            </a:r>
+          </a:p>
+          <a:p>
+            <a:pPr marL="0" indent="0">
+              <a:buNone/>
+            </a:pPr>
+            <a:endParaRPr lang="en-US" dirty="0"/>
+          </a:p>
+          <a:p>
+            <a:pPr marL="0" indent="0">
+              <a:buNone/>
+            </a:pPr>
+            <a:endParaRPr lang="en-US" dirty="0"/>
+          </a:p>
+          <a:p>
+            <a:pPr marL="0" indent="0">
+              <a:buNone/>
+            </a:pPr>
+            <a:endParaRPr lang="en-US" dirty="0"/>
+          </a:p>
+          <a:p>
+            <a:pPr marL="0" indent="0">
+              <a:buNone/>
+            </a:pPr>
+            <a:r>
+              <a:rPr lang="en-US" dirty="0"/>
+              <a:t>TLDR: check that the UI works as expected.</a:t>
+            </a:r>
+          </a:p>
+        </p:txBody>
+      </p:sp>
+    </p:spTree>
+    <p:extLst>
+      <p:ext uri="{BB962C8B-B14F-4D97-AF65-F5344CB8AC3E}">
+        <p14:creationId xmlns:p14="http://schemas.microsoft.com/office/powerpoint/2010/main" val="2163864086"/>
+      </p:ext>
+    </p:extLst>
+  </p:cSld>
+  <p:clrMapOvr>
+    <a:masterClrMapping/>
+  </p:clrMapOvr>
+</p:sld>
+</file>
+
+<file path=ppt/slides/slide11.xml><?xml version="1.0" encoding="utf-8"?>
+<p:sld xmlns:a="http://schemas.openxmlformats.org/drawingml/2006/main" xmlns:r="http://schemas.openxmlformats.org/officeDocument/2006/relationships" xmlns:p="http://schemas.openxmlformats.org/presentationml/2006/main">
+  <p:cSld>
+    <p:bg>
+      <p:bgPr>
+        <a:blipFill dpi="0" rotWithShape="1">
+          <a:blip r:embed="rId3" cstate="print">
+            <a:lum/>
+            <a:extLst>
+              <a:ext uri="{28A0092B-C50C-407E-A947-70E740481C1C}">
+                <a14:useLocalDpi xmlns:a14="http://schemas.microsoft.com/office/drawing/2010/main"/>
+              </a:ext>
+            </a:extLst>
+          </a:blip>
+          <a:srcRect/>
+          <a:stretch>
+            <a:fillRect/>
+          </a:stretch>
+        </a:blipFill>
+        <a:effectLst/>
+      </p:bgPr>
+    </p:bg>
+    <p:spTree>
+      <p:nvGrpSpPr>
+        <p:cNvPr id="1" name="">
+          <a:extLst>
+            <a:ext uri="{FF2B5EF4-FFF2-40B4-BE49-F238E27FC236}">
+              <a16:creationId xmlns:a16="http://schemas.microsoft.com/office/drawing/2014/main" id="{CE6AA263-EDC0-82B9-0839-92AF21ACE1CD}"/>
+            </a:ext>
+          </a:extLst>
+        </p:cNvPr>
+        <p:cNvGrpSpPr/>
+        <p:nvPr/>
+      </p:nvGrpSpPr>
+      <p:grpSpPr>
+        <a:xfrm>
+          <a:off x="0" y="0"/>
+          <a:ext cx="0" cy="0"/>
+          <a:chOff x="0" y="0"/>
+          <a:chExt cx="0" cy="0"/>
+        </a:xfrm>
+      </p:grpSpPr>
+      <p:sp>
+        <p:nvSpPr>
+          <p:cNvPr id="4" name="Text Placeholder 3">
+            <a:extLst>
+              <a:ext uri="{FF2B5EF4-FFF2-40B4-BE49-F238E27FC236}">
+                <a16:creationId xmlns:a16="http://schemas.microsoft.com/office/drawing/2014/main" id="{0CBA97D0-9053-786F-6374-AD269EB13774}"/>
+              </a:ext>
+            </a:extLst>
+          </p:cNvPr>
+          <p:cNvSpPr>
+            <a:spLocks noGrp="1"/>
+          </p:cNvSpPr>
+          <p:nvPr>
+            <p:ph type="body" sz="quarter" idx="10"/>
+          </p:nvPr>
+        </p:nvSpPr>
+        <p:spPr/>
+        <p:txBody>
+          <a:bodyPr lIns="91440" tIns="45720" rIns="91440" bIns="45720" anchor="t"/>
+          <a:lstStyle/>
+          <a:p>
+            <a:r>
+              <a:rPr lang="it-IT" dirty="0">
+                <a:latin typeface="Arial"/>
+                <a:cs typeface="Arial"/>
+              </a:rPr>
+              <a:t>e2e</a:t>
+            </a:r>
+            <a:r>
+              <a:rPr lang="en-IT" dirty="0">
+                <a:latin typeface="Arial"/>
+                <a:cs typeface="Arial"/>
+              </a:rPr>
+              <a:t> testing</a:t>
+            </a:r>
+            <a:endParaRPr lang="en-US" dirty="0"/>
+          </a:p>
+        </p:txBody>
+      </p:sp>
+      <p:sp>
+        <p:nvSpPr>
+          <p:cNvPr id="6" name="Text Placeholder 3">
+            <a:extLst>
+              <a:ext uri="{FF2B5EF4-FFF2-40B4-BE49-F238E27FC236}">
+                <a16:creationId xmlns:a16="http://schemas.microsoft.com/office/drawing/2014/main" id="{BDFF9A42-A75A-359A-8534-541E28FE0BB2}"/>
+              </a:ext>
+            </a:extLst>
+          </p:cNvPr>
+          <p:cNvSpPr txBox="1">
+            <a:spLocks/>
+          </p:cNvSpPr>
+          <p:nvPr/>
+        </p:nvSpPr>
+        <p:spPr>
+          <a:xfrm>
+            <a:off x="6209198" y="4788827"/>
+            <a:ext cx="5445392" cy="849973"/>
+          </a:xfrm>
+          <a:prstGeom prst="rect">
+            <a:avLst/>
+          </a:prstGeom>
+        </p:spPr>
+        <p:txBody>
+          <a:bodyPr lIns="91440" tIns="45720" rIns="91440" bIns="45720" anchor="t"/>
+          <a:lstStyle>
+            <a:lvl1pPr marL="0" indent="0" algn="l" defTabSz="914400" rtl="0" eaLnBrk="1" latinLnBrk="0" hangingPunct="1">
+              <a:lnSpc>
+                <a:spcPct val="90000"/>
+              </a:lnSpc>
+              <a:spcBef>
+                <a:spcPts val="1000"/>
+              </a:spcBef>
+              <a:buFont typeface="Arial"/>
+              <a:buNone/>
+              <a:defRPr sz="4800" b="1" kern="1200">
+                <a:solidFill>
+                  <a:srgbClr val="00C700"/>
+                </a:solidFill>
+                <a:latin typeface="Arial" panose="020B0604020202020204" pitchFamily="34" charset="0"/>
+                <a:ea typeface="+mn-ea"/>
+                <a:cs typeface="Arial" panose="020B0604020202020204" pitchFamily="34" charset="0"/>
+              </a:defRPr>
+            </a:lvl1pPr>
+            <a:lvl2pPr marL="685800" indent="-228600" algn="l" defTabSz="914400" rtl="0" eaLnBrk="1" latinLnBrk="0" hangingPunct="1">
+              <a:lnSpc>
+                <a:spcPct val="90000"/>
+              </a:lnSpc>
+              <a:spcBef>
+                <a:spcPts val="500"/>
+              </a:spcBef>
+              <a:buFont typeface="Arial"/>
+              <a:buChar char="•"/>
+              <a:defRPr sz="2400" kern="1200">
+                <a:solidFill>
+                  <a:srgbClr val="00E2FF"/>
+                </a:solidFill>
+                <a:latin typeface="+mn-lt"/>
+                <a:ea typeface="+mn-ea"/>
+                <a:cs typeface="+mn-cs"/>
+              </a:defRPr>
+            </a:lvl2pPr>
+            <a:lvl3pPr marL="1143000" indent="-228600" algn="l" defTabSz="914400" rtl="0" eaLnBrk="1" latinLnBrk="0" hangingPunct="1">
+              <a:lnSpc>
+                <a:spcPct val="90000"/>
+              </a:lnSpc>
+              <a:spcBef>
+                <a:spcPts val="500"/>
+              </a:spcBef>
+              <a:buFont typeface="Arial"/>
+              <a:buChar char="•"/>
+              <a:defRPr sz="2000" kern="1200">
+                <a:solidFill>
+                  <a:srgbClr val="00E2FF"/>
+                </a:solidFill>
+                <a:latin typeface="+mn-lt"/>
+                <a:ea typeface="+mn-ea"/>
+                <a:cs typeface="+mn-cs"/>
+              </a:defRPr>
+            </a:lvl3pPr>
+            <a:lvl4pPr marL="1600200" indent="-228600" algn="l" defTabSz="914400" rtl="0" eaLnBrk="1" latinLnBrk="0" hangingPunct="1">
+              <a:lnSpc>
+                <a:spcPct val="90000"/>
+              </a:lnSpc>
+              <a:spcBef>
+                <a:spcPts val="500"/>
+              </a:spcBef>
+              <a:buFont typeface="Arial"/>
+              <a:buChar char="•"/>
+              <a:defRPr sz="1800" kern="1200">
+                <a:solidFill>
+                  <a:srgbClr val="00E2FF"/>
+                </a:solidFill>
+                <a:latin typeface="+mn-lt"/>
+                <a:ea typeface="+mn-ea"/>
+                <a:cs typeface="+mn-cs"/>
+              </a:defRPr>
+            </a:lvl4pPr>
+            <a:lvl5pPr marL="2057400" indent="-228600" algn="l" defTabSz="914400" rtl="0" eaLnBrk="1" latinLnBrk="0" hangingPunct="1">
+              <a:lnSpc>
+                <a:spcPct val="90000"/>
+              </a:lnSpc>
+              <a:spcBef>
+                <a:spcPts val="500"/>
+              </a:spcBef>
+              <a:buFont typeface="Arial"/>
+              <a:buChar char="•"/>
+              <a:defRPr sz="1800" kern="1200">
+                <a:solidFill>
+                  <a:srgbClr val="00E2FF"/>
+                </a:solidFill>
+                <a:latin typeface="+mn-lt"/>
+                <a:ea typeface="+mn-ea"/>
+                <a:cs typeface="+mn-cs"/>
+              </a:defRPr>
+            </a:lvl5pPr>
+            <a:lvl6pPr marL="2514600" indent="-228600" algn="l" defTabSz="914400" rtl="0" eaLnBrk="1" latinLnBrk="0" hangingPunct="1">
+              <a:lnSpc>
+                <a:spcPct val="90000"/>
+              </a:lnSpc>
+              <a:spcBef>
+                <a:spcPts val="500"/>
+              </a:spcBef>
+              <a:buFont typeface="Arial"/>
+              <a:buChar char="•"/>
+              <a:defRPr sz="1800" kern="1200">
+                <a:solidFill>
+                  <a:schemeClr val="tx1"/>
+                </a:solidFill>
+                <a:latin typeface="+mn-lt"/>
+                <a:ea typeface="+mn-ea"/>
+                <a:cs typeface="+mn-cs"/>
+              </a:defRPr>
+            </a:lvl6pPr>
+            <a:lvl7pPr marL="2971800" indent="-228600" algn="l" defTabSz="914400" rtl="0" eaLnBrk="1" latinLnBrk="0" hangingPunct="1">
+              <a:lnSpc>
+                <a:spcPct val="90000"/>
+              </a:lnSpc>
+              <a:spcBef>
+                <a:spcPts val="500"/>
+              </a:spcBef>
+              <a:buFont typeface="Arial"/>
+              <a:buChar char="•"/>
+              <a:defRPr sz="1800" kern="1200">
+                <a:solidFill>
+                  <a:schemeClr val="tx1"/>
+                </a:solidFill>
+                <a:latin typeface="+mn-lt"/>
+                <a:ea typeface="+mn-ea"/>
+                <a:cs typeface="+mn-cs"/>
+              </a:defRPr>
+            </a:lvl7pPr>
+            <a:lvl8pPr marL="3429000" indent="-228600" algn="l" defTabSz="914400" rtl="0" eaLnBrk="1" latinLnBrk="0" hangingPunct="1">
+              <a:lnSpc>
+                <a:spcPct val="90000"/>
+              </a:lnSpc>
+              <a:spcBef>
+                <a:spcPts val="500"/>
+              </a:spcBef>
+              <a:buFont typeface="Arial"/>
+              <a:buChar char="•"/>
+              <a:defRPr sz="1800" kern="1200">
+                <a:solidFill>
+                  <a:schemeClr val="tx1"/>
+                </a:solidFill>
+                <a:latin typeface="+mn-lt"/>
+                <a:ea typeface="+mn-ea"/>
+                <a:cs typeface="+mn-cs"/>
+              </a:defRPr>
+            </a:lvl8pPr>
+            <a:lvl9pPr marL="3886200" indent="-228600" algn="l" defTabSz="914400" rtl="0" eaLnBrk="1" latinLnBrk="0" hangingPunct="1">
+              <a:lnSpc>
+                <a:spcPct val="90000"/>
+              </a:lnSpc>
+              <a:spcBef>
+                <a:spcPts val="500"/>
+              </a:spcBef>
+              <a:buFont typeface="Arial"/>
+              <a:buChar char="•"/>
+              <a:defRPr sz="1800" kern="1200">
+                <a:solidFill>
+                  <a:schemeClr val="tx1"/>
+                </a:solidFill>
+                <a:latin typeface="+mn-lt"/>
+                <a:ea typeface="+mn-ea"/>
+                <a:cs typeface="+mn-cs"/>
+              </a:defRPr>
+            </a:lvl9pPr>
+          </a:lstStyle>
+          <a:p>
+            <a:endParaRPr lang="en-US" dirty="0"/>
+          </a:p>
+        </p:txBody>
+      </p:sp>
+      <p:sp>
+        <p:nvSpPr>
+          <p:cNvPr id="2" name="Text Placeholder 3">
+            <a:extLst>
+              <a:ext uri="{FF2B5EF4-FFF2-40B4-BE49-F238E27FC236}">
+                <a16:creationId xmlns:a16="http://schemas.microsoft.com/office/drawing/2014/main" id="{AFAEDE67-5200-687D-2622-25016CB5F05D}"/>
+              </a:ext>
+            </a:extLst>
+          </p:cNvPr>
+          <p:cNvSpPr txBox="1">
+            <a:spLocks/>
+          </p:cNvSpPr>
+          <p:nvPr/>
+        </p:nvSpPr>
+        <p:spPr>
+          <a:xfrm>
+            <a:off x="6361598" y="4941227"/>
+            <a:ext cx="5445392" cy="849973"/>
+          </a:xfrm>
+          <a:prstGeom prst="rect">
+            <a:avLst/>
+          </a:prstGeom>
+        </p:spPr>
+        <p:txBody>
+          <a:bodyPr lIns="91440" tIns="45720" rIns="91440" bIns="45720" anchor="t"/>
+          <a:lstStyle>
+            <a:lvl1pPr marL="0" indent="0" algn="l" defTabSz="914400" rtl="0" eaLnBrk="1" latinLnBrk="0" hangingPunct="1">
+              <a:lnSpc>
+                <a:spcPct val="90000"/>
+              </a:lnSpc>
+              <a:spcBef>
+                <a:spcPts val="1000"/>
+              </a:spcBef>
+              <a:buFont typeface="Arial"/>
+              <a:buNone/>
+              <a:defRPr sz="4800" b="1" kern="1200">
+                <a:solidFill>
+                  <a:srgbClr val="00C700"/>
+                </a:solidFill>
+                <a:latin typeface="Arial" panose="020B0604020202020204" pitchFamily="34" charset="0"/>
+                <a:ea typeface="+mn-ea"/>
+                <a:cs typeface="Arial" panose="020B0604020202020204" pitchFamily="34" charset="0"/>
+              </a:defRPr>
+            </a:lvl1pPr>
+            <a:lvl2pPr marL="685800" indent="-228600" algn="l" defTabSz="914400" rtl="0" eaLnBrk="1" latinLnBrk="0" hangingPunct="1">
+              <a:lnSpc>
+                <a:spcPct val="90000"/>
+              </a:lnSpc>
+              <a:spcBef>
+                <a:spcPts val="500"/>
+              </a:spcBef>
+              <a:buFont typeface="Arial"/>
+              <a:buChar char="•"/>
+              <a:defRPr sz="2400" kern="1200">
+                <a:solidFill>
+                  <a:srgbClr val="00E2FF"/>
+                </a:solidFill>
+                <a:latin typeface="+mn-lt"/>
+                <a:ea typeface="+mn-ea"/>
+                <a:cs typeface="+mn-cs"/>
+              </a:defRPr>
+            </a:lvl2pPr>
+            <a:lvl3pPr marL="1143000" indent="-228600" algn="l" defTabSz="914400" rtl="0" eaLnBrk="1" latinLnBrk="0" hangingPunct="1">
+              <a:lnSpc>
+                <a:spcPct val="90000"/>
+              </a:lnSpc>
+              <a:spcBef>
+                <a:spcPts val="500"/>
+              </a:spcBef>
+              <a:buFont typeface="Arial"/>
+              <a:buChar char="•"/>
+              <a:defRPr sz="2000" kern="1200">
+                <a:solidFill>
+                  <a:srgbClr val="00E2FF"/>
+                </a:solidFill>
+                <a:latin typeface="+mn-lt"/>
+                <a:ea typeface="+mn-ea"/>
+                <a:cs typeface="+mn-cs"/>
+              </a:defRPr>
+            </a:lvl3pPr>
+            <a:lvl4pPr marL="1600200" indent="-228600" algn="l" defTabSz="914400" rtl="0" eaLnBrk="1" latinLnBrk="0" hangingPunct="1">
+              <a:lnSpc>
+                <a:spcPct val="90000"/>
+              </a:lnSpc>
+              <a:spcBef>
+                <a:spcPts val="500"/>
+              </a:spcBef>
+              <a:buFont typeface="Arial"/>
+              <a:buChar char="•"/>
+              <a:defRPr sz="1800" kern="1200">
+                <a:solidFill>
+                  <a:srgbClr val="00E2FF"/>
+                </a:solidFill>
+                <a:latin typeface="+mn-lt"/>
+                <a:ea typeface="+mn-ea"/>
+                <a:cs typeface="+mn-cs"/>
+              </a:defRPr>
+            </a:lvl4pPr>
+            <a:lvl5pPr marL="2057400" indent="-228600" algn="l" defTabSz="914400" rtl="0" eaLnBrk="1" latinLnBrk="0" hangingPunct="1">
+              <a:lnSpc>
+                <a:spcPct val="90000"/>
+              </a:lnSpc>
+              <a:spcBef>
+                <a:spcPts val="500"/>
+              </a:spcBef>
+              <a:buFont typeface="Arial"/>
+              <a:buChar char="•"/>
+              <a:defRPr sz="1800" kern="1200">
+                <a:solidFill>
+                  <a:srgbClr val="00E2FF"/>
+                </a:solidFill>
+                <a:latin typeface="+mn-lt"/>
+                <a:ea typeface="+mn-ea"/>
+                <a:cs typeface="+mn-cs"/>
+              </a:defRPr>
+            </a:lvl5pPr>
+            <a:lvl6pPr marL="2514600" indent="-228600" algn="l" defTabSz="914400" rtl="0" eaLnBrk="1" latinLnBrk="0" hangingPunct="1">
+              <a:lnSpc>
+                <a:spcPct val="90000"/>
+              </a:lnSpc>
+              <a:spcBef>
+                <a:spcPts val="500"/>
+              </a:spcBef>
+              <a:buFont typeface="Arial"/>
+              <a:buChar char="•"/>
+              <a:defRPr sz="1800" kern="1200">
+                <a:solidFill>
+                  <a:schemeClr val="tx1"/>
+                </a:solidFill>
+                <a:latin typeface="+mn-lt"/>
+                <a:ea typeface="+mn-ea"/>
+                <a:cs typeface="+mn-cs"/>
+              </a:defRPr>
+            </a:lvl6pPr>
+            <a:lvl7pPr marL="2971800" indent="-228600" algn="l" defTabSz="914400" rtl="0" eaLnBrk="1" latinLnBrk="0" hangingPunct="1">
+              <a:lnSpc>
+                <a:spcPct val="90000"/>
+              </a:lnSpc>
+              <a:spcBef>
+                <a:spcPts val="500"/>
+              </a:spcBef>
+              <a:buFont typeface="Arial"/>
+              <a:buChar char="•"/>
+              <a:defRPr sz="1800" kern="1200">
+                <a:solidFill>
+                  <a:schemeClr val="tx1"/>
+                </a:solidFill>
+                <a:latin typeface="+mn-lt"/>
+                <a:ea typeface="+mn-ea"/>
+                <a:cs typeface="+mn-cs"/>
+              </a:defRPr>
+            </a:lvl7pPr>
+            <a:lvl8pPr marL="3429000" indent="-228600" algn="l" defTabSz="914400" rtl="0" eaLnBrk="1" latinLnBrk="0" hangingPunct="1">
+              <a:lnSpc>
+                <a:spcPct val="90000"/>
+              </a:lnSpc>
+              <a:spcBef>
+                <a:spcPts val="500"/>
+              </a:spcBef>
+              <a:buFont typeface="Arial"/>
+              <a:buChar char="•"/>
+              <a:defRPr sz="1800" kern="1200">
+                <a:solidFill>
+                  <a:schemeClr val="tx1"/>
+                </a:solidFill>
+                <a:latin typeface="+mn-lt"/>
+                <a:ea typeface="+mn-ea"/>
+                <a:cs typeface="+mn-cs"/>
+              </a:defRPr>
+            </a:lvl8pPr>
+            <a:lvl9pPr marL="3886200" indent="-228600" algn="l" defTabSz="914400" rtl="0" eaLnBrk="1" latinLnBrk="0" hangingPunct="1">
+              <a:lnSpc>
+                <a:spcPct val="90000"/>
+              </a:lnSpc>
+              <a:spcBef>
+                <a:spcPts val="500"/>
+              </a:spcBef>
+              <a:buFont typeface="Arial"/>
+              <a:buChar char="•"/>
+              <a:defRPr sz="1800" kern="1200">
+                <a:solidFill>
+                  <a:schemeClr val="tx1"/>
+                </a:solidFill>
+                <a:latin typeface="+mn-lt"/>
+                <a:ea typeface="+mn-ea"/>
+                <a:cs typeface="+mn-cs"/>
+              </a:defRPr>
+            </a:lvl9pPr>
+          </a:lstStyle>
+          <a:p>
+            <a:r>
+              <a:rPr lang="en-IT" dirty="0">
+                <a:latin typeface="Arial"/>
+                <a:cs typeface="Arial"/>
+              </a:rPr>
+              <a:t>Yes, it's a demo</a:t>
+            </a:r>
+            <a:endParaRPr lang="en-US" dirty="0"/>
+          </a:p>
+        </p:txBody>
+      </p:sp>
+    </p:spTree>
+    <p:extLst>
+      <p:ext uri="{BB962C8B-B14F-4D97-AF65-F5344CB8AC3E}">
+        <p14:creationId xmlns:p14="http://schemas.microsoft.com/office/powerpoint/2010/main" val="1979839893"/>
+      </p:ext>
+    </p:extLst>
+  </p:cSld>
+  <p:clrMapOvr>
+    <a:masterClrMapping/>
+  </p:clrMapOvr>
+</p:sld>
+</file>
+
+<file path=ppt/slides/slide12.xml><?xml version="1.0" encoding="utf-8"?>
+<p:sld xmlns:a="http://schemas.openxmlformats.org/drawingml/2006/main" xmlns:r="http://schemas.openxmlformats.org/officeDocument/2006/relationships" xmlns:p="http://schemas.openxmlformats.org/presentationml/2006/main">
+  <p:cSld>
+    <p:spTree>
+      <p:nvGrpSpPr>
+        <p:cNvPr id="1" name="">
+          <a:extLst>
+            <a:ext uri="{FF2B5EF4-FFF2-40B4-BE49-F238E27FC236}">
+              <a16:creationId xmlns:a16="http://schemas.microsoft.com/office/drawing/2014/main" id="{FFE4B5D9-5582-E31F-E09B-A0D944701E88}"/>
+            </a:ext>
+          </a:extLst>
+        </p:cNvPr>
+        <p:cNvGrpSpPr/>
+        <p:nvPr/>
+      </p:nvGrpSpPr>
+      <p:grpSpPr>
+        <a:xfrm>
+          <a:off x="0" y="0"/>
+          <a:ext cx="0" cy="0"/>
+          <a:chOff x="0" y="0"/>
+          <a:chExt cx="0" cy="0"/>
+        </a:xfrm>
+      </p:grpSpPr>
+      <p:sp>
+        <p:nvSpPr>
+          <p:cNvPr id="2" name="Title 1">
+            <a:extLst>
+              <a:ext uri="{FF2B5EF4-FFF2-40B4-BE49-F238E27FC236}">
+                <a16:creationId xmlns:a16="http://schemas.microsoft.com/office/drawing/2014/main" id="{8B445406-0C9C-89FA-D944-F614C18612CF}"/>
+              </a:ext>
+            </a:extLst>
+          </p:cNvPr>
+          <p:cNvSpPr>
+            <a:spLocks noGrp="1"/>
+          </p:cNvSpPr>
+          <p:nvPr>
+            <p:ph type="title"/>
+          </p:nvPr>
+        </p:nvSpPr>
+        <p:spPr/>
+        <p:txBody>
+          <a:bodyPr/>
+          <a:lstStyle/>
+          <a:p>
+            <a:r>
+              <a:rPr lang="it-IT" dirty="0">
+                <a:latin typeface="Arial" panose="020B0604020202020204" pitchFamily="34" charset="0"/>
+                <a:cs typeface="Arial" panose="020B0604020202020204" pitchFamily="34" charset="0"/>
+              </a:rPr>
+              <a:t>GitHub actions</a:t>
+            </a:r>
+            <a:endParaRPr lang="en-US" dirty="0">
+              <a:latin typeface="Arial" panose="020B0604020202020204" pitchFamily="34" charset="0"/>
+              <a:cs typeface="Arial" panose="020B0604020202020204" pitchFamily="34" charset="0"/>
+            </a:endParaRPr>
+          </a:p>
+        </p:txBody>
+      </p:sp>
+      <p:sp>
+        <p:nvSpPr>
+          <p:cNvPr id="3" name="Text Placeholder 2">
+            <a:extLst>
+              <a:ext uri="{FF2B5EF4-FFF2-40B4-BE49-F238E27FC236}">
+                <a16:creationId xmlns:a16="http://schemas.microsoft.com/office/drawing/2014/main" id="{147FF6F7-DE87-FBDB-FB0A-EBD0FB90127F}"/>
+              </a:ext>
+            </a:extLst>
+          </p:cNvPr>
+          <p:cNvSpPr>
+            <a:spLocks noGrp="1"/>
+          </p:cNvSpPr>
+          <p:nvPr>
+            <p:ph type="body" sz="quarter" idx="11"/>
+          </p:nvPr>
+        </p:nvSpPr>
+        <p:spPr/>
+        <p:txBody>
+          <a:bodyPr/>
+          <a:lstStyle/>
+          <a:p>
+            <a:pPr marL="0" indent="0">
+              <a:buNone/>
+            </a:pPr>
+            <a:r>
+              <a:rPr lang="en-US" dirty="0"/>
+              <a:t>Is the continuous integration and continuous delivery (CI/CD) platform that allows you to automate your build, test, and deployment pipeline.</a:t>
+            </a:r>
+          </a:p>
+          <a:p>
+            <a:pPr marL="0" indent="0">
+              <a:buNone/>
+            </a:pPr>
+            <a:endParaRPr lang="en-US" dirty="0"/>
+          </a:p>
+          <a:p>
+            <a:pPr marL="0" indent="0">
+              <a:buNone/>
+            </a:pPr>
+            <a:endParaRPr lang="en-US" dirty="0"/>
+          </a:p>
+          <a:p>
+            <a:pPr marL="0" indent="0">
+              <a:buNone/>
+            </a:pPr>
+            <a:endParaRPr lang="en-US" dirty="0"/>
+          </a:p>
+          <a:p>
+            <a:pPr marL="0" indent="0">
+              <a:buNone/>
+            </a:pPr>
+            <a:r>
+              <a:rPr lang="en-US" dirty="0"/>
+              <a:t>TLDR: performs </a:t>
+            </a:r>
+            <a:r>
+              <a:rPr lang="en-US"/>
+              <a:t>automated operations.</a:t>
+            </a:r>
+            <a:endParaRPr lang="en-US" dirty="0"/>
+          </a:p>
+        </p:txBody>
+      </p:sp>
+    </p:spTree>
+    <p:extLst>
+      <p:ext uri="{BB962C8B-B14F-4D97-AF65-F5344CB8AC3E}">
+        <p14:creationId xmlns:p14="http://schemas.microsoft.com/office/powerpoint/2010/main" val="55620653"/>
+      </p:ext>
+    </p:extLst>
+  </p:cSld>
+  <p:clrMapOvr>
+    <a:masterClrMapping/>
+  </p:clrMapOvr>
+</p:sld>
+</file>
+
+<file path=ppt/slides/slide13.xml><?xml version="1.0" encoding="utf-8"?>
+<p:sld xmlns:a="http://schemas.openxmlformats.org/drawingml/2006/main" xmlns:r="http://schemas.openxmlformats.org/officeDocument/2006/relationships" xmlns:p="http://schemas.openxmlformats.org/presentationml/2006/main">
+  <p:cSld>
     <p:bg>
       <p:bgPr>
         <a:blipFill dpi="0" rotWithShape="1">
@@ -7058,7 +8161,7 @@
 </p:sld>
 </file>
 
-<file path=ppt/slides/slide11.xml><?xml version="1.0" encoding="utf-8"?>
+<file path=ppt/slides/slide14.xml><?xml version="1.0" encoding="utf-8"?>
 <p:sld xmlns:a="http://schemas.openxmlformats.org/drawingml/2006/main" xmlns:r="http://schemas.openxmlformats.org/officeDocument/2006/relationships" xmlns:p="http://schemas.openxmlformats.org/presentationml/2006/main">
   <p:cSld>
     <p:bg>
@@ -7575,7 +8678,7 @@
 </p:sld>
 </file>
 
-<file path=ppt/slides/slide12.xml><?xml version="1.0" encoding="utf-8"?>
+<file path=ppt/slides/slide15.xml><?xml version="1.0" encoding="utf-8"?>
 <p:sld xmlns:a="http://schemas.openxmlformats.org/drawingml/2006/main" xmlns:r="http://schemas.openxmlformats.org/officeDocument/2006/relationships" xmlns:p="http://schemas.openxmlformats.org/presentationml/2006/main">
   <p:cSld>
     <p:bg>
@@ -7930,7 +9033,7 @@
 </p:sld>
 </file>
 
-<file path=ppt/slides/slide13.xml><?xml version="1.0" encoding="utf-8"?>
+<file path=ppt/slides/slide16.xml><?xml version="1.0" encoding="utf-8"?>
 <p:sld xmlns:a="http://schemas.openxmlformats.org/drawingml/2006/main" xmlns:r="http://schemas.openxmlformats.org/officeDocument/2006/relationships" xmlns:p="http://schemas.openxmlformats.org/presentationml/2006/main">
   <p:cSld>
     <p:bg>
@@ -9624,6 +10727,135 @@
 <file path=ppt/slides/slide8.xml><?xml version="1.0" encoding="utf-8"?>
 <p:sld xmlns:a="http://schemas.openxmlformats.org/drawingml/2006/main" xmlns:r="http://schemas.openxmlformats.org/officeDocument/2006/relationships" xmlns:p="http://schemas.openxmlformats.org/presentationml/2006/main">
   <p:cSld>
+    <p:spTree>
+      <p:nvGrpSpPr>
+        <p:cNvPr id="1" name="">
+          <a:extLst>
+            <a:ext uri="{FF2B5EF4-FFF2-40B4-BE49-F238E27FC236}">
+              <a16:creationId xmlns:a16="http://schemas.microsoft.com/office/drawing/2014/main" id="{AFCA8928-DC41-C286-8D29-AFC735173735}"/>
+            </a:ext>
+          </a:extLst>
+        </p:cNvPr>
+        <p:cNvGrpSpPr/>
+        <p:nvPr/>
+      </p:nvGrpSpPr>
+      <p:grpSpPr>
+        <a:xfrm>
+          <a:off x="0" y="0"/>
+          <a:ext cx="0" cy="0"/>
+          <a:chOff x="0" y="0"/>
+          <a:chExt cx="0" cy="0"/>
+        </a:xfrm>
+      </p:grpSpPr>
+      <p:sp>
+        <p:nvSpPr>
+          <p:cNvPr id="2" name="Title 1">
+            <a:extLst>
+              <a:ext uri="{FF2B5EF4-FFF2-40B4-BE49-F238E27FC236}">
+                <a16:creationId xmlns:a16="http://schemas.microsoft.com/office/drawing/2014/main" id="{C94A2362-EEF6-1C5E-1772-6ADAB0E91EDA}"/>
+              </a:ext>
+            </a:extLst>
+          </p:cNvPr>
+          <p:cNvSpPr>
+            <a:spLocks noGrp="1"/>
+          </p:cNvSpPr>
+          <p:nvPr>
+            <p:ph type="title"/>
+          </p:nvPr>
+        </p:nvSpPr>
+        <p:spPr/>
+        <p:txBody>
+          <a:bodyPr/>
+          <a:lstStyle/>
+          <a:p>
+            <a:r>
+              <a:rPr lang="it-IT" dirty="0">
+                <a:latin typeface="Arial" panose="020B0604020202020204" pitchFamily="34" charset="0"/>
+                <a:cs typeface="Arial" panose="020B0604020202020204" pitchFamily="34" charset="0"/>
+              </a:rPr>
+              <a:t>Unit testing</a:t>
+            </a:r>
+            <a:endParaRPr lang="en-US" dirty="0">
+              <a:latin typeface="Arial" panose="020B0604020202020204" pitchFamily="34" charset="0"/>
+              <a:cs typeface="Arial" panose="020B0604020202020204" pitchFamily="34" charset="0"/>
+            </a:endParaRPr>
+          </a:p>
+        </p:txBody>
+      </p:sp>
+      <p:sp>
+        <p:nvSpPr>
+          <p:cNvPr id="3" name="Text Placeholder 2">
+            <a:extLst>
+              <a:ext uri="{FF2B5EF4-FFF2-40B4-BE49-F238E27FC236}">
+                <a16:creationId xmlns:a16="http://schemas.microsoft.com/office/drawing/2014/main" id="{36149FAB-55B3-49C9-2348-F2E0A02006F7}"/>
+              </a:ext>
+            </a:extLst>
+          </p:cNvPr>
+          <p:cNvSpPr>
+            <a:spLocks noGrp="1"/>
+          </p:cNvSpPr>
+          <p:nvPr>
+            <p:ph type="body" sz="quarter" idx="11"/>
+          </p:nvPr>
+        </p:nvSpPr>
+        <p:spPr/>
+        <p:txBody>
+          <a:bodyPr/>
+          <a:lstStyle/>
+          <a:p>
+            <a:pPr marL="0" indent="0">
+              <a:buNone/>
+            </a:pPr>
+            <a:r>
+              <a:rPr lang="en-US" dirty="0"/>
+              <a:t>Is the practice of testing individual, isolated units or components of software, such as a function or method, to verify they work correctly</a:t>
+            </a:r>
+          </a:p>
+          <a:p>
+            <a:pPr marL="0" indent="0">
+              <a:buNone/>
+            </a:pPr>
+            <a:endParaRPr lang="en-US" dirty="0"/>
+          </a:p>
+          <a:p>
+            <a:pPr marL="0" indent="0">
+              <a:buNone/>
+            </a:pPr>
+            <a:endParaRPr lang="en-US" dirty="0"/>
+          </a:p>
+          <a:p>
+            <a:pPr marL="0" indent="0">
+              <a:buNone/>
+            </a:pPr>
+            <a:endParaRPr lang="en-US" dirty="0"/>
+          </a:p>
+          <a:p>
+            <a:pPr marL="0" indent="0">
+              <a:buNone/>
+            </a:pPr>
+            <a:r>
+              <a:rPr lang="en-US" dirty="0"/>
+              <a:t>TLDR: check that the components works as expected</a:t>
+            </a:r>
+          </a:p>
+        </p:txBody>
+      </p:sp>
+    </p:spTree>
+    <p:extLst>
+      <p:ext uri="{BB962C8B-B14F-4D97-AF65-F5344CB8AC3E}">
+        <p14:creationId xmlns:p14="http://schemas.microsoft.com/office/powerpoint/2010/main" val="2940073033"/>
+      </p:ext>
+    </p:extLst>
+  </p:cSld>
+  <p:clrMapOvr>
+    <a:masterClrMapping/>
+  </p:clrMapOvr>
+</p:sld>
+</file>
+
+<file path=ppt/slides/slide9.xml><?xml version="1.0" encoding="utf-8"?>
+<p:sld xmlns:a="http://schemas.openxmlformats.org/drawingml/2006/main" xmlns:r="http://schemas.openxmlformats.org/officeDocument/2006/relationships" xmlns:p="http://schemas.openxmlformats.org/presentationml/2006/main">
+  <p:cSld>
     <p:bg>
       <p:bgPr>
         <a:blipFill dpi="0" rotWithShape="1">
@@ -10104,495 +11336,6 @@
     <p:extLst>
       <p:ext uri="{BB962C8B-B14F-4D97-AF65-F5344CB8AC3E}">
         <p14:creationId xmlns:p14="http://schemas.microsoft.com/office/powerpoint/2010/main" val="1577633904"/>
-      </p:ext>
-    </p:extLst>
-  </p:cSld>
-  <p:clrMapOvr>
-    <a:masterClrMapping/>
-  </p:clrMapOvr>
-</p:sld>
-</file>
-
-<file path=ppt/slides/slide9.xml><?xml version="1.0" encoding="utf-8"?>
-<p:sld xmlns:a="http://schemas.openxmlformats.org/drawingml/2006/main" xmlns:r="http://schemas.openxmlformats.org/officeDocument/2006/relationships" xmlns:p="http://schemas.openxmlformats.org/presentationml/2006/main">
-  <p:cSld>
-    <p:bg>
-      <p:bgPr>
-        <a:blipFill dpi="0" rotWithShape="1">
-          <a:blip r:embed="rId3" cstate="print">
-            <a:lum/>
-            <a:extLst>
-              <a:ext uri="{28A0092B-C50C-407E-A947-70E740481C1C}">
-                <a14:useLocalDpi xmlns:a14="http://schemas.microsoft.com/office/drawing/2010/main"/>
-              </a:ext>
-            </a:extLst>
-          </a:blip>
-          <a:srcRect/>
-          <a:stretch>
-            <a:fillRect/>
-          </a:stretch>
-        </a:blipFill>
-        <a:effectLst/>
-      </p:bgPr>
-    </p:bg>
-    <p:spTree>
-      <p:nvGrpSpPr>
-        <p:cNvPr id="1" name="">
-          <a:extLst>
-            <a:ext uri="{FF2B5EF4-FFF2-40B4-BE49-F238E27FC236}">
-              <a16:creationId xmlns:a16="http://schemas.microsoft.com/office/drawing/2014/main" id="{CE6AA263-EDC0-82B9-0839-92AF21ACE1CD}"/>
-            </a:ext>
-          </a:extLst>
-        </p:cNvPr>
-        <p:cNvGrpSpPr/>
-        <p:nvPr/>
-      </p:nvGrpSpPr>
-      <p:grpSpPr>
-        <a:xfrm>
-          <a:off x="0" y="0"/>
-          <a:ext cx="0" cy="0"/>
-          <a:chOff x="0" y="0"/>
-          <a:chExt cx="0" cy="0"/>
-        </a:xfrm>
-      </p:grpSpPr>
-      <p:sp>
-        <p:nvSpPr>
-          <p:cNvPr id="4" name="Text Placeholder 3">
-            <a:extLst>
-              <a:ext uri="{FF2B5EF4-FFF2-40B4-BE49-F238E27FC236}">
-                <a16:creationId xmlns:a16="http://schemas.microsoft.com/office/drawing/2014/main" id="{0CBA97D0-9053-786F-6374-AD269EB13774}"/>
-              </a:ext>
-            </a:extLst>
-          </p:cNvPr>
-          <p:cNvSpPr>
-            <a:spLocks noGrp="1"/>
-          </p:cNvSpPr>
-          <p:nvPr>
-            <p:ph type="body" sz="quarter" idx="10"/>
-          </p:nvPr>
-        </p:nvSpPr>
-        <p:spPr/>
-        <p:txBody>
-          <a:bodyPr lIns="91440" tIns="45720" rIns="91440" bIns="45720" anchor="t"/>
-          <a:lstStyle/>
-          <a:p>
-            <a:r>
-              <a:rPr lang="it-IT" dirty="0">
-                <a:latin typeface="Arial"/>
-                <a:cs typeface="Arial"/>
-              </a:rPr>
-              <a:t>e2e</a:t>
-            </a:r>
-            <a:r>
-              <a:rPr lang="en-IT" dirty="0">
-                <a:latin typeface="Arial"/>
-                <a:cs typeface="Arial"/>
-              </a:rPr>
-              <a:t> testing</a:t>
-            </a:r>
-            <a:endParaRPr lang="en-US" dirty="0"/>
-          </a:p>
-        </p:txBody>
-      </p:sp>
-      <p:sp>
-        <p:nvSpPr>
-          <p:cNvPr id="6" name="Text Placeholder 3">
-            <a:extLst>
-              <a:ext uri="{FF2B5EF4-FFF2-40B4-BE49-F238E27FC236}">
-                <a16:creationId xmlns:a16="http://schemas.microsoft.com/office/drawing/2014/main" id="{BDFF9A42-A75A-359A-8534-541E28FE0BB2}"/>
-              </a:ext>
-            </a:extLst>
-          </p:cNvPr>
-          <p:cNvSpPr txBox="1">
-            <a:spLocks/>
-          </p:cNvSpPr>
-          <p:nvPr/>
-        </p:nvSpPr>
-        <p:spPr>
-          <a:xfrm>
-            <a:off x="6209198" y="4788827"/>
-            <a:ext cx="5445392" cy="849973"/>
-          </a:xfrm>
-          <a:prstGeom prst="rect">
-            <a:avLst/>
-          </a:prstGeom>
-        </p:spPr>
-        <p:txBody>
-          <a:bodyPr lIns="91440" tIns="45720" rIns="91440" bIns="45720" anchor="t"/>
-          <a:lstStyle>
-            <a:lvl1pPr marL="0" indent="0" algn="l" defTabSz="914400" rtl="0" eaLnBrk="1" latinLnBrk="0" hangingPunct="1">
-              <a:lnSpc>
-                <a:spcPct val="90000"/>
-              </a:lnSpc>
-              <a:spcBef>
-                <a:spcPts val="1000"/>
-              </a:spcBef>
-              <a:buFont typeface="Arial"/>
-              <a:buNone/>
-              <a:defRPr sz="4800" b="1" kern="1200">
-                <a:solidFill>
-                  <a:srgbClr val="00C700"/>
-                </a:solidFill>
-                <a:latin typeface="Arial" panose="020B0604020202020204" pitchFamily="34" charset="0"/>
-                <a:ea typeface="+mn-ea"/>
-                <a:cs typeface="Arial" panose="020B0604020202020204" pitchFamily="34" charset="0"/>
-              </a:defRPr>
-            </a:lvl1pPr>
-            <a:lvl2pPr marL="685800" indent="-228600" algn="l" defTabSz="914400" rtl="0" eaLnBrk="1" latinLnBrk="0" hangingPunct="1">
-              <a:lnSpc>
-                <a:spcPct val="90000"/>
-              </a:lnSpc>
-              <a:spcBef>
-                <a:spcPts val="500"/>
-              </a:spcBef>
-              <a:buFont typeface="Arial"/>
-              <a:buChar char="•"/>
-              <a:defRPr sz="2400" kern="1200">
-                <a:solidFill>
-                  <a:srgbClr val="00E2FF"/>
-                </a:solidFill>
-                <a:latin typeface="+mn-lt"/>
-                <a:ea typeface="+mn-ea"/>
-                <a:cs typeface="+mn-cs"/>
-              </a:defRPr>
-            </a:lvl2pPr>
-            <a:lvl3pPr marL="1143000" indent="-228600" algn="l" defTabSz="914400" rtl="0" eaLnBrk="1" latinLnBrk="0" hangingPunct="1">
-              <a:lnSpc>
-                <a:spcPct val="90000"/>
-              </a:lnSpc>
-              <a:spcBef>
-                <a:spcPts val="500"/>
-              </a:spcBef>
-              <a:buFont typeface="Arial"/>
-              <a:buChar char="•"/>
-              <a:defRPr sz="2000" kern="1200">
-                <a:solidFill>
-                  <a:srgbClr val="00E2FF"/>
-                </a:solidFill>
-                <a:latin typeface="+mn-lt"/>
-                <a:ea typeface="+mn-ea"/>
-                <a:cs typeface="+mn-cs"/>
-              </a:defRPr>
-            </a:lvl3pPr>
-            <a:lvl4pPr marL="1600200" indent="-228600" algn="l" defTabSz="914400" rtl="0" eaLnBrk="1" latinLnBrk="0" hangingPunct="1">
-              <a:lnSpc>
-                <a:spcPct val="90000"/>
-              </a:lnSpc>
-              <a:spcBef>
-                <a:spcPts val="500"/>
-              </a:spcBef>
-              <a:buFont typeface="Arial"/>
-              <a:buChar char="•"/>
-              <a:defRPr sz="1800" kern="1200">
-                <a:solidFill>
-                  <a:srgbClr val="00E2FF"/>
-                </a:solidFill>
-                <a:latin typeface="+mn-lt"/>
-                <a:ea typeface="+mn-ea"/>
-                <a:cs typeface="+mn-cs"/>
-              </a:defRPr>
-            </a:lvl4pPr>
-            <a:lvl5pPr marL="2057400" indent="-228600" algn="l" defTabSz="914400" rtl="0" eaLnBrk="1" latinLnBrk="0" hangingPunct="1">
-              <a:lnSpc>
-                <a:spcPct val="90000"/>
-              </a:lnSpc>
-              <a:spcBef>
-                <a:spcPts val="500"/>
-              </a:spcBef>
-              <a:buFont typeface="Arial"/>
-              <a:buChar char="•"/>
-              <a:defRPr sz="1800" kern="1200">
-                <a:solidFill>
-                  <a:srgbClr val="00E2FF"/>
-                </a:solidFill>
-                <a:latin typeface="+mn-lt"/>
-                <a:ea typeface="+mn-ea"/>
-                <a:cs typeface="+mn-cs"/>
-              </a:defRPr>
-            </a:lvl5pPr>
-            <a:lvl6pPr marL="2514600" indent="-228600" algn="l" defTabSz="914400" rtl="0" eaLnBrk="1" latinLnBrk="0" hangingPunct="1">
-              <a:lnSpc>
-                <a:spcPct val="90000"/>
-              </a:lnSpc>
-              <a:spcBef>
-                <a:spcPts val="500"/>
-              </a:spcBef>
-              <a:buFont typeface="Arial"/>
-              <a:buChar char="•"/>
-              <a:defRPr sz="1800" kern="1200">
-                <a:solidFill>
-                  <a:schemeClr val="tx1"/>
-                </a:solidFill>
-                <a:latin typeface="+mn-lt"/>
-                <a:ea typeface="+mn-ea"/>
-                <a:cs typeface="+mn-cs"/>
-              </a:defRPr>
-            </a:lvl6pPr>
-            <a:lvl7pPr marL="2971800" indent="-228600" algn="l" defTabSz="914400" rtl="0" eaLnBrk="1" latinLnBrk="0" hangingPunct="1">
-              <a:lnSpc>
-                <a:spcPct val="90000"/>
-              </a:lnSpc>
-              <a:spcBef>
-                <a:spcPts val="500"/>
-              </a:spcBef>
-              <a:buFont typeface="Arial"/>
-              <a:buChar char="•"/>
-              <a:defRPr sz="1800" kern="1200">
-                <a:solidFill>
-                  <a:schemeClr val="tx1"/>
-                </a:solidFill>
-                <a:latin typeface="+mn-lt"/>
-                <a:ea typeface="+mn-ea"/>
-                <a:cs typeface="+mn-cs"/>
-              </a:defRPr>
-            </a:lvl7pPr>
-            <a:lvl8pPr marL="3429000" indent="-228600" algn="l" defTabSz="914400" rtl="0" eaLnBrk="1" latinLnBrk="0" hangingPunct="1">
-              <a:lnSpc>
-                <a:spcPct val="90000"/>
-              </a:lnSpc>
-              <a:spcBef>
-                <a:spcPts val="500"/>
-              </a:spcBef>
-              <a:buFont typeface="Arial"/>
-              <a:buChar char="•"/>
-              <a:defRPr sz="1800" kern="1200">
-                <a:solidFill>
-                  <a:schemeClr val="tx1"/>
-                </a:solidFill>
-                <a:latin typeface="+mn-lt"/>
-                <a:ea typeface="+mn-ea"/>
-                <a:cs typeface="+mn-cs"/>
-              </a:defRPr>
-            </a:lvl8pPr>
-            <a:lvl9pPr marL="3886200" indent="-228600" algn="l" defTabSz="914400" rtl="0" eaLnBrk="1" latinLnBrk="0" hangingPunct="1">
-              <a:lnSpc>
-                <a:spcPct val="90000"/>
-              </a:lnSpc>
-              <a:spcBef>
-                <a:spcPts val="500"/>
-              </a:spcBef>
-              <a:buFont typeface="Arial"/>
-              <a:buChar char="•"/>
-              <a:defRPr sz="1800" kern="1200">
-                <a:solidFill>
-                  <a:schemeClr val="tx1"/>
-                </a:solidFill>
-                <a:latin typeface="+mn-lt"/>
-                <a:ea typeface="+mn-ea"/>
-                <a:cs typeface="+mn-cs"/>
-              </a:defRPr>
-            </a:lvl9pPr>
-          </a:lstStyle>
-          <a:p>
-            <a:endParaRPr lang="en-US" dirty="0"/>
-          </a:p>
-        </p:txBody>
-      </p:sp>
-      <p:sp>
-        <p:nvSpPr>
-          <p:cNvPr id="2" name="Text Placeholder 3">
-            <a:extLst>
-              <a:ext uri="{FF2B5EF4-FFF2-40B4-BE49-F238E27FC236}">
-                <a16:creationId xmlns:a16="http://schemas.microsoft.com/office/drawing/2014/main" id="{AFAEDE67-5200-687D-2622-25016CB5F05D}"/>
-              </a:ext>
-            </a:extLst>
-          </p:cNvPr>
-          <p:cNvSpPr txBox="1">
-            <a:spLocks/>
-          </p:cNvSpPr>
-          <p:nvPr/>
-        </p:nvSpPr>
-        <p:spPr>
-          <a:xfrm>
-            <a:off x="6361598" y="4941227"/>
-            <a:ext cx="5445392" cy="849973"/>
-          </a:xfrm>
-          <a:prstGeom prst="rect">
-            <a:avLst/>
-          </a:prstGeom>
-        </p:spPr>
-        <p:txBody>
-          <a:bodyPr lIns="91440" tIns="45720" rIns="91440" bIns="45720" anchor="t"/>
-          <a:lstStyle>
-            <a:lvl1pPr marL="0" indent="0" algn="l" defTabSz="914400" rtl="0" eaLnBrk="1" latinLnBrk="0" hangingPunct="1">
-              <a:lnSpc>
-                <a:spcPct val="90000"/>
-              </a:lnSpc>
-              <a:spcBef>
-                <a:spcPts val="1000"/>
-              </a:spcBef>
-              <a:buFont typeface="Arial"/>
-              <a:buNone/>
-              <a:defRPr sz="4800" b="1" kern="1200">
-                <a:solidFill>
-                  <a:srgbClr val="00C700"/>
-                </a:solidFill>
-                <a:latin typeface="Arial" panose="020B0604020202020204" pitchFamily="34" charset="0"/>
-                <a:ea typeface="+mn-ea"/>
-                <a:cs typeface="Arial" panose="020B0604020202020204" pitchFamily="34" charset="0"/>
-              </a:defRPr>
-            </a:lvl1pPr>
-            <a:lvl2pPr marL="685800" indent="-228600" algn="l" defTabSz="914400" rtl="0" eaLnBrk="1" latinLnBrk="0" hangingPunct="1">
-              <a:lnSpc>
-                <a:spcPct val="90000"/>
-              </a:lnSpc>
-              <a:spcBef>
-                <a:spcPts val="500"/>
-              </a:spcBef>
-              <a:buFont typeface="Arial"/>
-              <a:buChar char="•"/>
-              <a:defRPr sz="2400" kern="1200">
-                <a:solidFill>
-                  <a:srgbClr val="00E2FF"/>
-                </a:solidFill>
-                <a:latin typeface="+mn-lt"/>
-                <a:ea typeface="+mn-ea"/>
-                <a:cs typeface="+mn-cs"/>
-              </a:defRPr>
-            </a:lvl2pPr>
-            <a:lvl3pPr marL="1143000" indent="-228600" algn="l" defTabSz="914400" rtl="0" eaLnBrk="1" latinLnBrk="0" hangingPunct="1">
-              <a:lnSpc>
-                <a:spcPct val="90000"/>
-              </a:lnSpc>
-              <a:spcBef>
-                <a:spcPts val="500"/>
-              </a:spcBef>
-              <a:buFont typeface="Arial"/>
-              <a:buChar char="•"/>
-              <a:defRPr sz="2000" kern="1200">
-                <a:solidFill>
-                  <a:srgbClr val="00E2FF"/>
-                </a:solidFill>
-                <a:latin typeface="+mn-lt"/>
-                <a:ea typeface="+mn-ea"/>
-                <a:cs typeface="+mn-cs"/>
-              </a:defRPr>
-            </a:lvl3pPr>
-            <a:lvl4pPr marL="1600200" indent="-228600" algn="l" defTabSz="914400" rtl="0" eaLnBrk="1" latinLnBrk="0" hangingPunct="1">
-              <a:lnSpc>
-                <a:spcPct val="90000"/>
-              </a:lnSpc>
-              <a:spcBef>
-                <a:spcPts val="500"/>
-              </a:spcBef>
-              <a:buFont typeface="Arial"/>
-              <a:buChar char="•"/>
-              <a:defRPr sz="1800" kern="1200">
-                <a:solidFill>
-                  <a:srgbClr val="00E2FF"/>
-                </a:solidFill>
-                <a:latin typeface="+mn-lt"/>
-                <a:ea typeface="+mn-ea"/>
-                <a:cs typeface="+mn-cs"/>
-              </a:defRPr>
-            </a:lvl4pPr>
-            <a:lvl5pPr marL="2057400" indent="-228600" algn="l" defTabSz="914400" rtl="0" eaLnBrk="1" latinLnBrk="0" hangingPunct="1">
-              <a:lnSpc>
-                <a:spcPct val="90000"/>
-              </a:lnSpc>
-              <a:spcBef>
-                <a:spcPts val="500"/>
-              </a:spcBef>
-              <a:buFont typeface="Arial"/>
-              <a:buChar char="•"/>
-              <a:defRPr sz="1800" kern="1200">
-                <a:solidFill>
-                  <a:srgbClr val="00E2FF"/>
-                </a:solidFill>
-                <a:latin typeface="+mn-lt"/>
-                <a:ea typeface="+mn-ea"/>
-                <a:cs typeface="+mn-cs"/>
-              </a:defRPr>
-            </a:lvl5pPr>
-            <a:lvl6pPr marL="2514600" indent="-228600" algn="l" defTabSz="914400" rtl="0" eaLnBrk="1" latinLnBrk="0" hangingPunct="1">
-              <a:lnSpc>
-                <a:spcPct val="90000"/>
-              </a:lnSpc>
-              <a:spcBef>
-                <a:spcPts val="500"/>
-              </a:spcBef>
-              <a:buFont typeface="Arial"/>
-              <a:buChar char="•"/>
-              <a:defRPr sz="1800" kern="1200">
-                <a:solidFill>
-                  <a:schemeClr val="tx1"/>
-                </a:solidFill>
-                <a:latin typeface="+mn-lt"/>
-                <a:ea typeface="+mn-ea"/>
-                <a:cs typeface="+mn-cs"/>
-              </a:defRPr>
-            </a:lvl6pPr>
-            <a:lvl7pPr marL="2971800" indent="-228600" algn="l" defTabSz="914400" rtl="0" eaLnBrk="1" latinLnBrk="0" hangingPunct="1">
-              <a:lnSpc>
-                <a:spcPct val="90000"/>
-              </a:lnSpc>
-              <a:spcBef>
-                <a:spcPts val="500"/>
-              </a:spcBef>
-              <a:buFont typeface="Arial"/>
-              <a:buChar char="•"/>
-              <a:defRPr sz="1800" kern="1200">
-                <a:solidFill>
-                  <a:schemeClr val="tx1"/>
-                </a:solidFill>
-                <a:latin typeface="+mn-lt"/>
-                <a:ea typeface="+mn-ea"/>
-                <a:cs typeface="+mn-cs"/>
-              </a:defRPr>
-            </a:lvl7pPr>
-            <a:lvl8pPr marL="3429000" indent="-228600" algn="l" defTabSz="914400" rtl="0" eaLnBrk="1" latinLnBrk="0" hangingPunct="1">
-              <a:lnSpc>
-                <a:spcPct val="90000"/>
-              </a:lnSpc>
-              <a:spcBef>
-                <a:spcPts val="500"/>
-              </a:spcBef>
-              <a:buFont typeface="Arial"/>
-              <a:buChar char="•"/>
-              <a:defRPr sz="1800" kern="1200">
-                <a:solidFill>
-                  <a:schemeClr val="tx1"/>
-                </a:solidFill>
-                <a:latin typeface="+mn-lt"/>
-                <a:ea typeface="+mn-ea"/>
-                <a:cs typeface="+mn-cs"/>
-              </a:defRPr>
-            </a:lvl8pPr>
-            <a:lvl9pPr marL="3886200" indent="-228600" algn="l" defTabSz="914400" rtl="0" eaLnBrk="1" latinLnBrk="0" hangingPunct="1">
-              <a:lnSpc>
-                <a:spcPct val="90000"/>
-              </a:lnSpc>
-              <a:spcBef>
-                <a:spcPts val="500"/>
-              </a:spcBef>
-              <a:buFont typeface="Arial"/>
-              <a:buChar char="•"/>
-              <a:defRPr sz="1800" kern="1200">
-                <a:solidFill>
-                  <a:schemeClr val="tx1"/>
-                </a:solidFill>
-                <a:latin typeface="+mn-lt"/>
-                <a:ea typeface="+mn-ea"/>
-                <a:cs typeface="+mn-cs"/>
-              </a:defRPr>
-            </a:lvl9pPr>
-          </a:lstStyle>
-          <a:p>
-            <a:r>
-              <a:rPr lang="en-IT" dirty="0">
-                <a:latin typeface="Arial"/>
-                <a:cs typeface="Arial"/>
-              </a:rPr>
-              <a:t>Yes, it's a demo</a:t>
-            </a:r>
-            <a:endParaRPr lang="en-US" dirty="0"/>
-          </a:p>
-        </p:txBody>
-      </p:sp>
-    </p:spTree>
-    <p:extLst>
-      <p:ext uri="{BB962C8B-B14F-4D97-AF65-F5344CB8AC3E}">
-        <p14:creationId xmlns:p14="http://schemas.microsoft.com/office/powerpoint/2010/main" val="1979839893"/>
       </p:ext>
     </p:extLst>
   </p:cSld>
@@ -11926,15 +12669,6 @@
 </file>
 
 <file path=customXml/item1.xml><?xml version="1.0" encoding="utf-8"?>
-<?mso-contentType ?>
-<FormTemplates xmlns="http://schemas.microsoft.com/sharepoint/v3/contenttype/forms">
-  <Display>DocumentLibraryForm</Display>
-  <Edit>DocumentLibraryForm</Edit>
-  <New>DocumentLibraryForm</New>
-</FormTemplates>
-</file>
-
-<file path=customXml/item2.xml><?xml version="1.0" encoding="utf-8"?>
 <p:properties xmlns:p="http://schemas.microsoft.com/office/2006/metadata/properties" xmlns:xsi="http://www.w3.org/2001/XMLSchema-instance" xmlns:pc="http://schemas.microsoft.com/office/infopath/2007/PartnerControls">
   <documentManagement>
     <TaxCatchAll xmlns="1b3b1065-ae42-4d8a-aa8c-0a73a17faba8" xsi:nil="true"/>
@@ -11943,6 +12677,15 @@
     </lcf76f155ced4ddcb4097134ff3c332f>
   </documentManagement>
 </p:properties>
+</file>
+
+<file path=customXml/item2.xml><?xml version="1.0" encoding="utf-8"?>
+<?mso-contentType ?>
+<FormTemplates xmlns="http://schemas.microsoft.com/sharepoint/v3/contenttype/forms">
+  <Display>DocumentLibraryForm</Display>
+  <Edit>DocumentLibraryForm</Edit>
+  <New>DocumentLibraryForm</New>
+</FormTemplates>
 </file>
 
 <file path=customXml/item3.xml><?xml version="1.0" encoding="utf-8"?>
@@ -12159,14 +12902,6 @@
 </file>
 
 <file path=customXml/itemProps1.xml><?xml version="1.0" encoding="utf-8"?>
-<ds:datastoreItem xmlns:ds="http://schemas.openxmlformats.org/officeDocument/2006/customXml" ds:itemID="{B6782FBD-C4AD-49F1-B11B-703DF9FAD87C}">
-  <ds:schemaRefs>
-    <ds:schemaRef ds:uri="http://schemas.microsoft.com/sharepoint/v3/contenttype/forms"/>
-  </ds:schemaRefs>
-</ds:datastoreItem>
-</file>
-
-<file path=customXml/itemProps2.xml><?xml version="1.0" encoding="utf-8"?>
 <ds:datastoreItem xmlns:ds="http://schemas.openxmlformats.org/officeDocument/2006/customXml" ds:itemID="{D05C0892-D583-430B-AD43-D1A4EB1EE043}">
   <ds:schemaRefs>
     <ds:schemaRef ds:uri="1b3b1065-ae42-4d8a-aa8c-0a73a17faba8"/>
@@ -12179,6 +12914,14 @@
     <ds:schemaRef ds:uri="http://schemas.microsoft.com/office/infopath/2007/PartnerControls"/>
     <ds:schemaRef ds:uri="http://schemas.openxmlformats.org/package/2006/metadata/core-properties"/>
     <ds:schemaRef ds:uri="http://www.w3.org/XML/1998/namespace"/>
+  </ds:schemaRefs>
+</ds:datastoreItem>
+</file>
+
+<file path=customXml/itemProps2.xml><?xml version="1.0" encoding="utf-8"?>
+<ds:datastoreItem xmlns:ds="http://schemas.openxmlformats.org/officeDocument/2006/customXml" ds:itemID="{B6782FBD-C4AD-49F1-B11B-703DF9FAD87C}">
+  <ds:schemaRefs>
+    <ds:schemaRef ds:uri="http://schemas.microsoft.com/sharepoint/v3/contenttype/forms"/>
   </ds:schemaRefs>
 </ds:datastoreItem>
 </file>

--- a/.demo/ESPC25_SPFx_Slides.pptx
+++ b/.demo/ESPC25_SPFx_Slides.pptx
@@ -7656,13 +7656,8 @@
             </a:pPr>
             <a:r>
               <a:rPr lang="en-US" dirty="0"/>
-              <a:t>TLDR: performs </a:t>
-            </a:r>
-            <a:r>
-              <a:rPr lang="en-US"/>
-              <a:t>automated operations.</a:t>
-            </a:r>
-            <a:endParaRPr lang="en-US" dirty="0"/>
+              <a:t>TLDR: performs automated operations.</a:t>
+            </a:r>
           </a:p>
         </p:txBody>
       </p:sp>
@@ -9800,6 +9795,18 @@
             <a:r>
               <a:rPr lang="en-US" dirty="0"/>
               <a:t>Configuring GitHub actions for CI/CD.</a:t>
+            </a:r>
+          </a:p>
+          <a:p>
+            <a:r>
+              <a:rPr lang="en-US" dirty="0"/>
+              <a:t>Two different environments (TEST and PROD)</a:t>
+            </a:r>
+          </a:p>
+          <a:p>
+            <a:r>
+              <a:rPr lang="en-US" dirty="0"/>
+              <a:t>Three different branches on GitHub (DEV, TEST, and PROD)</a:t>
             </a:r>
           </a:p>
         </p:txBody>

--- a/.demo/ESPC25_SPFx_Slides.pptx
+++ b/.demo/ESPC25_SPFx_Slides.pptx
@@ -706,7 +706,7 @@
           <a:p>
             <a:fld id="{8DB4B101-3225-4967-95B5-ED5755256DE0}" type="datetimeFigureOut">
               <a:rPr lang="en-GB" smtClean="0"/>
-              <a:t>22/11/2025</a:t>
+              <a:t>23/11/2025</a:t>
             </a:fld>
             <a:endParaRPr lang="en-GB"/>
           </a:p>
@@ -1018,7 +1018,7 @@
           <a:bodyPr/>
           <a:lstStyle/>
           <a:p>
-            <a:endParaRPr lang="en-IE" sz="1200" kern="1200">
+            <a:endParaRPr lang="en-IE" sz="1200" kern="1200" dirty="0">
               <a:solidFill>
                 <a:srgbClr val="FF0000"/>
               </a:solidFill>
@@ -1771,7 +1771,7 @@
                 <a:ea typeface="Calibri"/>
                 <a:cs typeface="Calibri"/>
               </a:rPr>
-              <a:t>Unit tests saves can save our life and are responsible to have an expected behavior of your application over multiple deployments and changes.</a:t>
+              <a:t>Unit tests can save our life and are responsible to have an expected behavior of your application over multiple deployments and changes.</a:t>
             </a:r>
           </a:p>
           <a:p>
@@ -1839,14 +1839,17 @@
             </a:endParaRPr>
           </a:p>
           <a:p>
-            <a:pPr marL="171450" indent="-171450">
+            <a:pPr marL="0" indent="0">
               <a:buFont typeface="Calibri"/>
-              <a:buChar char="-"/>
+              <a:buNone/>
             </a:pPr>
-            <a:endParaRPr lang="en-US" dirty="0">
-              <a:ea typeface="Calibri"/>
-              <a:cs typeface="Calibri"/>
-            </a:endParaRPr>
+            <a:r>
+              <a:rPr lang="en-US" dirty="0">
+                <a:ea typeface="Calibri"/>
+                <a:cs typeface="Calibri"/>
+              </a:rPr>
+              <a:t>TODO: fix images</a:t>
+            </a:r>
           </a:p>
         </p:txBody>
       </p:sp>
@@ -2322,7 +2325,30 @@
           <a:bodyPr/>
           <a:lstStyle/>
           <a:p>
-            <a:endParaRPr lang="en-US"/>
+            <a:pPr marL="0" marR="0" lvl="0" indent="0" algn="l" defTabSz="914400" rtl="0" eaLnBrk="1" fontAlgn="auto" latinLnBrk="0" hangingPunct="1">
+              <a:lnSpc>
+                <a:spcPct val="100000"/>
+              </a:lnSpc>
+              <a:spcBef>
+                <a:spcPts val="0"/>
+              </a:spcBef>
+              <a:spcAft>
+                <a:spcPts val="0"/>
+              </a:spcAft>
+              <a:buClrTx/>
+              <a:buSzTx/>
+              <a:buFontTx/>
+              <a:buNone/>
+              <a:tabLst/>
+              <a:defRPr/>
+            </a:pPr>
+            <a:r>
+              <a:rPr lang="en-US" dirty="0">
+                <a:latin typeface="Arial"/>
+                <a:cs typeface="Arial"/>
+              </a:rPr>
+              <a:t>New colleagues will have the best time putting their hands on the project for the first time</a:t>
+            </a:r>
           </a:p>
         </p:txBody>
       </p:sp>
@@ -2730,6 +2756,361 @@
           <a:bodyPr/>
           <a:lstStyle/>
           <a:p>
+            <a:r>
+              <a:rPr lang="it-IT" sz="1200" kern="1200" dirty="0">
+                <a:solidFill>
+                  <a:schemeClr val="tx1"/>
+                </a:solidFill>
+                <a:effectLst/>
+                <a:latin typeface="+mn-lt"/>
+                <a:ea typeface="+mn-ea"/>
+                <a:cs typeface="+mn-cs"/>
+              </a:rPr>
+              <a:t>TODO: </a:t>
+            </a:r>
+            <a:r>
+              <a:rPr lang="it-IT" sz="1200" kern="1200" dirty="0" err="1">
+                <a:solidFill>
+                  <a:schemeClr val="tx1"/>
+                </a:solidFill>
+                <a:effectLst/>
+                <a:latin typeface="+mn-lt"/>
+                <a:ea typeface="+mn-ea"/>
+                <a:cs typeface="+mn-cs"/>
+              </a:rPr>
+              <a:t>expand</a:t>
+            </a:r>
+            <a:endParaRPr lang="it-IT" sz="1200" kern="1200" dirty="0">
+              <a:solidFill>
+                <a:schemeClr val="tx1"/>
+              </a:solidFill>
+              <a:effectLst/>
+              <a:latin typeface="+mn-lt"/>
+              <a:ea typeface="+mn-ea"/>
+              <a:cs typeface="+mn-cs"/>
+            </a:endParaRPr>
+          </a:p>
+          <a:p>
+            <a:endParaRPr lang="it-IT" sz="1200" kern="1200" dirty="0">
+              <a:solidFill>
+                <a:schemeClr val="tx1"/>
+              </a:solidFill>
+              <a:effectLst/>
+              <a:latin typeface="+mn-lt"/>
+              <a:ea typeface="+mn-ea"/>
+              <a:cs typeface="+mn-cs"/>
+            </a:endParaRPr>
+          </a:p>
+          <a:p>
+            <a:r>
+              <a:rPr lang="it-IT" sz="1200" kern="1200" dirty="0">
+                <a:solidFill>
+                  <a:schemeClr val="tx1"/>
+                </a:solidFill>
+                <a:effectLst/>
+                <a:latin typeface="+mn-lt"/>
+                <a:ea typeface="+mn-ea"/>
+                <a:cs typeface="+mn-cs"/>
+              </a:rPr>
+              <a:t>More </a:t>
+            </a:r>
+            <a:r>
+              <a:rPr lang="it-IT" sz="1200" kern="1200" dirty="0" err="1">
+                <a:solidFill>
+                  <a:schemeClr val="tx1"/>
+                </a:solidFill>
+                <a:effectLst/>
+                <a:latin typeface="+mn-lt"/>
+                <a:ea typeface="+mn-ea"/>
+                <a:cs typeface="+mn-cs"/>
+              </a:rPr>
+              <a:t>possible</a:t>
+            </a:r>
+            <a:r>
+              <a:rPr lang="it-IT" sz="1200" kern="1200" dirty="0">
+                <a:solidFill>
+                  <a:schemeClr val="tx1"/>
+                </a:solidFill>
+                <a:effectLst/>
+                <a:latin typeface="+mn-lt"/>
+                <a:ea typeface="+mn-ea"/>
+                <a:cs typeface="+mn-cs"/>
+              </a:rPr>
+              <a:t> component </a:t>
+            </a:r>
+            <a:r>
+              <a:rPr lang="it-IT" sz="1200" kern="1200" dirty="0" err="1">
+                <a:solidFill>
+                  <a:schemeClr val="tx1"/>
+                </a:solidFill>
+                <a:effectLst/>
+                <a:latin typeface="+mn-lt"/>
+                <a:ea typeface="+mn-ea"/>
+                <a:cs typeface="+mn-cs"/>
+              </a:rPr>
+              <a:t>types</a:t>
+            </a:r>
+            <a:r>
+              <a:rPr lang="it-IT" sz="1200" kern="1200" dirty="0">
+                <a:solidFill>
+                  <a:schemeClr val="tx1"/>
+                </a:solidFill>
+                <a:effectLst/>
+                <a:latin typeface="+mn-lt"/>
+                <a:ea typeface="+mn-ea"/>
+                <a:cs typeface="+mn-cs"/>
+              </a:rPr>
+              <a:t>.</a:t>
+            </a:r>
+          </a:p>
+          <a:p>
+            <a:endParaRPr lang="it-IT" sz="1200" kern="1200" dirty="0">
+              <a:solidFill>
+                <a:schemeClr val="tx1"/>
+              </a:solidFill>
+              <a:effectLst/>
+              <a:latin typeface="+mn-lt"/>
+              <a:ea typeface="+mn-ea"/>
+              <a:cs typeface="+mn-cs"/>
+            </a:endParaRPr>
+          </a:p>
+          <a:p>
+            <a:r>
+              <a:rPr lang="it-IT" sz="1200" kern="1200" dirty="0" err="1">
+                <a:solidFill>
+                  <a:schemeClr val="tx1"/>
+                </a:solidFill>
+                <a:effectLst/>
+                <a:latin typeface="+mn-lt"/>
+                <a:ea typeface="+mn-ea"/>
+                <a:cs typeface="+mn-cs"/>
+              </a:rPr>
+              <a:t>What</a:t>
+            </a:r>
+            <a:r>
+              <a:rPr lang="it-IT" sz="1200" kern="1200" dirty="0">
+                <a:solidFill>
+                  <a:schemeClr val="tx1"/>
+                </a:solidFill>
+                <a:effectLst/>
+                <a:latin typeface="+mn-lt"/>
+                <a:ea typeface="+mn-ea"/>
+                <a:cs typeface="+mn-cs"/>
+              </a:rPr>
+              <a:t> </a:t>
+            </a:r>
+            <a:r>
+              <a:rPr lang="it-IT" sz="1200" kern="1200" dirty="0" err="1">
+                <a:solidFill>
+                  <a:schemeClr val="tx1"/>
+                </a:solidFill>
+                <a:effectLst/>
+                <a:latin typeface="+mn-lt"/>
+                <a:ea typeface="+mn-ea"/>
+                <a:cs typeface="+mn-cs"/>
+              </a:rPr>
+              <a:t>is</a:t>
+            </a:r>
+            <a:r>
+              <a:rPr lang="it-IT" sz="1200" kern="1200" dirty="0">
+                <a:solidFill>
+                  <a:schemeClr val="tx1"/>
+                </a:solidFill>
+                <a:effectLst/>
+                <a:latin typeface="+mn-lt"/>
+                <a:ea typeface="+mn-ea"/>
+                <a:cs typeface="+mn-cs"/>
+              </a:rPr>
+              <a:t> a component?</a:t>
+            </a:r>
+            <a:br>
+              <a:rPr lang="it-IT" sz="1200" kern="1200" dirty="0">
+                <a:solidFill>
+                  <a:schemeClr val="tx1"/>
+                </a:solidFill>
+                <a:effectLst/>
+                <a:latin typeface="+mn-lt"/>
+                <a:ea typeface="+mn-ea"/>
+                <a:cs typeface="+mn-cs"/>
+              </a:rPr>
+            </a:br>
+            <a:endParaRPr lang="it-IT" sz="1200" kern="1200" dirty="0">
+              <a:solidFill>
+                <a:schemeClr val="tx1"/>
+              </a:solidFill>
+              <a:effectLst/>
+              <a:latin typeface="+mn-lt"/>
+              <a:ea typeface="+mn-ea"/>
+              <a:cs typeface="+mn-cs"/>
+            </a:endParaRPr>
+          </a:p>
+          <a:p>
+            <a:r>
+              <a:rPr lang="it-IT" sz="1200" kern="1200" dirty="0">
+                <a:solidFill>
+                  <a:schemeClr val="tx1"/>
+                </a:solidFill>
+                <a:effectLst/>
+                <a:latin typeface="+mn-lt"/>
+                <a:ea typeface="+mn-ea"/>
+                <a:cs typeface="+mn-cs"/>
+              </a:rPr>
+              <a:t>More </a:t>
+            </a:r>
+            <a:r>
+              <a:rPr lang="it-IT" sz="1200" kern="1200" dirty="0" err="1">
+                <a:solidFill>
+                  <a:schemeClr val="tx1"/>
+                </a:solidFill>
+                <a:effectLst/>
+                <a:latin typeface="+mn-lt"/>
+                <a:ea typeface="+mn-ea"/>
+                <a:cs typeface="+mn-cs"/>
+              </a:rPr>
+              <a:t>components</a:t>
+            </a:r>
+            <a:r>
+              <a:rPr lang="it-IT" sz="1200" kern="1200" dirty="0">
+                <a:solidFill>
+                  <a:schemeClr val="tx1"/>
+                </a:solidFill>
+                <a:effectLst/>
+                <a:latin typeface="+mn-lt"/>
+                <a:ea typeface="+mn-ea"/>
+                <a:cs typeface="+mn-cs"/>
+              </a:rPr>
+              <a:t> </a:t>
+            </a:r>
+            <a:r>
+              <a:rPr lang="it-IT" sz="1200" kern="1200" dirty="0" err="1">
+                <a:solidFill>
+                  <a:schemeClr val="tx1"/>
+                </a:solidFill>
+                <a:effectLst/>
+                <a:latin typeface="+mn-lt"/>
+                <a:ea typeface="+mn-ea"/>
+                <a:cs typeface="+mn-cs"/>
+              </a:rPr>
+              <a:t>is</a:t>
+            </a:r>
+            <a:r>
+              <a:rPr lang="it-IT" sz="1200" kern="1200" dirty="0">
+                <a:solidFill>
+                  <a:schemeClr val="tx1"/>
+                </a:solidFill>
+                <a:effectLst/>
+                <a:latin typeface="+mn-lt"/>
+                <a:ea typeface="+mn-ea"/>
+                <a:cs typeface="+mn-cs"/>
+              </a:rPr>
+              <a:t> </a:t>
+            </a:r>
+            <a:r>
+              <a:rPr lang="it-IT" sz="1200" kern="1200" dirty="0" err="1">
+                <a:solidFill>
+                  <a:schemeClr val="tx1"/>
+                </a:solidFill>
+                <a:effectLst/>
+                <a:latin typeface="+mn-lt"/>
+                <a:ea typeface="+mn-ea"/>
+                <a:cs typeface="+mn-cs"/>
+              </a:rPr>
+              <a:t>better</a:t>
+            </a:r>
+            <a:r>
+              <a:rPr lang="it-IT" sz="1200" kern="1200" dirty="0">
+                <a:solidFill>
+                  <a:schemeClr val="tx1"/>
+                </a:solidFill>
+                <a:effectLst/>
+                <a:latin typeface="+mn-lt"/>
+                <a:ea typeface="+mn-ea"/>
+                <a:cs typeface="+mn-cs"/>
+              </a:rPr>
+              <a:t> </a:t>
+            </a:r>
+            <a:r>
+              <a:rPr lang="it-IT" sz="1200" kern="1200" dirty="0" err="1">
+                <a:solidFill>
+                  <a:schemeClr val="tx1"/>
+                </a:solidFill>
+                <a:effectLst/>
+                <a:latin typeface="+mn-lt"/>
+                <a:ea typeface="+mn-ea"/>
+                <a:cs typeface="+mn-cs"/>
+              </a:rPr>
+              <a:t>than</a:t>
+            </a:r>
+            <a:r>
+              <a:rPr lang="it-IT" sz="1200" kern="1200" dirty="0">
+                <a:solidFill>
+                  <a:schemeClr val="tx1"/>
+                </a:solidFill>
+                <a:effectLst/>
+                <a:latin typeface="+mn-lt"/>
+                <a:ea typeface="+mn-ea"/>
+                <a:cs typeface="+mn-cs"/>
+              </a:rPr>
+              <a:t> </a:t>
+            </a:r>
+            <a:r>
+              <a:rPr lang="it-IT" sz="1200" kern="1200" dirty="0" err="1">
+                <a:solidFill>
+                  <a:schemeClr val="tx1"/>
+                </a:solidFill>
+                <a:effectLst/>
+                <a:latin typeface="+mn-lt"/>
+                <a:ea typeface="+mn-ea"/>
+                <a:cs typeface="+mn-cs"/>
+              </a:rPr>
+              <a:t>less</a:t>
+            </a:r>
+            <a:endParaRPr lang="it-IT" sz="1200" kern="1200" dirty="0">
+              <a:solidFill>
+                <a:schemeClr val="tx1"/>
+              </a:solidFill>
+              <a:effectLst/>
+              <a:latin typeface="+mn-lt"/>
+              <a:ea typeface="+mn-ea"/>
+              <a:cs typeface="+mn-cs"/>
+            </a:endParaRPr>
+          </a:p>
+          <a:p>
+            <a:endParaRPr lang="it-IT" sz="1200" kern="1200" dirty="0">
+              <a:solidFill>
+                <a:schemeClr val="tx1"/>
+              </a:solidFill>
+              <a:effectLst/>
+              <a:latin typeface="+mn-lt"/>
+              <a:ea typeface="+mn-ea"/>
+              <a:cs typeface="+mn-cs"/>
+            </a:endParaRPr>
+          </a:p>
+          <a:p>
+            <a:r>
+              <a:rPr lang="it-IT" sz="1200" kern="1200" dirty="0">
+                <a:solidFill>
+                  <a:schemeClr val="tx1"/>
+                </a:solidFill>
+                <a:effectLst/>
+                <a:latin typeface="+mn-lt"/>
+                <a:ea typeface="+mn-ea"/>
+                <a:cs typeface="+mn-cs"/>
+              </a:rPr>
+              <a:t>Card </a:t>
+            </a:r>
+            <a:r>
+              <a:rPr lang="it-IT" sz="1200" kern="1200" dirty="0" err="1">
+                <a:solidFill>
+                  <a:schemeClr val="tx1"/>
+                </a:solidFill>
+                <a:effectLst/>
+                <a:latin typeface="+mn-lt"/>
+                <a:ea typeface="+mn-ea"/>
+                <a:cs typeface="+mn-cs"/>
+              </a:rPr>
+              <a:t>example</a:t>
+            </a:r>
             <a:endParaRPr lang="en-US" sz="1200" kern="1200" dirty="0">
               <a:solidFill>
                 <a:schemeClr val="tx1"/>
@@ -8787,6 +9168,21 @@
               </a:rPr>
               <a:t>https://github.com/GuidoZam/espc-spfx-session-demo</a:t>
             </a:r>
+            <a:endParaRPr lang="it-IT" dirty="0">
+              <a:latin typeface="Arial"/>
+              <a:cs typeface="Arial"/>
+            </a:endParaRPr>
+          </a:p>
+          <a:p>
+            <a:pPr marL="0" indent="0">
+              <a:buNone/>
+            </a:pPr>
+            <a:endParaRPr lang="en-US" dirty="0"/>
+          </a:p>
+          <a:p>
+            <a:pPr marL="0" indent="0">
+              <a:buNone/>
+            </a:pPr>
             <a:endParaRPr lang="en-US" dirty="0"/>
           </a:p>
         </p:txBody>
@@ -9007,14 +9403,204 @@
         </p:blipFill>
         <p:spPr>
           <a:xfrm>
-            <a:off x="7741560" y="2973771"/>
-            <a:ext cx="2665029" cy="2665029"/>
+            <a:off x="9759142" y="205520"/>
+            <a:ext cx="2027360" cy="2027360"/>
           </a:xfrm>
           <a:prstGeom prst="rect">
             <a:avLst/>
           </a:prstGeom>
         </p:spPr>
       </p:pic>
+      <p:sp>
+        <p:nvSpPr>
+          <p:cNvPr id="3" name="TextBox 2">
+            <a:extLst>
+              <a:ext uri="{FF2B5EF4-FFF2-40B4-BE49-F238E27FC236}">
+                <a16:creationId xmlns:a16="http://schemas.microsoft.com/office/drawing/2014/main" id="{A1A26F54-BE1A-85D5-0571-2394394042F2}"/>
+              </a:ext>
+            </a:extLst>
+          </p:cNvPr>
+          <p:cNvSpPr txBox="1"/>
+          <p:nvPr/>
+        </p:nvSpPr>
+        <p:spPr>
+          <a:xfrm>
+            <a:off x="3925891" y="4075545"/>
+            <a:ext cx="8011886" cy="615553"/>
+          </a:xfrm>
+          <a:prstGeom prst="rect">
+            <a:avLst/>
+          </a:prstGeom>
+          <a:noFill/>
+        </p:spPr>
+        <p:txBody>
+          <a:bodyPr wrap="square" rtlCol="0" anchor="t">
+            <a:spAutoFit/>
+          </a:bodyPr>
+          <a:lstStyle/>
+          <a:p>
+            <a:r>
+              <a:rPr lang="en-GB" sz="3400" b="1" dirty="0">
+                <a:solidFill>
+                  <a:srgbClr val="00C700"/>
+                </a:solidFill>
+                <a:latin typeface="Arial" panose="020B0604020202020204" pitchFamily="34" charset="0"/>
+                <a:ea typeface="Calibri" charset="0"/>
+                <a:cs typeface="Arial" panose="020B0604020202020204" pitchFamily="34" charset="0"/>
+              </a:rPr>
+              <a:t>Peter Paul Kirschner</a:t>
+            </a:r>
+          </a:p>
+        </p:txBody>
+      </p:sp>
+      <p:sp>
+        <p:nvSpPr>
+          <p:cNvPr id="7" name="TextBox 6">
+            <a:extLst>
+              <a:ext uri="{FF2B5EF4-FFF2-40B4-BE49-F238E27FC236}">
+                <a16:creationId xmlns:a16="http://schemas.microsoft.com/office/drawing/2014/main" id="{C3E839C5-8938-277D-E271-D58C949CF356}"/>
+              </a:ext>
+            </a:extLst>
+          </p:cNvPr>
+          <p:cNvSpPr txBox="1"/>
+          <p:nvPr/>
+        </p:nvSpPr>
+        <p:spPr>
+          <a:xfrm>
+            <a:off x="3925891" y="4691671"/>
+            <a:ext cx="8011886" cy="461665"/>
+          </a:xfrm>
+          <a:prstGeom prst="rect">
+            <a:avLst/>
+          </a:prstGeom>
+          <a:noFill/>
+        </p:spPr>
+        <p:txBody>
+          <a:bodyPr wrap="square" rtlCol="0" anchor="t">
+            <a:spAutoFit/>
+          </a:bodyPr>
+          <a:lstStyle/>
+          <a:p>
+            <a:r>
+              <a:rPr lang="en-GB" sz="2400">
+                <a:solidFill>
+                  <a:schemeClr val="bg2"/>
+                </a:solidFill>
+                <a:latin typeface="Arial" panose="020B0604020202020204" pitchFamily="34" charset="0"/>
+                <a:ea typeface="Calibri" charset="0"/>
+                <a:cs typeface="Arial" panose="020B0604020202020204" pitchFamily="34" charset="0"/>
+              </a:rPr>
+              <a:t>MVP - ACP CUBIDO Digital Solutions GmbH, Austria</a:t>
+            </a:r>
+          </a:p>
+        </p:txBody>
+      </p:sp>
+      <p:sp>
+        <p:nvSpPr>
+          <p:cNvPr id="8" name="TextBox 7">
+            <a:extLst>
+              <a:ext uri="{FF2B5EF4-FFF2-40B4-BE49-F238E27FC236}">
+                <a16:creationId xmlns:a16="http://schemas.microsoft.com/office/drawing/2014/main" id="{2A695E24-E6AB-229E-3D97-01316544D8B8}"/>
+              </a:ext>
+            </a:extLst>
+          </p:cNvPr>
+          <p:cNvSpPr txBox="1"/>
+          <p:nvPr/>
+        </p:nvSpPr>
+        <p:spPr>
+          <a:xfrm>
+            <a:off x="3925891" y="5153909"/>
+            <a:ext cx="8011886" cy="615553"/>
+          </a:xfrm>
+          <a:prstGeom prst="rect">
+            <a:avLst/>
+          </a:prstGeom>
+          <a:noFill/>
+        </p:spPr>
+        <p:txBody>
+          <a:bodyPr wrap="square" rtlCol="0" anchor="t">
+            <a:spAutoFit/>
+          </a:bodyPr>
+          <a:lstStyle/>
+          <a:p>
+            <a:r>
+              <a:rPr lang="en-GB" sz="3400" b="1">
+                <a:solidFill>
+                  <a:srgbClr val="00C700"/>
+                </a:solidFill>
+                <a:latin typeface="Arial" panose="020B0604020202020204" pitchFamily="34" charset="0"/>
+                <a:ea typeface="Calibri" charset="0"/>
+                <a:cs typeface="Arial" panose="020B0604020202020204" pitchFamily="34" charset="0"/>
+              </a:rPr>
+              <a:t>Guido Zambarda</a:t>
+            </a:r>
+          </a:p>
+        </p:txBody>
+      </p:sp>
+      <p:sp>
+        <p:nvSpPr>
+          <p:cNvPr id="9" name="TextBox 8">
+            <a:extLst>
+              <a:ext uri="{FF2B5EF4-FFF2-40B4-BE49-F238E27FC236}">
+                <a16:creationId xmlns:a16="http://schemas.microsoft.com/office/drawing/2014/main" id="{46449E46-D832-C716-AD9A-CC969B2C748D}"/>
+              </a:ext>
+            </a:extLst>
+          </p:cNvPr>
+          <p:cNvSpPr txBox="1"/>
+          <p:nvPr/>
+        </p:nvSpPr>
+        <p:spPr>
+          <a:xfrm>
+            <a:off x="3925891" y="5770035"/>
+            <a:ext cx="8011886" cy="461665"/>
+          </a:xfrm>
+          <a:prstGeom prst="rect">
+            <a:avLst/>
+          </a:prstGeom>
+          <a:noFill/>
+        </p:spPr>
+        <p:txBody>
+          <a:bodyPr wrap="square" rtlCol="0" anchor="t">
+            <a:spAutoFit/>
+          </a:bodyPr>
+          <a:lstStyle/>
+          <a:p>
+            <a:r>
+              <a:rPr lang="en-GB" sz="2400">
+                <a:solidFill>
+                  <a:schemeClr val="bg2"/>
+                </a:solidFill>
+                <a:latin typeface="Arial" panose="020B0604020202020204" pitchFamily="34" charset="0"/>
+                <a:ea typeface="Calibri" charset="0"/>
+                <a:cs typeface="Arial" panose="020B0604020202020204" pitchFamily="34" charset="0"/>
+              </a:rPr>
+              <a:t>MVP – SSD </a:t>
+            </a:r>
+            <a:r>
+              <a:rPr lang="en-GB" sz="2400" err="1">
+                <a:solidFill>
+                  <a:schemeClr val="bg2"/>
+                </a:solidFill>
+                <a:latin typeface="Arial" panose="020B0604020202020204" pitchFamily="34" charset="0"/>
+                <a:ea typeface="Calibri" charset="0"/>
+                <a:cs typeface="Arial" panose="020B0604020202020204" pitchFamily="34" charset="0"/>
+              </a:rPr>
+              <a:t>PiaSys.com</a:t>
+            </a:r>
+            <a:r>
+              <a:rPr lang="en-GB" sz="2400">
+                <a:solidFill>
+                  <a:schemeClr val="bg2"/>
+                </a:solidFill>
+                <a:latin typeface="Arial" panose="020B0604020202020204" pitchFamily="34" charset="0"/>
+                <a:ea typeface="Calibri" charset="0"/>
+                <a:cs typeface="Arial" panose="020B0604020202020204" pitchFamily="34" charset="0"/>
+              </a:rPr>
+              <a:t>, Italy</a:t>
+            </a:r>
+          </a:p>
+        </p:txBody>
+      </p:sp>
     </p:spTree>
     <p:extLst>
       <p:ext uri="{BB962C8B-B14F-4D97-AF65-F5344CB8AC3E}">
@@ -9186,7 +9772,7 @@
           <a:lstStyle/>
           <a:p>
             <a:r>
-              <a:rPr lang="en-GB" sz="3400" b="1">
+              <a:rPr lang="en-GB" sz="3400" b="1" dirty="0">
                 <a:solidFill>
                   <a:srgbClr val="00C700"/>
                 </a:solidFill>
@@ -12687,15 +13273,6 @@
 </file>
 
 <file path=customXml/item2.xml><?xml version="1.0" encoding="utf-8"?>
-<?mso-contentType ?>
-<FormTemplates xmlns="http://schemas.microsoft.com/sharepoint/v3/contenttype/forms">
-  <Display>DocumentLibraryForm</Display>
-  <Edit>DocumentLibraryForm</Edit>
-  <New>DocumentLibraryForm</New>
-</FormTemplates>
-</file>
-
-<file path=customXml/item3.xml><?xml version="1.0" encoding="utf-8"?>
 <ct:contentTypeSchema xmlns:ct="http://schemas.microsoft.com/office/2006/metadata/contentType" xmlns:ma="http://schemas.microsoft.com/office/2006/metadata/properties/metaAttributes" ct:_="" ma:_="" ma:contentTypeName="Document" ma:contentTypeID="0x010100A051F54D7AD26C459333D1AFF09839BE" ma:contentTypeVersion="14" ma:contentTypeDescription="Create a new document." ma:contentTypeScope="" ma:versionID="360607d15cd3ba6bc1b1206b5ab58707">
   <xsd:schema xmlns:xsd="http://www.w3.org/2001/XMLSchema" xmlns:xs="http://www.w3.org/2001/XMLSchema" xmlns:p="http://schemas.microsoft.com/office/2006/metadata/properties" xmlns:ns2="221fbb9a-23db-4311-a69c-34622b264696" xmlns:ns3="1b3b1065-ae42-4d8a-aa8c-0a73a17faba8" targetNamespace="http://schemas.microsoft.com/office/2006/metadata/properties" ma:root="true" ma:fieldsID="418f801ce3daba7e05e8e0f00fba8a3d" ns2:_="" ns3:_="">
     <xsd:import namespace="221fbb9a-23db-4311-a69c-34622b264696"/>
@@ -12908,6 +13485,15 @@
 </ct:contentTypeSchema>
 </file>
 
+<file path=customXml/item3.xml><?xml version="1.0" encoding="utf-8"?>
+<?mso-contentType ?>
+<FormTemplates xmlns="http://schemas.microsoft.com/sharepoint/v3/contenttype/forms">
+  <Display>DocumentLibraryForm</Display>
+  <Edit>DocumentLibraryForm</Edit>
+  <New>DocumentLibraryForm</New>
+</FormTemplates>
+</file>
+
 <file path=customXml/itemProps1.xml><?xml version="1.0" encoding="utf-8"?>
 <ds:datastoreItem xmlns:ds="http://schemas.openxmlformats.org/officeDocument/2006/customXml" ds:itemID="{D05C0892-D583-430B-AD43-D1A4EB1EE043}">
   <ds:schemaRefs>
@@ -12926,14 +13512,6 @@
 </file>
 
 <file path=customXml/itemProps2.xml><?xml version="1.0" encoding="utf-8"?>
-<ds:datastoreItem xmlns:ds="http://schemas.openxmlformats.org/officeDocument/2006/customXml" ds:itemID="{B6782FBD-C4AD-49F1-B11B-703DF9FAD87C}">
-  <ds:schemaRefs>
-    <ds:schemaRef ds:uri="http://schemas.microsoft.com/sharepoint/v3/contenttype/forms"/>
-  </ds:schemaRefs>
-</ds:datastoreItem>
-</file>
-
-<file path=customXml/itemProps3.xml><?xml version="1.0" encoding="utf-8"?>
 <ds:datastoreItem xmlns:ds="http://schemas.openxmlformats.org/officeDocument/2006/customXml" ds:itemID="{B29BB492-93BB-4EF4-B08B-18E3BC9C8765}">
   <ds:schemaRefs>
     <ds:schemaRef ds:uri="1b3b1065-ae42-4d8a-aa8c-0a73a17faba8"/>
@@ -12950,4 +13528,12 @@
     <ds:schemaRef ds:uri="http://www.w3.org/2001/XMLSchema"/>
   </ds:schemaRefs>
 </ds:datastoreItem>
+</file>
+
+<file path=customXml/itemProps3.xml><?xml version="1.0" encoding="utf-8"?>
+<ds:datastoreItem xmlns:ds="http://schemas.openxmlformats.org/officeDocument/2006/customXml" ds:itemID="{B6782FBD-C4AD-49F1-B11B-703DF9FAD87C}">
+  <ds:schemaRefs>
+    <ds:schemaRef ds:uri="http://schemas.microsoft.com/sharepoint/v3/contenttype/forms"/>
+  </ds:schemaRefs>
+</ds:datastoreItem>
 </file>
--- a/.demo/ESPC25_SPFx_Slides.pptx
+++ b/.demo/ESPC25_SPFx_Slides.pptx
@@ -8,25 +8,27 @@
     <p:sldMasterId id="2147483684" r:id="rId7"/>
   </p:sldMasterIdLst>
   <p:notesMasterIdLst>
-    <p:notesMasterId r:id="rId24"/>
+    <p:notesMasterId r:id="rId26"/>
   </p:notesMasterIdLst>
   <p:sldIdLst>
     <p:sldId id="256" r:id="rId8"/>
     <p:sldId id="258" r:id="rId9"/>
-    <p:sldId id="267" r:id="rId10"/>
-    <p:sldId id="261" r:id="rId11"/>
-    <p:sldId id="274" r:id="rId12"/>
-    <p:sldId id="285" r:id="rId13"/>
-    <p:sldId id="286" r:id="rId14"/>
-    <p:sldId id="287" r:id="rId15"/>
-    <p:sldId id="275" r:id="rId16"/>
-    <p:sldId id="288" r:id="rId17"/>
-    <p:sldId id="276" r:id="rId18"/>
-    <p:sldId id="289" r:id="rId19"/>
-    <p:sldId id="277" r:id="rId20"/>
-    <p:sldId id="283" r:id="rId21"/>
-    <p:sldId id="281" r:id="rId22"/>
-    <p:sldId id="273" r:id="rId23"/>
+    <p:sldId id="292" r:id="rId10"/>
+    <p:sldId id="290" r:id="rId11"/>
+    <p:sldId id="261" r:id="rId12"/>
+    <p:sldId id="274" r:id="rId13"/>
+    <p:sldId id="285" r:id="rId14"/>
+    <p:sldId id="286" r:id="rId15"/>
+    <p:sldId id="287" r:id="rId16"/>
+    <p:sldId id="275" r:id="rId17"/>
+    <p:sldId id="288" r:id="rId18"/>
+    <p:sldId id="276" r:id="rId19"/>
+    <p:sldId id="289" r:id="rId20"/>
+    <p:sldId id="277" r:id="rId21"/>
+    <p:sldId id="283" r:id="rId22"/>
+    <p:sldId id="295" r:id="rId23"/>
+    <p:sldId id="293" r:id="rId24"/>
+    <p:sldId id="273" r:id="rId25"/>
   </p:sldIdLst>
   <p:sldSz cx="12192000" cy="6858000"/>
   <p:notesSz cx="6858000" cy="9144000"/>
@@ -1074,6 +1076,114 @@
         <p:cNvPr id="1" name="">
           <a:extLst>
             <a:ext uri="{FF2B5EF4-FFF2-40B4-BE49-F238E27FC236}">
+              <a16:creationId xmlns:a16="http://schemas.microsoft.com/office/drawing/2014/main" id="{9EB93853-D80F-F9BD-38A5-5F6755630F42}"/>
+            </a:ext>
+          </a:extLst>
+        </p:cNvPr>
+        <p:cNvGrpSpPr/>
+        <p:nvPr/>
+      </p:nvGrpSpPr>
+      <p:grpSpPr>
+        <a:xfrm>
+          <a:off x="0" y="0"/>
+          <a:ext cx="0" cy="0"/>
+          <a:chOff x="0" y="0"/>
+          <a:chExt cx="0" cy="0"/>
+        </a:xfrm>
+      </p:grpSpPr>
+      <p:sp>
+        <p:nvSpPr>
+          <p:cNvPr id="2" name="Slide Image Placeholder 1">
+            <a:extLst>
+              <a:ext uri="{FF2B5EF4-FFF2-40B4-BE49-F238E27FC236}">
+                <a16:creationId xmlns:a16="http://schemas.microsoft.com/office/drawing/2014/main" id="{A4CBDE32-55CC-9F2F-E4D2-12FA30AAA873}"/>
+              </a:ext>
+            </a:extLst>
+          </p:cNvPr>
+          <p:cNvSpPr>
+            <a:spLocks noGrp="1" noRot="1" noChangeAspect="1"/>
+          </p:cNvSpPr>
+          <p:nvPr>
+            <p:ph type="sldImg"/>
+          </p:nvPr>
+        </p:nvSpPr>
+        <p:spPr/>
+      </p:sp>
+      <p:sp>
+        <p:nvSpPr>
+          <p:cNvPr id="3" name="Notes Placeholder 2">
+            <a:extLst>
+              <a:ext uri="{FF2B5EF4-FFF2-40B4-BE49-F238E27FC236}">
+                <a16:creationId xmlns:a16="http://schemas.microsoft.com/office/drawing/2014/main" id="{4B48900A-7FFB-8C0A-2CA3-C8BF603F0163}"/>
+              </a:ext>
+            </a:extLst>
+          </p:cNvPr>
+          <p:cNvSpPr>
+            <a:spLocks noGrp="1"/>
+          </p:cNvSpPr>
+          <p:nvPr>
+            <p:ph type="body" idx="1"/>
+          </p:nvPr>
+        </p:nvSpPr>
+        <p:spPr/>
+        <p:txBody>
+          <a:bodyPr/>
+          <a:lstStyle/>
+          <a:p>
+            <a:endParaRPr lang="en-US"/>
+          </a:p>
+        </p:txBody>
+      </p:sp>
+      <p:sp>
+        <p:nvSpPr>
+          <p:cNvPr id="4" name="Slide Number Placeholder 3">
+            <a:extLst>
+              <a:ext uri="{FF2B5EF4-FFF2-40B4-BE49-F238E27FC236}">
+                <a16:creationId xmlns:a16="http://schemas.microsoft.com/office/drawing/2014/main" id="{2615C5AA-254C-3A9C-B86A-B802468FED74}"/>
+              </a:ext>
+            </a:extLst>
+          </p:cNvPr>
+          <p:cNvSpPr>
+            <a:spLocks noGrp="1"/>
+          </p:cNvSpPr>
+          <p:nvPr>
+            <p:ph type="sldNum" sz="quarter" idx="5"/>
+          </p:nvPr>
+        </p:nvSpPr>
+        <p:spPr/>
+        <p:txBody>
+          <a:bodyPr/>
+          <a:lstStyle/>
+          <a:p>
+            <a:fld id="{7EB8C794-77EE-4724-B493-2E0907BFA558}" type="slidenum">
+              <a:rPr lang="en-GB" smtClean="0"/>
+              <a:t>12</a:t>
+            </a:fld>
+            <a:endParaRPr lang="en-GB"/>
+          </a:p>
+        </p:txBody>
+      </p:sp>
+    </p:spTree>
+    <p:extLst>
+      <p:ext uri="{BB962C8B-B14F-4D97-AF65-F5344CB8AC3E}">
+        <p14:creationId xmlns:p14="http://schemas.microsoft.com/office/powerpoint/2010/main" val="4161228640"/>
+      </p:ext>
+    </p:extLst>
+  </p:cSld>
+  <p:clrMapOvr>
+    <a:masterClrMapping/>
+  </p:clrMapOvr>
+</p:notes>
+</file>
+
+<file path=ppt/notesSlides/notesSlide11.xml><?xml version="1.0" encoding="utf-8"?>
+<p:notes xmlns:a="http://schemas.openxmlformats.org/drawingml/2006/main" xmlns:r="http://schemas.openxmlformats.org/officeDocument/2006/relationships" xmlns:p="http://schemas.openxmlformats.org/presentationml/2006/main">
+  <p:cSld>
+    <p:spTree>
+      <p:nvGrpSpPr>
+        <p:cNvPr id="1" name="">
+          <a:extLst>
+            <a:ext uri="{FF2B5EF4-FFF2-40B4-BE49-F238E27FC236}">
               <a16:creationId xmlns:a16="http://schemas.microsoft.com/office/drawing/2014/main" id="{7A251376-E98D-0D52-97E6-BE532ED4896C}"/>
             </a:ext>
           </a:extLst>
@@ -1163,7 +1273,7 @@
           <a:p>
             <a:fld id="{7EB8C794-77EE-4724-B493-2E0907BFA558}" type="slidenum">
               <a:rPr lang="en-GB" smtClean="0"/>
-              <a:t>12</a:t>
+              <a:t>13</a:t>
             </a:fld>
             <a:endParaRPr lang="en-GB"/>
           </a:p>
@@ -1182,7 +1292,7 @@
 </p:notes>
 </file>
 
-<file path=ppt/notesSlides/notesSlide11.xml><?xml version="1.0" encoding="utf-8"?>
+<file path=ppt/notesSlides/notesSlide12.xml><?xml version="1.0" encoding="utf-8"?>
 <p:notes xmlns:a="http://schemas.openxmlformats.org/drawingml/2006/main" xmlns:r="http://schemas.openxmlformats.org/officeDocument/2006/relationships" xmlns:p="http://schemas.openxmlformats.org/presentationml/2006/main">
   <p:cSld>
     <p:spTree>
@@ -1386,7 +1496,7 @@
           <a:p>
             <a:fld id="{7EB8C794-77EE-4724-B493-2E0907BFA558}" type="slidenum">
               <a:rPr lang="en-GB" smtClean="0"/>
-              <a:t>13</a:t>
+              <a:t>14</a:t>
             </a:fld>
             <a:endParaRPr lang="en-GB"/>
           </a:p>
@@ -1405,7 +1515,7 @@
 </p:notes>
 </file>
 
-<file path=ppt/notesSlides/notesSlide12.xml><?xml version="1.0" encoding="utf-8"?>
+<file path=ppt/notesSlides/notesSlide13.xml><?xml version="1.0" encoding="utf-8"?>
 <p:notes xmlns:a="http://schemas.openxmlformats.org/drawingml/2006/main" xmlns:r="http://schemas.openxmlformats.org/officeDocument/2006/relationships" xmlns:p="http://schemas.openxmlformats.org/presentationml/2006/main">
   <p:cSld>
     <p:spTree>
@@ -1609,7 +1719,7 @@
           <a:p>
             <a:fld id="{7EB8C794-77EE-4724-B493-2E0907BFA558}" type="slidenum">
               <a:rPr lang="en-GB" smtClean="0"/>
-              <a:t>14</a:t>
+              <a:t>15</a:t>
             </a:fld>
             <a:endParaRPr lang="en-GB"/>
           </a:p>
@@ -1628,7 +1738,7 @@
 </p:notes>
 </file>
 
-<file path=ppt/notesSlides/notesSlide13.xml><?xml version="1.0" encoding="utf-8"?>
+<file path=ppt/notesSlides/notesSlide14.xml><?xml version="1.0" encoding="utf-8"?>
 <p:notes xmlns:a="http://schemas.openxmlformats.org/drawingml/2006/main" xmlns:r="http://schemas.openxmlformats.org/officeDocument/2006/relationships" xmlns:p="http://schemas.openxmlformats.org/presentationml/2006/main">
   <p:cSld>
     <p:spTree>
@@ -1636,7 +1746,7 @@
         <p:cNvPr id="1" name="">
           <a:extLst>
             <a:ext uri="{FF2B5EF4-FFF2-40B4-BE49-F238E27FC236}">
-              <a16:creationId xmlns:a16="http://schemas.microsoft.com/office/drawing/2014/main" id="{57A32D5C-DF60-A326-82D2-59F7D398ADA0}"/>
+              <a16:creationId xmlns:a16="http://schemas.microsoft.com/office/drawing/2014/main" id="{D3C368C6-BC84-AB35-94B0-8DD130AFE4CD}"/>
             </a:ext>
           </a:extLst>
         </p:cNvPr>
@@ -1656,7 +1766,7 @@
           <p:cNvPr id="2" name="Slide Image Placeholder 1">
             <a:extLst>
               <a:ext uri="{FF2B5EF4-FFF2-40B4-BE49-F238E27FC236}">
-                <a16:creationId xmlns:a16="http://schemas.microsoft.com/office/drawing/2014/main" id="{6E3B74E8-2E37-1493-93D8-32A40ECE3BAF}"/>
+                <a16:creationId xmlns:a16="http://schemas.microsoft.com/office/drawing/2014/main" id="{723317E1-CB41-7BED-C13E-F88E2AD30DDB}"/>
               </a:ext>
             </a:extLst>
           </p:cNvPr>
@@ -1674,7 +1784,7 @@
           <p:cNvPr id="3" name="Notes Placeholder 2">
             <a:extLst>
               <a:ext uri="{FF2B5EF4-FFF2-40B4-BE49-F238E27FC236}">
-                <a16:creationId xmlns:a16="http://schemas.microsoft.com/office/drawing/2014/main" id="{97FB4A5C-0675-356A-1F5A-592FEACD8AC4}"/>
+                <a16:creationId xmlns:a16="http://schemas.microsoft.com/office/drawing/2014/main" id="{21B6DF64-D139-5408-7C9A-93A8932C9BB2}"/>
               </a:ext>
             </a:extLst>
           </p:cNvPr>
@@ -1758,7 +1868,7 @@
                 <a:ea typeface="Calibri"/>
                 <a:cs typeface="Calibri"/>
               </a:rPr>
-              <a:t>Giveaways</a:t>
+              <a:t>Takeaways</a:t>
             </a:r>
           </a:p>
           <a:p>
@@ -1798,34 +1908,78 @@
             </a:endParaRPr>
           </a:p>
           <a:p>
-            <a:pPr marL="0" marR="0" lvl="0" indent="0" algn="l" defTabSz="914400" rtl="0" eaLnBrk="1" fontAlgn="auto" latinLnBrk="0" hangingPunct="1">
-              <a:lnSpc>
-                <a:spcPct val="100000"/>
-              </a:lnSpc>
-              <a:spcBef>
-                <a:spcPts val="0"/>
-              </a:spcBef>
-              <a:spcAft>
-                <a:spcPts val="0"/>
-              </a:spcAft>
-              <a:buClrTx/>
-              <a:buSzTx/>
+            <a:r>
+              <a:rPr lang="en-IE" dirty="0">
+                <a:ea typeface="Calibri"/>
+                <a:cs typeface="Calibri"/>
+              </a:rPr>
+              <a:t>Highlight the benefits:</a:t>
+            </a:r>
+          </a:p>
+          <a:p>
+            <a:pPr marL="171450" indent="-171450">
               <a:buFont typeface="Calibri"/>
-              <a:buNone/>
-              <a:tabLst/>
-              <a:defRPr/>
+              <a:buChar char="-"/>
             </a:pPr>
             <a:r>
-              <a:rPr lang="en-US" sz="1200" kern="1200" dirty="0">
-                <a:solidFill>
-                  <a:schemeClr val="tx1"/>
-                </a:solidFill>
-                <a:effectLst/>
-                <a:latin typeface="+mn-lt"/>
-                <a:ea typeface="+mn-ea"/>
-                <a:cs typeface="+mn-cs"/>
+              <a:rPr lang="en-IE" dirty="0">
+                <a:ea typeface="Calibri"/>
+                <a:cs typeface="Calibri"/>
               </a:rPr>
-              <a:t>The provided repo is public for audience use and learning: https://github.com/GuidoZam/espc-spfx-session-demo</a:t>
+              <a:t>If you're on vacation the coworkers are still able to fix bugs without having the dev environment installed</a:t>
+            </a:r>
+          </a:p>
+          <a:p>
+            <a:pPr marL="171450" indent="-171450">
+              <a:buFont typeface="Calibri"/>
+              <a:buChar char="-"/>
+            </a:pPr>
+            <a:r>
+              <a:rPr lang="en-IE" dirty="0">
+                <a:ea typeface="Calibri"/>
+                <a:cs typeface="Calibri"/>
+              </a:rPr>
+              <a:t>You should have different environments (DEV,TEST,STAGING,PROD)</a:t>
+            </a:r>
+          </a:p>
+          <a:p>
+            <a:pPr marL="171450" indent="-171450">
+              <a:buFont typeface="Calibri"/>
+              <a:buChar char="-"/>
+            </a:pPr>
+            <a:r>
+              <a:rPr lang="en-IE" dirty="0">
+                <a:ea typeface="Calibri"/>
+                <a:cs typeface="Calibri"/>
+              </a:rPr>
+              <a:t>You want your off-time to be really an off-time</a:t>
+            </a:r>
+          </a:p>
+          <a:p>
+            <a:pPr marL="171450" indent="-171450">
+              <a:buFont typeface="Calibri"/>
+              <a:buChar char="-"/>
+            </a:pPr>
+            <a:r>
+              <a:rPr lang="en-IE" dirty="0">
+                <a:ea typeface="Calibri"/>
+                <a:cs typeface="Calibri"/>
+              </a:rPr>
+              <a:t>Don't publish on </a:t>
+            </a:r>
+            <a:r>
+              <a:rPr lang="en-IE" dirty="0" err="1">
+                <a:ea typeface="Calibri"/>
+                <a:cs typeface="Calibri"/>
+              </a:rPr>
+              <a:t>friday</a:t>
+            </a:r>
+            <a:r>
+              <a:rPr lang="en-IE" dirty="0">
+                <a:ea typeface="Calibri"/>
+                <a:cs typeface="Calibri"/>
+              </a:rPr>
+              <a:t> :)</a:t>
             </a:r>
           </a:p>
           <a:p>
@@ -1839,17 +1993,25 @@
             </a:endParaRPr>
           </a:p>
           <a:p>
-            <a:pPr marL="0" indent="0">
+            <a:pPr marL="171450" indent="-171450">
               <a:buFont typeface="Calibri"/>
-              <a:buNone/>
+              <a:buChar char="-"/>
             </a:pPr>
-            <a:r>
-              <a:rPr lang="en-US" dirty="0">
-                <a:ea typeface="Calibri"/>
-                <a:cs typeface="Calibri"/>
-              </a:rPr>
-              <a:t>TODO: fix images</a:t>
-            </a:r>
+            <a:endParaRPr lang="en-US" dirty="0">
+              <a:ea typeface="Calibri"/>
+              <a:cs typeface="Calibri"/>
+            </a:endParaRPr>
+          </a:p>
+          <a:p>
+            <a:endParaRPr lang="en-US" sz="1200" kern="1200" dirty="0">
+              <a:solidFill>
+                <a:schemeClr val="tx1"/>
+              </a:solidFill>
+              <a:effectLst/>
+              <a:latin typeface="+mn-lt"/>
+              <a:ea typeface="+mn-ea"/>
+              <a:cs typeface="+mn-cs"/>
+            </a:endParaRPr>
           </a:p>
         </p:txBody>
       </p:sp>
@@ -1858,7 +2020,7 @@
           <p:cNvPr id="4" name="Slide Number Placeholder 3">
             <a:extLst>
               <a:ext uri="{FF2B5EF4-FFF2-40B4-BE49-F238E27FC236}">
-                <a16:creationId xmlns:a16="http://schemas.microsoft.com/office/drawing/2014/main" id="{EC39FCA7-6B20-7398-7513-B8ABA284E421}"/>
+                <a16:creationId xmlns:a16="http://schemas.microsoft.com/office/drawing/2014/main" id="{C75E5724-FAD0-58C0-B870-982FF0DD5855}"/>
               </a:ext>
             </a:extLst>
           </p:cNvPr>
@@ -1876,7 +2038,7 @@
           <a:p>
             <a:fld id="{7EB8C794-77EE-4724-B493-2E0907BFA558}" type="slidenum">
               <a:rPr lang="en-GB" smtClean="0"/>
-              <a:t>15</a:t>
+              <a:t>16</a:t>
             </a:fld>
             <a:endParaRPr lang="en-GB"/>
           </a:p>
@@ -1885,7 +2047,7 @@
     </p:spTree>
     <p:extLst>
       <p:ext uri="{BB962C8B-B14F-4D97-AF65-F5344CB8AC3E}">
-        <p14:creationId xmlns:p14="http://schemas.microsoft.com/office/powerpoint/2010/main" val="4150165631"/>
+        <p14:creationId xmlns:p14="http://schemas.microsoft.com/office/powerpoint/2010/main" val="1190428111"/>
       </p:ext>
     </p:extLst>
   </p:cSld>
@@ -1895,7 +2057,118 @@
 </p:notes>
 </file>
 
-<file path=ppt/notesSlides/notesSlide14.xml><?xml version="1.0" encoding="utf-8"?>
+<file path=ppt/notesSlides/notesSlide15.xml><?xml version="1.0" encoding="utf-8"?>
+<p:notes xmlns:a="http://schemas.openxmlformats.org/drawingml/2006/main" xmlns:r="http://schemas.openxmlformats.org/officeDocument/2006/relationships" xmlns:p="http://schemas.openxmlformats.org/presentationml/2006/main">
+  <p:cSld>
+    <p:spTree>
+      <p:nvGrpSpPr>
+        <p:cNvPr id="1" name="">
+          <a:extLst>
+            <a:ext uri="{FF2B5EF4-FFF2-40B4-BE49-F238E27FC236}">
+              <a16:creationId xmlns:a16="http://schemas.microsoft.com/office/drawing/2014/main" id="{673AAFE2-33DD-2999-9F4F-14A5FD44D2DE}"/>
+            </a:ext>
+          </a:extLst>
+        </p:cNvPr>
+        <p:cNvGrpSpPr/>
+        <p:nvPr/>
+      </p:nvGrpSpPr>
+      <p:grpSpPr>
+        <a:xfrm>
+          <a:off x="0" y="0"/>
+          <a:ext cx="0" cy="0"/>
+          <a:chOff x="0" y="0"/>
+          <a:chExt cx="0" cy="0"/>
+        </a:xfrm>
+      </p:grpSpPr>
+      <p:sp>
+        <p:nvSpPr>
+          <p:cNvPr id="2" name="Slide Image Placeholder 1">
+            <a:extLst>
+              <a:ext uri="{FF2B5EF4-FFF2-40B4-BE49-F238E27FC236}">
+                <a16:creationId xmlns:a16="http://schemas.microsoft.com/office/drawing/2014/main" id="{8D8F79CE-8B7D-AA52-FEC0-79AA345276A9}"/>
+              </a:ext>
+            </a:extLst>
+          </p:cNvPr>
+          <p:cNvSpPr>
+            <a:spLocks noGrp="1" noRot="1" noChangeAspect="1"/>
+          </p:cNvSpPr>
+          <p:nvPr>
+            <p:ph type="sldImg"/>
+          </p:nvPr>
+        </p:nvSpPr>
+        <p:spPr/>
+      </p:sp>
+      <p:sp>
+        <p:nvSpPr>
+          <p:cNvPr id="3" name="Notes Placeholder 2">
+            <a:extLst>
+              <a:ext uri="{FF2B5EF4-FFF2-40B4-BE49-F238E27FC236}">
+                <a16:creationId xmlns:a16="http://schemas.microsoft.com/office/drawing/2014/main" id="{CAFDA246-2CBC-C406-EB9E-E7632F47B562}"/>
+              </a:ext>
+            </a:extLst>
+          </p:cNvPr>
+          <p:cNvSpPr>
+            <a:spLocks noGrp="1"/>
+          </p:cNvSpPr>
+          <p:nvPr>
+            <p:ph type="body" idx="1"/>
+          </p:nvPr>
+        </p:nvSpPr>
+        <p:spPr/>
+        <p:txBody>
+          <a:bodyPr/>
+          <a:lstStyle/>
+          <a:p>
+            <a:endParaRPr lang="en-US" dirty="0">
+              <a:ea typeface="Calibri"/>
+              <a:cs typeface="Calibri"/>
+            </a:endParaRPr>
+          </a:p>
+        </p:txBody>
+      </p:sp>
+      <p:sp>
+        <p:nvSpPr>
+          <p:cNvPr id="4" name="Slide Number Placeholder 3">
+            <a:extLst>
+              <a:ext uri="{FF2B5EF4-FFF2-40B4-BE49-F238E27FC236}">
+                <a16:creationId xmlns:a16="http://schemas.microsoft.com/office/drawing/2014/main" id="{716283F3-DE20-F22E-82DC-A1B67DDE57FC}"/>
+              </a:ext>
+            </a:extLst>
+          </p:cNvPr>
+          <p:cNvSpPr>
+            <a:spLocks noGrp="1"/>
+          </p:cNvSpPr>
+          <p:nvPr>
+            <p:ph type="sldNum" sz="quarter" idx="5"/>
+          </p:nvPr>
+        </p:nvSpPr>
+        <p:spPr/>
+        <p:txBody>
+          <a:bodyPr/>
+          <a:lstStyle/>
+          <a:p>
+            <a:fld id="{7EB8C794-77EE-4724-B493-2E0907BFA558}" type="slidenum">
+              <a:rPr lang="en-GB" smtClean="0"/>
+              <a:t>17</a:t>
+            </a:fld>
+            <a:endParaRPr lang="en-GB"/>
+          </a:p>
+        </p:txBody>
+      </p:sp>
+    </p:spTree>
+    <p:extLst>
+      <p:ext uri="{BB962C8B-B14F-4D97-AF65-F5344CB8AC3E}">
+        <p14:creationId xmlns:p14="http://schemas.microsoft.com/office/powerpoint/2010/main" val="1696065687"/>
+      </p:ext>
+    </p:extLst>
+  </p:cSld>
+  <p:clrMapOvr>
+    <a:masterClrMapping/>
+  </p:clrMapOvr>
+</p:notes>
+</file>
+
+<file path=ppt/notesSlides/notesSlide16.xml><?xml version="1.0" encoding="utf-8"?>
 <p:notes xmlns:a="http://schemas.openxmlformats.org/drawingml/2006/main" xmlns:r="http://schemas.openxmlformats.org/officeDocument/2006/relationships" xmlns:p="http://schemas.openxmlformats.org/presentationml/2006/main">
   <p:cSld>
     <p:spTree>
@@ -1968,7 +2241,7 @@
           <a:p>
             <a:fld id="{7EB8C794-77EE-4724-B493-2E0907BFA558}" type="slidenum">
               <a:rPr lang="en-GB" smtClean="0"/>
-              <a:t>16</a:t>
+              <a:t>18</a:t>
             </a:fld>
             <a:endParaRPr lang="en-GB"/>
           </a:p>
@@ -2076,7 +2349,13 @@
   <p:cSld>
     <p:spTree>
       <p:nvGrpSpPr>
-        <p:cNvPr id="1" name=""/>
+        <p:cNvPr id="1" name="">
+          <a:extLst>
+            <a:ext uri="{FF2B5EF4-FFF2-40B4-BE49-F238E27FC236}">
+              <a16:creationId xmlns:a16="http://schemas.microsoft.com/office/drawing/2014/main" id="{CE722B19-CA49-B01C-9F0E-1130D35473E6}"/>
+            </a:ext>
+          </a:extLst>
+        </p:cNvPr>
         <p:cNvGrpSpPr/>
         <p:nvPr/>
       </p:nvGrpSpPr>
@@ -2090,7 +2369,13 @@
       </p:grpSpPr>
       <p:sp>
         <p:nvSpPr>
-          <p:cNvPr id="2" name="Slide Image Placeholder 1"/>
+          <p:cNvPr id="2" name="Slide Image Placeholder 1">
+            <a:extLst>
+              <a:ext uri="{FF2B5EF4-FFF2-40B4-BE49-F238E27FC236}">
+                <a16:creationId xmlns:a16="http://schemas.microsoft.com/office/drawing/2014/main" id="{1E78658E-A52B-15A0-B59C-CED62EA5B3BF}"/>
+              </a:ext>
+            </a:extLst>
+          </p:cNvPr>
           <p:cNvSpPr>
             <a:spLocks noGrp="1" noRot="1" noChangeAspect="1"/>
           </p:cNvSpPr>
@@ -2102,7 +2387,13 @@
       </p:sp>
       <p:sp>
         <p:nvSpPr>
-          <p:cNvPr id="3" name="Notes Placeholder 2"/>
+          <p:cNvPr id="3" name="Notes Placeholder 2">
+            <a:extLst>
+              <a:ext uri="{FF2B5EF4-FFF2-40B4-BE49-F238E27FC236}">
+                <a16:creationId xmlns:a16="http://schemas.microsoft.com/office/drawing/2014/main" id="{B02A3EFD-B76D-CAB9-2346-019FBBE62CE3}"/>
+              </a:ext>
+            </a:extLst>
+          </p:cNvPr>
           <p:cNvSpPr>
             <a:spLocks noGrp="1"/>
           </p:cNvSpPr>
@@ -2115,139 +2406,19 @@
           <a:bodyPr/>
           <a:lstStyle/>
           <a:p>
-            <a:r>
-              <a:rPr lang="en-IE" dirty="0"/>
-              <a:t>Ask audience question: </a:t>
-            </a:r>
             <a:endParaRPr lang="en-US" dirty="0"/>
-          </a:p>
-          <a:p>
-            <a:pPr marL="171450" indent="-171450">
-              <a:buFont typeface="Calibri"/>
-              <a:buChar char="-"/>
-            </a:pPr>
-            <a:r>
-              <a:rPr lang="en-IE" dirty="0"/>
-              <a:t>Do you use pipelines? You should, after the session go and create your own.</a:t>
-            </a:r>
-            <a:endParaRPr lang="en-US" dirty="0">
-              <a:ea typeface="Calibri" panose="020F0502020204030204"/>
-              <a:cs typeface="Calibri" panose="020F0502020204030204"/>
-            </a:endParaRPr>
-          </a:p>
-          <a:p>
-            <a:pPr marL="171450" indent="-171450">
-              <a:buFont typeface="Calibri"/>
-              <a:buChar char="-"/>
-            </a:pPr>
-            <a:r>
-              <a:rPr lang="en-IE" dirty="0">
-                <a:ea typeface="Calibri"/>
-                <a:cs typeface="Calibri"/>
-              </a:rPr>
-              <a:t>Do you package the solution on your own hardware?</a:t>
-            </a:r>
-          </a:p>
-          <a:p>
-            <a:pPr marL="171450" indent="-171450">
-              <a:buFont typeface="Calibri"/>
-              <a:buChar char="-"/>
-            </a:pPr>
-            <a:r>
-              <a:rPr lang="en-IE">
-                <a:ea typeface="Calibri"/>
-                <a:cs typeface="Calibri"/>
-              </a:rPr>
-              <a:t>Do you have different environment set up?</a:t>
-            </a:r>
-            <a:endParaRPr lang="en-IE"/>
-          </a:p>
-          <a:p>
-            <a:endParaRPr lang="en-IE" dirty="0">
-              <a:ea typeface="Calibri"/>
-              <a:cs typeface="Calibri"/>
-            </a:endParaRPr>
-          </a:p>
-          <a:p>
-            <a:r>
-              <a:rPr lang="en-IE" dirty="0">
-                <a:ea typeface="Calibri"/>
-                <a:cs typeface="Calibri"/>
-              </a:rPr>
-              <a:t>Highlight the benefits of using those:</a:t>
-            </a:r>
-          </a:p>
-          <a:p>
-            <a:pPr marL="171450" indent="-171450">
-              <a:buFont typeface="Calibri"/>
-              <a:buChar char="-"/>
-            </a:pPr>
-            <a:r>
-              <a:rPr lang="en-IE" dirty="0">
-                <a:ea typeface="Calibri"/>
-                <a:cs typeface="Calibri"/>
-              </a:rPr>
-              <a:t>If you're on vacation the others are still able to fix bugs without having the dev environment installed</a:t>
-            </a:r>
-          </a:p>
-          <a:p>
-            <a:pPr marL="171450" indent="-171450">
-              <a:buFont typeface="Calibri"/>
-              <a:buChar char="-"/>
-            </a:pPr>
-            <a:r>
-              <a:rPr lang="en-IE" dirty="0">
-                <a:ea typeface="Calibri"/>
-                <a:cs typeface="Calibri"/>
-              </a:rPr>
-              <a:t>You should have different environments (DEV,TEST,STAGING,PROD)</a:t>
-            </a:r>
-          </a:p>
-          <a:p>
-            <a:pPr marL="171450" indent="-171450">
-              <a:buFont typeface="Calibri"/>
-              <a:buChar char="-"/>
-            </a:pPr>
-            <a:r>
-              <a:rPr lang="en-IE" dirty="0">
-                <a:ea typeface="Calibri"/>
-                <a:cs typeface="Calibri"/>
-              </a:rPr>
-              <a:t>You want your off-time to be really an off-time</a:t>
-            </a:r>
-          </a:p>
-          <a:p>
-            <a:pPr marL="171450" indent="-171450">
-              <a:buFont typeface="Calibri"/>
-              <a:buChar char="-"/>
-            </a:pPr>
-            <a:r>
-              <a:rPr lang="en-IE" dirty="0">
-                <a:ea typeface="Calibri"/>
-                <a:cs typeface="Calibri"/>
-              </a:rPr>
-              <a:t>Don't publish on </a:t>
-            </a:r>
-            <a:r>
-              <a:rPr lang="en-IE" dirty="0" err="1">
-                <a:ea typeface="Calibri"/>
-                <a:cs typeface="Calibri"/>
-              </a:rPr>
-              <a:t>friday</a:t>
-            </a:r>
-            <a:r>
-              <a:rPr lang="en-IE" dirty="0">
-                <a:ea typeface="Calibri"/>
-                <a:cs typeface="Calibri"/>
-              </a:rPr>
-              <a:t> :)</a:t>
-            </a:r>
           </a:p>
         </p:txBody>
       </p:sp>
       <p:sp>
         <p:nvSpPr>
-          <p:cNvPr id="4" name="Slide Number Placeholder 3"/>
+          <p:cNvPr id="4" name="Slide Number Placeholder 3">
+            <a:extLst>
+              <a:ext uri="{FF2B5EF4-FFF2-40B4-BE49-F238E27FC236}">
+                <a16:creationId xmlns:a16="http://schemas.microsoft.com/office/drawing/2014/main" id="{9654FB59-7A88-7720-4382-BC325F314C2E}"/>
+              </a:ext>
+            </a:extLst>
+          </p:cNvPr>
           <p:cNvSpPr>
             <a:spLocks noGrp="1"/>
           </p:cNvSpPr>
@@ -2271,7 +2442,7 @@
     </p:spTree>
     <p:extLst>
       <p:ext uri="{BB962C8B-B14F-4D97-AF65-F5344CB8AC3E}">
-        <p14:creationId xmlns:p14="http://schemas.microsoft.com/office/powerpoint/2010/main" val="2842748347"/>
+        <p14:creationId xmlns:p14="http://schemas.microsoft.com/office/powerpoint/2010/main" val="2152803435"/>
       </p:ext>
     </p:extLst>
   </p:cSld>
@@ -2282,6 +2453,178 @@
 </file>
 
 <file path=ppt/notesSlides/notesSlide4.xml><?xml version="1.0" encoding="utf-8"?>
+<p:notes xmlns:a="http://schemas.openxmlformats.org/drawingml/2006/main" xmlns:r="http://schemas.openxmlformats.org/officeDocument/2006/relationships" xmlns:p="http://schemas.openxmlformats.org/presentationml/2006/main">
+  <p:cSld>
+    <p:spTree>
+      <p:nvGrpSpPr>
+        <p:cNvPr id="1" name="">
+          <a:extLst>
+            <a:ext uri="{FF2B5EF4-FFF2-40B4-BE49-F238E27FC236}">
+              <a16:creationId xmlns:a16="http://schemas.microsoft.com/office/drawing/2014/main" id="{AEFBBE75-F678-AFDF-4F5B-AD65EC4ABA54}"/>
+            </a:ext>
+          </a:extLst>
+        </p:cNvPr>
+        <p:cNvGrpSpPr/>
+        <p:nvPr/>
+      </p:nvGrpSpPr>
+      <p:grpSpPr>
+        <a:xfrm>
+          <a:off x="0" y="0"/>
+          <a:ext cx="0" cy="0"/>
+          <a:chOff x="0" y="0"/>
+          <a:chExt cx="0" cy="0"/>
+        </a:xfrm>
+      </p:grpSpPr>
+      <p:sp>
+        <p:nvSpPr>
+          <p:cNvPr id="2" name="Slide Image Placeholder 1">
+            <a:extLst>
+              <a:ext uri="{FF2B5EF4-FFF2-40B4-BE49-F238E27FC236}">
+                <a16:creationId xmlns:a16="http://schemas.microsoft.com/office/drawing/2014/main" id="{AC969DE6-05C7-07E5-8D0C-ABAE45061F8F}"/>
+              </a:ext>
+            </a:extLst>
+          </p:cNvPr>
+          <p:cNvSpPr>
+            <a:spLocks noGrp="1" noRot="1" noChangeAspect="1"/>
+          </p:cNvSpPr>
+          <p:nvPr>
+            <p:ph type="sldImg"/>
+          </p:nvPr>
+        </p:nvSpPr>
+        <p:spPr/>
+      </p:sp>
+      <p:sp>
+        <p:nvSpPr>
+          <p:cNvPr id="3" name="Notes Placeholder 2">
+            <a:extLst>
+              <a:ext uri="{FF2B5EF4-FFF2-40B4-BE49-F238E27FC236}">
+                <a16:creationId xmlns:a16="http://schemas.microsoft.com/office/drawing/2014/main" id="{AF38634E-5DFA-E5EA-C6C9-B18F87325BD3}"/>
+              </a:ext>
+            </a:extLst>
+          </p:cNvPr>
+          <p:cNvSpPr>
+            <a:spLocks noGrp="1"/>
+          </p:cNvSpPr>
+          <p:nvPr>
+            <p:ph type="body" idx="1"/>
+          </p:nvPr>
+        </p:nvSpPr>
+        <p:spPr/>
+        <p:txBody>
+          <a:bodyPr/>
+          <a:lstStyle/>
+          <a:p>
+            <a:r>
+              <a:rPr lang="en-IE" dirty="0"/>
+              <a:t>Ask audience questions like: </a:t>
+            </a:r>
+            <a:endParaRPr lang="en-US" dirty="0"/>
+          </a:p>
+          <a:p>
+            <a:pPr marL="171450" indent="-171450">
+              <a:buFont typeface="Calibri"/>
+              <a:buChar char="-"/>
+            </a:pPr>
+            <a:r>
+              <a:rPr lang="en-IE" dirty="0"/>
+              <a:t>Do you use pipelines? You should, after the session go and create your own.</a:t>
+            </a:r>
+            <a:endParaRPr lang="en-US" dirty="0">
+              <a:ea typeface="Calibri" panose="020F0502020204030204"/>
+              <a:cs typeface="Calibri" panose="020F0502020204030204"/>
+            </a:endParaRPr>
+          </a:p>
+          <a:p>
+            <a:pPr marL="171450" indent="-171450">
+              <a:buFont typeface="Calibri"/>
+              <a:buChar char="-"/>
+            </a:pPr>
+            <a:r>
+              <a:rPr lang="en-IE" dirty="0">
+                <a:ea typeface="Calibri"/>
+                <a:cs typeface="Calibri"/>
+              </a:rPr>
+              <a:t>Do you package the solution on your own hardware?</a:t>
+            </a:r>
+          </a:p>
+          <a:p>
+            <a:pPr marL="171450" indent="-171450">
+              <a:buFont typeface="Calibri"/>
+              <a:buChar char="-"/>
+            </a:pPr>
+            <a:r>
+              <a:rPr lang="en-IE" dirty="0">
+                <a:ea typeface="Calibri"/>
+                <a:cs typeface="Calibri"/>
+              </a:rPr>
+              <a:t>Do you have different environment set up?</a:t>
+            </a:r>
+          </a:p>
+          <a:p>
+            <a:pPr marL="171450" indent="-171450">
+              <a:buFont typeface="Calibri"/>
+              <a:buChar char="-"/>
+            </a:pPr>
+            <a:r>
+              <a:rPr lang="en-IE" dirty="0">
+                <a:cs typeface="Calibri"/>
+              </a:rPr>
+              <a:t>Who likes demo more than slides? </a:t>
+            </a:r>
+            <a:r>
+              <a:rPr lang="en-IE" dirty="0">
+                <a:cs typeface="Calibri"/>
+                <a:sym typeface="Wingdings" pitchFamily="2" charset="2"/>
+              </a:rPr>
+              <a:t></a:t>
+            </a:r>
+            <a:endParaRPr lang="en-IE" dirty="0"/>
+          </a:p>
+        </p:txBody>
+      </p:sp>
+      <p:sp>
+        <p:nvSpPr>
+          <p:cNvPr id="4" name="Slide Number Placeholder 3">
+            <a:extLst>
+              <a:ext uri="{FF2B5EF4-FFF2-40B4-BE49-F238E27FC236}">
+                <a16:creationId xmlns:a16="http://schemas.microsoft.com/office/drawing/2014/main" id="{E568860E-A0F1-5275-2014-A380EA6C05A5}"/>
+              </a:ext>
+            </a:extLst>
+          </p:cNvPr>
+          <p:cNvSpPr>
+            <a:spLocks noGrp="1"/>
+          </p:cNvSpPr>
+          <p:nvPr>
+            <p:ph type="sldNum" sz="quarter" idx="5"/>
+          </p:nvPr>
+        </p:nvSpPr>
+        <p:spPr/>
+        <p:txBody>
+          <a:bodyPr/>
+          <a:lstStyle/>
+          <a:p>
+            <a:fld id="{7EB8C794-77EE-4724-B493-2E0907BFA558}" type="slidenum">
+              <a:rPr lang="en-GB" smtClean="0"/>
+              <a:t>4</a:t>
+            </a:fld>
+            <a:endParaRPr lang="en-GB"/>
+          </a:p>
+        </p:txBody>
+      </p:sp>
+    </p:spTree>
+    <p:extLst>
+      <p:ext uri="{BB962C8B-B14F-4D97-AF65-F5344CB8AC3E}">
+        <p14:creationId xmlns:p14="http://schemas.microsoft.com/office/powerpoint/2010/main" val="878637212"/>
+      </p:ext>
+    </p:extLst>
+  </p:cSld>
+  <p:clrMapOvr>
+    <a:masterClrMapping/>
+  </p:clrMapOvr>
+</p:notes>
+</file>
+
+<file path=ppt/notesSlides/notesSlide5.xml><?xml version="1.0" encoding="utf-8"?>
 <p:notes xmlns:a="http://schemas.openxmlformats.org/drawingml/2006/main" xmlns:r="http://schemas.openxmlformats.org/officeDocument/2006/relationships" xmlns:p="http://schemas.openxmlformats.org/presentationml/2006/main">
   <p:cSld>
     <p:spTree>
@@ -2350,6 +2693,29 @@
               <a:t>New colleagues will have the best time putting their hands on the project for the first time</a:t>
             </a:r>
           </a:p>
+          <a:p>
+            <a:pPr marL="0" marR="0" lvl="0" indent="0" algn="l" defTabSz="914400" rtl="0" eaLnBrk="1" fontAlgn="auto" latinLnBrk="0" hangingPunct="1">
+              <a:lnSpc>
+                <a:spcPct val="100000"/>
+              </a:lnSpc>
+              <a:spcBef>
+                <a:spcPts val="0"/>
+              </a:spcBef>
+              <a:spcAft>
+                <a:spcPts val="0"/>
+              </a:spcAft>
+              <a:buClrTx/>
+              <a:buSzTx/>
+              <a:buFontTx/>
+              <a:buNone/>
+              <a:tabLst/>
+              <a:defRPr/>
+            </a:pPr>
+            <a:endParaRPr lang="en-US" dirty="0">
+              <a:latin typeface="Arial"/>
+              <a:cs typeface="Arial"/>
+            </a:endParaRPr>
+          </a:p>
         </p:txBody>
       </p:sp>
       <p:sp>
@@ -2369,7 +2735,7 @@
           <a:p>
             <a:fld id="{7EB8C794-77EE-4724-B493-2E0907BFA558}" type="slidenum">
               <a:rPr lang="en-GB" smtClean="0"/>
-              <a:t>4</a:t>
+              <a:t>5</a:t>
             </a:fld>
             <a:endParaRPr lang="en-GB"/>
           </a:p>
@@ -2388,7 +2754,7 @@
 </p:notes>
 </file>
 
-<file path=ppt/notesSlides/notesSlide5.xml><?xml version="1.0" encoding="utf-8"?>
+<file path=ppt/notesSlides/notesSlide6.xml><?xml version="1.0" encoding="utf-8"?>
 <p:notes xmlns:a="http://schemas.openxmlformats.org/drawingml/2006/main" xmlns:r="http://schemas.openxmlformats.org/officeDocument/2006/relationships" xmlns:p="http://schemas.openxmlformats.org/presentationml/2006/main">
   <p:cSld>
     <p:spTree>
@@ -2675,7 +3041,7 @@
           <a:p>
             <a:fld id="{7EB8C794-77EE-4724-B493-2E0907BFA558}" type="slidenum">
               <a:rPr lang="en-GB" smtClean="0"/>
-              <a:t>5</a:t>
+              <a:t>6</a:t>
             </a:fld>
             <a:endParaRPr lang="en-GB"/>
           </a:p>
@@ -2694,7 +3060,7 @@
 </p:notes>
 </file>
 
-<file path=ppt/notesSlides/notesSlide6.xml><?xml version="1.0" encoding="utf-8"?>
+<file path=ppt/notesSlides/notesSlide7.xml><?xml version="1.0" encoding="utf-8"?>
 <p:notes xmlns:a="http://schemas.openxmlformats.org/drawingml/2006/main" xmlns:r="http://schemas.openxmlformats.org/officeDocument/2006/relationships" xmlns:p="http://schemas.openxmlformats.org/presentationml/2006/main">
   <p:cSld>
     <p:spTree>
@@ -2757,369 +3123,78 @@
           <a:lstStyle/>
           <a:p>
             <a:r>
-              <a:rPr lang="it-IT" sz="1200" kern="1200" dirty="0">
-                <a:solidFill>
-                  <a:schemeClr val="tx1"/>
-                </a:solidFill>
-                <a:effectLst/>
-                <a:latin typeface="+mn-lt"/>
-                <a:ea typeface="+mn-ea"/>
-                <a:cs typeface="+mn-cs"/>
-              </a:rPr>
-              <a:t>TODO: </a:t>
-            </a:r>
-            <a:r>
-              <a:rPr lang="it-IT" sz="1200" kern="1200" dirty="0" err="1">
-                <a:solidFill>
-                  <a:schemeClr val="tx1"/>
-                </a:solidFill>
-                <a:effectLst/>
-                <a:latin typeface="+mn-lt"/>
-                <a:ea typeface="+mn-ea"/>
-                <a:cs typeface="+mn-cs"/>
-              </a:rPr>
-              <a:t>expand</a:t>
-            </a:r>
-            <a:endParaRPr lang="it-IT" sz="1200" kern="1200" dirty="0">
-              <a:solidFill>
-                <a:schemeClr val="tx1"/>
-              </a:solidFill>
-              <a:effectLst/>
-              <a:latin typeface="+mn-lt"/>
-              <a:ea typeface="+mn-ea"/>
-              <a:cs typeface="+mn-cs"/>
-            </a:endParaRPr>
-          </a:p>
-          <a:p>
-            <a:endParaRPr lang="it-IT" sz="1200" kern="1200" dirty="0">
-              <a:solidFill>
-                <a:schemeClr val="tx1"/>
-              </a:solidFill>
-              <a:effectLst/>
-              <a:latin typeface="+mn-lt"/>
-              <a:ea typeface="+mn-ea"/>
-              <a:cs typeface="+mn-cs"/>
-            </a:endParaRPr>
-          </a:p>
-          <a:p>
-            <a:r>
-              <a:rPr lang="it-IT" sz="1200" kern="1200" dirty="0">
-                <a:solidFill>
-                  <a:schemeClr val="tx1"/>
-                </a:solidFill>
-                <a:effectLst/>
-                <a:latin typeface="+mn-lt"/>
-                <a:ea typeface="+mn-ea"/>
-                <a:cs typeface="+mn-cs"/>
-              </a:rPr>
-              <a:t>More </a:t>
-            </a:r>
-            <a:r>
-              <a:rPr lang="it-IT" sz="1200" kern="1200" dirty="0" err="1">
-                <a:solidFill>
-                  <a:schemeClr val="tx1"/>
-                </a:solidFill>
-                <a:effectLst/>
-                <a:latin typeface="+mn-lt"/>
-                <a:ea typeface="+mn-ea"/>
-                <a:cs typeface="+mn-cs"/>
-              </a:rPr>
-              <a:t>possible</a:t>
-            </a:r>
-            <a:r>
-              <a:rPr lang="it-IT" sz="1200" kern="1200" dirty="0">
-                <a:solidFill>
-                  <a:schemeClr val="tx1"/>
-                </a:solidFill>
-                <a:effectLst/>
-                <a:latin typeface="+mn-lt"/>
-                <a:ea typeface="+mn-ea"/>
-                <a:cs typeface="+mn-cs"/>
-              </a:rPr>
-              <a:t> component </a:t>
-            </a:r>
-            <a:r>
-              <a:rPr lang="it-IT" sz="1200" kern="1200" dirty="0" err="1">
-                <a:solidFill>
-                  <a:schemeClr val="tx1"/>
-                </a:solidFill>
-                <a:effectLst/>
-                <a:latin typeface="+mn-lt"/>
-                <a:ea typeface="+mn-ea"/>
-                <a:cs typeface="+mn-cs"/>
-              </a:rPr>
-              <a:t>types</a:t>
-            </a:r>
-            <a:r>
-              <a:rPr lang="it-IT" sz="1200" kern="1200" dirty="0">
-                <a:solidFill>
-                  <a:schemeClr val="tx1"/>
-                </a:solidFill>
-                <a:effectLst/>
-                <a:latin typeface="+mn-lt"/>
-                <a:ea typeface="+mn-ea"/>
-                <a:cs typeface="+mn-cs"/>
-              </a:rPr>
-              <a:t>.</a:t>
-            </a:r>
-          </a:p>
-          <a:p>
-            <a:endParaRPr lang="it-IT" sz="1200" kern="1200" dirty="0">
-              <a:solidFill>
-                <a:schemeClr val="tx1"/>
-              </a:solidFill>
-              <a:effectLst/>
-              <a:latin typeface="+mn-lt"/>
-              <a:ea typeface="+mn-ea"/>
-              <a:cs typeface="+mn-cs"/>
-            </a:endParaRPr>
-          </a:p>
-          <a:p>
-            <a:r>
-              <a:rPr lang="it-IT" sz="1200" kern="1200" dirty="0" err="1">
-                <a:solidFill>
-                  <a:schemeClr val="tx1"/>
-                </a:solidFill>
-                <a:effectLst/>
-                <a:latin typeface="+mn-lt"/>
-                <a:ea typeface="+mn-ea"/>
-                <a:cs typeface="+mn-cs"/>
-              </a:rPr>
-              <a:t>What</a:t>
-            </a:r>
-            <a:r>
-              <a:rPr lang="it-IT" sz="1200" kern="1200" dirty="0">
-                <a:solidFill>
-                  <a:schemeClr val="tx1"/>
-                </a:solidFill>
-                <a:effectLst/>
-                <a:latin typeface="+mn-lt"/>
-                <a:ea typeface="+mn-ea"/>
-                <a:cs typeface="+mn-cs"/>
-              </a:rPr>
-              <a:t> </a:t>
-            </a:r>
-            <a:r>
-              <a:rPr lang="it-IT" sz="1200" kern="1200" dirty="0" err="1">
-                <a:solidFill>
-                  <a:schemeClr val="tx1"/>
-                </a:solidFill>
-                <a:effectLst/>
-                <a:latin typeface="+mn-lt"/>
-                <a:ea typeface="+mn-ea"/>
-                <a:cs typeface="+mn-cs"/>
-              </a:rPr>
-              <a:t>is</a:t>
-            </a:r>
-            <a:r>
-              <a:rPr lang="it-IT" sz="1200" kern="1200" dirty="0">
-                <a:solidFill>
-                  <a:schemeClr val="tx1"/>
-                </a:solidFill>
-                <a:effectLst/>
-                <a:latin typeface="+mn-lt"/>
-                <a:ea typeface="+mn-ea"/>
-                <a:cs typeface="+mn-cs"/>
-              </a:rPr>
-              <a:t> a component?</a:t>
-            </a:r>
-            <a:br>
-              <a:rPr lang="it-IT" sz="1200" kern="1200" dirty="0">
-                <a:solidFill>
-                  <a:schemeClr val="tx1"/>
-                </a:solidFill>
-                <a:effectLst/>
-                <a:latin typeface="+mn-lt"/>
-                <a:ea typeface="+mn-ea"/>
-                <a:cs typeface="+mn-cs"/>
-              </a:rPr>
-            </a:br>
-            <a:endParaRPr lang="it-IT" sz="1200" kern="1200" dirty="0">
-              <a:solidFill>
-                <a:schemeClr val="tx1"/>
-              </a:solidFill>
-              <a:effectLst/>
-              <a:latin typeface="+mn-lt"/>
-              <a:ea typeface="+mn-ea"/>
-              <a:cs typeface="+mn-cs"/>
-            </a:endParaRPr>
-          </a:p>
-          <a:p>
-            <a:r>
-              <a:rPr lang="it-IT" sz="1200" kern="1200" dirty="0">
-                <a:solidFill>
-                  <a:schemeClr val="tx1"/>
-                </a:solidFill>
-                <a:effectLst/>
-                <a:latin typeface="+mn-lt"/>
-                <a:ea typeface="+mn-ea"/>
-                <a:cs typeface="+mn-cs"/>
-              </a:rPr>
-              <a:t>More </a:t>
-            </a:r>
-            <a:r>
-              <a:rPr lang="it-IT" sz="1200" kern="1200" dirty="0" err="1">
-                <a:solidFill>
-                  <a:schemeClr val="tx1"/>
-                </a:solidFill>
-                <a:effectLst/>
-                <a:latin typeface="+mn-lt"/>
-                <a:ea typeface="+mn-ea"/>
-                <a:cs typeface="+mn-cs"/>
-              </a:rPr>
-              <a:t>components</a:t>
-            </a:r>
-            <a:r>
-              <a:rPr lang="it-IT" sz="1200" kern="1200" dirty="0">
-                <a:solidFill>
-                  <a:schemeClr val="tx1"/>
-                </a:solidFill>
-                <a:effectLst/>
-                <a:latin typeface="+mn-lt"/>
-                <a:ea typeface="+mn-ea"/>
-                <a:cs typeface="+mn-cs"/>
-              </a:rPr>
-              <a:t> </a:t>
-            </a:r>
-            <a:r>
-              <a:rPr lang="it-IT" sz="1200" kern="1200" dirty="0" err="1">
-                <a:solidFill>
-                  <a:schemeClr val="tx1"/>
-                </a:solidFill>
-                <a:effectLst/>
-                <a:latin typeface="+mn-lt"/>
-                <a:ea typeface="+mn-ea"/>
-                <a:cs typeface="+mn-cs"/>
-              </a:rPr>
-              <a:t>is</a:t>
-            </a:r>
-            <a:r>
-              <a:rPr lang="it-IT" sz="1200" kern="1200" dirty="0">
-                <a:solidFill>
-                  <a:schemeClr val="tx1"/>
-                </a:solidFill>
-                <a:effectLst/>
-                <a:latin typeface="+mn-lt"/>
-                <a:ea typeface="+mn-ea"/>
-                <a:cs typeface="+mn-cs"/>
-              </a:rPr>
-              <a:t> </a:t>
-            </a:r>
-            <a:r>
-              <a:rPr lang="it-IT" sz="1200" kern="1200" dirty="0" err="1">
-                <a:solidFill>
-                  <a:schemeClr val="tx1"/>
-                </a:solidFill>
-                <a:effectLst/>
-                <a:latin typeface="+mn-lt"/>
-                <a:ea typeface="+mn-ea"/>
-                <a:cs typeface="+mn-cs"/>
-              </a:rPr>
-              <a:t>better</a:t>
-            </a:r>
-            <a:r>
-              <a:rPr lang="it-IT" sz="1200" kern="1200" dirty="0">
-                <a:solidFill>
-                  <a:schemeClr val="tx1"/>
-                </a:solidFill>
-                <a:effectLst/>
-                <a:latin typeface="+mn-lt"/>
-                <a:ea typeface="+mn-ea"/>
-                <a:cs typeface="+mn-cs"/>
-              </a:rPr>
-              <a:t> </a:t>
-            </a:r>
-            <a:r>
-              <a:rPr lang="it-IT" sz="1200" kern="1200" dirty="0" err="1">
-                <a:solidFill>
-                  <a:schemeClr val="tx1"/>
-                </a:solidFill>
-                <a:effectLst/>
-                <a:latin typeface="+mn-lt"/>
-                <a:ea typeface="+mn-ea"/>
-                <a:cs typeface="+mn-cs"/>
-              </a:rPr>
-              <a:t>than</a:t>
-            </a:r>
-            <a:r>
-              <a:rPr lang="it-IT" sz="1200" kern="1200" dirty="0">
-                <a:solidFill>
-                  <a:schemeClr val="tx1"/>
-                </a:solidFill>
-                <a:effectLst/>
-                <a:latin typeface="+mn-lt"/>
-                <a:ea typeface="+mn-ea"/>
-                <a:cs typeface="+mn-cs"/>
-              </a:rPr>
-              <a:t> </a:t>
-            </a:r>
-            <a:r>
-              <a:rPr lang="it-IT" sz="1200" kern="1200" dirty="0" err="1">
-                <a:solidFill>
-                  <a:schemeClr val="tx1"/>
-                </a:solidFill>
-                <a:effectLst/>
-                <a:latin typeface="+mn-lt"/>
-                <a:ea typeface="+mn-ea"/>
-                <a:cs typeface="+mn-cs"/>
-              </a:rPr>
-              <a:t>less</a:t>
-            </a:r>
-            <a:endParaRPr lang="it-IT" sz="1200" kern="1200" dirty="0">
-              <a:solidFill>
-                <a:schemeClr val="tx1"/>
-              </a:solidFill>
-              <a:effectLst/>
-              <a:latin typeface="+mn-lt"/>
-              <a:ea typeface="+mn-ea"/>
-              <a:cs typeface="+mn-cs"/>
-            </a:endParaRPr>
-          </a:p>
-          <a:p>
-            <a:endParaRPr lang="it-IT" sz="1200" kern="1200" dirty="0">
-              <a:solidFill>
-                <a:schemeClr val="tx1"/>
-              </a:solidFill>
-              <a:effectLst/>
-              <a:latin typeface="+mn-lt"/>
-              <a:ea typeface="+mn-ea"/>
-              <a:cs typeface="+mn-cs"/>
-            </a:endParaRPr>
-          </a:p>
-          <a:p>
-            <a:r>
-              <a:rPr lang="it-IT" sz="1200" kern="1200" dirty="0">
-                <a:solidFill>
-                  <a:schemeClr val="tx1"/>
-                </a:solidFill>
-                <a:effectLst/>
-                <a:latin typeface="+mn-lt"/>
-                <a:ea typeface="+mn-ea"/>
-                <a:cs typeface="+mn-cs"/>
-              </a:rPr>
-              <a:t>Card </a:t>
-            </a:r>
-            <a:r>
-              <a:rPr lang="it-IT" sz="1200" kern="1200" dirty="0" err="1">
-                <a:solidFill>
-                  <a:schemeClr val="tx1"/>
-                </a:solidFill>
-                <a:effectLst/>
-                <a:latin typeface="+mn-lt"/>
-                <a:ea typeface="+mn-ea"/>
-                <a:cs typeface="+mn-cs"/>
-              </a:rPr>
-              <a:t>example</a:t>
-            </a:r>
-            <a:endParaRPr lang="en-US" sz="1200" kern="1200" dirty="0">
-              <a:solidFill>
-                <a:schemeClr val="tx1"/>
-              </a:solidFill>
-              <a:effectLst/>
-              <a:latin typeface="+mn-lt"/>
-              <a:ea typeface="+mn-ea"/>
-              <a:cs typeface="+mn-cs"/>
-            </a:endParaRPr>
+              <a:rPr lang="en-US" b="1" dirty="0"/>
+              <a:t>What is a component?</a:t>
+            </a:r>
+          </a:p>
+          <a:p>
+            <a:r>
+              <a:rPr lang="en-US" dirty="0"/>
+              <a:t>A component is a self-contained, reusable piece of software—such as a function, class, or UI element—that performs a specific role within an application.</a:t>
+            </a:r>
+          </a:p>
+          <a:p>
+            <a:endParaRPr lang="en-US" dirty="0"/>
+          </a:p>
+          <a:p>
+            <a:r>
+              <a:rPr lang="en-US" b="1" dirty="0"/>
+              <a:t>More possible component types</a:t>
+            </a:r>
+          </a:p>
+          <a:p>
+            <a:r>
+              <a:rPr lang="en-US" dirty="0"/>
+              <a:t>Designing your system with a variety of component types allows for greater flexibility and adaptability.</a:t>
+            </a:r>
+          </a:p>
+          <a:p>
+            <a:r>
+              <a:rPr lang="en-US" dirty="0"/>
+              <a:t>Each component can be tested in isolation, ensuring reliability and easier maintenance.</a:t>
+            </a:r>
+          </a:p>
+          <a:p>
+            <a:endParaRPr lang="en-US" dirty="0"/>
+          </a:p>
+          <a:p>
+            <a:r>
+              <a:rPr lang="en-US" b="1" dirty="0"/>
+              <a:t>Why more components is better than less</a:t>
+            </a:r>
+          </a:p>
+          <a:p>
+            <a:r>
+              <a:rPr lang="en-US" dirty="0"/>
+              <a:t>More components mean finer granularity in testing, making it easier to pinpoint issues and extend functionality.</a:t>
+            </a:r>
+          </a:p>
+          <a:p>
+            <a:r>
+              <a:rPr lang="en-US" dirty="0"/>
+              <a:t>Encourages modular design, which supports scalability and team collaboration.</a:t>
+            </a:r>
+          </a:p>
+          <a:p>
+            <a:endParaRPr lang="en-US" dirty="0"/>
+          </a:p>
+          <a:p>
+            <a:r>
+              <a:rPr lang="en-US" b="1" dirty="0"/>
+              <a:t>Card example</a:t>
+            </a:r>
+          </a:p>
+          <a:p>
+            <a:r>
+              <a:rPr lang="en-US" dirty="0"/>
+              <a:t>Think of a "card" UI component: it’s a reusable structure that can display different types of content (text, images, actions).</a:t>
+            </a:r>
+          </a:p>
+          <a:p>
+            <a:r>
+              <a:rPr lang="en-US" dirty="0"/>
+              <a:t>Cards can be enhanced over time—add new features, styles, or behaviors—without affecting other parts of the system.</a:t>
+            </a:r>
           </a:p>
         </p:txBody>
       </p:sp>
@@ -3146,7 +3221,7 @@
           <a:p>
             <a:fld id="{7EB8C794-77EE-4724-B493-2E0907BFA558}" type="slidenum">
               <a:rPr lang="en-GB" smtClean="0"/>
-              <a:t>8</a:t>
+              <a:t>9</a:t>
             </a:fld>
             <a:endParaRPr lang="en-GB"/>
           </a:p>
@@ -3165,7 +3240,7 @@
 </p:notes>
 </file>
 
-<file path=ppt/notesSlides/notesSlide7.xml><?xml version="1.0" encoding="utf-8"?>
+<file path=ppt/notesSlides/notesSlide8.xml><?xml version="1.0" encoding="utf-8"?>
 <p:notes xmlns:a="http://schemas.openxmlformats.org/drawingml/2006/main" xmlns:r="http://schemas.openxmlformats.org/officeDocument/2006/relationships" xmlns:p="http://schemas.openxmlformats.org/presentationml/2006/main">
   <p:cSld>
     <p:spTree>
@@ -3254,7 +3329,7 @@
           <a:p>
             <a:fld id="{7EB8C794-77EE-4724-B493-2E0907BFA558}" type="slidenum">
               <a:rPr lang="en-GB" smtClean="0"/>
-              <a:t>9</a:t>
+              <a:t>10</a:t>
             </a:fld>
             <a:endParaRPr lang="en-GB"/>
           </a:p>
@@ -3273,7 +3348,7 @@
 </p:notes>
 </file>
 
-<file path=ppt/notesSlides/notesSlide8.xml><?xml version="1.0" encoding="utf-8"?>
+<file path=ppt/notesSlides/notesSlide9.xml><?xml version="1.0" encoding="utf-8"?>
 <p:notes xmlns:a="http://schemas.openxmlformats.org/drawingml/2006/main" xmlns:r="http://schemas.openxmlformats.org/officeDocument/2006/relationships" xmlns:p="http://schemas.openxmlformats.org/presentationml/2006/main">
   <p:cSld>
     <p:spTree>
@@ -3335,15 +3410,79 @@
           <a:bodyPr/>
           <a:lstStyle/>
           <a:p>
-            <a:endParaRPr lang="en-US" sz="1200" kern="1200" dirty="0">
-              <a:solidFill>
-                <a:schemeClr val="tx1"/>
-              </a:solidFill>
-              <a:effectLst/>
-              <a:latin typeface="+mn-lt"/>
-              <a:ea typeface="+mn-ea"/>
-              <a:cs typeface="+mn-cs"/>
-            </a:endParaRPr>
+            <a:r>
+              <a:rPr lang="en-US" b="1" dirty="0"/>
+              <a:t>What is e2e testing?</a:t>
+            </a:r>
+          </a:p>
+          <a:p>
+            <a:r>
+              <a:rPr lang="en-US" dirty="0"/>
+              <a:t>End-to-end testing verifies that the entire application flow works as expected, simulating real user scenarios from start to finish.</a:t>
+            </a:r>
+          </a:p>
+          <a:p>
+            <a:endParaRPr lang="en-US" dirty="0"/>
+          </a:p>
+          <a:p>
+            <a:r>
+              <a:rPr lang="en-US" b="1" dirty="0"/>
+              <a:t>More possible user journeys</a:t>
+            </a:r>
+          </a:p>
+          <a:p>
+            <a:r>
+              <a:rPr lang="en-US" dirty="0"/>
+              <a:t>Designing for a variety of user journeys ensures your application is robust and can handle different real-world scenarios.</a:t>
+            </a:r>
+          </a:p>
+          <a:p>
+            <a:r>
+              <a:rPr lang="en-US" dirty="0"/>
+              <a:t>Each journey can be tested independently, helping to catch integration issues early.</a:t>
+            </a:r>
+          </a:p>
+          <a:p>
+            <a:endParaRPr lang="en-US" dirty="0"/>
+          </a:p>
+          <a:p>
+            <a:r>
+              <a:rPr lang="en-US" b="1" dirty="0"/>
+              <a:t>Why more user journeys is better than less</a:t>
+            </a:r>
+          </a:p>
+          <a:p>
+            <a:r>
+              <a:rPr lang="en-US" dirty="0"/>
+              <a:t>More journeys mean broader coverage, reducing the risk of missed bugs in complex workflows.</a:t>
+            </a:r>
+          </a:p>
+          <a:p>
+            <a:r>
+              <a:rPr lang="en-US" dirty="0"/>
+              <a:t>Encourages thinking about edge cases and diverse user needs.</a:t>
+            </a:r>
+          </a:p>
+          <a:p>
+            <a:endParaRPr lang="en-US" dirty="0"/>
+          </a:p>
+          <a:p>
+            <a:r>
+              <a:rPr lang="en-US" b="1" dirty="0"/>
+              <a:t>Card example</a:t>
+            </a:r>
+          </a:p>
+          <a:p>
+            <a:r>
+              <a:rPr lang="en-US" dirty="0"/>
+              <a:t>Consider a "card" UI component: e2e tests can verify how cards behave in different contexts (e.g., displaying various data, interacting with other components).</a:t>
+            </a:r>
+          </a:p>
+          <a:p>
+            <a:r>
+              <a:rPr lang="en-US" dirty="0"/>
+              <a:t>As cards evolve, e2e tests ensure enhancements don’t break existing flows.</a:t>
+            </a:r>
           </a:p>
         </p:txBody>
       </p:sp>
@@ -3370,7 +3509,7 @@
           <a:p>
             <a:fld id="{7EB8C794-77EE-4724-B493-2E0907BFA558}" type="slidenum">
               <a:rPr lang="en-GB" smtClean="0"/>
-              <a:t>10</a:t>
+              <a:t>11</a:t>
             </a:fld>
             <a:endParaRPr lang="en-GB"/>
           </a:p>
@@ -3380,114 +3519,6 @@
     <p:extLst>
       <p:ext uri="{BB962C8B-B14F-4D97-AF65-F5344CB8AC3E}">
         <p14:creationId xmlns:p14="http://schemas.microsoft.com/office/powerpoint/2010/main" val="3572504598"/>
-      </p:ext>
-    </p:extLst>
-  </p:cSld>
-  <p:clrMapOvr>
-    <a:masterClrMapping/>
-  </p:clrMapOvr>
-</p:notes>
-</file>
-
-<file path=ppt/notesSlides/notesSlide9.xml><?xml version="1.0" encoding="utf-8"?>
-<p:notes xmlns:a="http://schemas.openxmlformats.org/drawingml/2006/main" xmlns:r="http://schemas.openxmlformats.org/officeDocument/2006/relationships" xmlns:p="http://schemas.openxmlformats.org/presentationml/2006/main">
-  <p:cSld>
-    <p:spTree>
-      <p:nvGrpSpPr>
-        <p:cNvPr id="1" name="">
-          <a:extLst>
-            <a:ext uri="{FF2B5EF4-FFF2-40B4-BE49-F238E27FC236}">
-              <a16:creationId xmlns:a16="http://schemas.microsoft.com/office/drawing/2014/main" id="{9EB93853-D80F-F9BD-38A5-5F6755630F42}"/>
-            </a:ext>
-          </a:extLst>
-        </p:cNvPr>
-        <p:cNvGrpSpPr/>
-        <p:nvPr/>
-      </p:nvGrpSpPr>
-      <p:grpSpPr>
-        <a:xfrm>
-          <a:off x="0" y="0"/>
-          <a:ext cx="0" cy="0"/>
-          <a:chOff x="0" y="0"/>
-          <a:chExt cx="0" cy="0"/>
-        </a:xfrm>
-      </p:grpSpPr>
-      <p:sp>
-        <p:nvSpPr>
-          <p:cNvPr id="2" name="Slide Image Placeholder 1">
-            <a:extLst>
-              <a:ext uri="{FF2B5EF4-FFF2-40B4-BE49-F238E27FC236}">
-                <a16:creationId xmlns:a16="http://schemas.microsoft.com/office/drawing/2014/main" id="{A4CBDE32-55CC-9F2F-E4D2-12FA30AAA873}"/>
-              </a:ext>
-            </a:extLst>
-          </p:cNvPr>
-          <p:cNvSpPr>
-            <a:spLocks noGrp="1" noRot="1" noChangeAspect="1"/>
-          </p:cNvSpPr>
-          <p:nvPr>
-            <p:ph type="sldImg"/>
-          </p:nvPr>
-        </p:nvSpPr>
-        <p:spPr/>
-      </p:sp>
-      <p:sp>
-        <p:nvSpPr>
-          <p:cNvPr id="3" name="Notes Placeholder 2">
-            <a:extLst>
-              <a:ext uri="{FF2B5EF4-FFF2-40B4-BE49-F238E27FC236}">
-                <a16:creationId xmlns:a16="http://schemas.microsoft.com/office/drawing/2014/main" id="{4B48900A-7FFB-8C0A-2CA3-C8BF603F0163}"/>
-              </a:ext>
-            </a:extLst>
-          </p:cNvPr>
-          <p:cNvSpPr>
-            <a:spLocks noGrp="1"/>
-          </p:cNvSpPr>
-          <p:nvPr>
-            <p:ph type="body" idx="1"/>
-          </p:nvPr>
-        </p:nvSpPr>
-        <p:spPr/>
-        <p:txBody>
-          <a:bodyPr/>
-          <a:lstStyle/>
-          <a:p>
-            <a:endParaRPr lang="en-US"/>
-          </a:p>
-        </p:txBody>
-      </p:sp>
-      <p:sp>
-        <p:nvSpPr>
-          <p:cNvPr id="4" name="Slide Number Placeholder 3">
-            <a:extLst>
-              <a:ext uri="{FF2B5EF4-FFF2-40B4-BE49-F238E27FC236}">
-                <a16:creationId xmlns:a16="http://schemas.microsoft.com/office/drawing/2014/main" id="{2615C5AA-254C-3A9C-B86A-B802468FED74}"/>
-              </a:ext>
-            </a:extLst>
-          </p:cNvPr>
-          <p:cNvSpPr>
-            <a:spLocks noGrp="1"/>
-          </p:cNvSpPr>
-          <p:nvPr>
-            <p:ph type="sldNum" sz="quarter" idx="5"/>
-          </p:nvPr>
-        </p:nvSpPr>
-        <p:spPr/>
-        <p:txBody>
-          <a:bodyPr/>
-          <a:lstStyle/>
-          <a:p>
-            <a:fld id="{7EB8C794-77EE-4724-B493-2E0907BFA558}" type="slidenum">
-              <a:rPr lang="en-GB" smtClean="0"/>
-              <a:t>11</a:t>
-            </a:fld>
-            <a:endParaRPr lang="en-GB"/>
-          </a:p>
-        </p:txBody>
-      </p:sp>
-    </p:spTree>
-    <p:extLst>
-      <p:ext uri="{BB962C8B-B14F-4D97-AF65-F5344CB8AC3E}">
-        <p14:creationId xmlns:p14="http://schemas.microsoft.com/office/powerpoint/2010/main" val="4161228640"/>
       </p:ext>
     </p:extLst>
   </p:cSld>
@@ -3548,6 +3579,323 @@
 
 <file path=ppt/slideLayouts/slideLayout10.xml><?xml version="1.0" encoding="utf-8"?>
 <p:sldLayout xmlns:a="http://schemas.openxmlformats.org/drawingml/2006/main" xmlns:r="http://schemas.openxmlformats.org/officeDocument/2006/relationships" xmlns:p="http://schemas.openxmlformats.org/presentationml/2006/main" preserve="1" userDrawn="1">
+  <p:cSld name="Main Content - Dark BKG : Title + Visual Data">
+    <p:bg>
+      <p:bgPr>
+        <a:blipFill dpi="0" rotWithShape="1">
+          <a:blip r:embed="rId2" cstate="print">
+            <a:lum/>
+            <a:extLst>
+              <a:ext uri="{28A0092B-C50C-407E-A947-70E740481C1C}">
+                <a14:useLocalDpi xmlns:a14="http://schemas.microsoft.com/office/drawing/2010/main"/>
+              </a:ext>
+            </a:extLst>
+          </a:blip>
+          <a:srcRect/>
+          <a:stretch>
+            <a:fillRect/>
+          </a:stretch>
+        </a:blipFill>
+        <a:effectLst/>
+      </p:bgPr>
+    </p:bg>
+    <p:spTree>
+      <p:nvGrpSpPr>
+        <p:cNvPr id="1" name=""/>
+        <p:cNvGrpSpPr/>
+        <p:nvPr/>
+      </p:nvGrpSpPr>
+      <p:grpSpPr>
+        <a:xfrm>
+          <a:off x="0" y="0"/>
+          <a:ext cx="0" cy="0"/>
+          <a:chOff x="0" y="0"/>
+          <a:chExt cx="0" cy="0"/>
+        </a:xfrm>
+      </p:grpSpPr>
+      <p:sp>
+        <p:nvSpPr>
+          <p:cNvPr id="6" name="Title 10">
+            <a:extLst>
+              <a:ext uri="{FF2B5EF4-FFF2-40B4-BE49-F238E27FC236}">
+                <a16:creationId xmlns:a16="http://schemas.microsoft.com/office/drawing/2014/main" id="{A54FBFB0-DCDC-C848-901F-75B727D01B69}"/>
+              </a:ext>
+            </a:extLst>
+          </p:cNvPr>
+          <p:cNvSpPr>
+            <a:spLocks noGrp="1"/>
+          </p:cNvSpPr>
+          <p:nvPr>
+            <p:ph type="title" hasCustomPrompt="1"/>
+          </p:nvPr>
+        </p:nvSpPr>
+        <p:spPr>
+          <a:xfrm>
+            <a:off x="757990" y="798262"/>
+            <a:ext cx="5204111" cy="1046579"/>
+          </a:xfrm>
+          <a:prstGeom prst="rect">
+            <a:avLst/>
+          </a:prstGeom>
+        </p:spPr>
+        <p:txBody>
+          <a:bodyPr/>
+          <a:lstStyle>
+            <a:lvl1pPr>
+              <a:defRPr sz="3200" b="1">
+                <a:solidFill>
+                  <a:srgbClr val="00C700"/>
+                </a:solidFill>
+                <a:latin typeface="Arial" panose="020B0604020202020204" pitchFamily="34" charset="0"/>
+                <a:cs typeface="Arial" panose="020B0604020202020204" pitchFamily="34" charset="0"/>
+              </a:defRPr>
+            </a:lvl1pPr>
+          </a:lstStyle>
+          <a:p>
+            <a:r>
+              <a:rPr lang="en-US"/>
+              <a:t>CLICK TO EDIT MASTER TITLE STYLE</a:t>
+            </a:r>
+          </a:p>
+        </p:txBody>
+      </p:sp>
+      <p:sp>
+        <p:nvSpPr>
+          <p:cNvPr id="7" name="Text Placeholder 12">
+            <a:extLst>
+              <a:ext uri="{FF2B5EF4-FFF2-40B4-BE49-F238E27FC236}">
+                <a16:creationId xmlns:a16="http://schemas.microsoft.com/office/drawing/2014/main" id="{E6537CD3-4D9A-184F-8D06-E1B8E2D9036C}"/>
+              </a:ext>
+            </a:extLst>
+          </p:cNvPr>
+          <p:cNvSpPr>
+            <a:spLocks noGrp="1"/>
+          </p:cNvSpPr>
+          <p:nvPr>
+            <p:ph type="body" sz="quarter" idx="12"/>
+          </p:nvPr>
+        </p:nvSpPr>
+        <p:spPr>
+          <a:xfrm>
+            <a:off x="738188" y="2005263"/>
+            <a:ext cx="5213433" cy="3930399"/>
+          </a:xfrm>
+          <a:prstGeom prst="rect">
+            <a:avLst/>
+          </a:prstGeom>
+        </p:spPr>
+        <p:txBody>
+          <a:bodyPr/>
+          <a:lstStyle>
+            <a:lvl1pPr>
+              <a:defRPr>
+                <a:solidFill>
+                  <a:schemeClr val="bg1"/>
+                </a:solidFill>
+                <a:latin typeface="Arial" panose="020B0604020202020204" pitchFamily="34" charset="0"/>
+                <a:cs typeface="Arial" panose="020B0604020202020204" pitchFamily="34" charset="0"/>
+              </a:defRPr>
+            </a:lvl1pPr>
+            <a:lvl2pPr>
+              <a:defRPr>
+                <a:solidFill>
+                  <a:schemeClr val="bg1"/>
+                </a:solidFill>
+                <a:latin typeface="Arial" panose="020B0604020202020204" pitchFamily="34" charset="0"/>
+                <a:cs typeface="Arial" panose="020B0604020202020204" pitchFamily="34" charset="0"/>
+              </a:defRPr>
+            </a:lvl2pPr>
+            <a:lvl3pPr>
+              <a:defRPr>
+                <a:solidFill>
+                  <a:schemeClr val="bg1"/>
+                </a:solidFill>
+                <a:latin typeface="Arial" panose="020B0604020202020204" pitchFamily="34" charset="0"/>
+                <a:cs typeface="Arial" panose="020B0604020202020204" pitchFamily="34" charset="0"/>
+              </a:defRPr>
+            </a:lvl3pPr>
+            <a:lvl4pPr>
+              <a:defRPr>
+                <a:solidFill>
+                  <a:schemeClr val="bg1"/>
+                </a:solidFill>
+                <a:latin typeface="Arial" panose="020B0604020202020204" pitchFamily="34" charset="0"/>
+                <a:cs typeface="Arial" panose="020B0604020202020204" pitchFamily="34" charset="0"/>
+              </a:defRPr>
+            </a:lvl4pPr>
+            <a:lvl5pPr>
+              <a:defRPr>
+                <a:solidFill>
+                  <a:schemeClr val="bg1"/>
+                </a:solidFill>
+                <a:latin typeface="Arial" panose="020B0604020202020204" pitchFamily="34" charset="0"/>
+                <a:cs typeface="Arial" panose="020B0604020202020204" pitchFamily="34" charset="0"/>
+              </a:defRPr>
+            </a:lvl5pPr>
+          </a:lstStyle>
+          <a:p>
+            <a:pPr lvl="0"/>
+            <a:r>
+              <a:rPr lang="en-US"/>
+              <a:t>Click to edit Master text styles</a:t>
+            </a:r>
+          </a:p>
+          <a:p>
+            <a:pPr lvl="1"/>
+            <a:r>
+              <a:rPr lang="en-US"/>
+              <a:t>Second level</a:t>
+            </a:r>
+          </a:p>
+          <a:p>
+            <a:pPr lvl="2"/>
+            <a:r>
+              <a:rPr lang="en-US"/>
+              <a:t>Third level</a:t>
+            </a:r>
+          </a:p>
+          <a:p>
+            <a:pPr lvl="3"/>
+            <a:r>
+              <a:rPr lang="en-US"/>
+              <a:t>Fourth level</a:t>
+            </a:r>
+          </a:p>
+          <a:p>
+            <a:pPr lvl="4"/>
+            <a:r>
+              <a:rPr lang="en-US"/>
+              <a:t>Fifth level</a:t>
+            </a:r>
+          </a:p>
+        </p:txBody>
+      </p:sp>
+      <p:sp>
+        <p:nvSpPr>
+          <p:cNvPr id="10" name="Content Placeholder 7">
+            <a:extLst>
+              <a:ext uri="{FF2B5EF4-FFF2-40B4-BE49-F238E27FC236}">
+                <a16:creationId xmlns:a16="http://schemas.microsoft.com/office/drawing/2014/main" id="{DC03047F-22E2-5B43-86A2-7583C9DB314F}"/>
+              </a:ext>
+            </a:extLst>
+          </p:cNvPr>
+          <p:cNvSpPr>
+            <a:spLocks noGrp="1"/>
+          </p:cNvSpPr>
+          <p:nvPr>
+            <p:ph sz="quarter" idx="13"/>
+          </p:nvPr>
+        </p:nvSpPr>
+        <p:spPr>
+          <a:xfrm>
+            <a:off x="6157913" y="757238"/>
+            <a:ext cx="5372100" cy="5200650"/>
+          </a:xfrm>
+          <a:prstGeom prst="rect">
+            <a:avLst/>
+          </a:prstGeom>
+        </p:spPr>
+        <p:txBody>
+          <a:bodyPr/>
+          <a:lstStyle>
+            <a:lvl1pPr>
+              <a:defRPr>
+                <a:solidFill>
+                  <a:schemeClr val="bg1"/>
+                </a:solidFill>
+                <a:latin typeface="Arial" panose="020B0604020202020204" pitchFamily="34" charset="0"/>
+                <a:cs typeface="Arial" panose="020B0604020202020204" pitchFamily="34" charset="0"/>
+              </a:defRPr>
+            </a:lvl1pPr>
+            <a:lvl2pPr>
+              <a:defRPr>
+                <a:solidFill>
+                  <a:schemeClr val="bg1"/>
+                </a:solidFill>
+                <a:latin typeface="Arial" panose="020B0604020202020204" pitchFamily="34" charset="0"/>
+                <a:cs typeface="Arial" panose="020B0604020202020204" pitchFamily="34" charset="0"/>
+              </a:defRPr>
+            </a:lvl2pPr>
+            <a:lvl3pPr>
+              <a:defRPr>
+                <a:solidFill>
+                  <a:schemeClr val="bg1"/>
+                </a:solidFill>
+                <a:latin typeface="Arial" panose="020B0604020202020204" pitchFamily="34" charset="0"/>
+                <a:cs typeface="Arial" panose="020B0604020202020204" pitchFamily="34" charset="0"/>
+              </a:defRPr>
+            </a:lvl3pPr>
+            <a:lvl4pPr>
+              <a:defRPr>
+                <a:solidFill>
+                  <a:schemeClr val="bg1"/>
+                </a:solidFill>
+                <a:latin typeface="Arial" panose="020B0604020202020204" pitchFamily="34" charset="0"/>
+                <a:cs typeface="Arial" panose="020B0604020202020204" pitchFamily="34" charset="0"/>
+              </a:defRPr>
+            </a:lvl4pPr>
+            <a:lvl5pPr>
+              <a:defRPr>
+                <a:solidFill>
+                  <a:schemeClr val="bg1"/>
+                </a:solidFill>
+                <a:latin typeface="Arial" panose="020B0604020202020204" pitchFamily="34" charset="0"/>
+                <a:cs typeface="Arial" panose="020B0604020202020204" pitchFamily="34" charset="0"/>
+              </a:defRPr>
+            </a:lvl5pPr>
+          </a:lstStyle>
+          <a:p>
+            <a:pPr lvl="0"/>
+            <a:r>
+              <a:rPr lang="en-US"/>
+              <a:t>Click to edit Master text styles</a:t>
+            </a:r>
+          </a:p>
+          <a:p>
+            <a:pPr lvl="1"/>
+            <a:r>
+              <a:rPr lang="en-US"/>
+              <a:t>Second level</a:t>
+            </a:r>
+          </a:p>
+          <a:p>
+            <a:pPr lvl="2"/>
+            <a:r>
+              <a:rPr lang="en-US"/>
+              <a:t>Third level</a:t>
+            </a:r>
+          </a:p>
+          <a:p>
+            <a:pPr lvl="3"/>
+            <a:r>
+              <a:rPr lang="en-US"/>
+              <a:t>Fourth level</a:t>
+            </a:r>
+          </a:p>
+          <a:p>
+            <a:pPr lvl="4"/>
+            <a:r>
+              <a:rPr lang="en-US"/>
+              <a:t>Fifth level</a:t>
+            </a:r>
+          </a:p>
+        </p:txBody>
+      </p:sp>
+    </p:spTree>
+    <p:extLst>
+      <p:ext uri="{BB962C8B-B14F-4D97-AF65-F5344CB8AC3E}">
+        <p14:creationId xmlns:p14="http://schemas.microsoft.com/office/powerpoint/2010/main" val="1038442111"/>
+      </p:ext>
+    </p:extLst>
+  </p:cSld>
+  <p:clrMapOvr>
+    <a:masterClrMapping/>
+  </p:clrMapOvr>
+</p:sldLayout>
+</file>
+
+<file path=ppt/slideLayouts/slideLayout11.xml><?xml version="1.0" encoding="utf-8"?>
+<p:sldLayout xmlns:a="http://schemas.openxmlformats.org/drawingml/2006/main" xmlns:r="http://schemas.openxmlformats.org/officeDocument/2006/relationships" xmlns:p="http://schemas.openxmlformats.org/presentationml/2006/main" preserve="1" userDrawn="1">
   <p:cSld name="Main Content : Visual Data + Text">
     <p:spTree>
       <p:nvGrpSpPr>
@@ -3814,7 +4162,7 @@
 </p:sldLayout>
 </file>
 
-<file path=ppt/slideLayouts/slideLayout11.xml><?xml version="1.0" encoding="utf-8"?>
+<file path=ppt/slideLayouts/slideLayout12.xml><?xml version="1.0" encoding="utf-8"?>
 <p:sldLayout xmlns:a="http://schemas.openxmlformats.org/drawingml/2006/main" xmlns:r="http://schemas.openxmlformats.org/officeDocument/2006/relationships" xmlns:p="http://schemas.openxmlformats.org/presentationml/2006/main" preserve="1" userDrawn="1">
   <p:cSld name="Main Content : Title + Dual Visual Data">
     <p:spTree>
@@ -4082,7 +4430,113 @@
 </p:sldLayout>
 </file>
 
-<file path=ppt/slideLayouts/slideLayout12.xml><?xml version="1.0" encoding="utf-8"?>
+<file path=ppt/slideLayouts/slideLayout13.xml><?xml version="1.0" encoding="utf-8"?>
+<p:sldLayout xmlns:a="http://schemas.openxmlformats.org/drawingml/2006/main" xmlns:r="http://schemas.openxmlformats.org/officeDocument/2006/relationships" xmlns:p="http://schemas.openxmlformats.org/presentationml/2006/main" userDrawn="1">
+  <p:cSld name="Section Break Slide">
+    <p:spTree>
+      <p:nvGrpSpPr>
+        <p:cNvPr id="1" name=""/>
+        <p:cNvGrpSpPr/>
+        <p:nvPr/>
+      </p:nvGrpSpPr>
+      <p:grpSpPr>
+        <a:xfrm>
+          <a:off x="0" y="0"/>
+          <a:ext cx="0" cy="0"/>
+          <a:chOff x="0" y="0"/>
+          <a:chExt cx="0" cy="0"/>
+        </a:xfrm>
+      </p:grpSpPr>
+      <p:sp>
+        <p:nvSpPr>
+          <p:cNvPr id="15" name="Text Placeholder 2">
+            <a:extLst>
+              <a:ext uri="{FF2B5EF4-FFF2-40B4-BE49-F238E27FC236}">
+                <a16:creationId xmlns:a16="http://schemas.microsoft.com/office/drawing/2014/main" id="{091E24DE-EFB1-0B46-A1A5-D4A0F86E2C80}"/>
+              </a:ext>
+            </a:extLst>
+          </p:cNvPr>
+          <p:cNvSpPr>
+            <a:spLocks noGrp="1"/>
+          </p:cNvSpPr>
+          <p:nvPr>
+            <p:ph type="body" sz="quarter" idx="10" hasCustomPrompt="1"/>
+          </p:nvPr>
+        </p:nvSpPr>
+        <p:spPr>
+          <a:xfrm>
+            <a:off x="737938" y="1628799"/>
+            <a:ext cx="10764252" cy="3857601"/>
+          </a:xfrm>
+          <a:prstGeom prst="rect">
+            <a:avLst/>
+          </a:prstGeom>
+        </p:spPr>
+        <p:txBody>
+          <a:bodyPr/>
+          <a:lstStyle>
+            <a:lvl1pPr marL="0" indent="0">
+              <a:buNone/>
+              <a:defRPr sz="4800" b="1">
+                <a:solidFill>
+                  <a:srgbClr val="00C700"/>
+                </a:solidFill>
+                <a:latin typeface="Arial" panose="020B0604020202020204" pitchFamily="34" charset="0"/>
+                <a:cs typeface="Arial" panose="020B0604020202020204" pitchFamily="34" charset="0"/>
+              </a:defRPr>
+            </a:lvl1pPr>
+            <a:lvl2pPr>
+              <a:defRPr>
+                <a:solidFill>
+                  <a:srgbClr val="00E2FF"/>
+                </a:solidFill>
+              </a:defRPr>
+            </a:lvl2pPr>
+            <a:lvl3pPr>
+              <a:defRPr>
+                <a:solidFill>
+                  <a:srgbClr val="00E2FF"/>
+                </a:solidFill>
+              </a:defRPr>
+            </a:lvl3pPr>
+            <a:lvl4pPr>
+              <a:defRPr>
+                <a:solidFill>
+                  <a:srgbClr val="00E2FF"/>
+                </a:solidFill>
+              </a:defRPr>
+            </a:lvl4pPr>
+            <a:lvl5pPr>
+              <a:defRPr>
+                <a:solidFill>
+                  <a:srgbClr val="00E2FF"/>
+                </a:solidFill>
+              </a:defRPr>
+            </a:lvl5pPr>
+          </a:lstStyle>
+          <a:p>
+            <a:pPr lvl="0"/>
+            <a:r>
+              <a:rPr lang="en-US" dirty="0"/>
+              <a:t>Section title</a:t>
+            </a:r>
+          </a:p>
+        </p:txBody>
+      </p:sp>
+    </p:spTree>
+    <p:extLst>
+      <p:ext uri="{BB962C8B-B14F-4D97-AF65-F5344CB8AC3E}">
+        <p14:creationId xmlns:p14="http://schemas.microsoft.com/office/powerpoint/2010/main" val="698521200"/>
+      </p:ext>
+    </p:extLst>
+  </p:cSld>
+  <p:clrMapOvr>
+    <a:masterClrMapping/>
+  </p:clrMapOvr>
+</p:sldLayout>
+</file>
+
+<file path=ppt/slideLayouts/slideLayout14.xml><?xml version="1.0" encoding="utf-8"?>
 <p:sldLayout xmlns:a="http://schemas.openxmlformats.org/drawingml/2006/main" xmlns:r="http://schemas.openxmlformats.org/officeDocument/2006/relationships" xmlns:p="http://schemas.openxmlformats.org/presentationml/2006/main" preserve="1" userDrawn="1">
   <p:cSld name="Dark Content (White Background)">
     <p:bg>
@@ -4238,6 +4692,36 @@
 </file>
 
 <file path=ppt/slideLayouts/slideLayout3.xml><?xml version="1.0" encoding="utf-8"?>
+<p:sldLayout xmlns:a="http://schemas.openxmlformats.org/drawingml/2006/main" xmlns:r="http://schemas.openxmlformats.org/officeDocument/2006/relationships" xmlns:p="http://schemas.openxmlformats.org/presentationml/2006/main" userDrawn="1">
+  <p:cSld name="Main Content (White Background)">
+    <p:spTree>
+      <p:nvGrpSpPr>
+        <p:cNvPr id="1" name=""/>
+        <p:cNvGrpSpPr/>
+        <p:nvPr/>
+      </p:nvGrpSpPr>
+      <p:grpSpPr>
+        <a:xfrm>
+          <a:off x="0" y="0"/>
+          <a:ext cx="0" cy="0"/>
+          <a:chOff x="0" y="0"/>
+          <a:chExt cx="0" cy="0"/>
+        </a:xfrm>
+      </p:grpSpPr>
+    </p:spTree>
+    <p:extLst>
+      <p:ext uri="{BB962C8B-B14F-4D97-AF65-F5344CB8AC3E}">
+        <p14:creationId xmlns:p14="http://schemas.microsoft.com/office/powerpoint/2010/main" val="3609986731"/>
+      </p:ext>
+    </p:extLst>
+  </p:cSld>
+  <p:clrMapOvr>
+    <a:masterClrMapping/>
+  </p:clrMapOvr>
+</p:sldLayout>
+</file>
+
+<file path=ppt/slideLayouts/slideLayout4.xml><?xml version="1.0" encoding="utf-8"?>
 <p:sldLayout xmlns:a="http://schemas.openxmlformats.org/drawingml/2006/main" xmlns:r="http://schemas.openxmlformats.org/officeDocument/2006/relationships" xmlns:p="http://schemas.openxmlformats.org/presentationml/2006/main" preserve="1" userDrawn="1">
   <p:cSld name="Main Content : Title + Text Box">
     <p:bg>
@@ -4428,7 +4912,7 @@
 </p:sldLayout>
 </file>
 
-<file path=ppt/slideLayouts/slideLayout4.xml><?xml version="1.0" encoding="utf-8"?>
+<file path=ppt/slideLayouts/slideLayout5.xml><?xml version="1.0" encoding="utf-8"?>
 <p:sldLayout xmlns:a="http://schemas.openxmlformats.org/drawingml/2006/main" xmlns:r="http://schemas.openxmlformats.org/officeDocument/2006/relationships" xmlns:p="http://schemas.openxmlformats.org/presentationml/2006/main" preserve="1" userDrawn="1">
   <p:cSld name="1_Main Content : Title + Text Box">
     <p:bg>
@@ -4634,7 +5118,7 @@
 </p:sldLayout>
 </file>
 
-<file path=ppt/slideLayouts/slideLayout5.xml><?xml version="1.0" encoding="utf-8"?>
+<file path=ppt/slideLayouts/slideLayout6.xml><?xml version="1.0" encoding="utf-8"?>
 <p:sldLayout xmlns:a="http://schemas.openxmlformats.org/drawingml/2006/main" xmlns:r="http://schemas.openxmlformats.org/officeDocument/2006/relationships" xmlns:p="http://schemas.openxmlformats.org/presentationml/2006/main" preserve="1" userDrawn="1">
   <p:cSld name="Main Content : Title + Dual Text Box">
     <p:spTree>
@@ -4902,7 +5386,7 @@
 </p:sldLayout>
 </file>
 
-<file path=ppt/slideLayouts/slideLayout6.xml><?xml version="1.0" encoding="utf-8"?>
+<file path=ppt/slideLayouts/slideLayout7.xml><?xml version="1.0" encoding="utf-8"?>
 <p:sldLayout xmlns:a="http://schemas.openxmlformats.org/drawingml/2006/main" xmlns:r="http://schemas.openxmlformats.org/officeDocument/2006/relationships" xmlns:p="http://schemas.openxmlformats.org/presentationml/2006/main" preserve="1" userDrawn="1">
   <p:cSld name="Main Content - Dark BKG : Title + Dual Text Box">
     <p:bg>
@@ -5219,7 +5703,7 @@
 </p:sldLayout>
 </file>
 
-<file path=ppt/slideLayouts/slideLayout7.xml><?xml version="1.0" encoding="utf-8"?>
+<file path=ppt/slideLayouts/slideLayout8.xml><?xml version="1.0" encoding="utf-8"?>
 <p:sldLayout xmlns:a="http://schemas.openxmlformats.org/drawingml/2006/main" xmlns:r="http://schemas.openxmlformats.org/officeDocument/2006/relationships" xmlns:p="http://schemas.openxmlformats.org/presentationml/2006/main" preserve="1" userDrawn="1">
   <p:cSld name="Main Content : Visual Data">
     <p:spTree>
@@ -5345,7 +5829,7 @@
 </p:sldLayout>
 </file>
 
-<file path=ppt/slideLayouts/slideLayout8.xml><?xml version="1.0" encoding="utf-8"?>
+<file path=ppt/slideLayouts/slideLayout9.xml><?xml version="1.0" encoding="utf-8"?>
 <p:sldLayout xmlns:a="http://schemas.openxmlformats.org/drawingml/2006/main" xmlns:r="http://schemas.openxmlformats.org/officeDocument/2006/relationships" xmlns:p="http://schemas.openxmlformats.org/presentationml/2006/main" preserve="1" userDrawn="1">
   <p:cSld name="Main Content : Title + Visual Data">
     <p:spTree>
@@ -5604,323 +6088,6 @@
     <p:extLst>
       <p:ext uri="{BB962C8B-B14F-4D97-AF65-F5344CB8AC3E}">
         <p14:creationId xmlns:p14="http://schemas.microsoft.com/office/powerpoint/2010/main" val="1015417581"/>
-      </p:ext>
-    </p:extLst>
-  </p:cSld>
-  <p:clrMapOvr>
-    <a:masterClrMapping/>
-  </p:clrMapOvr>
-</p:sldLayout>
-</file>
-
-<file path=ppt/slideLayouts/slideLayout9.xml><?xml version="1.0" encoding="utf-8"?>
-<p:sldLayout xmlns:a="http://schemas.openxmlformats.org/drawingml/2006/main" xmlns:r="http://schemas.openxmlformats.org/officeDocument/2006/relationships" xmlns:p="http://schemas.openxmlformats.org/presentationml/2006/main" preserve="1" userDrawn="1">
-  <p:cSld name="Main Content - Dark BKG : Title + Visual Data">
-    <p:bg>
-      <p:bgPr>
-        <a:blipFill dpi="0" rotWithShape="1">
-          <a:blip r:embed="rId2" cstate="print">
-            <a:lum/>
-            <a:extLst>
-              <a:ext uri="{28A0092B-C50C-407E-A947-70E740481C1C}">
-                <a14:useLocalDpi xmlns:a14="http://schemas.microsoft.com/office/drawing/2010/main"/>
-              </a:ext>
-            </a:extLst>
-          </a:blip>
-          <a:srcRect/>
-          <a:stretch>
-            <a:fillRect/>
-          </a:stretch>
-        </a:blipFill>
-        <a:effectLst/>
-      </p:bgPr>
-    </p:bg>
-    <p:spTree>
-      <p:nvGrpSpPr>
-        <p:cNvPr id="1" name=""/>
-        <p:cNvGrpSpPr/>
-        <p:nvPr/>
-      </p:nvGrpSpPr>
-      <p:grpSpPr>
-        <a:xfrm>
-          <a:off x="0" y="0"/>
-          <a:ext cx="0" cy="0"/>
-          <a:chOff x="0" y="0"/>
-          <a:chExt cx="0" cy="0"/>
-        </a:xfrm>
-      </p:grpSpPr>
-      <p:sp>
-        <p:nvSpPr>
-          <p:cNvPr id="6" name="Title 10">
-            <a:extLst>
-              <a:ext uri="{FF2B5EF4-FFF2-40B4-BE49-F238E27FC236}">
-                <a16:creationId xmlns:a16="http://schemas.microsoft.com/office/drawing/2014/main" id="{A54FBFB0-DCDC-C848-901F-75B727D01B69}"/>
-              </a:ext>
-            </a:extLst>
-          </p:cNvPr>
-          <p:cNvSpPr>
-            <a:spLocks noGrp="1"/>
-          </p:cNvSpPr>
-          <p:nvPr>
-            <p:ph type="title" hasCustomPrompt="1"/>
-          </p:nvPr>
-        </p:nvSpPr>
-        <p:spPr>
-          <a:xfrm>
-            <a:off x="757990" y="798262"/>
-            <a:ext cx="5204111" cy="1046579"/>
-          </a:xfrm>
-          <a:prstGeom prst="rect">
-            <a:avLst/>
-          </a:prstGeom>
-        </p:spPr>
-        <p:txBody>
-          <a:bodyPr/>
-          <a:lstStyle>
-            <a:lvl1pPr>
-              <a:defRPr sz="3200" b="1">
-                <a:solidFill>
-                  <a:srgbClr val="00C700"/>
-                </a:solidFill>
-                <a:latin typeface="Arial" panose="020B0604020202020204" pitchFamily="34" charset="0"/>
-                <a:cs typeface="Arial" panose="020B0604020202020204" pitchFamily="34" charset="0"/>
-              </a:defRPr>
-            </a:lvl1pPr>
-          </a:lstStyle>
-          <a:p>
-            <a:r>
-              <a:rPr lang="en-US"/>
-              <a:t>CLICK TO EDIT MASTER TITLE STYLE</a:t>
-            </a:r>
-          </a:p>
-        </p:txBody>
-      </p:sp>
-      <p:sp>
-        <p:nvSpPr>
-          <p:cNvPr id="7" name="Text Placeholder 12">
-            <a:extLst>
-              <a:ext uri="{FF2B5EF4-FFF2-40B4-BE49-F238E27FC236}">
-                <a16:creationId xmlns:a16="http://schemas.microsoft.com/office/drawing/2014/main" id="{E6537CD3-4D9A-184F-8D06-E1B8E2D9036C}"/>
-              </a:ext>
-            </a:extLst>
-          </p:cNvPr>
-          <p:cNvSpPr>
-            <a:spLocks noGrp="1"/>
-          </p:cNvSpPr>
-          <p:nvPr>
-            <p:ph type="body" sz="quarter" idx="12"/>
-          </p:nvPr>
-        </p:nvSpPr>
-        <p:spPr>
-          <a:xfrm>
-            <a:off x="738188" y="2005263"/>
-            <a:ext cx="5213433" cy="3930399"/>
-          </a:xfrm>
-          <a:prstGeom prst="rect">
-            <a:avLst/>
-          </a:prstGeom>
-        </p:spPr>
-        <p:txBody>
-          <a:bodyPr/>
-          <a:lstStyle>
-            <a:lvl1pPr>
-              <a:defRPr>
-                <a:solidFill>
-                  <a:schemeClr val="bg1"/>
-                </a:solidFill>
-                <a:latin typeface="Arial" panose="020B0604020202020204" pitchFamily="34" charset="0"/>
-                <a:cs typeface="Arial" panose="020B0604020202020204" pitchFamily="34" charset="0"/>
-              </a:defRPr>
-            </a:lvl1pPr>
-            <a:lvl2pPr>
-              <a:defRPr>
-                <a:solidFill>
-                  <a:schemeClr val="bg1"/>
-                </a:solidFill>
-                <a:latin typeface="Arial" panose="020B0604020202020204" pitchFamily="34" charset="0"/>
-                <a:cs typeface="Arial" panose="020B0604020202020204" pitchFamily="34" charset="0"/>
-              </a:defRPr>
-            </a:lvl2pPr>
-            <a:lvl3pPr>
-              <a:defRPr>
-                <a:solidFill>
-                  <a:schemeClr val="bg1"/>
-                </a:solidFill>
-                <a:latin typeface="Arial" panose="020B0604020202020204" pitchFamily="34" charset="0"/>
-                <a:cs typeface="Arial" panose="020B0604020202020204" pitchFamily="34" charset="0"/>
-              </a:defRPr>
-            </a:lvl3pPr>
-            <a:lvl4pPr>
-              <a:defRPr>
-                <a:solidFill>
-                  <a:schemeClr val="bg1"/>
-                </a:solidFill>
-                <a:latin typeface="Arial" panose="020B0604020202020204" pitchFamily="34" charset="0"/>
-                <a:cs typeface="Arial" panose="020B0604020202020204" pitchFamily="34" charset="0"/>
-              </a:defRPr>
-            </a:lvl4pPr>
-            <a:lvl5pPr>
-              <a:defRPr>
-                <a:solidFill>
-                  <a:schemeClr val="bg1"/>
-                </a:solidFill>
-                <a:latin typeface="Arial" panose="020B0604020202020204" pitchFamily="34" charset="0"/>
-                <a:cs typeface="Arial" panose="020B0604020202020204" pitchFamily="34" charset="0"/>
-              </a:defRPr>
-            </a:lvl5pPr>
-          </a:lstStyle>
-          <a:p>
-            <a:pPr lvl="0"/>
-            <a:r>
-              <a:rPr lang="en-US"/>
-              <a:t>Click to edit Master text styles</a:t>
-            </a:r>
-          </a:p>
-          <a:p>
-            <a:pPr lvl="1"/>
-            <a:r>
-              <a:rPr lang="en-US"/>
-              <a:t>Second level</a:t>
-            </a:r>
-          </a:p>
-          <a:p>
-            <a:pPr lvl="2"/>
-            <a:r>
-              <a:rPr lang="en-US"/>
-              <a:t>Third level</a:t>
-            </a:r>
-          </a:p>
-          <a:p>
-            <a:pPr lvl="3"/>
-            <a:r>
-              <a:rPr lang="en-US"/>
-              <a:t>Fourth level</a:t>
-            </a:r>
-          </a:p>
-          <a:p>
-            <a:pPr lvl="4"/>
-            <a:r>
-              <a:rPr lang="en-US"/>
-              <a:t>Fifth level</a:t>
-            </a:r>
-          </a:p>
-        </p:txBody>
-      </p:sp>
-      <p:sp>
-        <p:nvSpPr>
-          <p:cNvPr id="10" name="Content Placeholder 7">
-            <a:extLst>
-              <a:ext uri="{FF2B5EF4-FFF2-40B4-BE49-F238E27FC236}">
-                <a16:creationId xmlns:a16="http://schemas.microsoft.com/office/drawing/2014/main" id="{DC03047F-22E2-5B43-86A2-7583C9DB314F}"/>
-              </a:ext>
-            </a:extLst>
-          </p:cNvPr>
-          <p:cNvSpPr>
-            <a:spLocks noGrp="1"/>
-          </p:cNvSpPr>
-          <p:nvPr>
-            <p:ph sz="quarter" idx="13"/>
-          </p:nvPr>
-        </p:nvSpPr>
-        <p:spPr>
-          <a:xfrm>
-            <a:off x="6157913" y="757238"/>
-            <a:ext cx="5372100" cy="5200650"/>
-          </a:xfrm>
-          <a:prstGeom prst="rect">
-            <a:avLst/>
-          </a:prstGeom>
-        </p:spPr>
-        <p:txBody>
-          <a:bodyPr/>
-          <a:lstStyle>
-            <a:lvl1pPr>
-              <a:defRPr>
-                <a:solidFill>
-                  <a:schemeClr val="bg1"/>
-                </a:solidFill>
-                <a:latin typeface="Arial" panose="020B0604020202020204" pitchFamily="34" charset="0"/>
-                <a:cs typeface="Arial" panose="020B0604020202020204" pitchFamily="34" charset="0"/>
-              </a:defRPr>
-            </a:lvl1pPr>
-            <a:lvl2pPr>
-              <a:defRPr>
-                <a:solidFill>
-                  <a:schemeClr val="bg1"/>
-                </a:solidFill>
-                <a:latin typeface="Arial" panose="020B0604020202020204" pitchFamily="34" charset="0"/>
-                <a:cs typeface="Arial" panose="020B0604020202020204" pitchFamily="34" charset="0"/>
-              </a:defRPr>
-            </a:lvl2pPr>
-            <a:lvl3pPr>
-              <a:defRPr>
-                <a:solidFill>
-                  <a:schemeClr val="bg1"/>
-                </a:solidFill>
-                <a:latin typeface="Arial" panose="020B0604020202020204" pitchFamily="34" charset="0"/>
-                <a:cs typeface="Arial" panose="020B0604020202020204" pitchFamily="34" charset="0"/>
-              </a:defRPr>
-            </a:lvl3pPr>
-            <a:lvl4pPr>
-              <a:defRPr>
-                <a:solidFill>
-                  <a:schemeClr val="bg1"/>
-                </a:solidFill>
-                <a:latin typeface="Arial" panose="020B0604020202020204" pitchFamily="34" charset="0"/>
-                <a:cs typeface="Arial" panose="020B0604020202020204" pitchFamily="34" charset="0"/>
-              </a:defRPr>
-            </a:lvl4pPr>
-            <a:lvl5pPr>
-              <a:defRPr>
-                <a:solidFill>
-                  <a:schemeClr val="bg1"/>
-                </a:solidFill>
-                <a:latin typeface="Arial" panose="020B0604020202020204" pitchFamily="34" charset="0"/>
-                <a:cs typeface="Arial" panose="020B0604020202020204" pitchFamily="34" charset="0"/>
-              </a:defRPr>
-            </a:lvl5pPr>
-          </a:lstStyle>
-          <a:p>
-            <a:pPr lvl="0"/>
-            <a:r>
-              <a:rPr lang="en-US"/>
-              <a:t>Click to edit Master text styles</a:t>
-            </a:r>
-          </a:p>
-          <a:p>
-            <a:pPr lvl="1"/>
-            <a:r>
-              <a:rPr lang="en-US"/>
-              <a:t>Second level</a:t>
-            </a:r>
-          </a:p>
-          <a:p>
-            <a:pPr lvl="2"/>
-            <a:r>
-              <a:rPr lang="en-US"/>
-              <a:t>Third level</a:t>
-            </a:r>
-          </a:p>
-          <a:p>
-            <a:pPr lvl="3"/>
-            <a:r>
-              <a:rPr lang="en-US"/>
-              <a:t>Fourth level</a:t>
-            </a:r>
-          </a:p>
-          <a:p>
-            <a:pPr lvl="4"/>
-            <a:r>
-              <a:rPr lang="en-US"/>
-              <a:t>Fifth level</a:t>
-            </a:r>
-          </a:p>
-        </p:txBody>
-      </p:sp>
-    </p:spTree>
-    <p:extLst>
-      <p:ext uri="{BB962C8B-B14F-4D97-AF65-F5344CB8AC3E}">
-        <p14:creationId xmlns:p14="http://schemas.microsoft.com/office/powerpoint/2010/main" val="1038442111"/>
       </p:ext>
     </p:extLst>
   </p:cSld>
@@ -6266,7 +6433,7 @@
     <p:bg>
       <p:bgPr>
         <a:blipFill dpi="0" rotWithShape="1">
-          <a:blip r:embed="rId3" cstate="print">
+          <a:blip r:embed="rId4" cstate="print">
             <a:lum/>
             <a:extLst>
               <a:ext uri="{28A0092B-C50C-407E-A947-70E740481C1C}">
@@ -6306,6 +6473,7 @@
   <p:clrMap bg1="lt1" tx1="dk1" bg2="lt2" tx2="dk2" accent1="accent1" accent2="accent2" accent3="accent3" accent4="accent4" accent5="accent5" accent6="accent6" hlink="hlink" folHlink="folHlink"/>
   <p:sldLayoutIdLst>
     <p:sldLayoutId id="2147483681" r:id="rId1"/>
+    <p:sldLayoutId id="2147483695" r:id="rId2"/>
   </p:sldLayoutIdLst>
   <p:txStyles>
     <p:titleStyle>
@@ -6596,7 +6764,7 @@
     <p:bg>
       <p:bgPr>
         <a:blipFill dpi="0" rotWithShape="1">
-          <a:blip r:embed="rId11" cstate="print">
+          <a:blip r:embed="rId12" cstate="print">
             <a:lum/>
             <a:extLst>
               <a:ext uri="{28A0092B-C50C-407E-A947-70E740481C1C}">
@@ -6644,6 +6812,7 @@
     <p:sldLayoutId id="2147483694" r:id="rId7"/>
     <p:sldLayoutId id="2147483688" r:id="rId8"/>
     <p:sldLayoutId id="2147483690" r:id="rId9"/>
+    <p:sldLayoutId id="2147483696" r:id="rId10"/>
   </p:sldLayoutIdLst>
   <p:txStyles>
     <p:titleStyle>
@@ -7311,6 +7480,630 @@
 <file path=ppt/slides/slide10.xml><?xml version="1.0" encoding="utf-8"?>
 <p:sld xmlns:a="http://schemas.openxmlformats.org/drawingml/2006/main" xmlns:r="http://schemas.openxmlformats.org/officeDocument/2006/relationships" xmlns:p="http://schemas.openxmlformats.org/presentationml/2006/main">
   <p:cSld>
+    <p:bg>
+      <p:bgPr>
+        <a:blipFill dpi="0" rotWithShape="1">
+          <a:blip r:embed="rId3" cstate="print">
+            <a:lum/>
+            <a:extLst>
+              <a:ext uri="{28A0092B-C50C-407E-A947-70E740481C1C}">
+                <a14:useLocalDpi xmlns:a14="http://schemas.microsoft.com/office/drawing/2010/main"/>
+              </a:ext>
+            </a:extLst>
+          </a:blip>
+          <a:srcRect/>
+          <a:stretch>
+            <a:fillRect/>
+          </a:stretch>
+        </a:blipFill>
+        <a:effectLst/>
+      </p:bgPr>
+    </p:bg>
+    <p:spTree>
+      <p:nvGrpSpPr>
+        <p:cNvPr id="1" name="">
+          <a:extLst>
+            <a:ext uri="{FF2B5EF4-FFF2-40B4-BE49-F238E27FC236}">
+              <a16:creationId xmlns:a16="http://schemas.microsoft.com/office/drawing/2014/main" id="{A2AFBFED-6FAE-6C24-CEF0-20129CB4512B}"/>
+            </a:ext>
+          </a:extLst>
+        </p:cNvPr>
+        <p:cNvGrpSpPr/>
+        <p:nvPr/>
+      </p:nvGrpSpPr>
+      <p:grpSpPr>
+        <a:xfrm>
+          <a:off x="0" y="0"/>
+          <a:ext cx="0" cy="0"/>
+          <a:chOff x="0" y="0"/>
+          <a:chExt cx="0" cy="0"/>
+        </a:xfrm>
+      </p:grpSpPr>
+      <p:sp>
+        <p:nvSpPr>
+          <p:cNvPr id="4" name="Text Placeholder 3">
+            <a:extLst>
+              <a:ext uri="{FF2B5EF4-FFF2-40B4-BE49-F238E27FC236}">
+                <a16:creationId xmlns:a16="http://schemas.microsoft.com/office/drawing/2014/main" id="{EC96C119-CC06-C306-4CB9-E960002CC49B}"/>
+              </a:ext>
+            </a:extLst>
+          </p:cNvPr>
+          <p:cNvSpPr>
+            <a:spLocks noGrp="1"/>
+          </p:cNvSpPr>
+          <p:nvPr>
+            <p:ph type="body" sz="quarter" idx="10"/>
+          </p:nvPr>
+        </p:nvSpPr>
+        <p:spPr/>
+        <p:txBody>
+          <a:bodyPr lIns="91440" tIns="45720" rIns="91440" bIns="45720" anchor="t"/>
+          <a:lstStyle/>
+          <a:p>
+            <a:r>
+              <a:rPr lang="en-IT" dirty="0">
+                <a:latin typeface="Arial"/>
+                <a:cs typeface="Arial"/>
+              </a:rPr>
+              <a:t>Unit testing</a:t>
+            </a:r>
+            <a:endParaRPr lang="en-US"/>
+          </a:p>
+          <a:p>
+            <a:r>
+              <a:rPr lang="en-US">
+                <a:latin typeface="Arial"/>
+                <a:cs typeface="Arial"/>
+              </a:rPr>
+              <a:t>Business logic</a:t>
+            </a:r>
+            <a:endParaRPr lang="en-US" dirty="0"/>
+          </a:p>
+        </p:txBody>
+      </p:sp>
+      <p:sp>
+        <p:nvSpPr>
+          <p:cNvPr id="6" name="Text Placeholder 3">
+            <a:extLst>
+              <a:ext uri="{FF2B5EF4-FFF2-40B4-BE49-F238E27FC236}">
+                <a16:creationId xmlns:a16="http://schemas.microsoft.com/office/drawing/2014/main" id="{CD4ED05C-D796-6842-5DCE-FF0250A5A793}"/>
+              </a:ext>
+            </a:extLst>
+          </p:cNvPr>
+          <p:cNvSpPr txBox="1">
+            <a:spLocks/>
+          </p:cNvSpPr>
+          <p:nvPr/>
+        </p:nvSpPr>
+        <p:spPr>
+          <a:xfrm>
+            <a:off x="6209198" y="4788827"/>
+            <a:ext cx="5445392" cy="849973"/>
+          </a:xfrm>
+          <a:prstGeom prst="rect">
+            <a:avLst/>
+          </a:prstGeom>
+        </p:spPr>
+        <p:txBody>
+          <a:bodyPr lIns="91440" tIns="45720" rIns="91440" bIns="45720" anchor="t"/>
+          <a:lstStyle>
+            <a:lvl1pPr marL="0" indent="0" algn="l" defTabSz="914400" rtl="0" eaLnBrk="1" latinLnBrk="0" hangingPunct="1">
+              <a:lnSpc>
+                <a:spcPct val="90000"/>
+              </a:lnSpc>
+              <a:spcBef>
+                <a:spcPts val="1000"/>
+              </a:spcBef>
+              <a:buFont typeface="Arial"/>
+              <a:buNone/>
+              <a:defRPr sz="4800" b="1" kern="1200">
+                <a:solidFill>
+                  <a:srgbClr val="00C700"/>
+                </a:solidFill>
+                <a:latin typeface="Arial" panose="020B0604020202020204" pitchFamily="34" charset="0"/>
+                <a:ea typeface="+mn-ea"/>
+                <a:cs typeface="Arial" panose="020B0604020202020204" pitchFamily="34" charset="0"/>
+              </a:defRPr>
+            </a:lvl1pPr>
+            <a:lvl2pPr marL="685800" indent="-228600" algn="l" defTabSz="914400" rtl="0" eaLnBrk="1" latinLnBrk="0" hangingPunct="1">
+              <a:lnSpc>
+                <a:spcPct val="90000"/>
+              </a:lnSpc>
+              <a:spcBef>
+                <a:spcPts val="500"/>
+              </a:spcBef>
+              <a:buFont typeface="Arial"/>
+              <a:buChar char="•"/>
+              <a:defRPr sz="2400" kern="1200">
+                <a:solidFill>
+                  <a:srgbClr val="00E2FF"/>
+                </a:solidFill>
+                <a:latin typeface="+mn-lt"/>
+                <a:ea typeface="+mn-ea"/>
+                <a:cs typeface="+mn-cs"/>
+              </a:defRPr>
+            </a:lvl2pPr>
+            <a:lvl3pPr marL="1143000" indent="-228600" algn="l" defTabSz="914400" rtl="0" eaLnBrk="1" latinLnBrk="0" hangingPunct="1">
+              <a:lnSpc>
+                <a:spcPct val="90000"/>
+              </a:lnSpc>
+              <a:spcBef>
+                <a:spcPts val="500"/>
+              </a:spcBef>
+              <a:buFont typeface="Arial"/>
+              <a:buChar char="•"/>
+              <a:defRPr sz="2000" kern="1200">
+                <a:solidFill>
+                  <a:srgbClr val="00E2FF"/>
+                </a:solidFill>
+                <a:latin typeface="+mn-lt"/>
+                <a:ea typeface="+mn-ea"/>
+                <a:cs typeface="+mn-cs"/>
+              </a:defRPr>
+            </a:lvl3pPr>
+            <a:lvl4pPr marL="1600200" indent="-228600" algn="l" defTabSz="914400" rtl="0" eaLnBrk="1" latinLnBrk="0" hangingPunct="1">
+              <a:lnSpc>
+                <a:spcPct val="90000"/>
+              </a:lnSpc>
+              <a:spcBef>
+                <a:spcPts val="500"/>
+              </a:spcBef>
+              <a:buFont typeface="Arial"/>
+              <a:buChar char="•"/>
+              <a:defRPr sz="1800" kern="1200">
+                <a:solidFill>
+                  <a:srgbClr val="00E2FF"/>
+                </a:solidFill>
+                <a:latin typeface="+mn-lt"/>
+                <a:ea typeface="+mn-ea"/>
+                <a:cs typeface="+mn-cs"/>
+              </a:defRPr>
+            </a:lvl4pPr>
+            <a:lvl5pPr marL="2057400" indent="-228600" algn="l" defTabSz="914400" rtl="0" eaLnBrk="1" latinLnBrk="0" hangingPunct="1">
+              <a:lnSpc>
+                <a:spcPct val="90000"/>
+              </a:lnSpc>
+              <a:spcBef>
+                <a:spcPts val="500"/>
+              </a:spcBef>
+              <a:buFont typeface="Arial"/>
+              <a:buChar char="•"/>
+              <a:defRPr sz="1800" kern="1200">
+                <a:solidFill>
+                  <a:srgbClr val="00E2FF"/>
+                </a:solidFill>
+                <a:latin typeface="+mn-lt"/>
+                <a:ea typeface="+mn-ea"/>
+                <a:cs typeface="+mn-cs"/>
+              </a:defRPr>
+            </a:lvl5pPr>
+            <a:lvl6pPr marL="2514600" indent="-228600" algn="l" defTabSz="914400" rtl="0" eaLnBrk="1" latinLnBrk="0" hangingPunct="1">
+              <a:lnSpc>
+                <a:spcPct val="90000"/>
+              </a:lnSpc>
+              <a:spcBef>
+                <a:spcPts val="500"/>
+              </a:spcBef>
+              <a:buFont typeface="Arial"/>
+              <a:buChar char="•"/>
+              <a:defRPr sz="1800" kern="1200">
+                <a:solidFill>
+                  <a:schemeClr val="tx1"/>
+                </a:solidFill>
+                <a:latin typeface="+mn-lt"/>
+                <a:ea typeface="+mn-ea"/>
+                <a:cs typeface="+mn-cs"/>
+              </a:defRPr>
+            </a:lvl6pPr>
+            <a:lvl7pPr marL="2971800" indent="-228600" algn="l" defTabSz="914400" rtl="0" eaLnBrk="1" latinLnBrk="0" hangingPunct="1">
+              <a:lnSpc>
+                <a:spcPct val="90000"/>
+              </a:lnSpc>
+              <a:spcBef>
+                <a:spcPts val="500"/>
+              </a:spcBef>
+              <a:buFont typeface="Arial"/>
+              <a:buChar char="•"/>
+              <a:defRPr sz="1800" kern="1200">
+                <a:solidFill>
+                  <a:schemeClr val="tx1"/>
+                </a:solidFill>
+                <a:latin typeface="+mn-lt"/>
+                <a:ea typeface="+mn-ea"/>
+                <a:cs typeface="+mn-cs"/>
+              </a:defRPr>
+            </a:lvl7pPr>
+            <a:lvl8pPr marL="3429000" indent="-228600" algn="l" defTabSz="914400" rtl="0" eaLnBrk="1" latinLnBrk="0" hangingPunct="1">
+              <a:lnSpc>
+                <a:spcPct val="90000"/>
+              </a:lnSpc>
+              <a:spcBef>
+                <a:spcPts val="500"/>
+              </a:spcBef>
+              <a:buFont typeface="Arial"/>
+              <a:buChar char="•"/>
+              <a:defRPr sz="1800" kern="1200">
+                <a:solidFill>
+                  <a:schemeClr val="tx1"/>
+                </a:solidFill>
+                <a:latin typeface="+mn-lt"/>
+                <a:ea typeface="+mn-ea"/>
+                <a:cs typeface="+mn-cs"/>
+              </a:defRPr>
+            </a:lvl8pPr>
+            <a:lvl9pPr marL="3886200" indent="-228600" algn="l" defTabSz="914400" rtl="0" eaLnBrk="1" latinLnBrk="0" hangingPunct="1">
+              <a:lnSpc>
+                <a:spcPct val="90000"/>
+              </a:lnSpc>
+              <a:spcBef>
+                <a:spcPts val="500"/>
+              </a:spcBef>
+              <a:buFont typeface="Arial"/>
+              <a:buChar char="•"/>
+              <a:defRPr sz="1800" kern="1200">
+                <a:solidFill>
+                  <a:schemeClr val="tx1"/>
+                </a:solidFill>
+                <a:latin typeface="+mn-lt"/>
+                <a:ea typeface="+mn-ea"/>
+                <a:cs typeface="+mn-cs"/>
+              </a:defRPr>
+            </a:lvl9pPr>
+          </a:lstStyle>
+          <a:p>
+            <a:endParaRPr lang="en-US" dirty="0"/>
+          </a:p>
+        </p:txBody>
+      </p:sp>
+      <p:sp>
+        <p:nvSpPr>
+          <p:cNvPr id="3" name="Text Placeholder 3">
+            <a:extLst>
+              <a:ext uri="{FF2B5EF4-FFF2-40B4-BE49-F238E27FC236}">
+                <a16:creationId xmlns:a16="http://schemas.microsoft.com/office/drawing/2014/main" id="{30F68356-5FE2-3B5F-62BF-DA8676F91059}"/>
+              </a:ext>
+            </a:extLst>
+          </p:cNvPr>
+          <p:cNvSpPr txBox="1">
+            <a:spLocks/>
+          </p:cNvSpPr>
+          <p:nvPr/>
+        </p:nvSpPr>
+        <p:spPr>
+          <a:xfrm>
+            <a:off x="6361598" y="4941227"/>
+            <a:ext cx="5445392" cy="849973"/>
+          </a:xfrm>
+          <a:prstGeom prst="rect">
+            <a:avLst/>
+          </a:prstGeom>
+        </p:spPr>
+        <p:txBody>
+          <a:bodyPr lIns="91440" tIns="45720" rIns="91440" bIns="45720" anchor="t"/>
+          <a:lstStyle>
+            <a:lvl1pPr marL="0" indent="0" algn="l" defTabSz="914400" rtl="0" eaLnBrk="1" latinLnBrk="0" hangingPunct="1">
+              <a:lnSpc>
+                <a:spcPct val="90000"/>
+              </a:lnSpc>
+              <a:spcBef>
+                <a:spcPts val="1000"/>
+              </a:spcBef>
+              <a:buFont typeface="Arial"/>
+              <a:buNone/>
+              <a:defRPr sz="4800" b="1" kern="1200">
+                <a:solidFill>
+                  <a:srgbClr val="00C700"/>
+                </a:solidFill>
+                <a:latin typeface="Arial" panose="020B0604020202020204" pitchFamily="34" charset="0"/>
+                <a:ea typeface="+mn-ea"/>
+                <a:cs typeface="Arial" panose="020B0604020202020204" pitchFamily="34" charset="0"/>
+              </a:defRPr>
+            </a:lvl1pPr>
+            <a:lvl2pPr marL="685800" indent="-228600" algn="l" defTabSz="914400" rtl="0" eaLnBrk="1" latinLnBrk="0" hangingPunct="1">
+              <a:lnSpc>
+                <a:spcPct val="90000"/>
+              </a:lnSpc>
+              <a:spcBef>
+                <a:spcPts val="500"/>
+              </a:spcBef>
+              <a:buFont typeface="Arial"/>
+              <a:buChar char="•"/>
+              <a:defRPr sz="2400" kern="1200">
+                <a:solidFill>
+                  <a:srgbClr val="00E2FF"/>
+                </a:solidFill>
+                <a:latin typeface="+mn-lt"/>
+                <a:ea typeface="+mn-ea"/>
+                <a:cs typeface="+mn-cs"/>
+              </a:defRPr>
+            </a:lvl2pPr>
+            <a:lvl3pPr marL="1143000" indent="-228600" algn="l" defTabSz="914400" rtl="0" eaLnBrk="1" latinLnBrk="0" hangingPunct="1">
+              <a:lnSpc>
+                <a:spcPct val="90000"/>
+              </a:lnSpc>
+              <a:spcBef>
+                <a:spcPts val="500"/>
+              </a:spcBef>
+              <a:buFont typeface="Arial"/>
+              <a:buChar char="•"/>
+              <a:defRPr sz="2000" kern="1200">
+                <a:solidFill>
+                  <a:srgbClr val="00E2FF"/>
+                </a:solidFill>
+                <a:latin typeface="+mn-lt"/>
+                <a:ea typeface="+mn-ea"/>
+                <a:cs typeface="+mn-cs"/>
+              </a:defRPr>
+            </a:lvl3pPr>
+            <a:lvl4pPr marL="1600200" indent="-228600" algn="l" defTabSz="914400" rtl="0" eaLnBrk="1" latinLnBrk="0" hangingPunct="1">
+              <a:lnSpc>
+                <a:spcPct val="90000"/>
+              </a:lnSpc>
+              <a:spcBef>
+                <a:spcPts val="500"/>
+              </a:spcBef>
+              <a:buFont typeface="Arial"/>
+              <a:buChar char="•"/>
+              <a:defRPr sz="1800" kern="1200">
+                <a:solidFill>
+                  <a:srgbClr val="00E2FF"/>
+                </a:solidFill>
+                <a:latin typeface="+mn-lt"/>
+                <a:ea typeface="+mn-ea"/>
+                <a:cs typeface="+mn-cs"/>
+              </a:defRPr>
+            </a:lvl4pPr>
+            <a:lvl5pPr marL="2057400" indent="-228600" algn="l" defTabSz="914400" rtl="0" eaLnBrk="1" latinLnBrk="0" hangingPunct="1">
+              <a:lnSpc>
+                <a:spcPct val="90000"/>
+              </a:lnSpc>
+              <a:spcBef>
+                <a:spcPts val="500"/>
+              </a:spcBef>
+              <a:buFont typeface="Arial"/>
+              <a:buChar char="•"/>
+              <a:defRPr sz="1800" kern="1200">
+                <a:solidFill>
+                  <a:srgbClr val="00E2FF"/>
+                </a:solidFill>
+                <a:latin typeface="+mn-lt"/>
+                <a:ea typeface="+mn-ea"/>
+                <a:cs typeface="+mn-cs"/>
+              </a:defRPr>
+            </a:lvl5pPr>
+            <a:lvl6pPr marL="2514600" indent="-228600" algn="l" defTabSz="914400" rtl="0" eaLnBrk="1" latinLnBrk="0" hangingPunct="1">
+              <a:lnSpc>
+                <a:spcPct val="90000"/>
+              </a:lnSpc>
+              <a:spcBef>
+                <a:spcPts val="500"/>
+              </a:spcBef>
+              <a:buFont typeface="Arial"/>
+              <a:buChar char="•"/>
+              <a:defRPr sz="1800" kern="1200">
+                <a:solidFill>
+                  <a:schemeClr val="tx1"/>
+                </a:solidFill>
+                <a:latin typeface="+mn-lt"/>
+                <a:ea typeface="+mn-ea"/>
+                <a:cs typeface="+mn-cs"/>
+              </a:defRPr>
+            </a:lvl6pPr>
+            <a:lvl7pPr marL="2971800" indent="-228600" algn="l" defTabSz="914400" rtl="0" eaLnBrk="1" latinLnBrk="0" hangingPunct="1">
+              <a:lnSpc>
+                <a:spcPct val="90000"/>
+              </a:lnSpc>
+              <a:spcBef>
+                <a:spcPts val="500"/>
+              </a:spcBef>
+              <a:buFont typeface="Arial"/>
+              <a:buChar char="•"/>
+              <a:defRPr sz="1800" kern="1200">
+                <a:solidFill>
+                  <a:schemeClr val="tx1"/>
+                </a:solidFill>
+                <a:latin typeface="+mn-lt"/>
+                <a:ea typeface="+mn-ea"/>
+                <a:cs typeface="+mn-cs"/>
+              </a:defRPr>
+            </a:lvl7pPr>
+            <a:lvl8pPr marL="3429000" indent="-228600" algn="l" defTabSz="914400" rtl="0" eaLnBrk="1" latinLnBrk="0" hangingPunct="1">
+              <a:lnSpc>
+                <a:spcPct val="90000"/>
+              </a:lnSpc>
+              <a:spcBef>
+                <a:spcPts val="500"/>
+              </a:spcBef>
+              <a:buFont typeface="Arial"/>
+              <a:buChar char="•"/>
+              <a:defRPr sz="1800" kern="1200">
+                <a:solidFill>
+                  <a:schemeClr val="tx1"/>
+                </a:solidFill>
+                <a:latin typeface="+mn-lt"/>
+                <a:ea typeface="+mn-ea"/>
+                <a:cs typeface="+mn-cs"/>
+              </a:defRPr>
+            </a:lvl8pPr>
+            <a:lvl9pPr marL="3886200" indent="-228600" algn="l" defTabSz="914400" rtl="0" eaLnBrk="1" latinLnBrk="0" hangingPunct="1">
+              <a:lnSpc>
+                <a:spcPct val="90000"/>
+              </a:lnSpc>
+              <a:spcBef>
+                <a:spcPts val="500"/>
+              </a:spcBef>
+              <a:buFont typeface="Arial"/>
+              <a:buChar char="•"/>
+              <a:defRPr sz="1800" kern="1200">
+                <a:solidFill>
+                  <a:schemeClr val="tx1"/>
+                </a:solidFill>
+                <a:latin typeface="+mn-lt"/>
+                <a:ea typeface="+mn-ea"/>
+                <a:cs typeface="+mn-cs"/>
+              </a:defRPr>
+            </a:lvl9pPr>
+          </a:lstStyle>
+          <a:p>
+            <a:r>
+              <a:rPr lang="en-IT" dirty="0">
+                <a:latin typeface="Arial"/>
+                <a:cs typeface="Arial"/>
+              </a:rPr>
+              <a:t>Yes, it's a demo</a:t>
+            </a:r>
+            <a:endParaRPr lang="en-US" dirty="0"/>
+          </a:p>
+        </p:txBody>
+      </p:sp>
+    </p:spTree>
+    <p:extLst>
+      <p:ext uri="{BB962C8B-B14F-4D97-AF65-F5344CB8AC3E}">
+        <p14:creationId xmlns:p14="http://schemas.microsoft.com/office/powerpoint/2010/main" val="1577633904"/>
+      </p:ext>
+    </p:extLst>
+  </p:cSld>
+  <p:clrMapOvr>
+    <a:masterClrMapping/>
+  </p:clrMapOvr>
+  <p:timing>
+    <p:tnLst>
+      <p:par>
+        <p:cTn id="1" dur="indefinite" restart="never" nodeType="tmRoot">
+          <p:childTnLst>
+            <p:seq concurrent="1" nextAc="seek">
+              <p:cTn id="2" dur="indefinite" nodeType="mainSeq">
+                <p:childTnLst>
+                  <p:par>
+                    <p:cTn id="3" fill="hold">
+                      <p:stCondLst>
+                        <p:cond delay="indefinite"/>
+                      </p:stCondLst>
+                      <p:childTnLst>
+                        <p:par>
+                          <p:cTn id="4" fill="hold">
+                            <p:stCondLst>
+                              <p:cond delay="0"/>
+                            </p:stCondLst>
+                            <p:childTnLst>
+                              <p:par>
+                                <p:cTn id="5" presetID="42" presetClass="entr" presetSubtype="0" fill="hold" grpId="0" nodeType="clickEffect">
+                                  <p:stCondLst>
+                                    <p:cond delay="0"/>
+                                  </p:stCondLst>
+                                  <p:childTnLst>
+                                    <p:set>
+                                      <p:cBhvr>
+                                        <p:cTn id="6" dur="1" fill="hold">
+                                          <p:stCondLst>
+                                            <p:cond delay="0"/>
+                                          </p:stCondLst>
+                                        </p:cTn>
+                                        <p:tgtEl>
+                                          <p:spTgt spid="3"/>
+                                        </p:tgtEl>
+                                        <p:attrNameLst>
+                                          <p:attrName>style.visibility</p:attrName>
+                                        </p:attrNameLst>
+                                      </p:cBhvr>
+                                      <p:to>
+                                        <p:strVal val="visible"/>
+                                      </p:to>
+                                    </p:set>
+                                    <p:animEffect transition="in" filter="fade">
+                                      <p:cBhvr>
+                                        <p:cTn id="7" dur="1000"/>
+                                        <p:tgtEl>
+                                          <p:spTgt spid="3"/>
+                                        </p:tgtEl>
+                                      </p:cBhvr>
+                                    </p:animEffect>
+                                    <p:anim calcmode="lin" valueType="num">
+                                      <p:cBhvr>
+                                        <p:cTn id="8" dur="1000" fill="hold"/>
+                                        <p:tgtEl>
+                                          <p:spTgt spid="3"/>
+                                        </p:tgtEl>
+                                        <p:attrNameLst>
+                                          <p:attrName>ppt_x</p:attrName>
+                                        </p:attrNameLst>
+                                      </p:cBhvr>
+                                      <p:tavLst>
+                                        <p:tav tm="0">
+                                          <p:val>
+                                            <p:strVal val="#ppt_x"/>
+                                          </p:val>
+                                        </p:tav>
+                                        <p:tav tm="100000">
+                                          <p:val>
+                                            <p:strVal val="#ppt_x"/>
+                                          </p:val>
+                                        </p:tav>
+                                      </p:tavLst>
+                                    </p:anim>
+                                    <p:anim calcmode="lin" valueType="num">
+                                      <p:cBhvr>
+                                        <p:cTn id="9" dur="1000" fill="hold"/>
+                                        <p:tgtEl>
+                                          <p:spTgt spid="3"/>
+                                        </p:tgtEl>
+                                        <p:attrNameLst>
+                                          <p:attrName>ppt_y</p:attrName>
+                                        </p:attrNameLst>
+                                      </p:cBhvr>
+                                      <p:tavLst>
+                                        <p:tav tm="0">
+                                          <p:val>
+                                            <p:strVal val="#ppt_y+.1"/>
+                                          </p:val>
+                                        </p:tav>
+                                        <p:tav tm="100000">
+                                          <p:val>
+                                            <p:strVal val="#ppt_y"/>
+                                          </p:val>
+                                        </p:tav>
+                                      </p:tavLst>
+                                    </p:anim>
+                                  </p:childTnLst>
+                                </p:cTn>
+                              </p:par>
+                            </p:childTnLst>
+                          </p:cTn>
+                        </p:par>
+                      </p:childTnLst>
+                    </p:cTn>
+                  </p:par>
+                </p:childTnLst>
+              </p:cTn>
+              <p:prevCondLst>
+                <p:cond evt="onPrev" delay="0">
+                  <p:tgtEl>
+                    <p:sldTgt/>
+                  </p:tgtEl>
+                </p:cond>
+              </p:prevCondLst>
+              <p:nextCondLst>
+                <p:cond evt="onNext" delay="0">
+                  <p:tgtEl>
+                    <p:sldTgt/>
+                  </p:tgtEl>
+                </p:cond>
+              </p:nextCondLst>
+            </p:seq>
+          </p:childTnLst>
+        </p:cTn>
+      </p:par>
+    </p:tnLst>
+    <p:bldLst>
+      <p:bldP spid="3" grpId="0"/>
+    </p:bldLst>
+  </p:timing>
+</p:sld>
+</file>
+
+<file path=ppt/slides/slide11.xml><?xml version="1.0" encoding="utf-8"?>
+<p:sld xmlns:a="http://schemas.openxmlformats.org/drawingml/2006/main" xmlns:r="http://schemas.openxmlformats.org/officeDocument/2006/relationships" xmlns:p="http://schemas.openxmlformats.org/presentationml/2006/main">
+  <p:cSld>
     <p:spTree>
       <p:nvGrpSpPr>
         <p:cNvPr id="1" name="">
@@ -7434,10 +8227,168 @@
   <p:clrMapOvr>
     <a:masterClrMapping/>
   </p:clrMapOvr>
+  <p:timing>
+    <p:tnLst>
+      <p:par>
+        <p:cTn id="1" dur="indefinite" restart="never" nodeType="tmRoot">
+          <p:childTnLst>
+            <p:seq concurrent="1" nextAc="seek">
+              <p:cTn id="2" dur="indefinite" nodeType="mainSeq">
+                <p:childTnLst>
+                  <p:par>
+                    <p:cTn id="3" fill="hold">
+                      <p:stCondLst>
+                        <p:cond delay="indefinite"/>
+                        <p:cond evt="onBegin" delay="0">
+                          <p:tn val="2"/>
+                        </p:cond>
+                      </p:stCondLst>
+                      <p:childTnLst>
+                        <p:par>
+                          <p:cTn id="4" fill="hold">
+                            <p:stCondLst>
+                              <p:cond delay="0"/>
+                            </p:stCondLst>
+                            <p:childTnLst>
+                              <p:par>
+                                <p:cTn id="5" presetID="9" presetClass="entr" presetSubtype="0" fill="hold" grpId="0" nodeType="afterEffect">
+                                  <p:stCondLst>
+                                    <p:cond delay="0"/>
+                                  </p:stCondLst>
+                                  <p:childTnLst>
+                                    <p:set>
+                                      <p:cBhvr>
+                                        <p:cTn id="6" dur="1" fill="hold">
+                                          <p:stCondLst>
+                                            <p:cond delay="0"/>
+                                          </p:stCondLst>
+                                        </p:cTn>
+                                        <p:tgtEl>
+                                          <p:spTgt spid="3">
+                                            <p:txEl>
+                                              <p:pRg st="0" end="0"/>
+                                            </p:txEl>
+                                          </p:spTgt>
+                                        </p:tgtEl>
+                                        <p:attrNameLst>
+                                          <p:attrName>style.visibility</p:attrName>
+                                        </p:attrNameLst>
+                                      </p:cBhvr>
+                                      <p:to>
+                                        <p:strVal val="visible"/>
+                                      </p:to>
+                                    </p:set>
+                                    <p:animEffect transition="in" filter="dissolve">
+                                      <p:cBhvr>
+                                        <p:cTn id="7" dur="500"/>
+                                        <p:tgtEl>
+                                          <p:spTgt spid="3">
+                                            <p:txEl>
+                                              <p:pRg st="0" end="0"/>
+                                            </p:txEl>
+                                          </p:spTgt>
+                                        </p:tgtEl>
+                                      </p:cBhvr>
+                                    </p:animEffect>
+                                  </p:childTnLst>
+                                </p:cTn>
+                              </p:par>
+                            </p:childTnLst>
+                          </p:cTn>
+                        </p:par>
+                      </p:childTnLst>
+                    </p:cTn>
+                  </p:par>
+                  <p:par>
+                    <p:cTn id="8" fill="hold">
+                      <p:stCondLst>
+                        <p:cond delay="indefinite"/>
+                      </p:stCondLst>
+                      <p:childTnLst>
+                        <p:par>
+                          <p:cTn id="9" fill="hold">
+                            <p:stCondLst>
+                              <p:cond delay="0"/>
+                            </p:stCondLst>
+                            <p:childTnLst>
+                              <p:par>
+                                <p:cTn id="10" presetID="9" presetClass="entr" presetSubtype="0" fill="hold" grpId="0" nodeType="clickEffect">
+                                  <p:stCondLst>
+                                    <p:cond delay="0"/>
+                                  </p:stCondLst>
+                                  <p:childTnLst>
+                                    <p:set>
+                                      <p:cBhvr>
+                                        <p:cTn id="11" dur="1" fill="hold">
+                                          <p:stCondLst>
+                                            <p:cond delay="0"/>
+                                          </p:stCondLst>
+                                        </p:cTn>
+                                        <p:tgtEl>
+                                          <p:spTgt spid="3">
+                                            <p:txEl>
+                                              <p:pRg st="4" end="4"/>
+                                            </p:txEl>
+                                          </p:spTgt>
+                                        </p:tgtEl>
+                                        <p:attrNameLst>
+                                          <p:attrName>style.visibility</p:attrName>
+                                        </p:attrNameLst>
+                                      </p:cBhvr>
+                                      <p:to>
+                                        <p:strVal val="visible"/>
+                                      </p:to>
+                                    </p:set>
+                                    <p:animEffect transition="in" filter="dissolve">
+                                      <p:cBhvr>
+                                        <p:cTn id="12" dur="500"/>
+                                        <p:tgtEl>
+                                          <p:spTgt spid="3">
+                                            <p:txEl>
+                                              <p:pRg st="4" end="4"/>
+                                            </p:txEl>
+                                          </p:spTgt>
+                                        </p:tgtEl>
+                                      </p:cBhvr>
+                                    </p:animEffect>
+                                  </p:childTnLst>
+                                </p:cTn>
+                              </p:par>
+                            </p:childTnLst>
+                          </p:cTn>
+                        </p:par>
+                      </p:childTnLst>
+                    </p:cTn>
+                  </p:par>
+                </p:childTnLst>
+              </p:cTn>
+              <p:prevCondLst>
+                <p:cond evt="onPrev" delay="0">
+                  <p:tgtEl>
+                    <p:sldTgt/>
+                  </p:tgtEl>
+                </p:cond>
+              </p:prevCondLst>
+              <p:nextCondLst>
+                <p:cond evt="onNext" delay="0">
+                  <p:tgtEl>
+                    <p:sldTgt/>
+                  </p:tgtEl>
+                </p:cond>
+              </p:nextCondLst>
+            </p:seq>
+          </p:childTnLst>
+        </p:cTn>
+      </p:par>
+    </p:tnLst>
+    <p:bldLst>
+      <p:bldP spid="3" grpId="0" uiExpand="1" build="p"/>
+    </p:bldLst>
+  </p:timing>
 </p:sld>
 </file>
 
-<file path=ppt/slides/slide11.xml><?xml version="1.0" encoding="utf-8"?>
+<file path=ppt/slides/slide12.xml><?xml version="1.0" encoding="utf-8"?>
 <p:sld xmlns:a="http://schemas.openxmlformats.org/drawingml/2006/main" xmlns:r="http://schemas.openxmlformats.org/officeDocument/2006/relationships" xmlns:p="http://schemas.openxmlformats.org/presentationml/2006/main">
   <p:cSld>
     <p:bg>
@@ -7714,10 +8665,10 @@
       </p:sp>
       <p:sp>
         <p:nvSpPr>
-          <p:cNvPr id="2" name="Text Placeholder 3">
+          <p:cNvPr id="3" name="Text Placeholder 3">
             <a:extLst>
               <a:ext uri="{FF2B5EF4-FFF2-40B4-BE49-F238E27FC236}">
-                <a16:creationId xmlns:a16="http://schemas.microsoft.com/office/drawing/2014/main" id="{AFAEDE67-5200-687D-2622-25016CB5F05D}"/>
+                <a16:creationId xmlns:a16="http://schemas.microsoft.com/office/drawing/2014/main" id="{9B02A1DD-21CC-F8E3-336A-34E94A730DAC}"/>
               </a:ext>
             </a:extLst>
           </p:cNvPr>
@@ -7923,10 +8874,142 @@
   <p:clrMapOvr>
     <a:masterClrMapping/>
   </p:clrMapOvr>
+  <p:timing>
+    <p:tnLst>
+      <p:par>
+        <p:cTn id="1" dur="indefinite" restart="never" nodeType="tmRoot">
+          <p:childTnLst>
+            <p:seq concurrent="1" nextAc="seek">
+              <p:cTn id="2" dur="indefinite" nodeType="mainSeq">
+                <p:childTnLst>
+                  <p:par>
+                    <p:cTn id="3" fill="hold">
+                      <p:stCondLst>
+                        <p:cond delay="indefinite"/>
+                      </p:stCondLst>
+                      <p:childTnLst>
+                        <p:par>
+                          <p:cTn id="4" fill="hold">
+                            <p:stCondLst>
+                              <p:cond delay="0"/>
+                            </p:stCondLst>
+                            <p:childTnLst>
+                              <p:par>
+                                <p:cTn id="5" presetID="42" presetClass="entr" presetSubtype="0" fill="hold" grpId="0" nodeType="clickEffect">
+                                  <p:stCondLst>
+                                    <p:cond delay="0"/>
+                                  </p:stCondLst>
+                                  <p:childTnLst>
+                                    <p:set>
+                                      <p:cBhvr>
+                                        <p:cTn id="6" dur="1" fill="hold">
+                                          <p:stCondLst>
+                                            <p:cond delay="0"/>
+                                          </p:stCondLst>
+                                        </p:cTn>
+                                        <p:tgtEl>
+                                          <p:spTgt spid="3"/>
+                                        </p:tgtEl>
+                                        <p:attrNameLst>
+                                          <p:attrName>style.visibility</p:attrName>
+                                        </p:attrNameLst>
+                                      </p:cBhvr>
+                                      <p:to>
+                                        <p:strVal val="visible"/>
+                                      </p:to>
+                                    </p:set>
+                                    <p:animEffect transition="in" filter="fade">
+                                      <p:cBhvr>
+                                        <p:cTn id="7" dur="1000"/>
+                                        <p:tgtEl>
+                                          <p:spTgt spid="3"/>
+                                        </p:tgtEl>
+                                      </p:cBhvr>
+                                    </p:animEffect>
+                                    <p:anim calcmode="lin" valueType="num">
+                                      <p:cBhvr>
+                                        <p:cTn id="8" dur="1000" fill="hold"/>
+                                        <p:tgtEl>
+                                          <p:spTgt spid="3"/>
+                                        </p:tgtEl>
+                                        <p:attrNameLst>
+                                          <p:attrName>ppt_x</p:attrName>
+                                        </p:attrNameLst>
+                                      </p:cBhvr>
+                                      <p:tavLst>
+                                        <p:tav tm="0">
+                                          <p:val>
+                                            <p:strVal val="#ppt_x"/>
+                                          </p:val>
+                                        </p:tav>
+                                        <p:tav tm="100000">
+                                          <p:val>
+                                            <p:strVal val="#ppt_x"/>
+                                          </p:val>
+                                        </p:tav>
+                                      </p:tavLst>
+                                    </p:anim>
+                                    <p:anim calcmode="lin" valueType="num">
+                                      <p:cBhvr>
+                                        <p:cTn id="9" dur="1000" fill="hold"/>
+                                        <p:tgtEl>
+                                          <p:spTgt spid="3"/>
+                                        </p:tgtEl>
+                                        <p:attrNameLst>
+                                          <p:attrName>ppt_y</p:attrName>
+                                        </p:attrNameLst>
+                                      </p:cBhvr>
+                                      <p:tavLst>
+                                        <p:tav tm="0">
+                                          <p:val>
+                                            <p:strVal val="#ppt_y+.1"/>
+                                          </p:val>
+                                        </p:tav>
+                                        <p:tav tm="100000">
+                                          <p:val>
+                                            <p:strVal val="#ppt_y"/>
+                                          </p:val>
+                                        </p:tav>
+                                      </p:tavLst>
+                                    </p:anim>
+                                  </p:childTnLst>
+                                </p:cTn>
+                              </p:par>
+                            </p:childTnLst>
+                          </p:cTn>
+                        </p:par>
+                      </p:childTnLst>
+                    </p:cTn>
+                  </p:par>
+                </p:childTnLst>
+              </p:cTn>
+              <p:prevCondLst>
+                <p:cond evt="onPrev" delay="0">
+                  <p:tgtEl>
+                    <p:sldTgt/>
+                  </p:tgtEl>
+                </p:cond>
+              </p:prevCondLst>
+              <p:nextCondLst>
+                <p:cond evt="onNext" delay="0">
+                  <p:tgtEl>
+                    <p:sldTgt/>
+                  </p:tgtEl>
+                </p:cond>
+              </p:nextCondLst>
+            </p:seq>
+          </p:childTnLst>
+        </p:cTn>
+      </p:par>
+    </p:tnLst>
+    <p:bldLst>
+      <p:bldP spid="3" grpId="0"/>
+    </p:bldLst>
+  </p:timing>
 </p:sld>
 </file>
 
-<file path=ppt/slides/slide12.xml><?xml version="1.0" encoding="utf-8"?>
+<file path=ppt/slides/slide13.xml><?xml version="1.0" encoding="utf-8"?>
 <p:sld xmlns:a="http://schemas.openxmlformats.org/drawingml/2006/main" xmlns:r="http://schemas.openxmlformats.org/officeDocument/2006/relationships" xmlns:p="http://schemas.openxmlformats.org/presentationml/2006/main">
   <p:cSld>
     <p:spTree>
@@ -8052,10 +9135,168 @@
   <p:clrMapOvr>
     <a:masterClrMapping/>
   </p:clrMapOvr>
+  <p:timing>
+    <p:tnLst>
+      <p:par>
+        <p:cTn id="1" dur="indefinite" restart="never" nodeType="tmRoot">
+          <p:childTnLst>
+            <p:seq concurrent="1" nextAc="seek">
+              <p:cTn id="2" dur="indefinite" nodeType="mainSeq">
+                <p:childTnLst>
+                  <p:par>
+                    <p:cTn id="3" fill="hold">
+                      <p:stCondLst>
+                        <p:cond delay="indefinite"/>
+                        <p:cond evt="onBegin" delay="0">
+                          <p:tn val="2"/>
+                        </p:cond>
+                      </p:stCondLst>
+                      <p:childTnLst>
+                        <p:par>
+                          <p:cTn id="4" fill="hold">
+                            <p:stCondLst>
+                              <p:cond delay="0"/>
+                            </p:stCondLst>
+                            <p:childTnLst>
+                              <p:par>
+                                <p:cTn id="5" presetID="9" presetClass="entr" presetSubtype="0" fill="hold" grpId="0" nodeType="afterEffect">
+                                  <p:stCondLst>
+                                    <p:cond delay="0"/>
+                                  </p:stCondLst>
+                                  <p:childTnLst>
+                                    <p:set>
+                                      <p:cBhvr>
+                                        <p:cTn id="6" dur="1" fill="hold">
+                                          <p:stCondLst>
+                                            <p:cond delay="0"/>
+                                          </p:stCondLst>
+                                        </p:cTn>
+                                        <p:tgtEl>
+                                          <p:spTgt spid="3">
+                                            <p:txEl>
+                                              <p:pRg st="0" end="0"/>
+                                            </p:txEl>
+                                          </p:spTgt>
+                                        </p:tgtEl>
+                                        <p:attrNameLst>
+                                          <p:attrName>style.visibility</p:attrName>
+                                        </p:attrNameLst>
+                                      </p:cBhvr>
+                                      <p:to>
+                                        <p:strVal val="visible"/>
+                                      </p:to>
+                                    </p:set>
+                                    <p:animEffect transition="in" filter="dissolve">
+                                      <p:cBhvr>
+                                        <p:cTn id="7" dur="500"/>
+                                        <p:tgtEl>
+                                          <p:spTgt spid="3">
+                                            <p:txEl>
+                                              <p:pRg st="0" end="0"/>
+                                            </p:txEl>
+                                          </p:spTgt>
+                                        </p:tgtEl>
+                                      </p:cBhvr>
+                                    </p:animEffect>
+                                  </p:childTnLst>
+                                </p:cTn>
+                              </p:par>
+                            </p:childTnLst>
+                          </p:cTn>
+                        </p:par>
+                      </p:childTnLst>
+                    </p:cTn>
+                  </p:par>
+                  <p:par>
+                    <p:cTn id="8" fill="hold">
+                      <p:stCondLst>
+                        <p:cond delay="indefinite"/>
+                      </p:stCondLst>
+                      <p:childTnLst>
+                        <p:par>
+                          <p:cTn id="9" fill="hold">
+                            <p:stCondLst>
+                              <p:cond delay="0"/>
+                            </p:stCondLst>
+                            <p:childTnLst>
+                              <p:par>
+                                <p:cTn id="10" presetID="9" presetClass="entr" presetSubtype="0" fill="hold" grpId="0" nodeType="clickEffect">
+                                  <p:stCondLst>
+                                    <p:cond delay="0"/>
+                                  </p:stCondLst>
+                                  <p:childTnLst>
+                                    <p:set>
+                                      <p:cBhvr>
+                                        <p:cTn id="11" dur="1" fill="hold">
+                                          <p:stCondLst>
+                                            <p:cond delay="0"/>
+                                          </p:stCondLst>
+                                        </p:cTn>
+                                        <p:tgtEl>
+                                          <p:spTgt spid="3">
+                                            <p:txEl>
+                                              <p:pRg st="4" end="4"/>
+                                            </p:txEl>
+                                          </p:spTgt>
+                                        </p:tgtEl>
+                                        <p:attrNameLst>
+                                          <p:attrName>style.visibility</p:attrName>
+                                        </p:attrNameLst>
+                                      </p:cBhvr>
+                                      <p:to>
+                                        <p:strVal val="visible"/>
+                                      </p:to>
+                                    </p:set>
+                                    <p:animEffect transition="in" filter="dissolve">
+                                      <p:cBhvr>
+                                        <p:cTn id="12" dur="500"/>
+                                        <p:tgtEl>
+                                          <p:spTgt spid="3">
+                                            <p:txEl>
+                                              <p:pRg st="4" end="4"/>
+                                            </p:txEl>
+                                          </p:spTgt>
+                                        </p:tgtEl>
+                                      </p:cBhvr>
+                                    </p:animEffect>
+                                  </p:childTnLst>
+                                </p:cTn>
+                              </p:par>
+                            </p:childTnLst>
+                          </p:cTn>
+                        </p:par>
+                      </p:childTnLst>
+                    </p:cTn>
+                  </p:par>
+                </p:childTnLst>
+              </p:cTn>
+              <p:prevCondLst>
+                <p:cond evt="onPrev" delay="0">
+                  <p:tgtEl>
+                    <p:sldTgt/>
+                  </p:tgtEl>
+                </p:cond>
+              </p:prevCondLst>
+              <p:nextCondLst>
+                <p:cond evt="onNext" delay="0">
+                  <p:tgtEl>
+                    <p:sldTgt/>
+                  </p:tgtEl>
+                </p:cond>
+              </p:nextCondLst>
+            </p:seq>
+          </p:childTnLst>
+        </p:cTn>
+      </p:par>
+    </p:tnLst>
+    <p:bldLst>
+      <p:bldP spid="3" grpId="0" uiExpand="1" build="p"/>
+    </p:bldLst>
+  </p:timing>
 </p:sld>
 </file>
 
-<file path=ppt/slides/slide13.xml><?xml version="1.0" encoding="utf-8"?>
+<file path=ppt/slides/slide14.xml><?xml version="1.0" encoding="utf-8"?>
 <p:sld xmlns:a="http://schemas.openxmlformats.org/drawingml/2006/main" xmlns:r="http://schemas.openxmlformats.org/officeDocument/2006/relationships" xmlns:p="http://schemas.openxmlformats.org/presentationml/2006/main">
   <p:cSld>
     <p:bg>
@@ -8325,10 +9566,10 @@
       </p:sp>
       <p:sp>
         <p:nvSpPr>
-          <p:cNvPr id="2" name="Text Placeholder 3">
+          <p:cNvPr id="3" name="Text Placeholder 3">
             <a:extLst>
               <a:ext uri="{FF2B5EF4-FFF2-40B4-BE49-F238E27FC236}">
-                <a16:creationId xmlns:a16="http://schemas.microsoft.com/office/drawing/2014/main" id="{8B8C9911-1E1C-2726-C60C-26A1C8978B2B}"/>
+                <a16:creationId xmlns:a16="http://schemas.microsoft.com/office/drawing/2014/main" id="{09A89AAB-1781-9F7B-29E6-1B445B099BED}"/>
               </a:ext>
             </a:extLst>
           </p:cNvPr>
@@ -8534,10 +9775,142 @@
   <p:clrMapOvr>
     <a:masterClrMapping/>
   </p:clrMapOvr>
+  <p:timing>
+    <p:tnLst>
+      <p:par>
+        <p:cTn id="1" dur="indefinite" restart="never" nodeType="tmRoot">
+          <p:childTnLst>
+            <p:seq concurrent="1" nextAc="seek">
+              <p:cTn id="2" dur="indefinite" nodeType="mainSeq">
+                <p:childTnLst>
+                  <p:par>
+                    <p:cTn id="3" fill="hold">
+                      <p:stCondLst>
+                        <p:cond delay="indefinite"/>
+                      </p:stCondLst>
+                      <p:childTnLst>
+                        <p:par>
+                          <p:cTn id="4" fill="hold">
+                            <p:stCondLst>
+                              <p:cond delay="0"/>
+                            </p:stCondLst>
+                            <p:childTnLst>
+                              <p:par>
+                                <p:cTn id="5" presetID="42" presetClass="entr" presetSubtype="0" fill="hold" grpId="0" nodeType="clickEffect">
+                                  <p:stCondLst>
+                                    <p:cond delay="0"/>
+                                  </p:stCondLst>
+                                  <p:childTnLst>
+                                    <p:set>
+                                      <p:cBhvr>
+                                        <p:cTn id="6" dur="1" fill="hold">
+                                          <p:stCondLst>
+                                            <p:cond delay="0"/>
+                                          </p:stCondLst>
+                                        </p:cTn>
+                                        <p:tgtEl>
+                                          <p:spTgt spid="3"/>
+                                        </p:tgtEl>
+                                        <p:attrNameLst>
+                                          <p:attrName>style.visibility</p:attrName>
+                                        </p:attrNameLst>
+                                      </p:cBhvr>
+                                      <p:to>
+                                        <p:strVal val="visible"/>
+                                      </p:to>
+                                    </p:set>
+                                    <p:animEffect transition="in" filter="fade">
+                                      <p:cBhvr>
+                                        <p:cTn id="7" dur="1000"/>
+                                        <p:tgtEl>
+                                          <p:spTgt spid="3"/>
+                                        </p:tgtEl>
+                                      </p:cBhvr>
+                                    </p:animEffect>
+                                    <p:anim calcmode="lin" valueType="num">
+                                      <p:cBhvr>
+                                        <p:cTn id="8" dur="1000" fill="hold"/>
+                                        <p:tgtEl>
+                                          <p:spTgt spid="3"/>
+                                        </p:tgtEl>
+                                        <p:attrNameLst>
+                                          <p:attrName>ppt_x</p:attrName>
+                                        </p:attrNameLst>
+                                      </p:cBhvr>
+                                      <p:tavLst>
+                                        <p:tav tm="0">
+                                          <p:val>
+                                            <p:strVal val="#ppt_x"/>
+                                          </p:val>
+                                        </p:tav>
+                                        <p:tav tm="100000">
+                                          <p:val>
+                                            <p:strVal val="#ppt_x"/>
+                                          </p:val>
+                                        </p:tav>
+                                      </p:tavLst>
+                                    </p:anim>
+                                    <p:anim calcmode="lin" valueType="num">
+                                      <p:cBhvr>
+                                        <p:cTn id="9" dur="1000" fill="hold"/>
+                                        <p:tgtEl>
+                                          <p:spTgt spid="3"/>
+                                        </p:tgtEl>
+                                        <p:attrNameLst>
+                                          <p:attrName>ppt_y</p:attrName>
+                                        </p:attrNameLst>
+                                      </p:cBhvr>
+                                      <p:tavLst>
+                                        <p:tav tm="0">
+                                          <p:val>
+                                            <p:strVal val="#ppt_y+.1"/>
+                                          </p:val>
+                                        </p:tav>
+                                        <p:tav tm="100000">
+                                          <p:val>
+                                            <p:strVal val="#ppt_y"/>
+                                          </p:val>
+                                        </p:tav>
+                                      </p:tavLst>
+                                    </p:anim>
+                                  </p:childTnLst>
+                                </p:cTn>
+                              </p:par>
+                            </p:childTnLst>
+                          </p:cTn>
+                        </p:par>
+                      </p:childTnLst>
+                    </p:cTn>
+                  </p:par>
+                </p:childTnLst>
+              </p:cTn>
+              <p:prevCondLst>
+                <p:cond evt="onPrev" delay="0">
+                  <p:tgtEl>
+                    <p:sldTgt/>
+                  </p:tgtEl>
+                </p:cond>
+              </p:prevCondLst>
+              <p:nextCondLst>
+                <p:cond evt="onNext" delay="0">
+                  <p:tgtEl>
+                    <p:sldTgt/>
+                  </p:tgtEl>
+                </p:cond>
+              </p:nextCondLst>
+            </p:seq>
+          </p:childTnLst>
+        </p:cTn>
+      </p:par>
+    </p:tnLst>
+    <p:bldLst>
+      <p:bldP spid="3" grpId="0"/>
+    </p:bldLst>
+  </p:timing>
 </p:sld>
 </file>
 
-<file path=ppt/slides/slide14.xml><?xml version="1.0" encoding="utf-8"?>
+<file path=ppt/slides/slide15.xml><?xml version="1.0" encoding="utf-8"?>
 <p:sld xmlns:a="http://schemas.openxmlformats.org/drawingml/2006/main" xmlns:r="http://schemas.openxmlformats.org/officeDocument/2006/relationships" xmlns:p="http://schemas.openxmlformats.org/presentationml/2006/main">
   <p:cSld>
     <p:bg>
@@ -8648,10 +10021,10 @@
       </p:sp>
       <p:sp>
         <p:nvSpPr>
-          <p:cNvPr id="6" name="Text Placeholder 3">
+          <p:cNvPr id="5" name="Text Placeholder 3">
             <a:extLst>
               <a:ext uri="{FF2B5EF4-FFF2-40B4-BE49-F238E27FC236}">
-                <a16:creationId xmlns:a16="http://schemas.microsoft.com/office/drawing/2014/main" id="{E8ECC6AD-9B07-D75E-274D-44FA4966A596}"/>
+                <a16:creationId xmlns:a16="http://schemas.microsoft.com/office/drawing/2014/main" id="{167204F0-54AD-E552-21A1-004D4A789724}"/>
               </a:ext>
             </a:extLst>
           </p:cNvPr>
@@ -8836,200 +10209,6 @@
             </a:lvl9pPr>
           </a:lstStyle>
           <a:p>
-            <a:endParaRPr lang="en-US" dirty="0"/>
-          </a:p>
-        </p:txBody>
-      </p:sp>
-      <p:sp>
-        <p:nvSpPr>
-          <p:cNvPr id="2" name="Text Placeholder 3">
-            <a:extLst>
-              <a:ext uri="{FF2B5EF4-FFF2-40B4-BE49-F238E27FC236}">
-                <a16:creationId xmlns:a16="http://schemas.microsoft.com/office/drawing/2014/main" id="{3A78386B-8BE4-FA7F-8A45-0993259E0E50}"/>
-              </a:ext>
-            </a:extLst>
-          </p:cNvPr>
-          <p:cNvSpPr txBox="1">
-            <a:spLocks/>
-          </p:cNvSpPr>
-          <p:nvPr/>
-        </p:nvSpPr>
-        <p:spPr>
-          <a:xfrm>
-            <a:off x="6361598" y="4941227"/>
-            <a:ext cx="5445392" cy="849973"/>
-          </a:xfrm>
-          <a:prstGeom prst="rect">
-            <a:avLst/>
-          </a:prstGeom>
-        </p:spPr>
-        <p:txBody>
-          <a:bodyPr lIns="91440" tIns="45720" rIns="91440" bIns="45720" anchor="t"/>
-          <a:lstStyle>
-            <a:lvl1pPr marL="0" indent="0" algn="l" defTabSz="914400" rtl="0" eaLnBrk="1" latinLnBrk="0" hangingPunct="1">
-              <a:lnSpc>
-                <a:spcPct val="90000"/>
-              </a:lnSpc>
-              <a:spcBef>
-                <a:spcPts val="1000"/>
-              </a:spcBef>
-              <a:buFont typeface="Arial"/>
-              <a:buNone/>
-              <a:defRPr sz="4800" b="1" kern="1200">
-                <a:solidFill>
-                  <a:srgbClr val="00C700"/>
-                </a:solidFill>
-                <a:latin typeface="Arial" panose="020B0604020202020204" pitchFamily="34" charset="0"/>
-                <a:ea typeface="+mn-ea"/>
-                <a:cs typeface="Arial" panose="020B0604020202020204" pitchFamily="34" charset="0"/>
-              </a:defRPr>
-            </a:lvl1pPr>
-            <a:lvl2pPr marL="685800" indent="-228600" algn="l" defTabSz="914400" rtl="0" eaLnBrk="1" latinLnBrk="0" hangingPunct="1">
-              <a:lnSpc>
-                <a:spcPct val="90000"/>
-              </a:lnSpc>
-              <a:spcBef>
-                <a:spcPts val="500"/>
-              </a:spcBef>
-              <a:buFont typeface="Arial"/>
-              <a:buChar char="•"/>
-              <a:defRPr sz="2400" kern="1200">
-                <a:solidFill>
-                  <a:srgbClr val="00E2FF"/>
-                </a:solidFill>
-                <a:latin typeface="+mn-lt"/>
-                <a:ea typeface="+mn-ea"/>
-                <a:cs typeface="+mn-cs"/>
-              </a:defRPr>
-            </a:lvl2pPr>
-            <a:lvl3pPr marL="1143000" indent="-228600" algn="l" defTabSz="914400" rtl="0" eaLnBrk="1" latinLnBrk="0" hangingPunct="1">
-              <a:lnSpc>
-                <a:spcPct val="90000"/>
-              </a:lnSpc>
-              <a:spcBef>
-                <a:spcPts val="500"/>
-              </a:spcBef>
-              <a:buFont typeface="Arial"/>
-              <a:buChar char="•"/>
-              <a:defRPr sz="2000" kern="1200">
-                <a:solidFill>
-                  <a:srgbClr val="00E2FF"/>
-                </a:solidFill>
-                <a:latin typeface="+mn-lt"/>
-                <a:ea typeface="+mn-ea"/>
-                <a:cs typeface="+mn-cs"/>
-              </a:defRPr>
-            </a:lvl3pPr>
-            <a:lvl4pPr marL="1600200" indent="-228600" algn="l" defTabSz="914400" rtl="0" eaLnBrk="1" latinLnBrk="0" hangingPunct="1">
-              <a:lnSpc>
-                <a:spcPct val="90000"/>
-              </a:lnSpc>
-              <a:spcBef>
-                <a:spcPts val="500"/>
-              </a:spcBef>
-              <a:buFont typeface="Arial"/>
-              <a:buChar char="•"/>
-              <a:defRPr sz="1800" kern="1200">
-                <a:solidFill>
-                  <a:srgbClr val="00E2FF"/>
-                </a:solidFill>
-                <a:latin typeface="+mn-lt"/>
-                <a:ea typeface="+mn-ea"/>
-                <a:cs typeface="+mn-cs"/>
-              </a:defRPr>
-            </a:lvl4pPr>
-            <a:lvl5pPr marL="2057400" indent="-228600" algn="l" defTabSz="914400" rtl="0" eaLnBrk="1" latinLnBrk="0" hangingPunct="1">
-              <a:lnSpc>
-                <a:spcPct val="90000"/>
-              </a:lnSpc>
-              <a:spcBef>
-                <a:spcPts val="500"/>
-              </a:spcBef>
-              <a:buFont typeface="Arial"/>
-              <a:buChar char="•"/>
-              <a:defRPr sz="1800" kern="1200">
-                <a:solidFill>
-                  <a:srgbClr val="00E2FF"/>
-                </a:solidFill>
-                <a:latin typeface="+mn-lt"/>
-                <a:ea typeface="+mn-ea"/>
-                <a:cs typeface="+mn-cs"/>
-              </a:defRPr>
-            </a:lvl5pPr>
-            <a:lvl6pPr marL="2514600" indent="-228600" algn="l" defTabSz="914400" rtl="0" eaLnBrk="1" latinLnBrk="0" hangingPunct="1">
-              <a:lnSpc>
-                <a:spcPct val="90000"/>
-              </a:lnSpc>
-              <a:spcBef>
-                <a:spcPts val="500"/>
-              </a:spcBef>
-              <a:buFont typeface="Arial"/>
-              <a:buChar char="•"/>
-              <a:defRPr sz="1800" kern="1200">
-                <a:solidFill>
-                  <a:schemeClr val="tx1"/>
-                </a:solidFill>
-                <a:latin typeface="+mn-lt"/>
-                <a:ea typeface="+mn-ea"/>
-                <a:cs typeface="+mn-cs"/>
-              </a:defRPr>
-            </a:lvl6pPr>
-            <a:lvl7pPr marL="2971800" indent="-228600" algn="l" defTabSz="914400" rtl="0" eaLnBrk="1" latinLnBrk="0" hangingPunct="1">
-              <a:lnSpc>
-                <a:spcPct val="90000"/>
-              </a:lnSpc>
-              <a:spcBef>
-                <a:spcPts val="500"/>
-              </a:spcBef>
-              <a:buFont typeface="Arial"/>
-              <a:buChar char="•"/>
-              <a:defRPr sz="1800" kern="1200">
-                <a:solidFill>
-                  <a:schemeClr val="tx1"/>
-                </a:solidFill>
-                <a:latin typeface="+mn-lt"/>
-                <a:ea typeface="+mn-ea"/>
-                <a:cs typeface="+mn-cs"/>
-              </a:defRPr>
-            </a:lvl7pPr>
-            <a:lvl8pPr marL="3429000" indent="-228600" algn="l" defTabSz="914400" rtl="0" eaLnBrk="1" latinLnBrk="0" hangingPunct="1">
-              <a:lnSpc>
-                <a:spcPct val="90000"/>
-              </a:lnSpc>
-              <a:spcBef>
-                <a:spcPts val="500"/>
-              </a:spcBef>
-              <a:buFont typeface="Arial"/>
-              <a:buChar char="•"/>
-              <a:defRPr sz="1800" kern="1200">
-                <a:solidFill>
-                  <a:schemeClr val="tx1"/>
-                </a:solidFill>
-                <a:latin typeface="+mn-lt"/>
-                <a:ea typeface="+mn-ea"/>
-                <a:cs typeface="+mn-cs"/>
-              </a:defRPr>
-            </a:lvl8pPr>
-            <a:lvl9pPr marL="3886200" indent="-228600" algn="l" defTabSz="914400" rtl="0" eaLnBrk="1" latinLnBrk="0" hangingPunct="1">
-              <a:lnSpc>
-                <a:spcPct val="90000"/>
-              </a:lnSpc>
-              <a:spcBef>
-                <a:spcPts val="500"/>
-              </a:spcBef>
-              <a:buFont typeface="Arial"/>
-              <a:buChar char="•"/>
-              <a:defRPr sz="1800" kern="1200">
-                <a:solidFill>
-                  <a:schemeClr val="tx1"/>
-                </a:solidFill>
-                <a:latin typeface="+mn-lt"/>
-                <a:ea typeface="+mn-ea"/>
-                <a:cs typeface="+mn-cs"/>
-              </a:defRPr>
-            </a:lvl9pPr>
-          </a:lstStyle>
-          <a:p>
             <a:r>
               <a:rPr lang="en-IT" dirty="0">
                 <a:latin typeface="Arial"/>
@@ -9051,10 +10230,1290 @@
   <p:clrMapOvr>
     <a:masterClrMapping/>
   </p:clrMapOvr>
+  <p:timing>
+    <p:tnLst>
+      <p:par>
+        <p:cTn id="1" dur="indefinite" restart="never" nodeType="tmRoot">
+          <p:childTnLst>
+            <p:seq concurrent="1" nextAc="seek">
+              <p:cTn id="2" dur="indefinite" nodeType="mainSeq">
+                <p:childTnLst>
+                  <p:par>
+                    <p:cTn id="3" fill="hold">
+                      <p:stCondLst>
+                        <p:cond delay="indefinite"/>
+                      </p:stCondLst>
+                      <p:childTnLst>
+                        <p:par>
+                          <p:cTn id="4" fill="hold">
+                            <p:stCondLst>
+                              <p:cond delay="0"/>
+                            </p:stCondLst>
+                            <p:childTnLst>
+                              <p:par>
+                                <p:cTn id="5" presetID="42" presetClass="entr" presetSubtype="0" fill="hold" grpId="0" nodeType="clickEffect">
+                                  <p:stCondLst>
+                                    <p:cond delay="0"/>
+                                  </p:stCondLst>
+                                  <p:childTnLst>
+                                    <p:set>
+                                      <p:cBhvr>
+                                        <p:cTn id="6" dur="1" fill="hold">
+                                          <p:stCondLst>
+                                            <p:cond delay="0"/>
+                                          </p:stCondLst>
+                                        </p:cTn>
+                                        <p:tgtEl>
+                                          <p:spTgt spid="5"/>
+                                        </p:tgtEl>
+                                        <p:attrNameLst>
+                                          <p:attrName>style.visibility</p:attrName>
+                                        </p:attrNameLst>
+                                      </p:cBhvr>
+                                      <p:to>
+                                        <p:strVal val="visible"/>
+                                      </p:to>
+                                    </p:set>
+                                    <p:animEffect transition="in" filter="fade">
+                                      <p:cBhvr>
+                                        <p:cTn id="7" dur="1000"/>
+                                        <p:tgtEl>
+                                          <p:spTgt spid="5"/>
+                                        </p:tgtEl>
+                                      </p:cBhvr>
+                                    </p:animEffect>
+                                    <p:anim calcmode="lin" valueType="num">
+                                      <p:cBhvr>
+                                        <p:cTn id="8" dur="1000" fill="hold"/>
+                                        <p:tgtEl>
+                                          <p:spTgt spid="5"/>
+                                        </p:tgtEl>
+                                        <p:attrNameLst>
+                                          <p:attrName>ppt_x</p:attrName>
+                                        </p:attrNameLst>
+                                      </p:cBhvr>
+                                      <p:tavLst>
+                                        <p:tav tm="0">
+                                          <p:val>
+                                            <p:strVal val="#ppt_x"/>
+                                          </p:val>
+                                        </p:tav>
+                                        <p:tav tm="100000">
+                                          <p:val>
+                                            <p:strVal val="#ppt_x"/>
+                                          </p:val>
+                                        </p:tav>
+                                      </p:tavLst>
+                                    </p:anim>
+                                    <p:anim calcmode="lin" valueType="num">
+                                      <p:cBhvr>
+                                        <p:cTn id="9" dur="1000" fill="hold"/>
+                                        <p:tgtEl>
+                                          <p:spTgt spid="5"/>
+                                        </p:tgtEl>
+                                        <p:attrNameLst>
+                                          <p:attrName>ppt_y</p:attrName>
+                                        </p:attrNameLst>
+                                      </p:cBhvr>
+                                      <p:tavLst>
+                                        <p:tav tm="0">
+                                          <p:val>
+                                            <p:strVal val="#ppt_y+.1"/>
+                                          </p:val>
+                                        </p:tav>
+                                        <p:tav tm="100000">
+                                          <p:val>
+                                            <p:strVal val="#ppt_y"/>
+                                          </p:val>
+                                        </p:tav>
+                                      </p:tavLst>
+                                    </p:anim>
+                                  </p:childTnLst>
+                                </p:cTn>
+                              </p:par>
+                            </p:childTnLst>
+                          </p:cTn>
+                        </p:par>
+                      </p:childTnLst>
+                    </p:cTn>
+                  </p:par>
+                </p:childTnLst>
+              </p:cTn>
+              <p:prevCondLst>
+                <p:cond evt="onPrev" delay="0">
+                  <p:tgtEl>
+                    <p:sldTgt/>
+                  </p:tgtEl>
+                </p:cond>
+              </p:prevCondLst>
+              <p:nextCondLst>
+                <p:cond evt="onNext" delay="0">
+                  <p:tgtEl>
+                    <p:sldTgt/>
+                  </p:tgtEl>
+                </p:cond>
+              </p:nextCondLst>
+            </p:seq>
+          </p:childTnLst>
+        </p:cTn>
+      </p:par>
+    </p:tnLst>
+    <p:bldLst>
+      <p:bldP spid="5" grpId="0"/>
+    </p:bldLst>
+  </p:timing>
 </p:sld>
 </file>
 
-<file path=ppt/slides/slide15.xml><?xml version="1.0" encoding="utf-8"?>
+<file path=ppt/slides/slide16.xml><?xml version="1.0" encoding="utf-8"?>
+<p:sld xmlns:a="http://schemas.openxmlformats.org/drawingml/2006/main" xmlns:r="http://schemas.openxmlformats.org/officeDocument/2006/relationships" xmlns:p="http://schemas.openxmlformats.org/presentationml/2006/main">
+  <p:cSld>
+    <p:spTree>
+      <p:nvGrpSpPr>
+        <p:cNvPr id="1" name="">
+          <a:extLst>
+            <a:ext uri="{FF2B5EF4-FFF2-40B4-BE49-F238E27FC236}">
+              <a16:creationId xmlns:a16="http://schemas.microsoft.com/office/drawing/2014/main" id="{12938592-25E7-5726-DB11-AF1E9D4C8392}"/>
+            </a:ext>
+          </a:extLst>
+        </p:cNvPr>
+        <p:cNvGrpSpPr/>
+        <p:nvPr/>
+      </p:nvGrpSpPr>
+      <p:grpSpPr>
+        <a:xfrm>
+          <a:off x="0" y="0"/>
+          <a:ext cx="0" cy="0"/>
+          <a:chOff x="0" y="0"/>
+          <a:chExt cx="0" cy="0"/>
+        </a:xfrm>
+      </p:grpSpPr>
+      <p:sp>
+        <p:nvSpPr>
+          <p:cNvPr id="6" name="Title 1">
+            <a:extLst>
+              <a:ext uri="{FF2B5EF4-FFF2-40B4-BE49-F238E27FC236}">
+                <a16:creationId xmlns:a16="http://schemas.microsoft.com/office/drawing/2014/main" id="{BFDFA4E3-A45C-5C8E-C6DC-8D6CC1F97490}"/>
+              </a:ext>
+            </a:extLst>
+          </p:cNvPr>
+          <p:cNvSpPr txBox="1">
+            <a:spLocks/>
+          </p:cNvSpPr>
+          <p:nvPr/>
+        </p:nvSpPr>
+        <p:spPr>
+          <a:xfrm>
+            <a:off x="749749" y="802379"/>
+            <a:ext cx="10728157" cy="725738"/>
+          </a:xfrm>
+          <a:prstGeom prst="rect">
+            <a:avLst/>
+          </a:prstGeom>
+        </p:spPr>
+        <p:txBody>
+          <a:bodyPr/>
+          <a:lstStyle>
+            <a:lvl1pPr algn="l" defTabSz="914400" rtl="0" eaLnBrk="1" latinLnBrk="0" hangingPunct="1">
+              <a:lnSpc>
+                <a:spcPct val="90000"/>
+              </a:lnSpc>
+              <a:spcBef>
+                <a:spcPct val="0"/>
+              </a:spcBef>
+              <a:buNone/>
+              <a:defRPr sz="3200" b="1" kern="1200">
+                <a:solidFill>
+                  <a:srgbClr val="00C700"/>
+                </a:solidFill>
+                <a:latin typeface="Arial" panose="020B0604020202020204" pitchFamily="34" charset="0"/>
+                <a:ea typeface="+mj-ea"/>
+                <a:cs typeface="Arial" panose="020B0604020202020204" pitchFamily="34" charset="0"/>
+              </a:defRPr>
+            </a:lvl1pPr>
+          </a:lstStyle>
+          <a:p>
+            <a:r>
+              <a:rPr lang="it-IT"/>
+              <a:t>Takeaways</a:t>
+            </a:r>
+            <a:endParaRPr lang="en-US" dirty="0"/>
+          </a:p>
+        </p:txBody>
+      </p:sp>
+      <p:sp>
+        <p:nvSpPr>
+          <p:cNvPr id="7" name="Text Placeholder 3">
+            <a:extLst>
+              <a:ext uri="{FF2B5EF4-FFF2-40B4-BE49-F238E27FC236}">
+                <a16:creationId xmlns:a16="http://schemas.microsoft.com/office/drawing/2014/main" id="{0344AC93-8755-D625-0D58-426A5EE12094}"/>
+              </a:ext>
+            </a:extLst>
+          </p:cNvPr>
+          <p:cNvSpPr txBox="1">
+            <a:spLocks/>
+          </p:cNvSpPr>
+          <p:nvPr/>
+        </p:nvSpPr>
+        <p:spPr>
+          <a:xfrm>
+            <a:off x="729947" y="1704329"/>
+            <a:ext cx="10747375" cy="4235450"/>
+          </a:xfrm>
+          <a:prstGeom prst="rect">
+            <a:avLst/>
+          </a:prstGeom>
+        </p:spPr>
+        <p:txBody>
+          <a:bodyPr lIns="91440" tIns="45720" rIns="91440" bIns="45720" anchor="t"/>
+          <a:lstStyle>
+            <a:lvl1pPr marL="228600" indent="-228600" algn="l" defTabSz="914400" rtl="0" eaLnBrk="1" latinLnBrk="0" hangingPunct="1">
+              <a:lnSpc>
+                <a:spcPct val="90000"/>
+              </a:lnSpc>
+              <a:spcBef>
+                <a:spcPts val="1000"/>
+              </a:spcBef>
+              <a:buFont typeface="Arial"/>
+              <a:buChar char="•"/>
+              <a:defRPr sz="2800" kern="1200">
+                <a:solidFill>
+                  <a:schemeClr val="tx1"/>
+                </a:solidFill>
+                <a:latin typeface="Arial" panose="020B0604020202020204" pitchFamily="34" charset="0"/>
+                <a:ea typeface="+mn-ea"/>
+                <a:cs typeface="Arial" panose="020B0604020202020204" pitchFamily="34" charset="0"/>
+              </a:defRPr>
+            </a:lvl1pPr>
+            <a:lvl2pPr marL="685800" indent="-228600" algn="l" defTabSz="914400" rtl="0" eaLnBrk="1" latinLnBrk="0" hangingPunct="1">
+              <a:lnSpc>
+                <a:spcPct val="90000"/>
+              </a:lnSpc>
+              <a:spcBef>
+                <a:spcPts val="500"/>
+              </a:spcBef>
+              <a:buFont typeface="Arial"/>
+              <a:buChar char="•"/>
+              <a:defRPr sz="2400" kern="1200">
+                <a:solidFill>
+                  <a:schemeClr val="tx1"/>
+                </a:solidFill>
+                <a:latin typeface="Arial" panose="020B0604020202020204" pitchFamily="34" charset="0"/>
+                <a:ea typeface="+mn-ea"/>
+                <a:cs typeface="Arial" panose="020B0604020202020204" pitchFamily="34" charset="0"/>
+              </a:defRPr>
+            </a:lvl2pPr>
+            <a:lvl3pPr marL="1143000" indent="-228600" algn="l" defTabSz="914400" rtl="0" eaLnBrk="1" latinLnBrk="0" hangingPunct="1">
+              <a:lnSpc>
+                <a:spcPct val="90000"/>
+              </a:lnSpc>
+              <a:spcBef>
+                <a:spcPts val="500"/>
+              </a:spcBef>
+              <a:buFont typeface="Arial"/>
+              <a:buChar char="•"/>
+              <a:defRPr sz="2000" kern="1200">
+                <a:solidFill>
+                  <a:schemeClr val="tx1"/>
+                </a:solidFill>
+                <a:latin typeface="Arial" panose="020B0604020202020204" pitchFamily="34" charset="0"/>
+                <a:ea typeface="+mn-ea"/>
+                <a:cs typeface="Arial" panose="020B0604020202020204" pitchFamily="34" charset="0"/>
+              </a:defRPr>
+            </a:lvl3pPr>
+            <a:lvl4pPr marL="1600200" indent="-228600" algn="l" defTabSz="914400" rtl="0" eaLnBrk="1" latinLnBrk="0" hangingPunct="1">
+              <a:lnSpc>
+                <a:spcPct val="90000"/>
+              </a:lnSpc>
+              <a:spcBef>
+                <a:spcPts val="500"/>
+              </a:spcBef>
+              <a:buFont typeface="Arial"/>
+              <a:buChar char="•"/>
+              <a:defRPr sz="1800" kern="1200">
+                <a:solidFill>
+                  <a:schemeClr val="tx1"/>
+                </a:solidFill>
+                <a:latin typeface="Arial" panose="020B0604020202020204" pitchFamily="34" charset="0"/>
+                <a:ea typeface="+mn-ea"/>
+                <a:cs typeface="Arial" panose="020B0604020202020204" pitchFamily="34" charset="0"/>
+              </a:defRPr>
+            </a:lvl4pPr>
+            <a:lvl5pPr marL="2057400" indent="-228600" algn="l" defTabSz="914400" rtl="0" eaLnBrk="1" latinLnBrk="0" hangingPunct="1">
+              <a:lnSpc>
+                <a:spcPct val="90000"/>
+              </a:lnSpc>
+              <a:spcBef>
+                <a:spcPts val="500"/>
+              </a:spcBef>
+              <a:buFont typeface="Arial"/>
+              <a:buChar char="•"/>
+              <a:defRPr sz="1800" kern="1200">
+                <a:solidFill>
+                  <a:schemeClr val="tx1"/>
+                </a:solidFill>
+                <a:latin typeface="Arial" panose="020B0604020202020204" pitchFamily="34" charset="0"/>
+                <a:ea typeface="+mn-ea"/>
+                <a:cs typeface="Arial" panose="020B0604020202020204" pitchFamily="34" charset="0"/>
+              </a:defRPr>
+            </a:lvl5pPr>
+            <a:lvl6pPr marL="2514600" indent="-228600" algn="l" defTabSz="914400" rtl="0" eaLnBrk="1" latinLnBrk="0" hangingPunct="1">
+              <a:lnSpc>
+                <a:spcPct val="90000"/>
+              </a:lnSpc>
+              <a:spcBef>
+                <a:spcPts val="500"/>
+              </a:spcBef>
+              <a:buFont typeface="Arial"/>
+              <a:buChar char="•"/>
+              <a:defRPr sz="1800" kern="1200">
+                <a:solidFill>
+                  <a:schemeClr val="tx1"/>
+                </a:solidFill>
+                <a:latin typeface="+mn-lt"/>
+                <a:ea typeface="+mn-ea"/>
+                <a:cs typeface="+mn-cs"/>
+              </a:defRPr>
+            </a:lvl6pPr>
+            <a:lvl7pPr marL="2971800" indent="-228600" algn="l" defTabSz="914400" rtl="0" eaLnBrk="1" latinLnBrk="0" hangingPunct="1">
+              <a:lnSpc>
+                <a:spcPct val="90000"/>
+              </a:lnSpc>
+              <a:spcBef>
+                <a:spcPts val="500"/>
+              </a:spcBef>
+              <a:buFont typeface="Arial"/>
+              <a:buChar char="•"/>
+              <a:defRPr sz="1800" kern="1200">
+                <a:solidFill>
+                  <a:schemeClr val="tx1"/>
+                </a:solidFill>
+                <a:latin typeface="+mn-lt"/>
+                <a:ea typeface="+mn-ea"/>
+                <a:cs typeface="+mn-cs"/>
+              </a:defRPr>
+            </a:lvl7pPr>
+            <a:lvl8pPr marL="3429000" indent="-228600" algn="l" defTabSz="914400" rtl="0" eaLnBrk="1" latinLnBrk="0" hangingPunct="1">
+              <a:lnSpc>
+                <a:spcPct val="90000"/>
+              </a:lnSpc>
+              <a:spcBef>
+                <a:spcPts val="500"/>
+              </a:spcBef>
+              <a:buFont typeface="Arial"/>
+              <a:buChar char="•"/>
+              <a:defRPr sz="1800" kern="1200">
+                <a:solidFill>
+                  <a:schemeClr val="tx1"/>
+                </a:solidFill>
+                <a:latin typeface="+mn-lt"/>
+                <a:ea typeface="+mn-ea"/>
+                <a:cs typeface="+mn-cs"/>
+              </a:defRPr>
+            </a:lvl8pPr>
+            <a:lvl9pPr marL="3886200" indent="-228600" algn="l" defTabSz="914400" rtl="0" eaLnBrk="1" latinLnBrk="0" hangingPunct="1">
+              <a:lnSpc>
+                <a:spcPct val="90000"/>
+              </a:lnSpc>
+              <a:spcBef>
+                <a:spcPts val="500"/>
+              </a:spcBef>
+              <a:buFont typeface="Arial"/>
+              <a:buChar char="•"/>
+              <a:defRPr sz="1800" kern="1200">
+                <a:solidFill>
+                  <a:schemeClr val="tx1"/>
+                </a:solidFill>
+                <a:latin typeface="+mn-lt"/>
+                <a:ea typeface="+mn-ea"/>
+                <a:cs typeface="+mn-cs"/>
+              </a:defRPr>
+            </a:lvl9pPr>
+          </a:lstStyle>
+          <a:p>
+            <a:r>
+              <a:rPr lang="en-US" dirty="0"/>
+              <a:t>Structure your environments</a:t>
+            </a:r>
+          </a:p>
+          <a:p>
+            <a:r>
+              <a:rPr lang="en-US" dirty="0"/>
+              <a:t>Use testing</a:t>
+            </a:r>
+          </a:p>
+          <a:p>
+            <a:pPr lvl="1"/>
+            <a:r>
+              <a:rPr lang="en-US" dirty="0"/>
+              <a:t>It can save lives </a:t>
+            </a:r>
+            <a:r>
+              <a:rPr lang="en-US" dirty="0">
+                <a:sym typeface="Wingdings" pitchFamily="2" charset="2"/>
+              </a:rPr>
+              <a:t></a:t>
+            </a:r>
+          </a:p>
+          <a:p>
+            <a:pPr lvl="1"/>
+            <a:r>
+              <a:rPr lang="en-US" dirty="0">
+                <a:sym typeface="Wingdings" pitchFamily="2" charset="2"/>
+              </a:rPr>
+              <a:t>Devs should not test their own code</a:t>
+            </a:r>
+          </a:p>
+          <a:p>
+            <a:r>
+              <a:rPr lang="en-US" dirty="0">
+                <a:sym typeface="Wingdings" pitchFamily="2" charset="2"/>
+              </a:rPr>
+              <a:t>Source control</a:t>
+            </a:r>
+            <a:endParaRPr lang="en-US" dirty="0"/>
+          </a:p>
+          <a:p>
+            <a:r>
+              <a:rPr lang="en-US" dirty="0"/>
+              <a:t>Automate your pipeline</a:t>
+            </a:r>
+          </a:p>
+          <a:p>
+            <a:pPr lvl="1"/>
+            <a:r>
+              <a:rPr lang="en-US" dirty="0"/>
+              <a:t>Easier for new coworkers</a:t>
+            </a:r>
+          </a:p>
+          <a:p>
+            <a:r>
+              <a:rPr lang="en-US" dirty="0"/>
+              <a:t>!“It works on my machine”</a:t>
+            </a:r>
+          </a:p>
+          <a:p>
+            <a:endParaRPr lang="en-US" dirty="0"/>
+          </a:p>
+        </p:txBody>
+      </p:sp>
+    </p:spTree>
+    <p:extLst>
+      <p:ext uri="{BB962C8B-B14F-4D97-AF65-F5344CB8AC3E}">
+        <p14:creationId xmlns:p14="http://schemas.microsoft.com/office/powerpoint/2010/main" val="351186458"/>
+      </p:ext>
+    </p:extLst>
+  </p:cSld>
+  <p:clrMapOvr>
+    <a:masterClrMapping/>
+  </p:clrMapOvr>
+  <p:timing>
+    <p:tnLst>
+      <p:par>
+        <p:cTn id="1" dur="indefinite" restart="never" nodeType="tmRoot">
+          <p:childTnLst>
+            <p:seq concurrent="1" nextAc="seek">
+              <p:cTn id="2" dur="indefinite" nodeType="mainSeq">
+                <p:childTnLst>
+                  <p:par>
+                    <p:cTn id="3" fill="hold">
+                      <p:stCondLst>
+                        <p:cond delay="indefinite"/>
+                      </p:stCondLst>
+                      <p:childTnLst>
+                        <p:par>
+                          <p:cTn id="4" fill="hold">
+                            <p:stCondLst>
+                              <p:cond delay="0"/>
+                            </p:stCondLst>
+                            <p:childTnLst>
+                              <p:par>
+                                <p:cTn id="5" presetID="2" presetClass="entr" presetSubtype="4" fill="hold" grpId="0" nodeType="clickEffect">
+                                  <p:stCondLst>
+                                    <p:cond delay="0"/>
+                                  </p:stCondLst>
+                                  <p:childTnLst>
+                                    <p:set>
+                                      <p:cBhvr>
+                                        <p:cTn id="6" dur="1" fill="hold">
+                                          <p:stCondLst>
+                                            <p:cond delay="0"/>
+                                          </p:stCondLst>
+                                        </p:cTn>
+                                        <p:tgtEl>
+                                          <p:spTgt spid="7">
+                                            <p:txEl>
+                                              <p:pRg st="0" end="0"/>
+                                            </p:txEl>
+                                          </p:spTgt>
+                                        </p:tgtEl>
+                                        <p:attrNameLst>
+                                          <p:attrName>style.visibility</p:attrName>
+                                        </p:attrNameLst>
+                                      </p:cBhvr>
+                                      <p:to>
+                                        <p:strVal val="visible"/>
+                                      </p:to>
+                                    </p:set>
+                                    <p:anim calcmode="lin" valueType="num">
+                                      <p:cBhvr additive="base">
+                                        <p:cTn id="7" dur="500" fill="hold"/>
+                                        <p:tgtEl>
+                                          <p:spTgt spid="7">
+                                            <p:txEl>
+                                              <p:pRg st="0" end="0"/>
+                                            </p:txEl>
+                                          </p:spTgt>
+                                        </p:tgtEl>
+                                        <p:attrNameLst>
+                                          <p:attrName>ppt_x</p:attrName>
+                                        </p:attrNameLst>
+                                      </p:cBhvr>
+                                      <p:tavLst>
+                                        <p:tav tm="0">
+                                          <p:val>
+                                            <p:strVal val="#ppt_x"/>
+                                          </p:val>
+                                        </p:tav>
+                                        <p:tav tm="100000">
+                                          <p:val>
+                                            <p:strVal val="#ppt_x"/>
+                                          </p:val>
+                                        </p:tav>
+                                      </p:tavLst>
+                                    </p:anim>
+                                    <p:anim calcmode="lin" valueType="num">
+                                      <p:cBhvr additive="base">
+                                        <p:cTn id="8" dur="500" fill="hold"/>
+                                        <p:tgtEl>
+                                          <p:spTgt spid="7">
+                                            <p:txEl>
+                                              <p:pRg st="0" end="0"/>
+                                            </p:txEl>
+                                          </p:spTgt>
+                                        </p:tgtEl>
+                                        <p:attrNameLst>
+                                          <p:attrName>ppt_y</p:attrName>
+                                        </p:attrNameLst>
+                                      </p:cBhvr>
+                                      <p:tavLst>
+                                        <p:tav tm="0">
+                                          <p:val>
+                                            <p:strVal val="1+#ppt_h/2"/>
+                                          </p:val>
+                                        </p:tav>
+                                        <p:tav tm="100000">
+                                          <p:val>
+                                            <p:strVal val="#ppt_y"/>
+                                          </p:val>
+                                        </p:tav>
+                                      </p:tavLst>
+                                    </p:anim>
+                                  </p:childTnLst>
+                                </p:cTn>
+                              </p:par>
+                            </p:childTnLst>
+                          </p:cTn>
+                        </p:par>
+                      </p:childTnLst>
+                    </p:cTn>
+                  </p:par>
+                  <p:par>
+                    <p:cTn id="9" fill="hold">
+                      <p:stCondLst>
+                        <p:cond delay="indefinite"/>
+                      </p:stCondLst>
+                      <p:childTnLst>
+                        <p:par>
+                          <p:cTn id="10" fill="hold">
+                            <p:stCondLst>
+                              <p:cond delay="0"/>
+                            </p:stCondLst>
+                            <p:childTnLst>
+                              <p:par>
+                                <p:cTn id="11" presetID="2" presetClass="entr" presetSubtype="4" fill="hold" grpId="0" nodeType="clickEffect">
+                                  <p:stCondLst>
+                                    <p:cond delay="0"/>
+                                  </p:stCondLst>
+                                  <p:childTnLst>
+                                    <p:set>
+                                      <p:cBhvr>
+                                        <p:cTn id="12" dur="1" fill="hold">
+                                          <p:stCondLst>
+                                            <p:cond delay="0"/>
+                                          </p:stCondLst>
+                                        </p:cTn>
+                                        <p:tgtEl>
+                                          <p:spTgt spid="7">
+                                            <p:txEl>
+                                              <p:pRg st="1" end="1"/>
+                                            </p:txEl>
+                                          </p:spTgt>
+                                        </p:tgtEl>
+                                        <p:attrNameLst>
+                                          <p:attrName>style.visibility</p:attrName>
+                                        </p:attrNameLst>
+                                      </p:cBhvr>
+                                      <p:to>
+                                        <p:strVal val="visible"/>
+                                      </p:to>
+                                    </p:set>
+                                    <p:anim calcmode="lin" valueType="num">
+                                      <p:cBhvr additive="base">
+                                        <p:cTn id="13" dur="500" fill="hold"/>
+                                        <p:tgtEl>
+                                          <p:spTgt spid="7">
+                                            <p:txEl>
+                                              <p:pRg st="1" end="1"/>
+                                            </p:txEl>
+                                          </p:spTgt>
+                                        </p:tgtEl>
+                                        <p:attrNameLst>
+                                          <p:attrName>ppt_x</p:attrName>
+                                        </p:attrNameLst>
+                                      </p:cBhvr>
+                                      <p:tavLst>
+                                        <p:tav tm="0">
+                                          <p:val>
+                                            <p:strVal val="#ppt_x"/>
+                                          </p:val>
+                                        </p:tav>
+                                        <p:tav tm="100000">
+                                          <p:val>
+                                            <p:strVal val="#ppt_x"/>
+                                          </p:val>
+                                        </p:tav>
+                                      </p:tavLst>
+                                    </p:anim>
+                                    <p:anim calcmode="lin" valueType="num">
+                                      <p:cBhvr additive="base">
+                                        <p:cTn id="14" dur="500" fill="hold"/>
+                                        <p:tgtEl>
+                                          <p:spTgt spid="7">
+                                            <p:txEl>
+                                              <p:pRg st="1" end="1"/>
+                                            </p:txEl>
+                                          </p:spTgt>
+                                        </p:tgtEl>
+                                        <p:attrNameLst>
+                                          <p:attrName>ppt_y</p:attrName>
+                                        </p:attrNameLst>
+                                      </p:cBhvr>
+                                      <p:tavLst>
+                                        <p:tav tm="0">
+                                          <p:val>
+                                            <p:strVal val="1+#ppt_h/2"/>
+                                          </p:val>
+                                        </p:tav>
+                                        <p:tav tm="100000">
+                                          <p:val>
+                                            <p:strVal val="#ppt_y"/>
+                                          </p:val>
+                                        </p:tav>
+                                      </p:tavLst>
+                                    </p:anim>
+                                  </p:childTnLst>
+                                </p:cTn>
+                              </p:par>
+                              <p:par>
+                                <p:cTn id="15" presetID="2" presetClass="entr" presetSubtype="4" fill="hold" grpId="0" nodeType="withEffect">
+                                  <p:stCondLst>
+                                    <p:cond delay="0"/>
+                                  </p:stCondLst>
+                                  <p:childTnLst>
+                                    <p:set>
+                                      <p:cBhvr>
+                                        <p:cTn id="16" dur="1" fill="hold">
+                                          <p:stCondLst>
+                                            <p:cond delay="0"/>
+                                          </p:stCondLst>
+                                        </p:cTn>
+                                        <p:tgtEl>
+                                          <p:spTgt spid="7">
+                                            <p:txEl>
+                                              <p:pRg st="2" end="2"/>
+                                            </p:txEl>
+                                          </p:spTgt>
+                                        </p:tgtEl>
+                                        <p:attrNameLst>
+                                          <p:attrName>style.visibility</p:attrName>
+                                        </p:attrNameLst>
+                                      </p:cBhvr>
+                                      <p:to>
+                                        <p:strVal val="visible"/>
+                                      </p:to>
+                                    </p:set>
+                                    <p:anim calcmode="lin" valueType="num">
+                                      <p:cBhvr additive="base">
+                                        <p:cTn id="17" dur="500" fill="hold"/>
+                                        <p:tgtEl>
+                                          <p:spTgt spid="7">
+                                            <p:txEl>
+                                              <p:pRg st="2" end="2"/>
+                                            </p:txEl>
+                                          </p:spTgt>
+                                        </p:tgtEl>
+                                        <p:attrNameLst>
+                                          <p:attrName>ppt_x</p:attrName>
+                                        </p:attrNameLst>
+                                      </p:cBhvr>
+                                      <p:tavLst>
+                                        <p:tav tm="0">
+                                          <p:val>
+                                            <p:strVal val="#ppt_x"/>
+                                          </p:val>
+                                        </p:tav>
+                                        <p:tav tm="100000">
+                                          <p:val>
+                                            <p:strVal val="#ppt_x"/>
+                                          </p:val>
+                                        </p:tav>
+                                      </p:tavLst>
+                                    </p:anim>
+                                    <p:anim calcmode="lin" valueType="num">
+                                      <p:cBhvr additive="base">
+                                        <p:cTn id="18" dur="500" fill="hold"/>
+                                        <p:tgtEl>
+                                          <p:spTgt spid="7">
+                                            <p:txEl>
+                                              <p:pRg st="2" end="2"/>
+                                            </p:txEl>
+                                          </p:spTgt>
+                                        </p:tgtEl>
+                                        <p:attrNameLst>
+                                          <p:attrName>ppt_y</p:attrName>
+                                        </p:attrNameLst>
+                                      </p:cBhvr>
+                                      <p:tavLst>
+                                        <p:tav tm="0">
+                                          <p:val>
+                                            <p:strVal val="1+#ppt_h/2"/>
+                                          </p:val>
+                                        </p:tav>
+                                        <p:tav tm="100000">
+                                          <p:val>
+                                            <p:strVal val="#ppt_y"/>
+                                          </p:val>
+                                        </p:tav>
+                                      </p:tavLst>
+                                    </p:anim>
+                                  </p:childTnLst>
+                                </p:cTn>
+                              </p:par>
+                              <p:par>
+                                <p:cTn id="19" presetID="2" presetClass="entr" presetSubtype="4" fill="hold" grpId="0" nodeType="withEffect">
+                                  <p:stCondLst>
+                                    <p:cond delay="0"/>
+                                  </p:stCondLst>
+                                  <p:childTnLst>
+                                    <p:set>
+                                      <p:cBhvr>
+                                        <p:cTn id="20" dur="1" fill="hold">
+                                          <p:stCondLst>
+                                            <p:cond delay="0"/>
+                                          </p:stCondLst>
+                                        </p:cTn>
+                                        <p:tgtEl>
+                                          <p:spTgt spid="7">
+                                            <p:txEl>
+                                              <p:pRg st="3" end="3"/>
+                                            </p:txEl>
+                                          </p:spTgt>
+                                        </p:tgtEl>
+                                        <p:attrNameLst>
+                                          <p:attrName>style.visibility</p:attrName>
+                                        </p:attrNameLst>
+                                      </p:cBhvr>
+                                      <p:to>
+                                        <p:strVal val="visible"/>
+                                      </p:to>
+                                    </p:set>
+                                    <p:anim calcmode="lin" valueType="num">
+                                      <p:cBhvr additive="base">
+                                        <p:cTn id="21" dur="500" fill="hold"/>
+                                        <p:tgtEl>
+                                          <p:spTgt spid="7">
+                                            <p:txEl>
+                                              <p:pRg st="3" end="3"/>
+                                            </p:txEl>
+                                          </p:spTgt>
+                                        </p:tgtEl>
+                                        <p:attrNameLst>
+                                          <p:attrName>ppt_x</p:attrName>
+                                        </p:attrNameLst>
+                                      </p:cBhvr>
+                                      <p:tavLst>
+                                        <p:tav tm="0">
+                                          <p:val>
+                                            <p:strVal val="#ppt_x"/>
+                                          </p:val>
+                                        </p:tav>
+                                        <p:tav tm="100000">
+                                          <p:val>
+                                            <p:strVal val="#ppt_x"/>
+                                          </p:val>
+                                        </p:tav>
+                                      </p:tavLst>
+                                    </p:anim>
+                                    <p:anim calcmode="lin" valueType="num">
+                                      <p:cBhvr additive="base">
+                                        <p:cTn id="22" dur="500" fill="hold"/>
+                                        <p:tgtEl>
+                                          <p:spTgt spid="7">
+                                            <p:txEl>
+                                              <p:pRg st="3" end="3"/>
+                                            </p:txEl>
+                                          </p:spTgt>
+                                        </p:tgtEl>
+                                        <p:attrNameLst>
+                                          <p:attrName>ppt_y</p:attrName>
+                                        </p:attrNameLst>
+                                      </p:cBhvr>
+                                      <p:tavLst>
+                                        <p:tav tm="0">
+                                          <p:val>
+                                            <p:strVal val="1+#ppt_h/2"/>
+                                          </p:val>
+                                        </p:tav>
+                                        <p:tav tm="100000">
+                                          <p:val>
+                                            <p:strVal val="#ppt_y"/>
+                                          </p:val>
+                                        </p:tav>
+                                      </p:tavLst>
+                                    </p:anim>
+                                  </p:childTnLst>
+                                </p:cTn>
+                              </p:par>
+                            </p:childTnLst>
+                          </p:cTn>
+                        </p:par>
+                      </p:childTnLst>
+                    </p:cTn>
+                  </p:par>
+                  <p:par>
+                    <p:cTn id="23" fill="hold">
+                      <p:stCondLst>
+                        <p:cond delay="indefinite"/>
+                      </p:stCondLst>
+                      <p:childTnLst>
+                        <p:par>
+                          <p:cTn id="24" fill="hold">
+                            <p:stCondLst>
+                              <p:cond delay="0"/>
+                            </p:stCondLst>
+                            <p:childTnLst>
+                              <p:par>
+                                <p:cTn id="25" presetID="2" presetClass="entr" presetSubtype="4" fill="hold" grpId="0" nodeType="clickEffect">
+                                  <p:stCondLst>
+                                    <p:cond delay="0"/>
+                                  </p:stCondLst>
+                                  <p:childTnLst>
+                                    <p:set>
+                                      <p:cBhvr>
+                                        <p:cTn id="26" dur="1" fill="hold">
+                                          <p:stCondLst>
+                                            <p:cond delay="0"/>
+                                          </p:stCondLst>
+                                        </p:cTn>
+                                        <p:tgtEl>
+                                          <p:spTgt spid="7">
+                                            <p:txEl>
+                                              <p:pRg st="4" end="4"/>
+                                            </p:txEl>
+                                          </p:spTgt>
+                                        </p:tgtEl>
+                                        <p:attrNameLst>
+                                          <p:attrName>style.visibility</p:attrName>
+                                        </p:attrNameLst>
+                                      </p:cBhvr>
+                                      <p:to>
+                                        <p:strVal val="visible"/>
+                                      </p:to>
+                                    </p:set>
+                                    <p:anim calcmode="lin" valueType="num">
+                                      <p:cBhvr additive="base">
+                                        <p:cTn id="27" dur="500" fill="hold"/>
+                                        <p:tgtEl>
+                                          <p:spTgt spid="7">
+                                            <p:txEl>
+                                              <p:pRg st="4" end="4"/>
+                                            </p:txEl>
+                                          </p:spTgt>
+                                        </p:tgtEl>
+                                        <p:attrNameLst>
+                                          <p:attrName>ppt_x</p:attrName>
+                                        </p:attrNameLst>
+                                      </p:cBhvr>
+                                      <p:tavLst>
+                                        <p:tav tm="0">
+                                          <p:val>
+                                            <p:strVal val="#ppt_x"/>
+                                          </p:val>
+                                        </p:tav>
+                                        <p:tav tm="100000">
+                                          <p:val>
+                                            <p:strVal val="#ppt_x"/>
+                                          </p:val>
+                                        </p:tav>
+                                      </p:tavLst>
+                                    </p:anim>
+                                    <p:anim calcmode="lin" valueType="num">
+                                      <p:cBhvr additive="base">
+                                        <p:cTn id="28" dur="500" fill="hold"/>
+                                        <p:tgtEl>
+                                          <p:spTgt spid="7">
+                                            <p:txEl>
+                                              <p:pRg st="4" end="4"/>
+                                            </p:txEl>
+                                          </p:spTgt>
+                                        </p:tgtEl>
+                                        <p:attrNameLst>
+                                          <p:attrName>ppt_y</p:attrName>
+                                        </p:attrNameLst>
+                                      </p:cBhvr>
+                                      <p:tavLst>
+                                        <p:tav tm="0">
+                                          <p:val>
+                                            <p:strVal val="1+#ppt_h/2"/>
+                                          </p:val>
+                                        </p:tav>
+                                        <p:tav tm="100000">
+                                          <p:val>
+                                            <p:strVal val="#ppt_y"/>
+                                          </p:val>
+                                        </p:tav>
+                                      </p:tavLst>
+                                    </p:anim>
+                                  </p:childTnLst>
+                                </p:cTn>
+                              </p:par>
+                            </p:childTnLst>
+                          </p:cTn>
+                        </p:par>
+                      </p:childTnLst>
+                    </p:cTn>
+                  </p:par>
+                  <p:par>
+                    <p:cTn id="29" fill="hold">
+                      <p:stCondLst>
+                        <p:cond delay="indefinite"/>
+                      </p:stCondLst>
+                      <p:childTnLst>
+                        <p:par>
+                          <p:cTn id="30" fill="hold">
+                            <p:stCondLst>
+                              <p:cond delay="0"/>
+                            </p:stCondLst>
+                            <p:childTnLst>
+                              <p:par>
+                                <p:cTn id="31" presetID="2" presetClass="entr" presetSubtype="4" fill="hold" grpId="0" nodeType="clickEffect">
+                                  <p:stCondLst>
+                                    <p:cond delay="0"/>
+                                  </p:stCondLst>
+                                  <p:childTnLst>
+                                    <p:set>
+                                      <p:cBhvr>
+                                        <p:cTn id="32" dur="1" fill="hold">
+                                          <p:stCondLst>
+                                            <p:cond delay="0"/>
+                                          </p:stCondLst>
+                                        </p:cTn>
+                                        <p:tgtEl>
+                                          <p:spTgt spid="7">
+                                            <p:txEl>
+                                              <p:pRg st="5" end="5"/>
+                                            </p:txEl>
+                                          </p:spTgt>
+                                        </p:tgtEl>
+                                        <p:attrNameLst>
+                                          <p:attrName>style.visibility</p:attrName>
+                                        </p:attrNameLst>
+                                      </p:cBhvr>
+                                      <p:to>
+                                        <p:strVal val="visible"/>
+                                      </p:to>
+                                    </p:set>
+                                    <p:anim calcmode="lin" valueType="num">
+                                      <p:cBhvr additive="base">
+                                        <p:cTn id="33" dur="500" fill="hold"/>
+                                        <p:tgtEl>
+                                          <p:spTgt spid="7">
+                                            <p:txEl>
+                                              <p:pRg st="5" end="5"/>
+                                            </p:txEl>
+                                          </p:spTgt>
+                                        </p:tgtEl>
+                                        <p:attrNameLst>
+                                          <p:attrName>ppt_x</p:attrName>
+                                        </p:attrNameLst>
+                                      </p:cBhvr>
+                                      <p:tavLst>
+                                        <p:tav tm="0">
+                                          <p:val>
+                                            <p:strVal val="#ppt_x"/>
+                                          </p:val>
+                                        </p:tav>
+                                        <p:tav tm="100000">
+                                          <p:val>
+                                            <p:strVal val="#ppt_x"/>
+                                          </p:val>
+                                        </p:tav>
+                                      </p:tavLst>
+                                    </p:anim>
+                                    <p:anim calcmode="lin" valueType="num">
+                                      <p:cBhvr additive="base">
+                                        <p:cTn id="34" dur="500" fill="hold"/>
+                                        <p:tgtEl>
+                                          <p:spTgt spid="7">
+                                            <p:txEl>
+                                              <p:pRg st="5" end="5"/>
+                                            </p:txEl>
+                                          </p:spTgt>
+                                        </p:tgtEl>
+                                        <p:attrNameLst>
+                                          <p:attrName>ppt_y</p:attrName>
+                                        </p:attrNameLst>
+                                      </p:cBhvr>
+                                      <p:tavLst>
+                                        <p:tav tm="0">
+                                          <p:val>
+                                            <p:strVal val="1+#ppt_h/2"/>
+                                          </p:val>
+                                        </p:tav>
+                                        <p:tav tm="100000">
+                                          <p:val>
+                                            <p:strVal val="#ppt_y"/>
+                                          </p:val>
+                                        </p:tav>
+                                      </p:tavLst>
+                                    </p:anim>
+                                  </p:childTnLst>
+                                </p:cTn>
+                              </p:par>
+                              <p:par>
+                                <p:cTn id="35" presetID="2" presetClass="entr" presetSubtype="4" fill="hold" grpId="0" nodeType="withEffect">
+                                  <p:stCondLst>
+                                    <p:cond delay="0"/>
+                                  </p:stCondLst>
+                                  <p:childTnLst>
+                                    <p:set>
+                                      <p:cBhvr>
+                                        <p:cTn id="36" dur="1" fill="hold">
+                                          <p:stCondLst>
+                                            <p:cond delay="0"/>
+                                          </p:stCondLst>
+                                        </p:cTn>
+                                        <p:tgtEl>
+                                          <p:spTgt spid="7">
+                                            <p:txEl>
+                                              <p:pRg st="6" end="6"/>
+                                            </p:txEl>
+                                          </p:spTgt>
+                                        </p:tgtEl>
+                                        <p:attrNameLst>
+                                          <p:attrName>style.visibility</p:attrName>
+                                        </p:attrNameLst>
+                                      </p:cBhvr>
+                                      <p:to>
+                                        <p:strVal val="visible"/>
+                                      </p:to>
+                                    </p:set>
+                                    <p:anim calcmode="lin" valueType="num">
+                                      <p:cBhvr additive="base">
+                                        <p:cTn id="37" dur="500" fill="hold"/>
+                                        <p:tgtEl>
+                                          <p:spTgt spid="7">
+                                            <p:txEl>
+                                              <p:pRg st="6" end="6"/>
+                                            </p:txEl>
+                                          </p:spTgt>
+                                        </p:tgtEl>
+                                        <p:attrNameLst>
+                                          <p:attrName>ppt_x</p:attrName>
+                                        </p:attrNameLst>
+                                      </p:cBhvr>
+                                      <p:tavLst>
+                                        <p:tav tm="0">
+                                          <p:val>
+                                            <p:strVal val="#ppt_x"/>
+                                          </p:val>
+                                        </p:tav>
+                                        <p:tav tm="100000">
+                                          <p:val>
+                                            <p:strVal val="#ppt_x"/>
+                                          </p:val>
+                                        </p:tav>
+                                      </p:tavLst>
+                                    </p:anim>
+                                    <p:anim calcmode="lin" valueType="num">
+                                      <p:cBhvr additive="base">
+                                        <p:cTn id="38" dur="500" fill="hold"/>
+                                        <p:tgtEl>
+                                          <p:spTgt spid="7">
+                                            <p:txEl>
+                                              <p:pRg st="6" end="6"/>
+                                            </p:txEl>
+                                          </p:spTgt>
+                                        </p:tgtEl>
+                                        <p:attrNameLst>
+                                          <p:attrName>ppt_y</p:attrName>
+                                        </p:attrNameLst>
+                                      </p:cBhvr>
+                                      <p:tavLst>
+                                        <p:tav tm="0">
+                                          <p:val>
+                                            <p:strVal val="1+#ppt_h/2"/>
+                                          </p:val>
+                                        </p:tav>
+                                        <p:tav tm="100000">
+                                          <p:val>
+                                            <p:strVal val="#ppt_y"/>
+                                          </p:val>
+                                        </p:tav>
+                                      </p:tavLst>
+                                    </p:anim>
+                                  </p:childTnLst>
+                                </p:cTn>
+                              </p:par>
+                            </p:childTnLst>
+                          </p:cTn>
+                        </p:par>
+                      </p:childTnLst>
+                    </p:cTn>
+                  </p:par>
+                  <p:par>
+                    <p:cTn id="39" fill="hold">
+                      <p:stCondLst>
+                        <p:cond delay="indefinite"/>
+                      </p:stCondLst>
+                      <p:childTnLst>
+                        <p:par>
+                          <p:cTn id="40" fill="hold">
+                            <p:stCondLst>
+                              <p:cond delay="0"/>
+                            </p:stCondLst>
+                            <p:childTnLst>
+                              <p:par>
+                                <p:cTn id="41" presetID="2" presetClass="entr" presetSubtype="4" fill="hold" grpId="0" nodeType="clickEffect">
+                                  <p:stCondLst>
+                                    <p:cond delay="0"/>
+                                  </p:stCondLst>
+                                  <p:childTnLst>
+                                    <p:set>
+                                      <p:cBhvr>
+                                        <p:cTn id="42" dur="1" fill="hold">
+                                          <p:stCondLst>
+                                            <p:cond delay="0"/>
+                                          </p:stCondLst>
+                                        </p:cTn>
+                                        <p:tgtEl>
+                                          <p:spTgt spid="7">
+                                            <p:txEl>
+                                              <p:pRg st="7" end="7"/>
+                                            </p:txEl>
+                                          </p:spTgt>
+                                        </p:tgtEl>
+                                        <p:attrNameLst>
+                                          <p:attrName>style.visibility</p:attrName>
+                                        </p:attrNameLst>
+                                      </p:cBhvr>
+                                      <p:to>
+                                        <p:strVal val="visible"/>
+                                      </p:to>
+                                    </p:set>
+                                    <p:anim calcmode="lin" valueType="num">
+                                      <p:cBhvr additive="base">
+                                        <p:cTn id="43" dur="500" fill="hold"/>
+                                        <p:tgtEl>
+                                          <p:spTgt spid="7">
+                                            <p:txEl>
+                                              <p:pRg st="7" end="7"/>
+                                            </p:txEl>
+                                          </p:spTgt>
+                                        </p:tgtEl>
+                                        <p:attrNameLst>
+                                          <p:attrName>ppt_x</p:attrName>
+                                        </p:attrNameLst>
+                                      </p:cBhvr>
+                                      <p:tavLst>
+                                        <p:tav tm="0">
+                                          <p:val>
+                                            <p:strVal val="#ppt_x"/>
+                                          </p:val>
+                                        </p:tav>
+                                        <p:tav tm="100000">
+                                          <p:val>
+                                            <p:strVal val="#ppt_x"/>
+                                          </p:val>
+                                        </p:tav>
+                                      </p:tavLst>
+                                    </p:anim>
+                                    <p:anim calcmode="lin" valueType="num">
+                                      <p:cBhvr additive="base">
+                                        <p:cTn id="44" dur="500" fill="hold"/>
+                                        <p:tgtEl>
+                                          <p:spTgt spid="7">
+                                            <p:txEl>
+                                              <p:pRg st="7" end="7"/>
+                                            </p:txEl>
+                                          </p:spTgt>
+                                        </p:tgtEl>
+                                        <p:attrNameLst>
+                                          <p:attrName>ppt_y</p:attrName>
+                                        </p:attrNameLst>
+                                      </p:cBhvr>
+                                      <p:tavLst>
+                                        <p:tav tm="0">
+                                          <p:val>
+                                            <p:strVal val="1+#ppt_h/2"/>
+                                          </p:val>
+                                        </p:tav>
+                                        <p:tav tm="100000">
+                                          <p:val>
+                                            <p:strVal val="#ppt_y"/>
+                                          </p:val>
+                                        </p:tav>
+                                      </p:tavLst>
+                                    </p:anim>
+                                  </p:childTnLst>
+                                </p:cTn>
+                              </p:par>
+                            </p:childTnLst>
+                          </p:cTn>
+                        </p:par>
+                      </p:childTnLst>
+                    </p:cTn>
+                  </p:par>
+                </p:childTnLst>
+              </p:cTn>
+              <p:prevCondLst>
+                <p:cond evt="onPrev" delay="0">
+                  <p:tgtEl>
+                    <p:sldTgt/>
+                  </p:tgtEl>
+                </p:cond>
+              </p:prevCondLst>
+              <p:nextCondLst>
+                <p:cond evt="onNext" delay="0">
+                  <p:tgtEl>
+                    <p:sldTgt/>
+                  </p:tgtEl>
+                </p:cond>
+              </p:nextCondLst>
+            </p:seq>
+          </p:childTnLst>
+        </p:cTn>
+      </p:par>
+    </p:tnLst>
+    <p:bldLst>
+      <p:bldP spid="7" grpId="0" build="p"/>
+    </p:bldLst>
+  </p:timing>
+</p:sld>
+</file>
+
+<file path=ppt/slides/slide17.xml><?xml version="1.0" encoding="utf-8"?>
 <p:sld xmlns:a="http://schemas.openxmlformats.org/drawingml/2006/main" xmlns:r="http://schemas.openxmlformats.org/officeDocument/2006/relationships" xmlns:p="http://schemas.openxmlformats.org/presentationml/2006/main">
   <p:cSld>
     <p:bg>
@@ -9081,7 +11540,7 @@
         <p:cNvPr id="1" name="">
           <a:extLst>
             <a:ext uri="{FF2B5EF4-FFF2-40B4-BE49-F238E27FC236}">
-              <a16:creationId xmlns:a16="http://schemas.microsoft.com/office/drawing/2014/main" id="{6829D93A-FF1F-07BE-E2B1-CEFF9961C4D6}"/>
+              <a16:creationId xmlns:a16="http://schemas.microsoft.com/office/drawing/2014/main" id="{56283A92-63F9-B559-861F-6BBDAF87B2CD}"/>
             </a:ext>
           </a:extLst>
         </p:cNvPr>
@@ -9101,7 +11560,7 @@
           <p:cNvPr id="2" name="Title 1">
             <a:extLst>
               <a:ext uri="{FF2B5EF4-FFF2-40B4-BE49-F238E27FC236}">
-                <a16:creationId xmlns:a16="http://schemas.microsoft.com/office/drawing/2014/main" id="{EB174F43-E0B4-56F1-2F81-F8EFE350D194}"/>
+                <a16:creationId xmlns:a16="http://schemas.microsoft.com/office/drawing/2014/main" id="{E7F85006-3332-A583-6173-3588C6975D5C}"/>
               </a:ext>
             </a:extLst>
           </p:cNvPr>
@@ -9118,8 +11577,8 @@
           <a:lstStyle/>
           <a:p>
             <a:r>
-              <a:rPr lang="it-IT" dirty="0"/>
-              <a:t>Wrap up</a:t>
+              <a:rPr lang="it-IT" dirty="0" err="1"/>
+              <a:t>Give-Away</a:t>
             </a:r>
             <a:endParaRPr lang="en-US" dirty="0"/>
           </a:p>
@@ -9130,7 +11589,7 @@
           <p:cNvPr id="4" name="Text Placeholder 3">
             <a:extLst>
               <a:ext uri="{FF2B5EF4-FFF2-40B4-BE49-F238E27FC236}">
-                <a16:creationId xmlns:a16="http://schemas.microsoft.com/office/drawing/2014/main" id="{06E963AE-86A9-5F86-F5CF-9F8D521A83D9}"/>
+                <a16:creationId xmlns:a16="http://schemas.microsoft.com/office/drawing/2014/main" id="{9F6F9F4E-1E42-8E9D-6089-7C639F35488B}"/>
               </a:ext>
             </a:extLst>
           </p:cNvPr>
@@ -9141,22 +11600,15 @@
             <p:ph type="body" sz="quarter" idx="11"/>
           </p:nvPr>
         </p:nvSpPr>
-        <p:spPr/>
+        <p:spPr>
+          <a:xfrm>
+            <a:off x="738188" y="1700213"/>
+            <a:ext cx="10747375" cy="1137816"/>
+          </a:xfrm>
+        </p:spPr>
         <p:txBody>
           <a:bodyPr lIns="91440" tIns="45720" rIns="91440" bIns="45720" anchor="t"/>
           <a:lstStyle/>
-          <a:p>
-            <a:pPr marL="0" indent="0">
-              <a:buNone/>
-            </a:pPr>
-            <a:r>
-              <a:rPr lang="it-IT" dirty="0">
-                <a:latin typeface="Arial"/>
-                <a:cs typeface="Arial"/>
-              </a:rPr>
-              <a:t>Public repo:</a:t>
-            </a:r>
-          </a:p>
           <a:p>
             <a:pPr marL="0" indent="0">
               <a:buNone/>
@@ -9192,7 +11644,7 @@
           <p:cNvPr id="6" name="Text Placeholder 3">
             <a:extLst>
               <a:ext uri="{FF2B5EF4-FFF2-40B4-BE49-F238E27FC236}">
-                <a16:creationId xmlns:a16="http://schemas.microsoft.com/office/drawing/2014/main" id="{53892A0E-7D53-9CB6-071B-6FAC1E608FD5}"/>
+                <a16:creationId xmlns:a16="http://schemas.microsoft.com/office/drawing/2014/main" id="{0977C171-0878-899E-D880-55DCEA10339C}"/>
               </a:ext>
             </a:extLst>
           </p:cNvPr>
@@ -9203,7 +11655,7 @@
         </p:nvSpPr>
         <p:spPr>
           <a:xfrm>
-            <a:off x="6209198" y="4788827"/>
+            <a:off x="6248178" y="3221749"/>
             <a:ext cx="5445392" cy="849973"/>
           </a:xfrm>
           <a:prstGeom prst="rect">
@@ -9386,7 +11838,7 @@
           <p:cNvPr id="5" name="Picture 4">
             <a:extLst>
               <a:ext uri="{FF2B5EF4-FFF2-40B4-BE49-F238E27FC236}">
-                <a16:creationId xmlns:a16="http://schemas.microsoft.com/office/drawing/2014/main" id="{E2BC3B9F-7E7B-E6C8-9727-3F09D8C9102B}"/>
+                <a16:creationId xmlns:a16="http://schemas.microsoft.com/office/drawing/2014/main" id="{F67911E6-F2E2-196A-C35F-5E7834239568}"/>
               </a:ext>
             </a:extLst>
           </p:cNvPr>
@@ -9413,10 +11865,10 @@
       </p:pic>
       <p:sp>
         <p:nvSpPr>
-          <p:cNvPr id="3" name="TextBox 2">
+          <p:cNvPr id="10" name="TextBox 9">
             <a:extLst>
               <a:ext uri="{FF2B5EF4-FFF2-40B4-BE49-F238E27FC236}">
-                <a16:creationId xmlns:a16="http://schemas.microsoft.com/office/drawing/2014/main" id="{A1A26F54-BE1A-85D5-0571-2394394042F2}"/>
+                <a16:creationId xmlns:a16="http://schemas.microsoft.com/office/drawing/2014/main" id="{4214BE09-ED41-E243-8C5A-2D1F081A44CE}"/>
               </a:ext>
             </a:extLst>
           </p:cNvPr>
@@ -9425,8 +11877,8 @@
         </p:nvSpPr>
         <p:spPr>
           <a:xfrm>
-            <a:off x="3925891" y="4075545"/>
-            <a:ext cx="8011886" cy="615553"/>
+            <a:off x="2326255" y="3207766"/>
+            <a:ext cx="8011886" cy="584775"/>
           </a:xfrm>
           <a:prstGeom prst="rect">
             <a:avLst/>
@@ -9440,7 +11892,7 @@
           <a:lstStyle/>
           <a:p>
             <a:r>
-              <a:rPr lang="en-GB" sz="3400" b="1" dirty="0">
+              <a:rPr lang="en-GB" sz="3200" b="1" dirty="0">
                 <a:solidFill>
                   <a:srgbClr val="00C700"/>
                 </a:solidFill>
@@ -9455,10 +11907,10 @@
       </p:sp>
       <p:sp>
         <p:nvSpPr>
-          <p:cNvPr id="7" name="TextBox 6">
+          <p:cNvPr id="11" name="TextBox 10">
             <a:extLst>
               <a:ext uri="{FF2B5EF4-FFF2-40B4-BE49-F238E27FC236}">
-                <a16:creationId xmlns:a16="http://schemas.microsoft.com/office/drawing/2014/main" id="{C3E839C5-8938-277D-E271-D58C949CF356}"/>
+                <a16:creationId xmlns:a16="http://schemas.microsoft.com/office/drawing/2014/main" id="{6A7041F8-EF91-4CC5-8D9F-7AB0E612F984}"/>
               </a:ext>
             </a:extLst>
           </p:cNvPr>
@@ -9467,8 +11919,8 @@
         </p:nvSpPr>
         <p:spPr>
           <a:xfrm>
-            <a:off x="3925891" y="4691671"/>
-            <a:ext cx="8011886" cy="461665"/>
+            <a:off x="2326255" y="3731794"/>
+            <a:ext cx="8011886" cy="400110"/>
           </a:xfrm>
           <a:prstGeom prst="rect">
             <a:avLst/>
@@ -9482,25 +11934,62 @@
           <a:lstStyle/>
           <a:p>
             <a:r>
-              <a:rPr lang="en-GB" sz="2400">
-                <a:solidFill>
-                  <a:schemeClr val="bg2"/>
+              <a:rPr lang="en-GB" sz="2000" dirty="0">
+                <a:solidFill>
+                  <a:srgbClr val="B2AFC4"/>
                 </a:solidFill>
                 <a:latin typeface="Arial" panose="020B0604020202020204" pitchFamily="34" charset="0"/>
                 <a:ea typeface="Calibri" charset="0"/>
                 <a:cs typeface="Arial" panose="020B0604020202020204" pitchFamily="34" charset="0"/>
               </a:rPr>
-              <a:t>MVP - ACP CUBIDO Digital Solutions GmbH, Austria</a:t>
+              <a:t>MVP - ACP CUBIDO Digital Solutions GmbH, Austria​</a:t>
             </a:r>
           </a:p>
         </p:txBody>
       </p:sp>
+      <p:pic>
+        <p:nvPicPr>
+          <p:cNvPr id="15" name="Picture 14" descr="A person wearing glasses and a black polo shirt&#10;&#10;AI-generated content may be incorrect.">
+            <a:extLst>
+              <a:ext uri="{FF2B5EF4-FFF2-40B4-BE49-F238E27FC236}">
+                <a16:creationId xmlns:a16="http://schemas.microsoft.com/office/drawing/2014/main" id="{08C3D16A-7F62-80BD-C95D-C52320F83147}"/>
+              </a:ext>
+            </a:extLst>
+          </p:cNvPr>
+          <p:cNvPicPr>
+            <a:picLocks noChangeAspect="1"/>
+          </p:cNvPicPr>
+          <p:nvPr/>
+        </p:nvPicPr>
+        <p:blipFill>
+          <a:blip r:embed="rId5">
+            <a:extLst>
+              <a:ext uri="{28A0092B-C50C-407E-A947-70E740481C1C}">
+                <a14:useLocalDpi xmlns:a14="http://schemas.microsoft.com/office/drawing/2010/main" val="0"/>
+              </a:ext>
+            </a:extLst>
+          </a:blip>
+          <a:srcRect l="19023" t="6603" r="20084" b="47467"/>
+          <a:stretch>
+            <a:fillRect/>
+          </a:stretch>
+        </p:blipFill>
+        <p:spPr>
+          <a:xfrm>
+            <a:off x="757990" y="3238578"/>
+            <a:ext cx="1404646" cy="1386543"/>
+          </a:xfrm>
+          <a:prstGeom prst="rect">
+            <a:avLst/>
+          </a:prstGeom>
+        </p:spPr>
+      </p:pic>
       <p:sp>
         <p:nvSpPr>
-          <p:cNvPr id="8" name="TextBox 7">
+          <p:cNvPr id="16" name="TextBox 15">
             <a:extLst>
               <a:ext uri="{FF2B5EF4-FFF2-40B4-BE49-F238E27FC236}">
-                <a16:creationId xmlns:a16="http://schemas.microsoft.com/office/drawing/2014/main" id="{2A695E24-E6AB-229E-3D97-01316544D8B8}"/>
+                <a16:creationId xmlns:a16="http://schemas.microsoft.com/office/drawing/2014/main" id="{46AB4661-C4AA-F224-3E63-9CB1EC979C20}"/>
               </a:ext>
             </a:extLst>
           </p:cNvPr>
@@ -9509,8 +11998,8 @@
         </p:nvSpPr>
         <p:spPr>
           <a:xfrm>
-            <a:off x="3925891" y="5153909"/>
-            <a:ext cx="8011886" cy="615553"/>
+            <a:off x="2306453" y="4622014"/>
+            <a:ext cx="8011886" cy="584775"/>
           </a:xfrm>
           <a:prstGeom prst="rect">
             <a:avLst/>
@@ -9524,7 +12013,7 @@
           <a:lstStyle/>
           <a:p>
             <a:r>
-              <a:rPr lang="en-GB" sz="3400" b="1">
+              <a:rPr lang="en-GB" sz="3200" b="1" dirty="0">
                 <a:solidFill>
                   <a:srgbClr val="00C700"/>
                 </a:solidFill>
@@ -9532,17 +12021,39 @@
                 <a:ea typeface="Calibri" charset="0"/>
                 <a:cs typeface="Arial" panose="020B0604020202020204" pitchFamily="34" charset="0"/>
               </a:rPr>
-              <a:t>Guido Zambarda</a:t>
+              <a:t>Guido </a:t>
+            </a:r>
+            <a:r>
+              <a:rPr lang="en-GB" sz="3200" b="1" dirty="0" err="1">
+                <a:solidFill>
+                  <a:srgbClr val="00C700"/>
+                </a:solidFill>
+                <a:latin typeface="Arial" panose="020B0604020202020204" pitchFamily="34" charset="0"/>
+                <a:ea typeface="Calibri" charset="0"/>
+                <a:cs typeface="Arial" panose="020B0604020202020204" pitchFamily="34" charset="0"/>
+              </a:rPr>
+              <a:t>Zambarda</a:t>
+            </a:r>
+            <a:r>
+              <a:rPr lang="en-GB" sz="3200" b="1" dirty="0">
+                <a:solidFill>
+                  <a:srgbClr val="00C700"/>
+                </a:solidFill>
+                <a:latin typeface="Arial" panose="020B0604020202020204" pitchFamily="34" charset="0"/>
+                <a:ea typeface="Calibri" charset="0"/>
+                <a:cs typeface="Arial" panose="020B0604020202020204" pitchFamily="34" charset="0"/>
+              </a:rPr>
+              <a:t>​</a:t>
             </a:r>
           </a:p>
         </p:txBody>
       </p:sp>
       <p:sp>
         <p:nvSpPr>
-          <p:cNvPr id="9" name="TextBox 8">
+          <p:cNvPr id="17" name="TextBox 16">
             <a:extLst>
               <a:ext uri="{FF2B5EF4-FFF2-40B4-BE49-F238E27FC236}">
-                <a16:creationId xmlns:a16="http://schemas.microsoft.com/office/drawing/2014/main" id="{46449E46-D832-C716-AD9A-CC969B2C748D}"/>
+                <a16:creationId xmlns:a16="http://schemas.microsoft.com/office/drawing/2014/main" id="{C3FB5918-7BB0-2F0B-C6DA-54F38BE03C82}"/>
               </a:ext>
             </a:extLst>
           </p:cNvPr>
@@ -9551,8 +12062,8 @@
         </p:nvSpPr>
         <p:spPr>
           <a:xfrm>
-            <a:off x="3925891" y="5770035"/>
-            <a:ext cx="8011886" cy="461665"/>
+            <a:off x="2306453" y="5176416"/>
+            <a:ext cx="8011886" cy="400110"/>
           </a:xfrm>
           <a:prstGeom prst="rect">
             <a:avLst/>
@@ -9566,9 +12077,9 @@
           <a:lstStyle/>
           <a:p>
             <a:r>
-              <a:rPr lang="en-GB" sz="2400">
-                <a:solidFill>
-                  <a:schemeClr val="bg2"/>
+              <a:rPr lang="en-GB" sz="2000" dirty="0">
+                <a:solidFill>
+                  <a:srgbClr val="B2AFC4"/>
                 </a:solidFill>
                 <a:latin typeface="Arial" panose="020B0604020202020204" pitchFamily="34" charset="0"/>
                 <a:ea typeface="Calibri" charset="0"/>
@@ -9577,9 +12088,9 @@
               <a:t>MVP – SSD </a:t>
             </a:r>
             <a:r>
-              <a:rPr lang="en-GB" sz="2400" err="1">
-                <a:solidFill>
-                  <a:schemeClr val="bg2"/>
+              <a:rPr lang="en-GB" sz="2000" dirty="0" err="1">
+                <a:solidFill>
+                  <a:srgbClr val="B2AFC4"/>
                 </a:solidFill>
                 <a:latin typeface="Arial" panose="020B0604020202020204" pitchFamily="34" charset="0"/>
                 <a:ea typeface="Calibri" charset="0"/>
@@ -9588,9 +12099,9 @@
               <a:t>PiaSys.com</a:t>
             </a:r>
             <a:r>
-              <a:rPr lang="en-GB" sz="2400">
-                <a:solidFill>
-                  <a:schemeClr val="bg2"/>
+              <a:rPr lang="en-GB" sz="2000" dirty="0">
+                <a:solidFill>
+                  <a:srgbClr val="B2AFC4"/>
                 </a:solidFill>
                 <a:latin typeface="Arial" panose="020B0604020202020204" pitchFamily="34" charset="0"/>
                 <a:ea typeface="Calibri" charset="0"/>
@@ -9601,10 +12112,46 @@
           </a:p>
         </p:txBody>
       </p:sp>
+      <p:pic>
+        <p:nvPicPr>
+          <p:cNvPr id="18" name="Picture 17" descr="A person smiling for the camera&#10;&#10;AI-generated content may be incorrect.">
+            <a:extLst>
+              <a:ext uri="{FF2B5EF4-FFF2-40B4-BE49-F238E27FC236}">
+                <a16:creationId xmlns:a16="http://schemas.microsoft.com/office/drawing/2014/main" id="{0B6CF5DF-8716-BB1A-63ED-BB55D36C1BCF}"/>
+              </a:ext>
+            </a:extLst>
+          </p:cNvPr>
+          <p:cNvPicPr>
+            <a:picLocks noChangeAspect="1"/>
+          </p:cNvPicPr>
+          <p:nvPr/>
+        </p:nvPicPr>
+        <p:blipFill>
+          <a:blip r:embed="rId6">
+            <a:extLst>
+              <a:ext uri="{28A0092B-C50C-407E-A947-70E740481C1C}">
+                <a14:useLocalDpi xmlns:a14="http://schemas.microsoft.com/office/drawing/2010/main" val="0"/>
+              </a:ext>
+            </a:extLst>
+          </a:blip>
+          <a:stretch>
+            <a:fillRect/>
+          </a:stretch>
+        </p:blipFill>
+        <p:spPr>
+          <a:xfrm>
+            <a:off x="765082" y="4752802"/>
+            <a:ext cx="1397554" cy="1397554"/>
+          </a:xfrm>
+          <a:prstGeom prst="rect">
+            <a:avLst/>
+          </a:prstGeom>
+        </p:spPr>
+      </p:pic>
     </p:spTree>
     <p:extLst>
       <p:ext uri="{BB962C8B-B14F-4D97-AF65-F5344CB8AC3E}">
-        <p14:creationId xmlns:p14="http://schemas.microsoft.com/office/powerpoint/2010/main" val="3238921738"/>
+        <p14:creationId xmlns:p14="http://schemas.microsoft.com/office/powerpoint/2010/main" val="3090964154"/>
       </p:ext>
     </p:extLst>
   </p:cSld>
@@ -9614,7 +12161,7 @@
 </p:sld>
 </file>
 
-<file path=ppt/slides/slide16.xml><?xml version="1.0" encoding="utf-8"?>
+<file path=ppt/slides/slide18.xml><?xml version="1.0" encoding="utf-8"?>
 <p:sld xmlns:a="http://schemas.openxmlformats.org/drawingml/2006/main" xmlns:r="http://schemas.openxmlformats.org/officeDocument/2006/relationships" xmlns:p="http://schemas.openxmlformats.org/presentationml/2006/main">
   <p:cSld>
     <p:bg>
@@ -9743,235 +12290,53 @@
           </a:p>
         </p:txBody>
       </p:sp>
-      <p:sp>
-        <p:nvSpPr>
-          <p:cNvPr id="3" name="TextBox 2">
+      <p:pic>
+        <p:nvPicPr>
+          <p:cNvPr id="2052" name="Picture 4" descr="Two men posing for a selfie&#10;&#10;AI-generated content may be incorrect.">
             <a:extLst>
               <a:ext uri="{FF2B5EF4-FFF2-40B4-BE49-F238E27FC236}">
-                <a16:creationId xmlns:a16="http://schemas.microsoft.com/office/drawing/2014/main" id="{43EEEF1E-D858-9C47-9A95-2D236BFD2F31}"/>
+                <a16:creationId xmlns:a16="http://schemas.microsoft.com/office/drawing/2014/main" id="{FD06EAEF-DE6D-F7D3-3275-EA7C5BDA51A4}"/>
               </a:ext>
             </a:extLst>
           </p:cNvPr>
-          <p:cNvSpPr txBox="1"/>
+          <p:cNvPicPr>
+            <a:picLocks noChangeAspect="1" noChangeArrowheads="1"/>
+          </p:cNvPicPr>
           <p:nvPr/>
-        </p:nvSpPr>
-        <p:spPr>
+        </p:nvPicPr>
+        <p:blipFill>
+          <a:blip r:embed="rId4">
+            <a:extLst>
+              <a:ext uri="{28A0092B-C50C-407E-A947-70E740481C1C}">
+                <a14:useLocalDpi xmlns:a14="http://schemas.microsoft.com/office/drawing/2010/main" val="0"/>
+              </a:ext>
+            </a:extLst>
+          </a:blip>
+          <a:srcRect/>
+          <a:stretch>
+            <a:fillRect/>
+          </a:stretch>
+        </p:blipFill>
+        <p:spPr bwMode="auto">
           <a:xfrm>
-            <a:off x="3925891" y="4075545"/>
-            <a:ext cx="8011886" cy="615553"/>
+            <a:off x="406688" y="1539749"/>
+            <a:ext cx="3297136" cy="2472852"/>
           </a:xfrm>
           <a:prstGeom prst="rect">
             <a:avLst/>
           </a:prstGeom>
           <a:noFill/>
+          <a:extLst>
+            <a:ext uri="{909E8E84-426E-40DD-AFC4-6F175D3DCCD1}">
+              <a14:hiddenFill xmlns:a14="http://schemas.microsoft.com/office/drawing/2010/main">
+                <a:solidFill>
+                  <a:srgbClr val="FFFFFF"/>
+                </a:solidFill>
+              </a14:hiddenFill>
+            </a:ext>
+          </a:extLst>
         </p:spPr>
-        <p:txBody>
-          <a:bodyPr wrap="square" rtlCol="0" anchor="t">
-            <a:spAutoFit/>
-          </a:bodyPr>
-          <a:lstStyle/>
-          <a:p>
-            <a:r>
-              <a:rPr lang="en-GB" sz="3400" b="1" dirty="0">
-                <a:solidFill>
-                  <a:srgbClr val="00C700"/>
-                </a:solidFill>
-                <a:latin typeface="Arial" panose="020B0604020202020204" pitchFamily="34" charset="0"/>
-                <a:ea typeface="Calibri" charset="0"/>
-                <a:cs typeface="Arial" panose="020B0604020202020204" pitchFamily="34" charset="0"/>
-              </a:rPr>
-              <a:t>Peter Paul Kirschner</a:t>
-            </a:r>
-          </a:p>
-        </p:txBody>
-      </p:sp>
-      <p:sp>
-        <p:nvSpPr>
-          <p:cNvPr id="4" name="TextBox 3">
-            <a:extLst>
-              <a:ext uri="{FF2B5EF4-FFF2-40B4-BE49-F238E27FC236}">
-                <a16:creationId xmlns:a16="http://schemas.microsoft.com/office/drawing/2014/main" id="{12D3891A-AA58-D14F-909B-BF581581CD69}"/>
-              </a:ext>
-            </a:extLst>
-          </p:cNvPr>
-          <p:cNvSpPr txBox="1"/>
-          <p:nvPr/>
-        </p:nvSpPr>
-        <p:spPr>
-          <a:xfrm>
-            <a:off x="3925891" y="4691671"/>
-            <a:ext cx="8011886" cy="461665"/>
-          </a:xfrm>
-          <a:prstGeom prst="rect">
-            <a:avLst/>
-          </a:prstGeom>
-          <a:noFill/>
-        </p:spPr>
-        <p:txBody>
-          <a:bodyPr wrap="square" rtlCol="0" anchor="t">
-            <a:spAutoFit/>
-          </a:bodyPr>
-          <a:lstStyle/>
-          <a:p>
-            <a:r>
-              <a:rPr lang="en-GB" sz="2400">
-                <a:solidFill>
-                  <a:schemeClr val="bg2"/>
-                </a:solidFill>
-                <a:latin typeface="Arial" panose="020B0604020202020204" pitchFamily="34" charset="0"/>
-                <a:ea typeface="Calibri" charset="0"/>
-                <a:cs typeface="Arial" panose="020B0604020202020204" pitchFamily="34" charset="0"/>
-              </a:rPr>
-              <a:t>MVP - ACP CUBIDO Digital Solutions GmbH, Austria</a:t>
-            </a:r>
-          </a:p>
-        </p:txBody>
-      </p:sp>
-      <p:sp>
-        <p:nvSpPr>
-          <p:cNvPr id="7" name="Picture Placeholder 6">
-            <a:extLst>
-              <a:ext uri="{FF2B5EF4-FFF2-40B4-BE49-F238E27FC236}">
-                <a16:creationId xmlns:a16="http://schemas.microsoft.com/office/drawing/2014/main" id="{107F331A-088A-5E4B-ADDD-52C41D93C27C}"/>
-              </a:ext>
-            </a:extLst>
-          </p:cNvPr>
-          <p:cNvSpPr>
-            <a:spLocks noGrp="1"/>
-          </p:cNvSpPr>
-          <p:nvPr>
-            <p:ph type="pic" sz="quarter" idx="4294967295"/>
-          </p:nvPr>
-        </p:nvSpPr>
-        <p:spPr>
-          <a:xfrm>
-            <a:off x="1732130" y="1587834"/>
-            <a:ext cx="1700881" cy="1700798"/>
-          </a:xfrm>
-          <a:prstGeom prst="rect">
-            <a:avLst/>
-          </a:prstGeom>
-        </p:spPr>
-        <p:txBody>
-          <a:bodyPr/>
-          <a:lstStyle/>
-          <a:p>
-            <a:endParaRPr lang="en-US" sz="2100">
-              <a:solidFill>
-                <a:schemeClr val="bg1"/>
-              </a:solidFill>
-              <a:latin typeface="Arial" panose="020B0604020202020204" pitchFamily="34" charset="0"/>
-              <a:cs typeface="Arial" panose="020B0604020202020204" pitchFamily="34" charset="0"/>
-            </a:endParaRPr>
-          </a:p>
-        </p:txBody>
-      </p:sp>
-      <p:sp>
-        <p:nvSpPr>
-          <p:cNvPr id="5" name="TextBox 4">
-            <a:extLst>
-              <a:ext uri="{FF2B5EF4-FFF2-40B4-BE49-F238E27FC236}">
-                <a16:creationId xmlns:a16="http://schemas.microsoft.com/office/drawing/2014/main" id="{785403A9-B327-DB69-7581-4459766A332E}"/>
-              </a:ext>
-            </a:extLst>
-          </p:cNvPr>
-          <p:cNvSpPr txBox="1"/>
-          <p:nvPr/>
-        </p:nvSpPr>
-        <p:spPr>
-          <a:xfrm>
-            <a:off x="3925891" y="5153909"/>
-            <a:ext cx="8011886" cy="615553"/>
-          </a:xfrm>
-          <a:prstGeom prst="rect">
-            <a:avLst/>
-          </a:prstGeom>
-          <a:noFill/>
-        </p:spPr>
-        <p:txBody>
-          <a:bodyPr wrap="square" rtlCol="0" anchor="t">
-            <a:spAutoFit/>
-          </a:bodyPr>
-          <a:lstStyle/>
-          <a:p>
-            <a:r>
-              <a:rPr lang="en-GB" sz="3400" b="1">
-                <a:solidFill>
-                  <a:srgbClr val="00C700"/>
-                </a:solidFill>
-                <a:latin typeface="Arial" panose="020B0604020202020204" pitchFamily="34" charset="0"/>
-                <a:ea typeface="Calibri" charset="0"/>
-                <a:cs typeface="Arial" panose="020B0604020202020204" pitchFamily="34" charset="0"/>
-              </a:rPr>
-              <a:t>Guido Zambarda</a:t>
-            </a:r>
-          </a:p>
-        </p:txBody>
-      </p:sp>
-      <p:sp>
-        <p:nvSpPr>
-          <p:cNvPr id="6" name="TextBox 5">
-            <a:extLst>
-              <a:ext uri="{FF2B5EF4-FFF2-40B4-BE49-F238E27FC236}">
-                <a16:creationId xmlns:a16="http://schemas.microsoft.com/office/drawing/2014/main" id="{515758A2-F774-7B79-1EB4-087503B40E08}"/>
-              </a:ext>
-            </a:extLst>
-          </p:cNvPr>
-          <p:cNvSpPr txBox="1"/>
-          <p:nvPr/>
-        </p:nvSpPr>
-        <p:spPr>
-          <a:xfrm>
-            <a:off x="3925891" y="5770035"/>
-            <a:ext cx="8011886" cy="461665"/>
-          </a:xfrm>
-          <a:prstGeom prst="rect">
-            <a:avLst/>
-          </a:prstGeom>
-          <a:noFill/>
-        </p:spPr>
-        <p:txBody>
-          <a:bodyPr wrap="square" rtlCol="0" anchor="t">
-            <a:spAutoFit/>
-          </a:bodyPr>
-          <a:lstStyle/>
-          <a:p>
-            <a:r>
-              <a:rPr lang="en-GB" sz="2400">
-                <a:solidFill>
-                  <a:schemeClr val="bg2"/>
-                </a:solidFill>
-                <a:latin typeface="Arial" panose="020B0604020202020204" pitchFamily="34" charset="0"/>
-                <a:ea typeface="Calibri" charset="0"/>
-                <a:cs typeface="Arial" panose="020B0604020202020204" pitchFamily="34" charset="0"/>
-              </a:rPr>
-              <a:t>MVP – SSD </a:t>
-            </a:r>
-            <a:r>
-              <a:rPr lang="en-GB" sz="2400" err="1">
-                <a:solidFill>
-                  <a:schemeClr val="bg2"/>
-                </a:solidFill>
-                <a:latin typeface="Arial" panose="020B0604020202020204" pitchFamily="34" charset="0"/>
-                <a:ea typeface="Calibri" charset="0"/>
-                <a:cs typeface="Arial" panose="020B0604020202020204" pitchFamily="34" charset="0"/>
-              </a:rPr>
-              <a:t>PiaSys.com</a:t>
-            </a:r>
-            <a:r>
-              <a:rPr lang="en-GB" sz="2400">
-                <a:solidFill>
-                  <a:schemeClr val="bg2"/>
-                </a:solidFill>
-                <a:latin typeface="Arial" panose="020B0604020202020204" pitchFamily="34" charset="0"/>
-                <a:ea typeface="Calibri" charset="0"/>
-                <a:cs typeface="Arial" panose="020B0604020202020204" pitchFamily="34" charset="0"/>
-              </a:rPr>
-              <a:t>, Italy</a:t>
-            </a:r>
-          </a:p>
-        </p:txBody>
-      </p:sp>
+      </p:pic>
     </p:spTree>
     <p:extLst>
       <p:ext uri="{BB962C8B-B14F-4D97-AF65-F5344CB8AC3E}">
@@ -9986,6 +12351,327 @@
 </file>
 
 <file path=ppt/slides/slide3.xml><?xml version="1.0" encoding="utf-8"?>
+<p:sld xmlns:a="http://schemas.openxmlformats.org/drawingml/2006/main" xmlns:r="http://schemas.openxmlformats.org/officeDocument/2006/relationships" xmlns:p="http://schemas.openxmlformats.org/presentationml/2006/main">
+  <p:cSld>
+    <p:spTree>
+      <p:nvGrpSpPr>
+        <p:cNvPr id="1" name="">
+          <a:extLst>
+            <a:ext uri="{FF2B5EF4-FFF2-40B4-BE49-F238E27FC236}">
+              <a16:creationId xmlns:a16="http://schemas.microsoft.com/office/drawing/2014/main" id="{27F912B7-03E4-8F76-5540-2BA36BADD0F2}"/>
+            </a:ext>
+          </a:extLst>
+        </p:cNvPr>
+        <p:cNvGrpSpPr/>
+        <p:nvPr/>
+      </p:nvGrpSpPr>
+      <p:grpSpPr>
+        <a:xfrm>
+          <a:off x="0" y="0"/>
+          <a:ext cx="0" cy="0"/>
+          <a:chOff x="0" y="0"/>
+          <a:chExt cx="0" cy="0"/>
+        </a:xfrm>
+      </p:grpSpPr>
+      <p:sp>
+        <p:nvSpPr>
+          <p:cNvPr id="2" name="TextBox 1">
+            <a:extLst>
+              <a:ext uri="{FF2B5EF4-FFF2-40B4-BE49-F238E27FC236}">
+                <a16:creationId xmlns:a16="http://schemas.microsoft.com/office/drawing/2014/main" id="{36A79C0E-07FE-81F7-7579-D07CB353BD7B}"/>
+              </a:ext>
+            </a:extLst>
+          </p:cNvPr>
+          <p:cNvSpPr txBox="1"/>
+          <p:nvPr/>
+        </p:nvSpPr>
+        <p:spPr>
+          <a:xfrm>
+            <a:off x="3843545" y="3670698"/>
+            <a:ext cx="8011886" cy="615553"/>
+          </a:xfrm>
+          <a:prstGeom prst="rect">
+            <a:avLst/>
+          </a:prstGeom>
+          <a:noFill/>
+        </p:spPr>
+        <p:txBody>
+          <a:bodyPr wrap="square" rtlCol="0" anchor="t">
+            <a:spAutoFit/>
+          </a:bodyPr>
+          <a:lstStyle/>
+          <a:p>
+            <a:r>
+              <a:rPr lang="en-GB" sz="3400" b="1" dirty="0">
+                <a:solidFill>
+                  <a:srgbClr val="00C700"/>
+                </a:solidFill>
+                <a:latin typeface="Arial" panose="020B0604020202020204" pitchFamily="34" charset="0"/>
+                <a:ea typeface="Calibri" charset="0"/>
+                <a:cs typeface="Arial" panose="020B0604020202020204" pitchFamily="34" charset="0"/>
+              </a:rPr>
+              <a:t>Guido </a:t>
+            </a:r>
+            <a:r>
+              <a:rPr lang="en-GB" sz="3400" b="1" dirty="0" err="1">
+                <a:solidFill>
+                  <a:srgbClr val="00C700"/>
+                </a:solidFill>
+                <a:latin typeface="Arial" panose="020B0604020202020204" pitchFamily="34" charset="0"/>
+                <a:ea typeface="Calibri" charset="0"/>
+                <a:cs typeface="Arial" panose="020B0604020202020204" pitchFamily="34" charset="0"/>
+              </a:rPr>
+              <a:t>Zambarda</a:t>
+            </a:r>
+            <a:r>
+              <a:rPr lang="en-GB" sz="3400" b="1" dirty="0">
+                <a:solidFill>
+                  <a:srgbClr val="00C700"/>
+                </a:solidFill>
+                <a:latin typeface="Arial" panose="020B0604020202020204" pitchFamily="34" charset="0"/>
+                <a:ea typeface="Calibri" charset="0"/>
+                <a:cs typeface="Arial" panose="020B0604020202020204" pitchFamily="34" charset="0"/>
+              </a:rPr>
+              <a:t>​</a:t>
+            </a:r>
+          </a:p>
+        </p:txBody>
+      </p:sp>
+      <p:sp>
+        <p:nvSpPr>
+          <p:cNvPr id="3" name="TextBox 2">
+            <a:extLst>
+              <a:ext uri="{FF2B5EF4-FFF2-40B4-BE49-F238E27FC236}">
+                <a16:creationId xmlns:a16="http://schemas.microsoft.com/office/drawing/2014/main" id="{88B31073-F140-9391-5E04-D1689293281C}"/>
+              </a:ext>
+            </a:extLst>
+          </p:cNvPr>
+          <p:cNvSpPr txBox="1"/>
+          <p:nvPr/>
+        </p:nvSpPr>
+        <p:spPr>
+          <a:xfrm>
+            <a:off x="3843545" y="4286251"/>
+            <a:ext cx="8011886" cy="461665"/>
+          </a:xfrm>
+          <a:prstGeom prst="rect">
+            <a:avLst/>
+          </a:prstGeom>
+          <a:noFill/>
+        </p:spPr>
+        <p:txBody>
+          <a:bodyPr wrap="square" rtlCol="0" anchor="t">
+            <a:spAutoFit/>
+          </a:bodyPr>
+          <a:lstStyle/>
+          <a:p>
+            <a:r>
+              <a:rPr lang="en-GB" sz="2400" dirty="0">
+                <a:solidFill>
+                  <a:srgbClr val="B2AFC4"/>
+                </a:solidFill>
+                <a:latin typeface="Arial" panose="020B0604020202020204" pitchFamily="34" charset="0"/>
+                <a:ea typeface="Calibri" charset="0"/>
+                <a:cs typeface="Arial" panose="020B0604020202020204" pitchFamily="34" charset="0"/>
+              </a:rPr>
+              <a:t>MVP – SSD </a:t>
+            </a:r>
+            <a:r>
+              <a:rPr lang="en-GB" sz="2400" dirty="0" err="1">
+                <a:solidFill>
+                  <a:srgbClr val="B2AFC4"/>
+                </a:solidFill>
+                <a:latin typeface="Arial" panose="020B0604020202020204" pitchFamily="34" charset="0"/>
+                <a:ea typeface="Calibri" charset="0"/>
+                <a:cs typeface="Arial" panose="020B0604020202020204" pitchFamily="34" charset="0"/>
+              </a:rPr>
+              <a:t>PiaSys.com</a:t>
+            </a:r>
+            <a:r>
+              <a:rPr lang="en-GB" sz="2400" dirty="0">
+                <a:solidFill>
+                  <a:srgbClr val="B2AFC4"/>
+                </a:solidFill>
+                <a:latin typeface="Arial" panose="020B0604020202020204" pitchFamily="34" charset="0"/>
+                <a:ea typeface="Calibri" charset="0"/>
+                <a:cs typeface="Arial" panose="020B0604020202020204" pitchFamily="34" charset="0"/>
+              </a:rPr>
+              <a:t>, Italy</a:t>
+            </a:r>
+          </a:p>
+        </p:txBody>
+      </p:sp>
+      <p:pic>
+        <p:nvPicPr>
+          <p:cNvPr id="8" name="Picture 7" descr="A person smiling for the camera&#10;&#10;AI-generated content may be incorrect.">
+            <a:extLst>
+              <a:ext uri="{FF2B5EF4-FFF2-40B4-BE49-F238E27FC236}">
+                <a16:creationId xmlns:a16="http://schemas.microsoft.com/office/drawing/2014/main" id="{24972705-90FF-49CC-0645-0DF15BC81F7E}"/>
+              </a:ext>
+            </a:extLst>
+          </p:cNvPr>
+          <p:cNvPicPr>
+            <a:picLocks noChangeAspect="1"/>
+          </p:cNvPicPr>
+          <p:nvPr/>
+        </p:nvPicPr>
+        <p:blipFill>
+          <a:blip r:embed="rId3">
+            <a:extLst>
+              <a:ext uri="{28A0092B-C50C-407E-A947-70E740481C1C}">
+                <a14:useLocalDpi xmlns:a14="http://schemas.microsoft.com/office/drawing/2010/main" val="0"/>
+              </a:ext>
+            </a:extLst>
+          </a:blip>
+          <a:stretch>
+            <a:fillRect/>
+          </a:stretch>
+        </p:blipFill>
+        <p:spPr>
+          <a:xfrm>
+            <a:off x="1681804" y="3429001"/>
+            <a:ext cx="1714500" cy="1714500"/>
+          </a:xfrm>
+          <a:prstGeom prst="rect">
+            <a:avLst/>
+          </a:prstGeom>
+        </p:spPr>
+      </p:pic>
+      <p:sp>
+        <p:nvSpPr>
+          <p:cNvPr id="7" name="TextBox 6">
+            <a:extLst>
+              <a:ext uri="{FF2B5EF4-FFF2-40B4-BE49-F238E27FC236}">
+                <a16:creationId xmlns:a16="http://schemas.microsoft.com/office/drawing/2014/main" id="{4AC4BE2F-EB7F-F2D3-9202-88D64D5295AB}"/>
+              </a:ext>
+            </a:extLst>
+          </p:cNvPr>
+          <p:cNvSpPr txBox="1"/>
+          <p:nvPr/>
+        </p:nvSpPr>
+        <p:spPr>
+          <a:xfrm>
+            <a:off x="3843545" y="1494532"/>
+            <a:ext cx="8011886" cy="615553"/>
+          </a:xfrm>
+          <a:prstGeom prst="rect">
+            <a:avLst/>
+          </a:prstGeom>
+          <a:noFill/>
+        </p:spPr>
+        <p:txBody>
+          <a:bodyPr wrap="square" rtlCol="0" anchor="t">
+            <a:spAutoFit/>
+          </a:bodyPr>
+          <a:lstStyle/>
+          <a:p>
+            <a:r>
+              <a:rPr lang="en-GB" sz="3400" b="1" dirty="0">
+                <a:solidFill>
+                  <a:srgbClr val="00C700"/>
+                </a:solidFill>
+                <a:latin typeface="Arial" panose="020B0604020202020204" pitchFamily="34" charset="0"/>
+                <a:ea typeface="Calibri" charset="0"/>
+                <a:cs typeface="Arial" panose="020B0604020202020204" pitchFamily="34" charset="0"/>
+              </a:rPr>
+              <a:t>Peter Paul Kirschner</a:t>
+            </a:r>
+          </a:p>
+        </p:txBody>
+      </p:sp>
+      <p:sp>
+        <p:nvSpPr>
+          <p:cNvPr id="9" name="TextBox 8">
+            <a:extLst>
+              <a:ext uri="{FF2B5EF4-FFF2-40B4-BE49-F238E27FC236}">
+                <a16:creationId xmlns:a16="http://schemas.microsoft.com/office/drawing/2014/main" id="{06F2659D-0BC8-4DBC-50E2-5BC4B7EF2A50}"/>
+              </a:ext>
+            </a:extLst>
+          </p:cNvPr>
+          <p:cNvSpPr txBox="1"/>
+          <p:nvPr/>
+        </p:nvSpPr>
+        <p:spPr>
+          <a:xfrm>
+            <a:off x="3843545" y="2110085"/>
+            <a:ext cx="8011886" cy="461665"/>
+          </a:xfrm>
+          <a:prstGeom prst="rect">
+            <a:avLst/>
+          </a:prstGeom>
+          <a:noFill/>
+        </p:spPr>
+        <p:txBody>
+          <a:bodyPr wrap="square" rtlCol="0" anchor="t">
+            <a:spAutoFit/>
+          </a:bodyPr>
+          <a:lstStyle/>
+          <a:p>
+            <a:r>
+              <a:rPr lang="en-GB" sz="2400" dirty="0">
+                <a:solidFill>
+                  <a:srgbClr val="B2AFC4"/>
+                </a:solidFill>
+                <a:latin typeface="Arial" panose="020B0604020202020204" pitchFamily="34" charset="0"/>
+                <a:ea typeface="Calibri" charset="0"/>
+                <a:cs typeface="Arial" panose="020B0604020202020204" pitchFamily="34" charset="0"/>
+              </a:rPr>
+              <a:t>MVP - ACP CUBIDO Digital Solutions GmbH, Austria​</a:t>
+            </a:r>
+          </a:p>
+        </p:txBody>
+      </p:sp>
+      <p:pic>
+        <p:nvPicPr>
+          <p:cNvPr id="11" name="Picture 10" descr="A person wearing glasses and a black polo shirt&#10;&#10;AI-generated content may be incorrect.">
+            <a:extLst>
+              <a:ext uri="{FF2B5EF4-FFF2-40B4-BE49-F238E27FC236}">
+                <a16:creationId xmlns:a16="http://schemas.microsoft.com/office/drawing/2014/main" id="{869DA7B3-0F95-433B-9902-84F9F8A0BB69}"/>
+              </a:ext>
+            </a:extLst>
+          </p:cNvPr>
+          <p:cNvPicPr>
+            <a:picLocks noChangeAspect="1"/>
+          </p:cNvPicPr>
+          <p:nvPr/>
+        </p:nvPicPr>
+        <p:blipFill>
+          <a:blip r:embed="rId4">
+            <a:extLst>
+              <a:ext uri="{28A0092B-C50C-407E-A947-70E740481C1C}">
+                <a14:useLocalDpi xmlns:a14="http://schemas.microsoft.com/office/drawing/2010/main" val="0"/>
+              </a:ext>
+            </a:extLst>
+          </a:blip>
+          <a:srcRect l="19023" t="6603" r="20084" b="47467"/>
+          <a:stretch>
+            <a:fillRect/>
+          </a:stretch>
+        </p:blipFill>
+        <p:spPr>
+          <a:xfrm>
+            <a:off x="1681804" y="1252835"/>
+            <a:ext cx="1736885" cy="1714500"/>
+          </a:xfrm>
+          <a:prstGeom prst="rect">
+            <a:avLst/>
+          </a:prstGeom>
+        </p:spPr>
+      </p:pic>
+    </p:spTree>
+    <p:extLst>
+      <p:ext uri="{BB962C8B-B14F-4D97-AF65-F5344CB8AC3E}">
+        <p14:creationId xmlns:p14="http://schemas.microsoft.com/office/powerpoint/2010/main" val="647309179"/>
+      </p:ext>
+    </p:extLst>
+  </p:cSld>
+  <p:clrMapOvr>
+    <a:masterClrMapping/>
+  </p:clrMapOvr>
+</p:sld>
+</file>
+
+<file path=ppt/slides/slide4.xml><?xml version="1.0" encoding="utf-8"?>
 <p:sld xmlns:a="http://schemas.openxmlformats.org/drawingml/2006/main" xmlns:r="http://schemas.openxmlformats.org/officeDocument/2006/relationships" xmlns:p="http://schemas.openxmlformats.org/presentationml/2006/main">
   <p:cSld>
     <p:bg>
@@ -10009,7 +12695,13 @@
     </p:bg>
     <p:spTree>
       <p:nvGrpSpPr>
-        <p:cNvPr id="1" name=""/>
+        <p:cNvPr id="1" name="">
+          <a:extLst>
+            <a:ext uri="{FF2B5EF4-FFF2-40B4-BE49-F238E27FC236}">
+              <a16:creationId xmlns:a16="http://schemas.microsoft.com/office/drawing/2014/main" id="{B17B9096-C85A-9589-39C8-3D89FBC1C911}"/>
+            </a:ext>
+          </a:extLst>
+        </p:cNvPr>
         <p:cNvGrpSpPr/>
         <p:nvPr/>
       </p:nvGrpSpPr>
@@ -10026,7 +12718,7 @@
           <p:cNvPr id="2" name="Text Placeholder 1">
             <a:extLst>
               <a:ext uri="{FF2B5EF4-FFF2-40B4-BE49-F238E27FC236}">
-                <a16:creationId xmlns:a16="http://schemas.microsoft.com/office/drawing/2014/main" id="{C448848D-FDC8-0E4A-A9A5-45DDD99E9CB7}"/>
+                <a16:creationId xmlns:a16="http://schemas.microsoft.com/office/drawing/2014/main" id="{97DAB181-F5E4-B8D1-C170-062D909BD614}"/>
               </a:ext>
             </a:extLst>
           </p:cNvPr>
@@ -10061,7 +12753,7 @@
     </p:spTree>
     <p:extLst>
       <p:ext uri="{BB962C8B-B14F-4D97-AF65-F5344CB8AC3E}">
-        <p14:creationId xmlns:p14="http://schemas.microsoft.com/office/powerpoint/2010/main" val="391276983"/>
+        <p14:creationId xmlns:p14="http://schemas.microsoft.com/office/powerpoint/2010/main" val="2729831894"/>
       </p:ext>
     </p:extLst>
   </p:cSld>
@@ -10071,7 +12763,7 @@
 </p:sld>
 </file>
 
-<file path=ppt/slides/slide4.xml><?xml version="1.0" encoding="utf-8"?>
+<file path=ppt/slides/slide5.xml><?xml version="1.0" encoding="utf-8"?>
 <p:sld xmlns:a="http://schemas.openxmlformats.org/drawingml/2006/main" xmlns:r="http://schemas.openxmlformats.org/officeDocument/2006/relationships" xmlns:p="http://schemas.openxmlformats.org/presentationml/2006/main">
   <p:cSld>
     <p:bg>
@@ -10224,10 +12916,571 @@
   <p:clrMapOvr>
     <a:masterClrMapping/>
   </p:clrMapOvr>
+  <p:timing>
+    <p:tnLst>
+      <p:par>
+        <p:cTn id="1" dur="indefinite" restart="never" nodeType="tmRoot">
+          <p:childTnLst>
+            <p:seq concurrent="1" nextAc="seek">
+              <p:cTn id="2" dur="indefinite" nodeType="mainSeq">
+                <p:childTnLst>
+                  <p:par>
+                    <p:cTn id="3" fill="hold">
+                      <p:stCondLst>
+                        <p:cond delay="indefinite"/>
+                      </p:stCondLst>
+                      <p:childTnLst>
+                        <p:par>
+                          <p:cTn id="4" fill="hold">
+                            <p:stCondLst>
+                              <p:cond delay="0"/>
+                            </p:stCondLst>
+                            <p:childTnLst>
+                              <p:par>
+                                <p:cTn id="5" presetID="12" presetClass="entr" presetSubtype="4" fill="hold" grpId="0" nodeType="clickEffect">
+                                  <p:stCondLst>
+                                    <p:cond delay="0"/>
+                                  </p:stCondLst>
+                                  <p:childTnLst>
+                                    <p:set>
+                                      <p:cBhvr>
+                                        <p:cTn id="6" dur="1" fill="hold">
+                                          <p:stCondLst>
+                                            <p:cond delay="0"/>
+                                          </p:stCondLst>
+                                        </p:cTn>
+                                        <p:tgtEl>
+                                          <p:spTgt spid="3">
+                                            <p:txEl>
+                                              <p:pRg st="0" end="0"/>
+                                            </p:txEl>
+                                          </p:spTgt>
+                                        </p:tgtEl>
+                                        <p:attrNameLst>
+                                          <p:attrName>style.visibility</p:attrName>
+                                        </p:attrNameLst>
+                                      </p:cBhvr>
+                                      <p:to>
+                                        <p:strVal val="visible"/>
+                                      </p:to>
+                                    </p:set>
+                                    <p:anim calcmode="lin" valueType="num">
+                                      <p:cBhvr additive="base">
+                                        <p:cTn id="7" dur="500"/>
+                                        <p:tgtEl>
+                                          <p:spTgt spid="3">
+                                            <p:txEl>
+                                              <p:pRg st="0" end="0"/>
+                                            </p:txEl>
+                                          </p:spTgt>
+                                        </p:tgtEl>
+                                        <p:attrNameLst>
+                                          <p:attrName>ppt_y</p:attrName>
+                                        </p:attrNameLst>
+                                      </p:cBhvr>
+                                      <p:tavLst>
+                                        <p:tav tm="0">
+                                          <p:val>
+                                            <p:strVal val="#ppt_y+#ppt_h*1.125000"/>
+                                          </p:val>
+                                        </p:tav>
+                                        <p:tav tm="100000">
+                                          <p:val>
+                                            <p:strVal val="#ppt_y"/>
+                                          </p:val>
+                                        </p:tav>
+                                      </p:tavLst>
+                                    </p:anim>
+                                    <p:animEffect transition="in" filter="wipe(up)">
+                                      <p:cBhvr>
+                                        <p:cTn id="8" dur="500"/>
+                                        <p:tgtEl>
+                                          <p:spTgt spid="3">
+                                            <p:txEl>
+                                              <p:pRg st="0" end="0"/>
+                                            </p:txEl>
+                                          </p:spTgt>
+                                        </p:tgtEl>
+                                      </p:cBhvr>
+                                    </p:animEffect>
+                                  </p:childTnLst>
+                                </p:cTn>
+                              </p:par>
+                            </p:childTnLst>
+                          </p:cTn>
+                        </p:par>
+                      </p:childTnLst>
+                    </p:cTn>
+                  </p:par>
+                  <p:par>
+                    <p:cTn id="9" fill="hold">
+                      <p:stCondLst>
+                        <p:cond delay="indefinite"/>
+                      </p:stCondLst>
+                      <p:childTnLst>
+                        <p:par>
+                          <p:cTn id="10" fill="hold">
+                            <p:stCondLst>
+                              <p:cond delay="0"/>
+                            </p:stCondLst>
+                            <p:childTnLst>
+                              <p:par>
+                                <p:cTn id="11" presetID="12" presetClass="entr" presetSubtype="4" fill="hold" grpId="0" nodeType="clickEffect">
+                                  <p:stCondLst>
+                                    <p:cond delay="0"/>
+                                  </p:stCondLst>
+                                  <p:childTnLst>
+                                    <p:set>
+                                      <p:cBhvr>
+                                        <p:cTn id="12" dur="1" fill="hold">
+                                          <p:stCondLst>
+                                            <p:cond delay="0"/>
+                                          </p:stCondLst>
+                                        </p:cTn>
+                                        <p:tgtEl>
+                                          <p:spTgt spid="3">
+                                            <p:txEl>
+                                              <p:pRg st="1" end="1"/>
+                                            </p:txEl>
+                                          </p:spTgt>
+                                        </p:tgtEl>
+                                        <p:attrNameLst>
+                                          <p:attrName>style.visibility</p:attrName>
+                                        </p:attrNameLst>
+                                      </p:cBhvr>
+                                      <p:to>
+                                        <p:strVal val="visible"/>
+                                      </p:to>
+                                    </p:set>
+                                    <p:anim calcmode="lin" valueType="num">
+                                      <p:cBhvr additive="base">
+                                        <p:cTn id="13" dur="500"/>
+                                        <p:tgtEl>
+                                          <p:spTgt spid="3">
+                                            <p:txEl>
+                                              <p:pRg st="1" end="1"/>
+                                            </p:txEl>
+                                          </p:spTgt>
+                                        </p:tgtEl>
+                                        <p:attrNameLst>
+                                          <p:attrName>ppt_y</p:attrName>
+                                        </p:attrNameLst>
+                                      </p:cBhvr>
+                                      <p:tavLst>
+                                        <p:tav tm="0">
+                                          <p:val>
+                                            <p:strVal val="#ppt_y+#ppt_h*1.125000"/>
+                                          </p:val>
+                                        </p:tav>
+                                        <p:tav tm="100000">
+                                          <p:val>
+                                            <p:strVal val="#ppt_y"/>
+                                          </p:val>
+                                        </p:tav>
+                                      </p:tavLst>
+                                    </p:anim>
+                                    <p:animEffect transition="in" filter="wipe(up)">
+                                      <p:cBhvr>
+                                        <p:cTn id="14" dur="500"/>
+                                        <p:tgtEl>
+                                          <p:spTgt spid="3">
+                                            <p:txEl>
+                                              <p:pRg st="1" end="1"/>
+                                            </p:txEl>
+                                          </p:spTgt>
+                                        </p:tgtEl>
+                                      </p:cBhvr>
+                                    </p:animEffect>
+                                  </p:childTnLst>
+                                </p:cTn>
+                              </p:par>
+                            </p:childTnLst>
+                          </p:cTn>
+                        </p:par>
+                      </p:childTnLst>
+                    </p:cTn>
+                  </p:par>
+                  <p:par>
+                    <p:cTn id="15" fill="hold">
+                      <p:stCondLst>
+                        <p:cond delay="indefinite"/>
+                      </p:stCondLst>
+                      <p:childTnLst>
+                        <p:par>
+                          <p:cTn id="16" fill="hold">
+                            <p:stCondLst>
+                              <p:cond delay="0"/>
+                            </p:stCondLst>
+                            <p:childTnLst>
+                              <p:par>
+                                <p:cTn id="17" presetID="12" presetClass="entr" presetSubtype="4" fill="hold" grpId="0" nodeType="clickEffect">
+                                  <p:stCondLst>
+                                    <p:cond delay="0"/>
+                                  </p:stCondLst>
+                                  <p:childTnLst>
+                                    <p:set>
+                                      <p:cBhvr>
+                                        <p:cTn id="18" dur="1" fill="hold">
+                                          <p:stCondLst>
+                                            <p:cond delay="0"/>
+                                          </p:stCondLst>
+                                        </p:cTn>
+                                        <p:tgtEl>
+                                          <p:spTgt spid="3">
+                                            <p:txEl>
+                                              <p:pRg st="2" end="2"/>
+                                            </p:txEl>
+                                          </p:spTgt>
+                                        </p:tgtEl>
+                                        <p:attrNameLst>
+                                          <p:attrName>style.visibility</p:attrName>
+                                        </p:attrNameLst>
+                                      </p:cBhvr>
+                                      <p:to>
+                                        <p:strVal val="visible"/>
+                                      </p:to>
+                                    </p:set>
+                                    <p:anim calcmode="lin" valueType="num">
+                                      <p:cBhvr additive="base">
+                                        <p:cTn id="19" dur="500"/>
+                                        <p:tgtEl>
+                                          <p:spTgt spid="3">
+                                            <p:txEl>
+                                              <p:pRg st="2" end="2"/>
+                                            </p:txEl>
+                                          </p:spTgt>
+                                        </p:tgtEl>
+                                        <p:attrNameLst>
+                                          <p:attrName>ppt_y</p:attrName>
+                                        </p:attrNameLst>
+                                      </p:cBhvr>
+                                      <p:tavLst>
+                                        <p:tav tm="0">
+                                          <p:val>
+                                            <p:strVal val="#ppt_y+#ppt_h*1.125000"/>
+                                          </p:val>
+                                        </p:tav>
+                                        <p:tav tm="100000">
+                                          <p:val>
+                                            <p:strVal val="#ppt_y"/>
+                                          </p:val>
+                                        </p:tav>
+                                      </p:tavLst>
+                                    </p:anim>
+                                    <p:animEffect transition="in" filter="wipe(up)">
+                                      <p:cBhvr>
+                                        <p:cTn id="20" dur="500"/>
+                                        <p:tgtEl>
+                                          <p:spTgt spid="3">
+                                            <p:txEl>
+                                              <p:pRg st="2" end="2"/>
+                                            </p:txEl>
+                                          </p:spTgt>
+                                        </p:tgtEl>
+                                      </p:cBhvr>
+                                    </p:animEffect>
+                                  </p:childTnLst>
+                                </p:cTn>
+                              </p:par>
+                            </p:childTnLst>
+                          </p:cTn>
+                        </p:par>
+                      </p:childTnLst>
+                    </p:cTn>
+                  </p:par>
+                  <p:par>
+                    <p:cTn id="21" fill="hold">
+                      <p:stCondLst>
+                        <p:cond delay="indefinite"/>
+                      </p:stCondLst>
+                      <p:childTnLst>
+                        <p:par>
+                          <p:cTn id="22" fill="hold">
+                            <p:stCondLst>
+                              <p:cond delay="0"/>
+                            </p:stCondLst>
+                            <p:childTnLst>
+                              <p:par>
+                                <p:cTn id="23" presetID="12" presetClass="entr" presetSubtype="4" fill="hold" grpId="0" nodeType="clickEffect">
+                                  <p:stCondLst>
+                                    <p:cond delay="0"/>
+                                  </p:stCondLst>
+                                  <p:childTnLst>
+                                    <p:set>
+                                      <p:cBhvr>
+                                        <p:cTn id="24" dur="1" fill="hold">
+                                          <p:stCondLst>
+                                            <p:cond delay="0"/>
+                                          </p:stCondLst>
+                                        </p:cTn>
+                                        <p:tgtEl>
+                                          <p:spTgt spid="3">
+                                            <p:txEl>
+                                              <p:pRg st="3" end="3"/>
+                                            </p:txEl>
+                                          </p:spTgt>
+                                        </p:tgtEl>
+                                        <p:attrNameLst>
+                                          <p:attrName>style.visibility</p:attrName>
+                                        </p:attrNameLst>
+                                      </p:cBhvr>
+                                      <p:to>
+                                        <p:strVal val="visible"/>
+                                      </p:to>
+                                    </p:set>
+                                    <p:anim calcmode="lin" valueType="num">
+                                      <p:cBhvr additive="base">
+                                        <p:cTn id="25" dur="500"/>
+                                        <p:tgtEl>
+                                          <p:spTgt spid="3">
+                                            <p:txEl>
+                                              <p:pRg st="3" end="3"/>
+                                            </p:txEl>
+                                          </p:spTgt>
+                                        </p:tgtEl>
+                                        <p:attrNameLst>
+                                          <p:attrName>ppt_y</p:attrName>
+                                        </p:attrNameLst>
+                                      </p:cBhvr>
+                                      <p:tavLst>
+                                        <p:tav tm="0">
+                                          <p:val>
+                                            <p:strVal val="#ppt_y+#ppt_h*1.125000"/>
+                                          </p:val>
+                                        </p:tav>
+                                        <p:tav tm="100000">
+                                          <p:val>
+                                            <p:strVal val="#ppt_y"/>
+                                          </p:val>
+                                        </p:tav>
+                                      </p:tavLst>
+                                    </p:anim>
+                                    <p:animEffect transition="in" filter="wipe(up)">
+                                      <p:cBhvr>
+                                        <p:cTn id="26" dur="500"/>
+                                        <p:tgtEl>
+                                          <p:spTgt spid="3">
+                                            <p:txEl>
+                                              <p:pRg st="3" end="3"/>
+                                            </p:txEl>
+                                          </p:spTgt>
+                                        </p:tgtEl>
+                                      </p:cBhvr>
+                                    </p:animEffect>
+                                  </p:childTnLst>
+                                </p:cTn>
+                              </p:par>
+                            </p:childTnLst>
+                          </p:cTn>
+                        </p:par>
+                      </p:childTnLst>
+                    </p:cTn>
+                  </p:par>
+                  <p:par>
+                    <p:cTn id="27" fill="hold">
+                      <p:stCondLst>
+                        <p:cond delay="indefinite"/>
+                      </p:stCondLst>
+                      <p:childTnLst>
+                        <p:par>
+                          <p:cTn id="28" fill="hold">
+                            <p:stCondLst>
+                              <p:cond delay="0"/>
+                            </p:stCondLst>
+                            <p:childTnLst>
+                              <p:par>
+                                <p:cTn id="29" presetID="12" presetClass="entr" presetSubtype="4" fill="hold" grpId="0" nodeType="clickEffect">
+                                  <p:stCondLst>
+                                    <p:cond delay="0"/>
+                                  </p:stCondLst>
+                                  <p:childTnLst>
+                                    <p:set>
+                                      <p:cBhvr>
+                                        <p:cTn id="30" dur="1" fill="hold">
+                                          <p:stCondLst>
+                                            <p:cond delay="0"/>
+                                          </p:stCondLst>
+                                        </p:cTn>
+                                        <p:tgtEl>
+                                          <p:spTgt spid="3">
+                                            <p:txEl>
+                                              <p:pRg st="4" end="4"/>
+                                            </p:txEl>
+                                          </p:spTgt>
+                                        </p:tgtEl>
+                                        <p:attrNameLst>
+                                          <p:attrName>style.visibility</p:attrName>
+                                        </p:attrNameLst>
+                                      </p:cBhvr>
+                                      <p:to>
+                                        <p:strVal val="visible"/>
+                                      </p:to>
+                                    </p:set>
+                                    <p:anim calcmode="lin" valueType="num">
+                                      <p:cBhvr additive="base">
+                                        <p:cTn id="31" dur="500"/>
+                                        <p:tgtEl>
+                                          <p:spTgt spid="3">
+                                            <p:txEl>
+                                              <p:pRg st="4" end="4"/>
+                                            </p:txEl>
+                                          </p:spTgt>
+                                        </p:tgtEl>
+                                        <p:attrNameLst>
+                                          <p:attrName>ppt_y</p:attrName>
+                                        </p:attrNameLst>
+                                      </p:cBhvr>
+                                      <p:tavLst>
+                                        <p:tav tm="0">
+                                          <p:val>
+                                            <p:strVal val="#ppt_y+#ppt_h*1.125000"/>
+                                          </p:val>
+                                        </p:tav>
+                                        <p:tav tm="100000">
+                                          <p:val>
+                                            <p:strVal val="#ppt_y"/>
+                                          </p:val>
+                                        </p:tav>
+                                      </p:tavLst>
+                                    </p:anim>
+                                    <p:animEffect transition="in" filter="wipe(up)">
+                                      <p:cBhvr>
+                                        <p:cTn id="32" dur="500"/>
+                                        <p:tgtEl>
+                                          <p:spTgt spid="3">
+                                            <p:txEl>
+                                              <p:pRg st="4" end="4"/>
+                                            </p:txEl>
+                                          </p:spTgt>
+                                        </p:tgtEl>
+                                      </p:cBhvr>
+                                    </p:animEffect>
+                                  </p:childTnLst>
+                                </p:cTn>
+                              </p:par>
+                            </p:childTnLst>
+                          </p:cTn>
+                        </p:par>
+                      </p:childTnLst>
+                    </p:cTn>
+                  </p:par>
+                  <p:par>
+                    <p:cTn id="33" fill="hold">
+                      <p:stCondLst>
+                        <p:cond delay="indefinite"/>
+                      </p:stCondLst>
+                      <p:childTnLst>
+                        <p:par>
+                          <p:cTn id="34" fill="hold">
+                            <p:stCondLst>
+                              <p:cond delay="0"/>
+                            </p:stCondLst>
+                            <p:childTnLst>
+                              <p:par>
+                                <p:cTn id="35" presetID="12" presetClass="entr" presetSubtype="4" fill="hold" grpId="0" nodeType="clickEffect">
+                                  <p:stCondLst>
+                                    <p:cond delay="0"/>
+                                  </p:stCondLst>
+                                  <p:childTnLst>
+                                    <p:set>
+                                      <p:cBhvr>
+                                        <p:cTn id="36" dur="1" fill="hold">
+                                          <p:stCondLst>
+                                            <p:cond delay="0"/>
+                                          </p:stCondLst>
+                                        </p:cTn>
+                                        <p:tgtEl>
+                                          <p:spTgt spid="3">
+                                            <p:txEl>
+                                              <p:pRg st="5" end="5"/>
+                                            </p:txEl>
+                                          </p:spTgt>
+                                        </p:tgtEl>
+                                        <p:attrNameLst>
+                                          <p:attrName>style.visibility</p:attrName>
+                                        </p:attrNameLst>
+                                      </p:cBhvr>
+                                      <p:to>
+                                        <p:strVal val="visible"/>
+                                      </p:to>
+                                    </p:set>
+                                    <p:anim calcmode="lin" valueType="num">
+                                      <p:cBhvr additive="base">
+                                        <p:cTn id="37" dur="500"/>
+                                        <p:tgtEl>
+                                          <p:spTgt spid="3">
+                                            <p:txEl>
+                                              <p:pRg st="5" end="5"/>
+                                            </p:txEl>
+                                          </p:spTgt>
+                                        </p:tgtEl>
+                                        <p:attrNameLst>
+                                          <p:attrName>ppt_y</p:attrName>
+                                        </p:attrNameLst>
+                                      </p:cBhvr>
+                                      <p:tavLst>
+                                        <p:tav tm="0">
+                                          <p:val>
+                                            <p:strVal val="#ppt_y+#ppt_h*1.125000"/>
+                                          </p:val>
+                                        </p:tav>
+                                        <p:tav tm="100000">
+                                          <p:val>
+                                            <p:strVal val="#ppt_y"/>
+                                          </p:val>
+                                        </p:tav>
+                                      </p:tavLst>
+                                    </p:anim>
+                                    <p:animEffect transition="in" filter="wipe(up)">
+                                      <p:cBhvr>
+                                        <p:cTn id="38" dur="500"/>
+                                        <p:tgtEl>
+                                          <p:spTgt spid="3">
+                                            <p:txEl>
+                                              <p:pRg st="5" end="5"/>
+                                            </p:txEl>
+                                          </p:spTgt>
+                                        </p:tgtEl>
+                                      </p:cBhvr>
+                                    </p:animEffect>
+                                  </p:childTnLst>
+                                </p:cTn>
+                              </p:par>
+                            </p:childTnLst>
+                          </p:cTn>
+                        </p:par>
+                      </p:childTnLst>
+                    </p:cTn>
+                  </p:par>
+                </p:childTnLst>
+              </p:cTn>
+              <p:prevCondLst>
+                <p:cond evt="onPrev" delay="0">
+                  <p:tgtEl>
+                    <p:sldTgt/>
+                  </p:tgtEl>
+                </p:cond>
+              </p:prevCondLst>
+              <p:nextCondLst>
+                <p:cond evt="onNext" delay="0">
+                  <p:tgtEl>
+                    <p:sldTgt/>
+                  </p:tgtEl>
+                </p:cond>
+              </p:nextCondLst>
+            </p:seq>
+          </p:childTnLst>
+        </p:cTn>
+      </p:par>
+    </p:tnLst>
+    <p:bldLst>
+      <p:bldP spid="3" grpId="0" uiExpand="1" build="p"/>
+    </p:bldLst>
+  </p:timing>
 </p:sld>
 </file>
 
-<file path=ppt/slides/slide5.xml><?xml version="1.0" encoding="utf-8"?>
+<file path=ppt/slides/slide6.xml><?xml version="1.0" encoding="utf-8"?>
 <p:sld xmlns:a="http://schemas.openxmlformats.org/drawingml/2006/main" xmlns:r="http://schemas.openxmlformats.org/officeDocument/2006/relationships" xmlns:p="http://schemas.openxmlformats.org/presentationml/2006/main">
   <p:cSld>
     <p:bg>
@@ -10407,10 +13660,747 @@
   <p:clrMapOvr>
     <a:masterClrMapping/>
   </p:clrMapOvr>
+  <p:timing>
+    <p:tnLst>
+      <p:par>
+        <p:cTn id="1" dur="indefinite" restart="never" nodeType="tmRoot">
+          <p:childTnLst>
+            <p:seq concurrent="1" nextAc="seek">
+              <p:cTn id="2" dur="indefinite" nodeType="mainSeq">
+                <p:childTnLst>
+                  <p:par>
+                    <p:cTn id="3" fill="hold">
+                      <p:stCondLst>
+                        <p:cond delay="indefinite"/>
+                      </p:stCondLst>
+                      <p:childTnLst>
+                        <p:par>
+                          <p:cTn id="4" fill="hold">
+                            <p:stCondLst>
+                              <p:cond delay="0"/>
+                            </p:stCondLst>
+                            <p:childTnLst>
+                              <p:par>
+                                <p:cTn id="5" presetID="12" presetClass="entr" presetSubtype="4" fill="hold" grpId="0" nodeType="clickEffect">
+                                  <p:stCondLst>
+                                    <p:cond delay="0"/>
+                                  </p:stCondLst>
+                                  <p:childTnLst>
+                                    <p:set>
+                                      <p:cBhvr>
+                                        <p:cTn id="6" dur="1" fill="hold">
+                                          <p:stCondLst>
+                                            <p:cond delay="0"/>
+                                          </p:stCondLst>
+                                        </p:cTn>
+                                        <p:tgtEl>
+                                          <p:spTgt spid="3">
+                                            <p:txEl>
+                                              <p:pRg st="0" end="0"/>
+                                            </p:txEl>
+                                          </p:spTgt>
+                                        </p:tgtEl>
+                                        <p:attrNameLst>
+                                          <p:attrName>style.visibility</p:attrName>
+                                        </p:attrNameLst>
+                                      </p:cBhvr>
+                                      <p:to>
+                                        <p:strVal val="visible"/>
+                                      </p:to>
+                                    </p:set>
+                                    <p:anim calcmode="lin" valueType="num">
+                                      <p:cBhvr additive="base">
+                                        <p:cTn id="7" dur="500"/>
+                                        <p:tgtEl>
+                                          <p:spTgt spid="3">
+                                            <p:txEl>
+                                              <p:pRg st="0" end="0"/>
+                                            </p:txEl>
+                                          </p:spTgt>
+                                        </p:tgtEl>
+                                        <p:attrNameLst>
+                                          <p:attrName>ppt_y</p:attrName>
+                                        </p:attrNameLst>
+                                      </p:cBhvr>
+                                      <p:tavLst>
+                                        <p:tav tm="0">
+                                          <p:val>
+                                            <p:strVal val="#ppt_y+#ppt_h*1.125000"/>
+                                          </p:val>
+                                        </p:tav>
+                                        <p:tav tm="100000">
+                                          <p:val>
+                                            <p:strVal val="#ppt_y"/>
+                                          </p:val>
+                                        </p:tav>
+                                      </p:tavLst>
+                                    </p:anim>
+                                    <p:animEffect transition="in" filter="wipe(up)">
+                                      <p:cBhvr>
+                                        <p:cTn id="8" dur="500"/>
+                                        <p:tgtEl>
+                                          <p:spTgt spid="3">
+                                            <p:txEl>
+                                              <p:pRg st="0" end="0"/>
+                                            </p:txEl>
+                                          </p:spTgt>
+                                        </p:tgtEl>
+                                      </p:cBhvr>
+                                    </p:animEffect>
+                                  </p:childTnLst>
+                                </p:cTn>
+                              </p:par>
+                            </p:childTnLst>
+                          </p:cTn>
+                        </p:par>
+                      </p:childTnLst>
+                    </p:cTn>
+                  </p:par>
+                  <p:par>
+                    <p:cTn id="9" fill="hold">
+                      <p:stCondLst>
+                        <p:cond delay="indefinite"/>
+                      </p:stCondLst>
+                      <p:childTnLst>
+                        <p:par>
+                          <p:cTn id="10" fill="hold">
+                            <p:stCondLst>
+                              <p:cond delay="0"/>
+                            </p:stCondLst>
+                            <p:childTnLst>
+                              <p:par>
+                                <p:cTn id="11" presetID="12" presetClass="entr" presetSubtype="4" fill="hold" grpId="0" nodeType="clickEffect">
+                                  <p:stCondLst>
+                                    <p:cond delay="0"/>
+                                  </p:stCondLst>
+                                  <p:childTnLst>
+                                    <p:set>
+                                      <p:cBhvr>
+                                        <p:cTn id="12" dur="1" fill="hold">
+                                          <p:stCondLst>
+                                            <p:cond delay="0"/>
+                                          </p:stCondLst>
+                                        </p:cTn>
+                                        <p:tgtEl>
+                                          <p:spTgt spid="3">
+                                            <p:txEl>
+                                              <p:pRg st="1" end="1"/>
+                                            </p:txEl>
+                                          </p:spTgt>
+                                        </p:tgtEl>
+                                        <p:attrNameLst>
+                                          <p:attrName>style.visibility</p:attrName>
+                                        </p:attrNameLst>
+                                      </p:cBhvr>
+                                      <p:to>
+                                        <p:strVal val="visible"/>
+                                      </p:to>
+                                    </p:set>
+                                    <p:anim calcmode="lin" valueType="num">
+                                      <p:cBhvr additive="base">
+                                        <p:cTn id="13" dur="500"/>
+                                        <p:tgtEl>
+                                          <p:spTgt spid="3">
+                                            <p:txEl>
+                                              <p:pRg st="1" end="1"/>
+                                            </p:txEl>
+                                          </p:spTgt>
+                                        </p:tgtEl>
+                                        <p:attrNameLst>
+                                          <p:attrName>ppt_y</p:attrName>
+                                        </p:attrNameLst>
+                                      </p:cBhvr>
+                                      <p:tavLst>
+                                        <p:tav tm="0">
+                                          <p:val>
+                                            <p:strVal val="#ppt_y+#ppt_h*1.125000"/>
+                                          </p:val>
+                                        </p:tav>
+                                        <p:tav tm="100000">
+                                          <p:val>
+                                            <p:strVal val="#ppt_y"/>
+                                          </p:val>
+                                        </p:tav>
+                                      </p:tavLst>
+                                    </p:anim>
+                                    <p:animEffect transition="in" filter="wipe(up)">
+                                      <p:cBhvr>
+                                        <p:cTn id="14" dur="500"/>
+                                        <p:tgtEl>
+                                          <p:spTgt spid="3">
+                                            <p:txEl>
+                                              <p:pRg st="1" end="1"/>
+                                            </p:txEl>
+                                          </p:spTgt>
+                                        </p:tgtEl>
+                                      </p:cBhvr>
+                                    </p:animEffect>
+                                  </p:childTnLst>
+                                </p:cTn>
+                              </p:par>
+                            </p:childTnLst>
+                          </p:cTn>
+                        </p:par>
+                      </p:childTnLst>
+                    </p:cTn>
+                  </p:par>
+                  <p:par>
+                    <p:cTn id="15" fill="hold">
+                      <p:stCondLst>
+                        <p:cond delay="indefinite"/>
+                      </p:stCondLst>
+                      <p:childTnLst>
+                        <p:par>
+                          <p:cTn id="16" fill="hold">
+                            <p:stCondLst>
+                              <p:cond delay="0"/>
+                            </p:stCondLst>
+                            <p:childTnLst>
+                              <p:par>
+                                <p:cTn id="17" presetID="12" presetClass="entr" presetSubtype="4" fill="hold" grpId="0" nodeType="clickEffect">
+                                  <p:stCondLst>
+                                    <p:cond delay="0"/>
+                                  </p:stCondLst>
+                                  <p:childTnLst>
+                                    <p:set>
+                                      <p:cBhvr>
+                                        <p:cTn id="18" dur="1" fill="hold">
+                                          <p:stCondLst>
+                                            <p:cond delay="0"/>
+                                          </p:stCondLst>
+                                        </p:cTn>
+                                        <p:tgtEl>
+                                          <p:spTgt spid="3">
+                                            <p:txEl>
+                                              <p:pRg st="2" end="2"/>
+                                            </p:txEl>
+                                          </p:spTgt>
+                                        </p:tgtEl>
+                                        <p:attrNameLst>
+                                          <p:attrName>style.visibility</p:attrName>
+                                        </p:attrNameLst>
+                                      </p:cBhvr>
+                                      <p:to>
+                                        <p:strVal val="visible"/>
+                                      </p:to>
+                                    </p:set>
+                                    <p:anim calcmode="lin" valueType="num">
+                                      <p:cBhvr additive="base">
+                                        <p:cTn id="19" dur="500"/>
+                                        <p:tgtEl>
+                                          <p:spTgt spid="3">
+                                            <p:txEl>
+                                              <p:pRg st="2" end="2"/>
+                                            </p:txEl>
+                                          </p:spTgt>
+                                        </p:tgtEl>
+                                        <p:attrNameLst>
+                                          <p:attrName>ppt_y</p:attrName>
+                                        </p:attrNameLst>
+                                      </p:cBhvr>
+                                      <p:tavLst>
+                                        <p:tav tm="0">
+                                          <p:val>
+                                            <p:strVal val="#ppt_y+#ppt_h*1.125000"/>
+                                          </p:val>
+                                        </p:tav>
+                                        <p:tav tm="100000">
+                                          <p:val>
+                                            <p:strVal val="#ppt_y"/>
+                                          </p:val>
+                                        </p:tav>
+                                      </p:tavLst>
+                                    </p:anim>
+                                    <p:animEffect transition="in" filter="wipe(up)">
+                                      <p:cBhvr>
+                                        <p:cTn id="20" dur="500"/>
+                                        <p:tgtEl>
+                                          <p:spTgt spid="3">
+                                            <p:txEl>
+                                              <p:pRg st="2" end="2"/>
+                                            </p:txEl>
+                                          </p:spTgt>
+                                        </p:tgtEl>
+                                      </p:cBhvr>
+                                    </p:animEffect>
+                                  </p:childTnLst>
+                                </p:cTn>
+                              </p:par>
+                            </p:childTnLst>
+                          </p:cTn>
+                        </p:par>
+                      </p:childTnLst>
+                    </p:cTn>
+                  </p:par>
+                  <p:par>
+                    <p:cTn id="21" fill="hold">
+                      <p:stCondLst>
+                        <p:cond delay="indefinite"/>
+                      </p:stCondLst>
+                      <p:childTnLst>
+                        <p:par>
+                          <p:cTn id="22" fill="hold">
+                            <p:stCondLst>
+                              <p:cond delay="0"/>
+                            </p:stCondLst>
+                            <p:childTnLst>
+                              <p:par>
+                                <p:cTn id="23" presetID="12" presetClass="entr" presetSubtype="4" fill="hold" grpId="0" nodeType="clickEffect">
+                                  <p:stCondLst>
+                                    <p:cond delay="0"/>
+                                  </p:stCondLst>
+                                  <p:childTnLst>
+                                    <p:set>
+                                      <p:cBhvr>
+                                        <p:cTn id="24" dur="1" fill="hold">
+                                          <p:stCondLst>
+                                            <p:cond delay="0"/>
+                                          </p:stCondLst>
+                                        </p:cTn>
+                                        <p:tgtEl>
+                                          <p:spTgt spid="3">
+                                            <p:txEl>
+                                              <p:pRg st="3" end="3"/>
+                                            </p:txEl>
+                                          </p:spTgt>
+                                        </p:tgtEl>
+                                        <p:attrNameLst>
+                                          <p:attrName>style.visibility</p:attrName>
+                                        </p:attrNameLst>
+                                      </p:cBhvr>
+                                      <p:to>
+                                        <p:strVal val="visible"/>
+                                      </p:to>
+                                    </p:set>
+                                    <p:anim calcmode="lin" valueType="num">
+                                      <p:cBhvr additive="base">
+                                        <p:cTn id="25" dur="500"/>
+                                        <p:tgtEl>
+                                          <p:spTgt spid="3">
+                                            <p:txEl>
+                                              <p:pRg st="3" end="3"/>
+                                            </p:txEl>
+                                          </p:spTgt>
+                                        </p:tgtEl>
+                                        <p:attrNameLst>
+                                          <p:attrName>ppt_y</p:attrName>
+                                        </p:attrNameLst>
+                                      </p:cBhvr>
+                                      <p:tavLst>
+                                        <p:tav tm="0">
+                                          <p:val>
+                                            <p:strVal val="#ppt_y+#ppt_h*1.125000"/>
+                                          </p:val>
+                                        </p:tav>
+                                        <p:tav tm="100000">
+                                          <p:val>
+                                            <p:strVal val="#ppt_y"/>
+                                          </p:val>
+                                        </p:tav>
+                                      </p:tavLst>
+                                    </p:anim>
+                                    <p:animEffect transition="in" filter="wipe(up)">
+                                      <p:cBhvr>
+                                        <p:cTn id="26" dur="500"/>
+                                        <p:tgtEl>
+                                          <p:spTgt spid="3">
+                                            <p:txEl>
+                                              <p:pRg st="3" end="3"/>
+                                            </p:txEl>
+                                          </p:spTgt>
+                                        </p:tgtEl>
+                                      </p:cBhvr>
+                                    </p:animEffect>
+                                  </p:childTnLst>
+                                </p:cTn>
+                              </p:par>
+                            </p:childTnLst>
+                          </p:cTn>
+                        </p:par>
+                      </p:childTnLst>
+                    </p:cTn>
+                  </p:par>
+                  <p:par>
+                    <p:cTn id="27" fill="hold">
+                      <p:stCondLst>
+                        <p:cond delay="indefinite"/>
+                      </p:stCondLst>
+                      <p:childTnLst>
+                        <p:par>
+                          <p:cTn id="28" fill="hold">
+                            <p:stCondLst>
+                              <p:cond delay="0"/>
+                            </p:stCondLst>
+                            <p:childTnLst>
+                              <p:par>
+                                <p:cTn id="29" presetID="12" presetClass="entr" presetSubtype="4" fill="hold" grpId="0" nodeType="clickEffect">
+                                  <p:stCondLst>
+                                    <p:cond delay="0"/>
+                                  </p:stCondLst>
+                                  <p:childTnLst>
+                                    <p:set>
+                                      <p:cBhvr>
+                                        <p:cTn id="30" dur="1" fill="hold">
+                                          <p:stCondLst>
+                                            <p:cond delay="0"/>
+                                          </p:stCondLst>
+                                        </p:cTn>
+                                        <p:tgtEl>
+                                          <p:spTgt spid="3">
+                                            <p:txEl>
+                                              <p:pRg st="4" end="4"/>
+                                            </p:txEl>
+                                          </p:spTgt>
+                                        </p:tgtEl>
+                                        <p:attrNameLst>
+                                          <p:attrName>style.visibility</p:attrName>
+                                        </p:attrNameLst>
+                                      </p:cBhvr>
+                                      <p:to>
+                                        <p:strVal val="visible"/>
+                                      </p:to>
+                                    </p:set>
+                                    <p:anim calcmode="lin" valueType="num">
+                                      <p:cBhvr additive="base">
+                                        <p:cTn id="31" dur="500"/>
+                                        <p:tgtEl>
+                                          <p:spTgt spid="3">
+                                            <p:txEl>
+                                              <p:pRg st="4" end="4"/>
+                                            </p:txEl>
+                                          </p:spTgt>
+                                        </p:tgtEl>
+                                        <p:attrNameLst>
+                                          <p:attrName>ppt_y</p:attrName>
+                                        </p:attrNameLst>
+                                      </p:cBhvr>
+                                      <p:tavLst>
+                                        <p:tav tm="0">
+                                          <p:val>
+                                            <p:strVal val="#ppt_y+#ppt_h*1.125000"/>
+                                          </p:val>
+                                        </p:tav>
+                                        <p:tav tm="100000">
+                                          <p:val>
+                                            <p:strVal val="#ppt_y"/>
+                                          </p:val>
+                                        </p:tav>
+                                      </p:tavLst>
+                                    </p:anim>
+                                    <p:animEffect transition="in" filter="wipe(up)">
+                                      <p:cBhvr>
+                                        <p:cTn id="32" dur="500"/>
+                                        <p:tgtEl>
+                                          <p:spTgt spid="3">
+                                            <p:txEl>
+                                              <p:pRg st="4" end="4"/>
+                                            </p:txEl>
+                                          </p:spTgt>
+                                        </p:tgtEl>
+                                      </p:cBhvr>
+                                    </p:animEffect>
+                                  </p:childTnLst>
+                                </p:cTn>
+                              </p:par>
+                            </p:childTnLst>
+                          </p:cTn>
+                        </p:par>
+                      </p:childTnLst>
+                    </p:cTn>
+                  </p:par>
+                  <p:par>
+                    <p:cTn id="33" fill="hold">
+                      <p:stCondLst>
+                        <p:cond delay="indefinite"/>
+                      </p:stCondLst>
+                      <p:childTnLst>
+                        <p:par>
+                          <p:cTn id="34" fill="hold">
+                            <p:stCondLst>
+                              <p:cond delay="0"/>
+                            </p:stCondLst>
+                            <p:childTnLst>
+                              <p:par>
+                                <p:cTn id="35" presetID="12" presetClass="entr" presetSubtype="4" fill="hold" grpId="0" nodeType="clickEffect">
+                                  <p:stCondLst>
+                                    <p:cond delay="0"/>
+                                  </p:stCondLst>
+                                  <p:childTnLst>
+                                    <p:set>
+                                      <p:cBhvr>
+                                        <p:cTn id="36" dur="1" fill="hold">
+                                          <p:stCondLst>
+                                            <p:cond delay="0"/>
+                                          </p:stCondLst>
+                                        </p:cTn>
+                                        <p:tgtEl>
+                                          <p:spTgt spid="3">
+                                            <p:txEl>
+                                              <p:pRg st="5" end="5"/>
+                                            </p:txEl>
+                                          </p:spTgt>
+                                        </p:tgtEl>
+                                        <p:attrNameLst>
+                                          <p:attrName>style.visibility</p:attrName>
+                                        </p:attrNameLst>
+                                      </p:cBhvr>
+                                      <p:to>
+                                        <p:strVal val="visible"/>
+                                      </p:to>
+                                    </p:set>
+                                    <p:anim calcmode="lin" valueType="num">
+                                      <p:cBhvr additive="base">
+                                        <p:cTn id="37" dur="500"/>
+                                        <p:tgtEl>
+                                          <p:spTgt spid="3">
+                                            <p:txEl>
+                                              <p:pRg st="5" end="5"/>
+                                            </p:txEl>
+                                          </p:spTgt>
+                                        </p:tgtEl>
+                                        <p:attrNameLst>
+                                          <p:attrName>ppt_y</p:attrName>
+                                        </p:attrNameLst>
+                                      </p:cBhvr>
+                                      <p:tavLst>
+                                        <p:tav tm="0">
+                                          <p:val>
+                                            <p:strVal val="#ppt_y+#ppt_h*1.125000"/>
+                                          </p:val>
+                                        </p:tav>
+                                        <p:tav tm="100000">
+                                          <p:val>
+                                            <p:strVal val="#ppt_y"/>
+                                          </p:val>
+                                        </p:tav>
+                                      </p:tavLst>
+                                    </p:anim>
+                                    <p:animEffect transition="in" filter="wipe(up)">
+                                      <p:cBhvr>
+                                        <p:cTn id="38" dur="500"/>
+                                        <p:tgtEl>
+                                          <p:spTgt spid="3">
+                                            <p:txEl>
+                                              <p:pRg st="5" end="5"/>
+                                            </p:txEl>
+                                          </p:spTgt>
+                                        </p:tgtEl>
+                                      </p:cBhvr>
+                                    </p:animEffect>
+                                  </p:childTnLst>
+                                </p:cTn>
+                              </p:par>
+                            </p:childTnLst>
+                          </p:cTn>
+                        </p:par>
+                      </p:childTnLst>
+                    </p:cTn>
+                  </p:par>
+                  <p:par>
+                    <p:cTn id="39" fill="hold">
+                      <p:stCondLst>
+                        <p:cond delay="indefinite"/>
+                      </p:stCondLst>
+                      <p:childTnLst>
+                        <p:par>
+                          <p:cTn id="40" fill="hold">
+                            <p:stCondLst>
+                              <p:cond delay="0"/>
+                            </p:stCondLst>
+                            <p:childTnLst>
+                              <p:par>
+                                <p:cTn id="41" presetID="12" presetClass="entr" presetSubtype="4" fill="hold" grpId="0" nodeType="clickEffect">
+                                  <p:stCondLst>
+                                    <p:cond delay="0"/>
+                                  </p:stCondLst>
+                                  <p:childTnLst>
+                                    <p:set>
+                                      <p:cBhvr>
+                                        <p:cTn id="42" dur="1" fill="hold">
+                                          <p:stCondLst>
+                                            <p:cond delay="0"/>
+                                          </p:stCondLst>
+                                        </p:cTn>
+                                        <p:tgtEl>
+                                          <p:spTgt spid="3">
+                                            <p:txEl>
+                                              <p:pRg st="6" end="6"/>
+                                            </p:txEl>
+                                          </p:spTgt>
+                                        </p:tgtEl>
+                                        <p:attrNameLst>
+                                          <p:attrName>style.visibility</p:attrName>
+                                        </p:attrNameLst>
+                                      </p:cBhvr>
+                                      <p:to>
+                                        <p:strVal val="visible"/>
+                                      </p:to>
+                                    </p:set>
+                                    <p:anim calcmode="lin" valueType="num">
+                                      <p:cBhvr additive="base">
+                                        <p:cTn id="43" dur="500"/>
+                                        <p:tgtEl>
+                                          <p:spTgt spid="3">
+                                            <p:txEl>
+                                              <p:pRg st="6" end="6"/>
+                                            </p:txEl>
+                                          </p:spTgt>
+                                        </p:tgtEl>
+                                        <p:attrNameLst>
+                                          <p:attrName>ppt_y</p:attrName>
+                                        </p:attrNameLst>
+                                      </p:cBhvr>
+                                      <p:tavLst>
+                                        <p:tav tm="0">
+                                          <p:val>
+                                            <p:strVal val="#ppt_y+#ppt_h*1.125000"/>
+                                          </p:val>
+                                        </p:tav>
+                                        <p:tav tm="100000">
+                                          <p:val>
+                                            <p:strVal val="#ppt_y"/>
+                                          </p:val>
+                                        </p:tav>
+                                      </p:tavLst>
+                                    </p:anim>
+                                    <p:animEffect transition="in" filter="wipe(up)">
+                                      <p:cBhvr>
+                                        <p:cTn id="44" dur="500"/>
+                                        <p:tgtEl>
+                                          <p:spTgt spid="3">
+                                            <p:txEl>
+                                              <p:pRg st="6" end="6"/>
+                                            </p:txEl>
+                                          </p:spTgt>
+                                        </p:tgtEl>
+                                      </p:cBhvr>
+                                    </p:animEffect>
+                                  </p:childTnLst>
+                                </p:cTn>
+                              </p:par>
+                            </p:childTnLst>
+                          </p:cTn>
+                        </p:par>
+                      </p:childTnLst>
+                    </p:cTn>
+                  </p:par>
+                  <p:par>
+                    <p:cTn id="45" fill="hold">
+                      <p:stCondLst>
+                        <p:cond delay="indefinite"/>
+                      </p:stCondLst>
+                      <p:childTnLst>
+                        <p:par>
+                          <p:cTn id="46" fill="hold">
+                            <p:stCondLst>
+                              <p:cond delay="0"/>
+                            </p:stCondLst>
+                            <p:childTnLst>
+                              <p:par>
+                                <p:cTn id="47" presetID="12" presetClass="entr" presetSubtype="4" fill="hold" grpId="0" nodeType="clickEffect">
+                                  <p:stCondLst>
+                                    <p:cond delay="0"/>
+                                  </p:stCondLst>
+                                  <p:childTnLst>
+                                    <p:set>
+                                      <p:cBhvr>
+                                        <p:cTn id="48" dur="1" fill="hold">
+                                          <p:stCondLst>
+                                            <p:cond delay="0"/>
+                                          </p:stCondLst>
+                                        </p:cTn>
+                                        <p:tgtEl>
+                                          <p:spTgt spid="3">
+                                            <p:txEl>
+                                              <p:pRg st="7" end="7"/>
+                                            </p:txEl>
+                                          </p:spTgt>
+                                        </p:tgtEl>
+                                        <p:attrNameLst>
+                                          <p:attrName>style.visibility</p:attrName>
+                                        </p:attrNameLst>
+                                      </p:cBhvr>
+                                      <p:to>
+                                        <p:strVal val="visible"/>
+                                      </p:to>
+                                    </p:set>
+                                    <p:anim calcmode="lin" valueType="num">
+                                      <p:cBhvr additive="base">
+                                        <p:cTn id="49" dur="500"/>
+                                        <p:tgtEl>
+                                          <p:spTgt spid="3">
+                                            <p:txEl>
+                                              <p:pRg st="7" end="7"/>
+                                            </p:txEl>
+                                          </p:spTgt>
+                                        </p:tgtEl>
+                                        <p:attrNameLst>
+                                          <p:attrName>ppt_y</p:attrName>
+                                        </p:attrNameLst>
+                                      </p:cBhvr>
+                                      <p:tavLst>
+                                        <p:tav tm="0">
+                                          <p:val>
+                                            <p:strVal val="#ppt_y+#ppt_h*1.125000"/>
+                                          </p:val>
+                                        </p:tav>
+                                        <p:tav tm="100000">
+                                          <p:val>
+                                            <p:strVal val="#ppt_y"/>
+                                          </p:val>
+                                        </p:tav>
+                                      </p:tavLst>
+                                    </p:anim>
+                                    <p:animEffect transition="in" filter="wipe(up)">
+                                      <p:cBhvr>
+                                        <p:cTn id="50" dur="500"/>
+                                        <p:tgtEl>
+                                          <p:spTgt spid="3">
+                                            <p:txEl>
+                                              <p:pRg st="7" end="7"/>
+                                            </p:txEl>
+                                          </p:spTgt>
+                                        </p:tgtEl>
+                                      </p:cBhvr>
+                                    </p:animEffect>
+                                  </p:childTnLst>
+                                </p:cTn>
+                              </p:par>
+                            </p:childTnLst>
+                          </p:cTn>
+                        </p:par>
+                      </p:childTnLst>
+                    </p:cTn>
+                  </p:par>
+                </p:childTnLst>
+              </p:cTn>
+              <p:prevCondLst>
+                <p:cond evt="onPrev" delay="0">
+                  <p:tgtEl>
+                    <p:sldTgt/>
+                  </p:tgtEl>
+                </p:cond>
+              </p:prevCondLst>
+              <p:nextCondLst>
+                <p:cond evt="onNext" delay="0">
+                  <p:tgtEl>
+                    <p:sldTgt/>
+                  </p:tgtEl>
+                </p:cond>
+              </p:nextCondLst>
+            </p:seq>
+          </p:childTnLst>
+        </p:cTn>
+      </p:par>
+    </p:tnLst>
+    <p:bldLst>
+      <p:bldP spid="3" grpId="0" uiExpand="1" build="p"/>
+    </p:bldLst>
+  </p:timing>
 </p:sld>
 </file>
 
-<file path=ppt/slides/slide6.xml><?xml version="1.0" encoding="utf-8"?>
+<file path=ppt/slides/slide7.xml><?xml version="1.0" encoding="utf-8"?>
 <p:sld xmlns:a="http://schemas.openxmlformats.org/drawingml/2006/main" xmlns:r="http://schemas.openxmlformats.org/officeDocument/2006/relationships" xmlns:p="http://schemas.openxmlformats.org/presentationml/2006/main">
   <p:cSld>
     <p:spTree>
@@ -10871,10 +14861,142 @@
   <p:clrMapOvr>
     <a:masterClrMapping/>
   </p:clrMapOvr>
+  <p:timing>
+    <p:tnLst>
+      <p:par>
+        <p:cTn id="1" dur="indefinite" restart="never" nodeType="tmRoot">
+          <p:childTnLst>
+            <p:seq concurrent="1" nextAc="seek">
+              <p:cTn id="2" dur="indefinite" nodeType="mainSeq">
+                <p:childTnLst>
+                  <p:par>
+                    <p:cTn id="3" fill="hold">
+                      <p:stCondLst>
+                        <p:cond delay="indefinite"/>
+                      </p:stCondLst>
+                      <p:childTnLst>
+                        <p:par>
+                          <p:cTn id="4" fill="hold">
+                            <p:stCondLst>
+                              <p:cond delay="0"/>
+                            </p:stCondLst>
+                            <p:childTnLst>
+                              <p:par>
+                                <p:cTn id="5" presetID="42" presetClass="entr" presetSubtype="0" fill="hold" grpId="0" nodeType="clickEffect">
+                                  <p:stCondLst>
+                                    <p:cond delay="0"/>
+                                  </p:stCondLst>
+                                  <p:childTnLst>
+                                    <p:set>
+                                      <p:cBhvr>
+                                        <p:cTn id="6" dur="1" fill="hold">
+                                          <p:stCondLst>
+                                            <p:cond delay="0"/>
+                                          </p:stCondLst>
+                                        </p:cTn>
+                                        <p:tgtEl>
+                                          <p:spTgt spid="5"/>
+                                        </p:tgtEl>
+                                        <p:attrNameLst>
+                                          <p:attrName>style.visibility</p:attrName>
+                                        </p:attrNameLst>
+                                      </p:cBhvr>
+                                      <p:to>
+                                        <p:strVal val="visible"/>
+                                      </p:to>
+                                    </p:set>
+                                    <p:animEffect transition="in" filter="fade">
+                                      <p:cBhvr>
+                                        <p:cTn id="7" dur="1000"/>
+                                        <p:tgtEl>
+                                          <p:spTgt spid="5"/>
+                                        </p:tgtEl>
+                                      </p:cBhvr>
+                                    </p:animEffect>
+                                    <p:anim calcmode="lin" valueType="num">
+                                      <p:cBhvr>
+                                        <p:cTn id="8" dur="1000" fill="hold"/>
+                                        <p:tgtEl>
+                                          <p:spTgt spid="5"/>
+                                        </p:tgtEl>
+                                        <p:attrNameLst>
+                                          <p:attrName>ppt_x</p:attrName>
+                                        </p:attrNameLst>
+                                      </p:cBhvr>
+                                      <p:tavLst>
+                                        <p:tav tm="0">
+                                          <p:val>
+                                            <p:strVal val="#ppt_x"/>
+                                          </p:val>
+                                        </p:tav>
+                                        <p:tav tm="100000">
+                                          <p:val>
+                                            <p:strVal val="#ppt_x"/>
+                                          </p:val>
+                                        </p:tav>
+                                      </p:tavLst>
+                                    </p:anim>
+                                    <p:anim calcmode="lin" valueType="num">
+                                      <p:cBhvr>
+                                        <p:cTn id="9" dur="1000" fill="hold"/>
+                                        <p:tgtEl>
+                                          <p:spTgt spid="5"/>
+                                        </p:tgtEl>
+                                        <p:attrNameLst>
+                                          <p:attrName>ppt_y</p:attrName>
+                                        </p:attrNameLst>
+                                      </p:cBhvr>
+                                      <p:tavLst>
+                                        <p:tav tm="0">
+                                          <p:val>
+                                            <p:strVal val="#ppt_y+.1"/>
+                                          </p:val>
+                                        </p:tav>
+                                        <p:tav tm="100000">
+                                          <p:val>
+                                            <p:strVal val="#ppt_y"/>
+                                          </p:val>
+                                        </p:tav>
+                                      </p:tavLst>
+                                    </p:anim>
+                                  </p:childTnLst>
+                                </p:cTn>
+                              </p:par>
+                            </p:childTnLst>
+                          </p:cTn>
+                        </p:par>
+                      </p:childTnLst>
+                    </p:cTn>
+                  </p:par>
+                </p:childTnLst>
+              </p:cTn>
+              <p:prevCondLst>
+                <p:cond evt="onPrev" delay="0">
+                  <p:tgtEl>
+                    <p:sldTgt/>
+                  </p:tgtEl>
+                </p:cond>
+              </p:prevCondLst>
+              <p:nextCondLst>
+                <p:cond evt="onNext" delay="0">
+                  <p:tgtEl>
+                    <p:sldTgt/>
+                  </p:tgtEl>
+                </p:cond>
+              </p:nextCondLst>
+            </p:seq>
+          </p:childTnLst>
+        </p:cTn>
+      </p:par>
+    </p:tnLst>
+    <p:bldLst>
+      <p:bldP spid="5" grpId="0"/>
+    </p:bldLst>
+  </p:timing>
 </p:sld>
 </file>
 
-<file path=ppt/slides/slide7.xml><?xml version="1.0" encoding="utf-8"?>
+<file path=ppt/slides/slide8.xml><?xml version="1.0" encoding="utf-8"?>
 <p:sld xmlns:a="http://schemas.openxmlformats.org/drawingml/2006/main" xmlns:r="http://schemas.openxmlformats.org/officeDocument/2006/relationships" xmlns:p="http://schemas.openxmlformats.org/presentationml/2006/main">
   <p:cSld>
     <p:spTree>
@@ -11105,10 +15227,10 @@
       </p:sp>
       <p:sp>
         <p:nvSpPr>
-          <p:cNvPr id="5" name="Text Placeholder 3">
+          <p:cNvPr id="2" name="Text Placeholder 3">
             <a:extLst>
               <a:ext uri="{FF2B5EF4-FFF2-40B4-BE49-F238E27FC236}">
-                <a16:creationId xmlns:a16="http://schemas.microsoft.com/office/drawing/2014/main" id="{94934B45-769D-EB84-1026-D9DC4BBEDA19}"/>
+                <a16:creationId xmlns:a16="http://schemas.microsoft.com/office/drawing/2014/main" id="{CE8206BF-D4A1-A972-65D2-51535A669E9E}"/>
               </a:ext>
             </a:extLst>
           </p:cNvPr>
@@ -11314,10 +15436,142 @@
   <p:clrMapOvr>
     <a:masterClrMapping/>
   </p:clrMapOvr>
+  <p:timing>
+    <p:tnLst>
+      <p:par>
+        <p:cTn id="1" dur="indefinite" restart="never" nodeType="tmRoot">
+          <p:childTnLst>
+            <p:seq concurrent="1" nextAc="seek">
+              <p:cTn id="2" dur="indefinite" nodeType="mainSeq">
+                <p:childTnLst>
+                  <p:par>
+                    <p:cTn id="3" fill="hold">
+                      <p:stCondLst>
+                        <p:cond delay="indefinite"/>
+                      </p:stCondLst>
+                      <p:childTnLst>
+                        <p:par>
+                          <p:cTn id="4" fill="hold">
+                            <p:stCondLst>
+                              <p:cond delay="0"/>
+                            </p:stCondLst>
+                            <p:childTnLst>
+                              <p:par>
+                                <p:cTn id="5" presetID="42" presetClass="entr" presetSubtype="0" fill="hold" grpId="0" nodeType="clickEffect">
+                                  <p:stCondLst>
+                                    <p:cond delay="0"/>
+                                  </p:stCondLst>
+                                  <p:childTnLst>
+                                    <p:set>
+                                      <p:cBhvr>
+                                        <p:cTn id="6" dur="1" fill="hold">
+                                          <p:stCondLst>
+                                            <p:cond delay="0"/>
+                                          </p:stCondLst>
+                                        </p:cTn>
+                                        <p:tgtEl>
+                                          <p:spTgt spid="2"/>
+                                        </p:tgtEl>
+                                        <p:attrNameLst>
+                                          <p:attrName>style.visibility</p:attrName>
+                                        </p:attrNameLst>
+                                      </p:cBhvr>
+                                      <p:to>
+                                        <p:strVal val="visible"/>
+                                      </p:to>
+                                    </p:set>
+                                    <p:animEffect transition="in" filter="fade">
+                                      <p:cBhvr>
+                                        <p:cTn id="7" dur="1000"/>
+                                        <p:tgtEl>
+                                          <p:spTgt spid="2"/>
+                                        </p:tgtEl>
+                                      </p:cBhvr>
+                                    </p:animEffect>
+                                    <p:anim calcmode="lin" valueType="num">
+                                      <p:cBhvr>
+                                        <p:cTn id="8" dur="1000" fill="hold"/>
+                                        <p:tgtEl>
+                                          <p:spTgt spid="2"/>
+                                        </p:tgtEl>
+                                        <p:attrNameLst>
+                                          <p:attrName>ppt_x</p:attrName>
+                                        </p:attrNameLst>
+                                      </p:cBhvr>
+                                      <p:tavLst>
+                                        <p:tav tm="0">
+                                          <p:val>
+                                            <p:strVal val="#ppt_x"/>
+                                          </p:val>
+                                        </p:tav>
+                                        <p:tav tm="100000">
+                                          <p:val>
+                                            <p:strVal val="#ppt_x"/>
+                                          </p:val>
+                                        </p:tav>
+                                      </p:tavLst>
+                                    </p:anim>
+                                    <p:anim calcmode="lin" valueType="num">
+                                      <p:cBhvr>
+                                        <p:cTn id="9" dur="1000" fill="hold"/>
+                                        <p:tgtEl>
+                                          <p:spTgt spid="2"/>
+                                        </p:tgtEl>
+                                        <p:attrNameLst>
+                                          <p:attrName>ppt_y</p:attrName>
+                                        </p:attrNameLst>
+                                      </p:cBhvr>
+                                      <p:tavLst>
+                                        <p:tav tm="0">
+                                          <p:val>
+                                            <p:strVal val="#ppt_y+.1"/>
+                                          </p:val>
+                                        </p:tav>
+                                        <p:tav tm="100000">
+                                          <p:val>
+                                            <p:strVal val="#ppt_y"/>
+                                          </p:val>
+                                        </p:tav>
+                                      </p:tavLst>
+                                    </p:anim>
+                                  </p:childTnLst>
+                                </p:cTn>
+                              </p:par>
+                            </p:childTnLst>
+                          </p:cTn>
+                        </p:par>
+                      </p:childTnLst>
+                    </p:cTn>
+                  </p:par>
+                </p:childTnLst>
+              </p:cTn>
+              <p:prevCondLst>
+                <p:cond evt="onPrev" delay="0">
+                  <p:tgtEl>
+                    <p:sldTgt/>
+                  </p:tgtEl>
+                </p:cond>
+              </p:prevCondLst>
+              <p:nextCondLst>
+                <p:cond evt="onNext" delay="0">
+                  <p:tgtEl>
+                    <p:sldTgt/>
+                  </p:tgtEl>
+                </p:cond>
+              </p:nextCondLst>
+            </p:seq>
+          </p:childTnLst>
+        </p:cTn>
+      </p:par>
+    </p:tnLst>
+    <p:bldLst>
+      <p:bldP spid="2" grpId="0"/>
+    </p:bldLst>
+  </p:timing>
 </p:sld>
 </file>
 
-<file path=ppt/slides/slide8.xml><?xml version="1.0" encoding="utf-8"?>
+<file path=ppt/slides/slide9.xml><?xml version="1.0" encoding="utf-8"?>
 <p:sld xmlns:a="http://schemas.openxmlformats.org/drawingml/2006/main" xmlns:r="http://schemas.openxmlformats.org/officeDocument/2006/relationships" xmlns:p="http://schemas.openxmlformats.org/presentationml/2006/main">
   <p:cSld>
     <p:spTree>
@@ -11401,7 +15655,7 @@
             </a:pPr>
             <a:r>
               <a:rPr lang="en-US" dirty="0"/>
-              <a:t>Is the practice of testing individual, isolated units or components of software, such as a function or method, to verify they work correctly</a:t>
+              <a:t>Is the practice of testing individual, isolated units or components of software, such as a function or method, to verify they work correctly.</a:t>
             </a:r>
           </a:p>
           <a:p>
@@ -11428,7 +15682,7 @@
             </a:pPr>
             <a:r>
               <a:rPr lang="en-US" dirty="0"/>
-              <a:t>TLDR: check that the components works as expected</a:t>
+              <a:t>TLDR: check that the components works as expected.</a:t>
             </a:r>
           </a:p>
         </p:txBody>
@@ -11443,498 +15697,164 @@
   <p:clrMapOvr>
     <a:masterClrMapping/>
   </p:clrMapOvr>
-</p:sld>
-</file>
-
-<file path=ppt/slides/slide9.xml><?xml version="1.0" encoding="utf-8"?>
-<p:sld xmlns:a="http://schemas.openxmlformats.org/drawingml/2006/main" xmlns:r="http://schemas.openxmlformats.org/officeDocument/2006/relationships" xmlns:p="http://schemas.openxmlformats.org/presentationml/2006/main">
-  <p:cSld>
-    <p:bg>
-      <p:bgPr>
-        <a:blipFill dpi="0" rotWithShape="1">
-          <a:blip r:embed="rId3" cstate="print">
-            <a:lum/>
-            <a:extLst>
-              <a:ext uri="{28A0092B-C50C-407E-A947-70E740481C1C}">
-                <a14:useLocalDpi xmlns:a14="http://schemas.microsoft.com/office/drawing/2010/main"/>
-              </a:ext>
-            </a:extLst>
-          </a:blip>
-          <a:srcRect/>
-          <a:stretch>
-            <a:fillRect/>
-          </a:stretch>
-        </a:blipFill>
-        <a:effectLst/>
-      </p:bgPr>
-    </p:bg>
-    <p:spTree>
-      <p:nvGrpSpPr>
-        <p:cNvPr id="1" name="">
-          <a:extLst>
-            <a:ext uri="{FF2B5EF4-FFF2-40B4-BE49-F238E27FC236}">
-              <a16:creationId xmlns:a16="http://schemas.microsoft.com/office/drawing/2014/main" id="{A2AFBFED-6FAE-6C24-CEF0-20129CB4512B}"/>
-            </a:ext>
-          </a:extLst>
-        </p:cNvPr>
-        <p:cNvGrpSpPr/>
-        <p:nvPr/>
-      </p:nvGrpSpPr>
-      <p:grpSpPr>
-        <a:xfrm>
-          <a:off x="0" y="0"/>
-          <a:ext cx="0" cy="0"/>
-          <a:chOff x="0" y="0"/>
-          <a:chExt cx="0" cy="0"/>
-        </a:xfrm>
-      </p:grpSpPr>
-      <p:sp>
-        <p:nvSpPr>
-          <p:cNvPr id="4" name="Text Placeholder 3">
-            <a:extLst>
-              <a:ext uri="{FF2B5EF4-FFF2-40B4-BE49-F238E27FC236}">
-                <a16:creationId xmlns:a16="http://schemas.microsoft.com/office/drawing/2014/main" id="{EC96C119-CC06-C306-4CB9-E960002CC49B}"/>
-              </a:ext>
-            </a:extLst>
-          </p:cNvPr>
-          <p:cNvSpPr>
-            <a:spLocks noGrp="1"/>
-          </p:cNvSpPr>
-          <p:nvPr>
-            <p:ph type="body" sz="quarter" idx="10"/>
-          </p:nvPr>
-        </p:nvSpPr>
-        <p:spPr/>
-        <p:txBody>
-          <a:bodyPr lIns="91440" tIns="45720" rIns="91440" bIns="45720" anchor="t"/>
-          <a:lstStyle/>
-          <a:p>
-            <a:r>
-              <a:rPr lang="en-IT" dirty="0">
-                <a:latin typeface="Arial"/>
-                <a:cs typeface="Arial"/>
-              </a:rPr>
-              <a:t>Unit testing</a:t>
-            </a:r>
-            <a:endParaRPr lang="en-US"/>
-          </a:p>
-          <a:p>
-            <a:r>
-              <a:rPr lang="en-US">
-                <a:latin typeface="Arial"/>
-                <a:cs typeface="Arial"/>
-              </a:rPr>
-              <a:t>Business logic</a:t>
-            </a:r>
-            <a:endParaRPr lang="en-US" dirty="0"/>
-          </a:p>
-        </p:txBody>
-      </p:sp>
-      <p:sp>
-        <p:nvSpPr>
-          <p:cNvPr id="6" name="Text Placeholder 3">
-            <a:extLst>
-              <a:ext uri="{FF2B5EF4-FFF2-40B4-BE49-F238E27FC236}">
-                <a16:creationId xmlns:a16="http://schemas.microsoft.com/office/drawing/2014/main" id="{CD4ED05C-D796-6842-5DCE-FF0250A5A793}"/>
-              </a:ext>
-            </a:extLst>
-          </p:cNvPr>
-          <p:cNvSpPr txBox="1">
-            <a:spLocks/>
-          </p:cNvSpPr>
-          <p:nvPr/>
-        </p:nvSpPr>
-        <p:spPr>
-          <a:xfrm>
-            <a:off x="6209198" y="4788827"/>
-            <a:ext cx="5445392" cy="849973"/>
-          </a:xfrm>
-          <a:prstGeom prst="rect">
-            <a:avLst/>
-          </a:prstGeom>
-        </p:spPr>
-        <p:txBody>
-          <a:bodyPr lIns="91440" tIns="45720" rIns="91440" bIns="45720" anchor="t"/>
-          <a:lstStyle>
-            <a:lvl1pPr marL="0" indent="0" algn="l" defTabSz="914400" rtl="0" eaLnBrk="1" latinLnBrk="0" hangingPunct="1">
-              <a:lnSpc>
-                <a:spcPct val="90000"/>
-              </a:lnSpc>
-              <a:spcBef>
-                <a:spcPts val="1000"/>
-              </a:spcBef>
-              <a:buFont typeface="Arial"/>
-              <a:buNone/>
-              <a:defRPr sz="4800" b="1" kern="1200">
-                <a:solidFill>
-                  <a:srgbClr val="00C700"/>
-                </a:solidFill>
-                <a:latin typeface="Arial" panose="020B0604020202020204" pitchFamily="34" charset="0"/>
-                <a:ea typeface="+mn-ea"/>
-                <a:cs typeface="Arial" panose="020B0604020202020204" pitchFamily="34" charset="0"/>
-              </a:defRPr>
-            </a:lvl1pPr>
-            <a:lvl2pPr marL="685800" indent="-228600" algn="l" defTabSz="914400" rtl="0" eaLnBrk="1" latinLnBrk="0" hangingPunct="1">
-              <a:lnSpc>
-                <a:spcPct val="90000"/>
-              </a:lnSpc>
-              <a:spcBef>
-                <a:spcPts val="500"/>
-              </a:spcBef>
-              <a:buFont typeface="Arial"/>
-              <a:buChar char="•"/>
-              <a:defRPr sz="2400" kern="1200">
-                <a:solidFill>
-                  <a:srgbClr val="00E2FF"/>
-                </a:solidFill>
-                <a:latin typeface="+mn-lt"/>
-                <a:ea typeface="+mn-ea"/>
-                <a:cs typeface="+mn-cs"/>
-              </a:defRPr>
-            </a:lvl2pPr>
-            <a:lvl3pPr marL="1143000" indent="-228600" algn="l" defTabSz="914400" rtl="0" eaLnBrk="1" latinLnBrk="0" hangingPunct="1">
-              <a:lnSpc>
-                <a:spcPct val="90000"/>
-              </a:lnSpc>
-              <a:spcBef>
-                <a:spcPts val="500"/>
-              </a:spcBef>
-              <a:buFont typeface="Arial"/>
-              <a:buChar char="•"/>
-              <a:defRPr sz="2000" kern="1200">
-                <a:solidFill>
-                  <a:srgbClr val="00E2FF"/>
-                </a:solidFill>
-                <a:latin typeface="+mn-lt"/>
-                <a:ea typeface="+mn-ea"/>
-                <a:cs typeface="+mn-cs"/>
-              </a:defRPr>
-            </a:lvl3pPr>
-            <a:lvl4pPr marL="1600200" indent="-228600" algn="l" defTabSz="914400" rtl="0" eaLnBrk="1" latinLnBrk="0" hangingPunct="1">
-              <a:lnSpc>
-                <a:spcPct val="90000"/>
-              </a:lnSpc>
-              <a:spcBef>
-                <a:spcPts val="500"/>
-              </a:spcBef>
-              <a:buFont typeface="Arial"/>
-              <a:buChar char="•"/>
-              <a:defRPr sz="1800" kern="1200">
-                <a:solidFill>
-                  <a:srgbClr val="00E2FF"/>
-                </a:solidFill>
-                <a:latin typeface="+mn-lt"/>
-                <a:ea typeface="+mn-ea"/>
-                <a:cs typeface="+mn-cs"/>
-              </a:defRPr>
-            </a:lvl4pPr>
-            <a:lvl5pPr marL="2057400" indent="-228600" algn="l" defTabSz="914400" rtl="0" eaLnBrk="1" latinLnBrk="0" hangingPunct="1">
-              <a:lnSpc>
-                <a:spcPct val="90000"/>
-              </a:lnSpc>
-              <a:spcBef>
-                <a:spcPts val="500"/>
-              </a:spcBef>
-              <a:buFont typeface="Arial"/>
-              <a:buChar char="•"/>
-              <a:defRPr sz="1800" kern="1200">
-                <a:solidFill>
-                  <a:srgbClr val="00E2FF"/>
-                </a:solidFill>
-                <a:latin typeface="+mn-lt"/>
-                <a:ea typeface="+mn-ea"/>
-                <a:cs typeface="+mn-cs"/>
-              </a:defRPr>
-            </a:lvl5pPr>
-            <a:lvl6pPr marL="2514600" indent="-228600" algn="l" defTabSz="914400" rtl="0" eaLnBrk="1" latinLnBrk="0" hangingPunct="1">
-              <a:lnSpc>
-                <a:spcPct val="90000"/>
-              </a:lnSpc>
-              <a:spcBef>
-                <a:spcPts val="500"/>
-              </a:spcBef>
-              <a:buFont typeface="Arial"/>
-              <a:buChar char="•"/>
-              <a:defRPr sz="1800" kern="1200">
-                <a:solidFill>
-                  <a:schemeClr val="tx1"/>
-                </a:solidFill>
-                <a:latin typeface="+mn-lt"/>
-                <a:ea typeface="+mn-ea"/>
-                <a:cs typeface="+mn-cs"/>
-              </a:defRPr>
-            </a:lvl6pPr>
-            <a:lvl7pPr marL="2971800" indent="-228600" algn="l" defTabSz="914400" rtl="0" eaLnBrk="1" latinLnBrk="0" hangingPunct="1">
-              <a:lnSpc>
-                <a:spcPct val="90000"/>
-              </a:lnSpc>
-              <a:spcBef>
-                <a:spcPts val="500"/>
-              </a:spcBef>
-              <a:buFont typeface="Arial"/>
-              <a:buChar char="•"/>
-              <a:defRPr sz="1800" kern="1200">
-                <a:solidFill>
-                  <a:schemeClr val="tx1"/>
-                </a:solidFill>
-                <a:latin typeface="+mn-lt"/>
-                <a:ea typeface="+mn-ea"/>
-                <a:cs typeface="+mn-cs"/>
-              </a:defRPr>
-            </a:lvl7pPr>
-            <a:lvl8pPr marL="3429000" indent="-228600" algn="l" defTabSz="914400" rtl="0" eaLnBrk="1" latinLnBrk="0" hangingPunct="1">
-              <a:lnSpc>
-                <a:spcPct val="90000"/>
-              </a:lnSpc>
-              <a:spcBef>
-                <a:spcPts val="500"/>
-              </a:spcBef>
-              <a:buFont typeface="Arial"/>
-              <a:buChar char="•"/>
-              <a:defRPr sz="1800" kern="1200">
-                <a:solidFill>
-                  <a:schemeClr val="tx1"/>
-                </a:solidFill>
-                <a:latin typeface="+mn-lt"/>
-                <a:ea typeface="+mn-ea"/>
-                <a:cs typeface="+mn-cs"/>
-              </a:defRPr>
-            </a:lvl8pPr>
-            <a:lvl9pPr marL="3886200" indent="-228600" algn="l" defTabSz="914400" rtl="0" eaLnBrk="1" latinLnBrk="0" hangingPunct="1">
-              <a:lnSpc>
-                <a:spcPct val="90000"/>
-              </a:lnSpc>
-              <a:spcBef>
-                <a:spcPts val="500"/>
-              </a:spcBef>
-              <a:buFont typeface="Arial"/>
-              <a:buChar char="•"/>
-              <a:defRPr sz="1800" kern="1200">
-                <a:solidFill>
-                  <a:schemeClr val="tx1"/>
-                </a:solidFill>
-                <a:latin typeface="+mn-lt"/>
-                <a:ea typeface="+mn-ea"/>
-                <a:cs typeface="+mn-cs"/>
-              </a:defRPr>
-            </a:lvl9pPr>
-          </a:lstStyle>
-          <a:p>
-            <a:endParaRPr lang="en-US" dirty="0"/>
-          </a:p>
-        </p:txBody>
-      </p:sp>
-      <p:sp>
-        <p:nvSpPr>
-          <p:cNvPr id="2" name="Text Placeholder 3">
-            <a:extLst>
-              <a:ext uri="{FF2B5EF4-FFF2-40B4-BE49-F238E27FC236}">
-                <a16:creationId xmlns:a16="http://schemas.microsoft.com/office/drawing/2014/main" id="{1B12BF3B-4688-0992-8EB8-D4AAABCB7FCE}"/>
-              </a:ext>
-            </a:extLst>
-          </p:cNvPr>
-          <p:cNvSpPr txBox="1">
-            <a:spLocks/>
-          </p:cNvSpPr>
-          <p:nvPr/>
-        </p:nvSpPr>
-        <p:spPr>
-          <a:xfrm>
-            <a:off x="6361598" y="4941227"/>
-            <a:ext cx="5445392" cy="849973"/>
-          </a:xfrm>
-          <a:prstGeom prst="rect">
-            <a:avLst/>
-          </a:prstGeom>
-        </p:spPr>
-        <p:txBody>
-          <a:bodyPr lIns="91440" tIns="45720" rIns="91440" bIns="45720" anchor="t"/>
-          <a:lstStyle>
-            <a:lvl1pPr marL="0" indent="0" algn="l" defTabSz="914400" rtl="0" eaLnBrk="1" latinLnBrk="0" hangingPunct="1">
-              <a:lnSpc>
-                <a:spcPct val="90000"/>
-              </a:lnSpc>
-              <a:spcBef>
-                <a:spcPts val="1000"/>
-              </a:spcBef>
-              <a:buFont typeface="Arial"/>
-              <a:buNone/>
-              <a:defRPr sz="4800" b="1" kern="1200">
-                <a:solidFill>
-                  <a:srgbClr val="00C700"/>
-                </a:solidFill>
-                <a:latin typeface="Arial" panose="020B0604020202020204" pitchFamily="34" charset="0"/>
-                <a:ea typeface="+mn-ea"/>
-                <a:cs typeface="Arial" panose="020B0604020202020204" pitchFamily="34" charset="0"/>
-              </a:defRPr>
-            </a:lvl1pPr>
-            <a:lvl2pPr marL="685800" indent="-228600" algn="l" defTabSz="914400" rtl="0" eaLnBrk="1" latinLnBrk="0" hangingPunct="1">
-              <a:lnSpc>
-                <a:spcPct val="90000"/>
-              </a:lnSpc>
-              <a:spcBef>
-                <a:spcPts val="500"/>
-              </a:spcBef>
-              <a:buFont typeface="Arial"/>
-              <a:buChar char="•"/>
-              <a:defRPr sz="2400" kern="1200">
-                <a:solidFill>
-                  <a:srgbClr val="00E2FF"/>
-                </a:solidFill>
-                <a:latin typeface="+mn-lt"/>
-                <a:ea typeface="+mn-ea"/>
-                <a:cs typeface="+mn-cs"/>
-              </a:defRPr>
-            </a:lvl2pPr>
-            <a:lvl3pPr marL="1143000" indent="-228600" algn="l" defTabSz="914400" rtl="0" eaLnBrk="1" latinLnBrk="0" hangingPunct="1">
-              <a:lnSpc>
-                <a:spcPct val="90000"/>
-              </a:lnSpc>
-              <a:spcBef>
-                <a:spcPts val="500"/>
-              </a:spcBef>
-              <a:buFont typeface="Arial"/>
-              <a:buChar char="•"/>
-              <a:defRPr sz="2000" kern="1200">
-                <a:solidFill>
-                  <a:srgbClr val="00E2FF"/>
-                </a:solidFill>
-                <a:latin typeface="+mn-lt"/>
-                <a:ea typeface="+mn-ea"/>
-                <a:cs typeface="+mn-cs"/>
-              </a:defRPr>
-            </a:lvl3pPr>
-            <a:lvl4pPr marL="1600200" indent="-228600" algn="l" defTabSz="914400" rtl="0" eaLnBrk="1" latinLnBrk="0" hangingPunct="1">
-              <a:lnSpc>
-                <a:spcPct val="90000"/>
-              </a:lnSpc>
-              <a:spcBef>
-                <a:spcPts val="500"/>
-              </a:spcBef>
-              <a:buFont typeface="Arial"/>
-              <a:buChar char="•"/>
-              <a:defRPr sz="1800" kern="1200">
-                <a:solidFill>
-                  <a:srgbClr val="00E2FF"/>
-                </a:solidFill>
-                <a:latin typeface="+mn-lt"/>
-                <a:ea typeface="+mn-ea"/>
-                <a:cs typeface="+mn-cs"/>
-              </a:defRPr>
-            </a:lvl4pPr>
-            <a:lvl5pPr marL="2057400" indent="-228600" algn="l" defTabSz="914400" rtl="0" eaLnBrk="1" latinLnBrk="0" hangingPunct="1">
-              <a:lnSpc>
-                <a:spcPct val="90000"/>
-              </a:lnSpc>
-              <a:spcBef>
-                <a:spcPts val="500"/>
-              </a:spcBef>
-              <a:buFont typeface="Arial"/>
-              <a:buChar char="•"/>
-              <a:defRPr sz="1800" kern="1200">
-                <a:solidFill>
-                  <a:srgbClr val="00E2FF"/>
-                </a:solidFill>
-                <a:latin typeface="+mn-lt"/>
-                <a:ea typeface="+mn-ea"/>
-                <a:cs typeface="+mn-cs"/>
-              </a:defRPr>
-            </a:lvl5pPr>
-            <a:lvl6pPr marL="2514600" indent="-228600" algn="l" defTabSz="914400" rtl="0" eaLnBrk="1" latinLnBrk="0" hangingPunct="1">
-              <a:lnSpc>
-                <a:spcPct val="90000"/>
-              </a:lnSpc>
-              <a:spcBef>
-                <a:spcPts val="500"/>
-              </a:spcBef>
-              <a:buFont typeface="Arial"/>
-              <a:buChar char="•"/>
-              <a:defRPr sz="1800" kern="1200">
-                <a:solidFill>
-                  <a:schemeClr val="tx1"/>
-                </a:solidFill>
-                <a:latin typeface="+mn-lt"/>
-                <a:ea typeface="+mn-ea"/>
-                <a:cs typeface="+mn-cs"/>
-              </a:defRPr>
-            </a:lvl6pPr>
-            <a:lvl7pPr marL="2971800" indent="-228600" algn="l" defTabSz="914400" rtl="0" eaLnBrk="1" latinLnBrk="0" hangingPunct="1">
-              <a:lnSpc>
-                <a:spcPct val="90000"/>
-              </a:lnSpc>
-              <a:spcBef>
-                <a:spcPts val="500"/>
-              </a:spcBef>
-              <a:buFont typeface="Arial"/>
-              <a:buChar char="•"/>
-              <a:defRPr sz="1800" kern="1200">
-                <a:solidFill>
-                  <a:schemeClr val="tx1"/>
-                </a:solidFill>
-                <a:latin typeface="+mn-lt"/>
-                <a:ea typeface="+mn-ea"/>
-                <a:cs typeface="+mn-cs"/>
-              </a:defRPr>
-            </a:lvl7pPr>
-            <a:lvl8pPr marL="3429000" indent="-228600" algn="l" defTabSz="914400" rtl="0" eaLnBrk="1" latinLnBrk="0" hangingPunct="1">
-              <a:lnSpc>
-                <a:spcPct val="90000"/>
-              </a:lnSpc>
-              <a:spcBef>
-                <a:spcPts val="500"/>
-              </a:spcBef>
-              <a:buFont typeface="Arial"/>
-              <a:buChar char="•"/>
-              <a:defRPr sz="1800" kern="1200">
-                <a:solidFill>
-                  <a:schemeClr val="tx1"/>
-                </a:solidFill>
-                <a:latin typeface="+mn-lt"/>
-                <a:ea typeface="+mn-ea"/>
-                <a:cs typeface="+mn-cs"/>
-              </a:defRPr>
-            </a:lvl8pPr>
-            <a:lvl9pPr marL="3886200" indent="-228600" algn="l" defTabSz="914400" rtl="0" eaLnBrk="1" latinLnBrk="0" hangingPunct="1">
-              <a:lnSpc>
-                <a:spcPct val="90000"/>
-              </a:lnSpc>
-              <a:spcBef>
-                <a:spcPts val="500"/>
-              </a:spcBef>
-              <a:buFont typeface="Arial"/>
-              <a:buChar char="•"/>
-              <a:defRPr sz="1800" kern="1200">
-                <a:solidFill>
-                  <a:schemeClr val="tx1"/>
-                </a:solidFill>
-                <a:latin typeface="+mn-lt"/>
-                <a:ea typeface="+mn-ea"/>
-                <a:cs typeface="+mn-cs"/>
-              </a:defRPr>
-            </a:lvl9pPr>
-          </a:lstStyle>
-          <a:p>
-            <a:r>
-              <a:rPr lang="en-IT" dirty="0">
-                <a:latin typeface="Arial"/>
-                <a:cs typeface="Arial"/>
-              </a:rPr>
-              <a:t>Yes, it's a demo</a:t>
-            </a:r>
-            <a:endParaRPr lang="en-US" dirty="0"/>
-          </a:p>
-        </p:txBody>
-      </p:sp>
-    </p:spTree>
-    <p:extLst>
-      <p:ext uri="{BB962C8B-B14F-4D97-AF65-F5344CB8AC3E}">
-        <p14:creationId xmlns:p14="http://schemas.microsoft.com/office/powerpoint/2010/main" val="1577633904"/>
-      </p:ext>
-    </p:extLst>
-  </p:cSld>
-  <p:clrMapOvr>
-    <a:masterClrMapping/>
-  </p:clrMapOvr>
+  <p:timing>
+    <p:tnLst>
+      <p:par>
+        <p:cTn id="1" dur="indefinite" restart="never" nodeType="tmRoot">
+          <p:childTnLst>
+            <p:seq concurrent="1" nextAc="seek">
+              <p:cTn id="2" dur="indefinite" nodeType="mainSeq">
+                <p:childTnLst>
+                  <p:par>
+                    <p:cTn id="3" fill="hold">
+                      <p:stCondLst>
+                        <p:cond delay="indefinite"/>
+                        <p:cond evt="onBegin" delay="0">
+                          <p:tn val="2"/>
+                        </p:cond>
+                      </p:stCondLst>
+                      <p:childTnLst>
+                        <p:par>
+                          <p:cTn id="4" fill="hold">
+                            <p:stCondLst>
+                              <p:cond delay="0"/>
+                            </p:stCondLst>
+                            <p:childTnLst>
+                              <p:par>
+                                <p:cTn id="5" presetID="9" presetClass="entr" presetSubtype="0" fill="hold" grpId="0" nodeType="afterEffect">
+                                  <p:stCondLst>
+                                    <p:cond delay="0"/>
+                                  </p:stCondLst>
+                                  <p:childTnLst>
+                                    <p:set>
+                                      <p:cBhvr>
+                                        <p:cTn id="6" dur="1" fill="hold">
+                                          <p:stCondLst>
+                                            <p:cond delay="0"/>
+                                          </p:stCondLst>
+                                        </p:cTn>
+                                        <p:tgtEl>
+                                          <p:spTgt spid="3">
+                                            <p:txEl>
+                                              <p:pRg st="0" end="0"/>
+                                            </p:txEl>
+                                          </p:spTgt>
+                                        </p:tgtEl>
+                                        <p:attrNameLst>
+                                          <p:attrName>style.visibility</p:attrName>
+                                        </p:attrNameLst>
+                                      </p:cBhvr>
+                                      <p:to>
+                                        <p:strVal val="visible"/>
+                                      </p:to>
+                                    </p:set>
+                                    <p:animEffect transition="in" filter="dissolve">
+                                      <p:cBhvr>
+                                        <p:cTn id="7" dur="500"/>
+                                        <p:tgtEl>
+                                          <p:spTgt spid="3">
+                                            <p:txEl>
+                                              <p:pRg st="0" end="0"/>
+                                            </p:txEl>
+                                          </p:spTgt>
+                                        </p:tgtEl>
+                                      </p:cBhvr>
+                                    </p:animEffect>
+                                  </p:childTnLst>
+                                </p:cTn>
+                              </p:par>
+                            </p:childTnLst>
+                          </p:cTn>
+                        </p:par>
+                      </p:childTnLst>
+                    </p:cTn>
+                  </p:par>
+                  <p:par>
+                    <p:cTn id="8" fill="hold">
+                      <p:stCondLst>
+                        <p:cond delay="indefinite"/>
+                      </p:stCondLst>
+                      <p:childTnLst>
+                        <p:par>
+                          <p:cTn id="9" fill="hold">
+                            <p:stCondLst>
+                              <p:cond delay="0"/>
+                            </p:stCondLst>
+                            <p:childTnLst>
+                              <p:par>
+                                <p:cTn id="10" presetID="9" presetClass="entr" presetSubtype="0" fill="hold" grpId="0" nodeType="clickEffect">
+                                  <p:stCondLst>
+                                    <p:cond delay="0"/>
+                                  </p:stCondLst>
+                                  <p:childTnLst>
+                                    <p:set>
+                                      <p:cBhvr>
+                                        <p:cTn id="11" dur="1" fill="hold">
+                                          <p:stCondLst>
+                                            <p:cond delay="0"/>
+                                          </p:stCondLst>
+                                        </p:cTn>
+                                        <p:tgtEl>
+                                          <p:spTgt spid="3">
+                                            <p:txEl>
+                                              <p:pRg st="4" end="4"/>
+                                            </p:txEl>
+                                          </p:spTgt>
+                                        </p:tgtEl>
+                                        <p:attrNameLst>
+                                          <p:attrName>style.visibility</p:attrName>
+                                        </p:attrNameLst>
+                                      </p:cBhvr>
+                                      <p:to>
+                                        <p:strVal val="visible"/>
+                                      </p:to>
+                                    </p:set>
+                                    <p:animEffect transition="in" filter="dissolve">
+                                      <p:cBhvr>
+                                        <p:cTn id="12" dur="500"/>
+                                        <p:tgtEl>
+                                          <p:spTgt spid="3">
+                                            <p:txEl>
+                                              <p:pRg st="4" end="4"/>
+                                            </p:txEl>
+                                          </p:spTgt>
+                                        </p:tgtEl>
+                                      </p:cBhvr>
+                                    </p:animEffect>
+                                  </p:childTnLst>
+                                </p:cTn>
+                              </p:par>
+                            </p:childTnLst>
+                          </p:cTn>
+                        </p:par>
+                      </p:childTnLst>
+                    </p:cTn>
+                  </p:par>
+                </p:childTnLst>
+              </p:cTn>
+              <p:prevCondLst>
+                <p:cond evt="onPrev" delay="0">
+                  <p:tgtEl>
+                    <p:sldTgt/>
+                  </p:tgtEl>
+                </p:cond>
+              </p:prevCondLst>
+              <p:nextCondLst>
+                <p:cond evt="onNext" delay="0">
+                  <p:tgtEl>
+                    <p:sldTgt/>
+                  </p:tgtEl>
+                </p:cond>
+              </p:nextCondLst>
+            </p:seq>
+          </p:childTnLst>
+        </p:cTn>
+      </p:par>
+    </p:tnLst>
+    <p:bldLst>
+      <p:bldP spid="3" grpId="0" uiExpand="1" build="p"/>
+    </p:bldLst>
+  </p:timing>
 </p:sld>
 </file>
 
@@ -13262,17 +17182,6 @@
 </file>
 
 <file path=customXml/item1.xml><?xml version="1.0" encoding="utf-8"?>
-<p:properties xmlns:p="http://schemas.microsoft.com/office/2006/metadata/properties" xmlns:xsi="http://www.w3.org/2001/XMLSchema-instance" xmlns:pc="http://schemas.microsoft.com/office/infopath/2007/PartnerControls">
-  <documentManagement>
-    <TaxCatchAll xmlns="1b3b1065-ae42-4d8a-aa8c-0a73a17faba8" xsi:nil="true"/>
-    <lcf76f155ced4ddcb4097134ff3c332f xmlns="221fbb9a-23db-4311-a69c-34622b264696">
-      <Terms xmlns="http://schemas.microsoft.com/office/infopath/2007/PartnerControls"/>
-    </lcf76f155ced4ddcb4097134ff3c332f>
-  </documentManagement>
-</p:properties>
-</file>
-
-<file path=customXml/item2.xml><?xml version="1.0" encoding="utf-8"?>
 <ct:contentTypeSchema xmlns:ct="http://schemas.microsoft.com/office/2006/metadata/contentType" xmlns:ma="http://schemas.microsoft.com/office/2006/metadata/properties/metaAttributes" ct:_="" ma:_="" ma:contentTypeName="Document" ma:contentTypeID="0x010100A051F54D7AD26C459333D1AFF09839BE" ma:contentTypeVersion="14" ma:contentTypeDescription="Create a new document." ma:contentTypeScope="" ma:versionID="360607d15cd3ba6bc1b1206b5ab58707">
   <xsd:schema xmlns:xsd="http://www.w3.org/2001/XMLSchema" xmlns:xs="http://www.w3.org/2001/XMLSchema" xmlns:p="http://schemas.microsoft.com/office/2006/metadata/properties" xmlns:ns2="221fbb9a-23db-4311-a69c-34622b264696" xmlns:ns3="1b3b1065-ae42-4d8a-aa8c-0a73a17faba8" targetNamespace="http://schemas.microsoft.com/office/2006/metadata/properties" ma:root="true" ma:fieldsID="418f801ce3daba7e05e8e0f00fba8a3d" ns2:_="" ns3:_="">
     <xsd:import namespace="221fbb9a-23db-4311-a69c-34622b264696"/>
@@ -13485,6 +17394,17 @@
 </ct:contentTypeSchema>
 </file>
 
+<file path=customXml/item2.xml><?xml version="1.0" encoding="utf-8"?>
+<p:properties xmlns:p="http://schemas.microsoft.com/office/2006/metadata/properties" xmlns:xsi="http://www.w3.org/2001/XMLSchema-instance" xmlns:pc="http://schemas.microsoft.com/office/infopath/2007/PartnerControls">
+  <documentManagement>
+    <TaxCatchAll xmlns="1b3b1065-ae42-4d8a-aa8c-0a73a17faba8" xsi:nil="true"/>
+    <lcf76f155ced4ddcb4097134ff3c332f xmlns="221fbb9a-23db-4311-a69c-34622b264696">
+      <Terms xmlns="http://schemas.microsoft.com/office/infopath/2007/PartnerControls"/>
+    </lcf76f155ced4ddcb4097134ff3c332f>
+  </documentManagement>
+</p:properties>
+</file>
+
 <file path=customXml/item3.xml><?xml version="1.0" encoding="utf-8"?>
 <?mso-contentType ?>
 <FormTemplates xmlns="http://schemas.microsoft.com/sharepoint/v3/contenttype/forms">
@@ -13495,23 +17415,6 @@
 </file>
 
 <file path=customXml/itemProps1.xml><?xml version="1.0" encoding="utf-8"?>
-<ds:datastoreItem xmlns:ds="http://schemas.openxmlformats.org/officeDocument/2006/customXml" ds:itemID="{D05C0892-D583-430B-AD43-D1A4EB1EE043}">
-  <ds:schemaRefs>
-    <ds:schemaRef ds:uri="1b3b1065-ae42-4d8a-aa8c-0a73a17faba8"/>
-    <ds:schemaRef ds:uri="221fbb9a-23db-4311-a69c-34622b264696"/>
-    <ds:schemaRef ds:uri="http://purl.org/dc/dcmitype/"/>
-    <ds:schemaRef ds:uri="http://purl.org/dc/elements/1.1/"/>
-    <ds:schemaRef ds:uri="http://purl.org/dc/terms/"/>
-    <ds:schemaRef ds:uri="http://schemas.microsoft.com/office/2006/documentManagement/types"/>
-    <ds:schemaRef ds:uri="http://schemas.microsoft.com/office/2006/metadata/properties"/>
-    <ds:schemaRef ds:uri="http://schemas.microsoft.com/office/infopath/2007/PartnerControls"/>
-    <ds:schemaRef ds:uri="http://schemas.openxmlformats.org/package/2006/metadata/core-properties"/>
-    <ds:schemaRef ds:uri="http://www.w3.org/XML/1998/namespace"/>
-  </ds:schemaRefs>
-</ds:datastoreItem>
-</file>
-
-<file path=customXml/itemProps2.xml><?xml version="1.0" encoding="utf-8"?>
 <ds:datastoreItem xmlns:ds="http://schemas.openxmlformats.org/officeDocument/2006/customXml" ds:itemID="{B29BB492-93BB-4EF4-B08B-18E3BC9C8765}">
   <ds:schemaRefs>
     <ds:schemaRef ds:uri="1b3b1065-ae42-4d8a-aa8c-0a73a17faba8"/>
@@ -13530,6 +17433,23 @@
 </ds:datastoreItem>
 </file>
 
+<file path=customXml/itemProps2.xml><?xml version="1.0" encoding="utf-8"?>
+<ds:datastoreItem xmlns:ds="http://schemas.openxmlformats.org/officeDocument/2006/customXml" ds:itemID="{D05C0892-D583-430B-AD43-D1A4EB1EE043}">
+  <ds:schemaRefs>
+    <ds:schemaRef ds:uri="1b3b1065-ae42-4d8a-aa8c-0a73a17faba8"/>
+    <ds:schemaRef ds:uri="221fbb9a-23db-4311-a69c-34622b264696"/>
+    <ds:schemaRef ds:uri="http://purl.org/dc/dcmitype/"/>
+    <ds:schemaRef ds:uri="http://purl.org/dc/elements/1.1/"/>
+    <ds:schemaRef ds:uri="http://purl.org/dc/terms/"/>
+    <ds:schemaRef ds:uri="http://schemas.microsoft.com/office/2006/documentManagement/types"/>
+    <ds:schemaRef ds:uri="http://schemas.microsoft.com/office/2006/metadata/properties"/>
+    <ds:schemaRef ds:uri="http://schemas.microsoft.com/office/infopath/2007/PartnerControls"/>
+    <ds:schemaRef ds:uri="http://schemas.openxmlformats.org/package/2006/metadata/core-properties"/>
+    <ds:schemaRef ds:uri="http://www.w3.org/XML/1998/namespace"/>
+  </ds:schemaRefs>
+</ds:datastoreItem>
+</file>
+
 <file path=customXml/itemProps3.xml><?xml version="1.0" encoding="utf-8"?>
 <ds:datastoreItem xmlns:ds="http://schemas.openxmlformats.org/officeDocument/2006/customXml" ds:itemID="{B6782FBD-C4AD-49F1-B11B-703DF9FAD87C}">
   <ds:schemaRefs>
